--- a/docs/theme-preview/pptx/glassmorphism.pptx
+++ b/docs/theme-preview/pptx/glassmorphism.pptx
@@ -366,7 +366,7 @@
             <a:pPr>
               <a:defRPr sz="1100" b="0" i="0" u="none" strike="noStrike">
                 <a:solidFill>
-                  <a:srgbClr val="F8FAFC"/>
+                  <a:srgbClr val="F8F8F8"/>
                 </a:solidFill>
                 <a:latin typeface="Pretendard"/>
               </a:defRPr>
@@ -418,7 +418,7 @@
             <a:pPr>
               <a:defRPr sz="1100" b="0" i="0" u="none" strike="noStrike">
                 <a:solidFill>
-                  <a:srgbClr val="CBD5E1"/>
+                  <a:srgbClr val="6C6C6C"/>
                 </a:solidFill>
                 <a:latin typeface="Pretendard"/>
               </a:defRPr>
@@ -448,7 +448,7 @@
           <a:pPr>
             <a:defRPr sz="1100">
               <a:solidFill>
-                <a:srgbClr val="CBD5E1"/>
+                <a:srgbClr val="6C6C6C"/>
               </a:solidFill>
               <a:latin typeface="Pretendard"/>
               <a:cs typeface="Pretendard"/>
@@ -626,7 +626,7 @@
             <a:pPr>
               <a:defRPr sz="1100" b="0" i="0" u="none" strike="noStrike">
                 <a:solidFill>
-                  <a:srgbClr val="F8FAFC"/>
+                  <a:srgbClr val="F8F8F8"/>
                 </a:solidFill>
                 <a:latin typeface="Pretendard"/>
               </a:defRPr>
@@ -678,7 +678,7 @@
             <a:pPr>
               <a:defRPr sz="1100" b="0" i="0" u="none" strike="noStrike">
                 <a:solidFill>
-                  <a:srgbClr val="CBD5E1"/>
+                  <a:srgbClr val="6C6C6C"/>
                 </a:solidFill>
                 <a:latin typeface="Pretendard"/>
               </a:defRPr>
@@ -4330,7 +4330,7 @@
             <a:r>
               <a:rPr lang="en-US" sz="3400" b="1" dirty="0">
                 <a:solidFill>
-                  <a:srgbClr val="F8FAFC"/>
+                  <a:srgbClr val="F8F8F8"/>
                 </a:solidFill>
                 <a:latin typeface="Pretendard" pitchFamily="34" charset="0"/>
                 <a:ea typeface="Pretendard" pitchFamily="34" charset="-122"/>
@@ -4389,7 +4389,7 @@
             <a:r>
               <a:rPr lang="en-US" sz="2200" dirty="0">
                 <a:solidFill>
-                  <a:srgbClr val="F8FAFC"/>
+                  <a:srgbClr val="F8F8F8"/>
                 </a:solidFill>
                 <a:latin typeface="Pretendard" pitchFamily="34" charset="0"/>
                 <a:ea typeface="Pretendard" pitchFamily="34" charset="-122"/>
@@ -4448,7 +4448,7 @@
             <a:r>
               <a:rPr lang="en-US" sz="2200" dirty="0">
                 <a:solidFill>
-                  <a:srgbClr val="F8FAFC"/>
+                  <a:srgbClr val="F8F8F8"/>
                 </a:solidFill>
                 <a:latin typeface="Pretendard" pitchFamily="34" charset="0"/>
                 <a:ea typeface="Pretendard" pitchFamily="34" charset="-122"/>
@@ -4783,7 +4783,7 @@
             <a:r>
               <a:rPr lang="en-US" sz="3400" b="1" dirty="0">
                 <a:solidFill>
-                  <a:srgbClr val="F8FAFC"/>
+                  <a:srgbClr val="F8F8F8"/>
                 </a:solidFill>
                 <a:latin typeface="Pretendard" pitchFamily="34" charset="0"/>
                 <a:ea typeface="Pretendard" pitchFamily="34" charset="-122"/>
@@ -5084,7 +5084,7 @@
             <a:r>
               <a:rPr lang="en-US" sz="1600" dirty="0">
                 <a:solidFill>
-                  <a:srgbClr val="F8FAFC"/>
+                  <a:srgbClr val="F8F8F8"/>
                 </a:solidFill>
                 <a:latin typeface="Pretendard" pitchFamily="34" charset="0"/>
                 <a:ea typeface="Pretendard" pitchFamily="34" charset="-122"/>
@@ -5265,7 +5265,7 @@
             <a:r>
               <a:rPr lang="en-US" sz="1600" dirty="0">
                 <a:solidFill>
-                  <a:srgbClr val="F8FAFC"/>
+                  <a:srgbClr val="F8F8F8"/>
                 </a:solidFill>
                 <a:latin typeface="Pretendard" pitchFamily="34" charset="0"/>
                 <a:ea typeface="Pretendard" pitchFamily="34" charset="-122"/>
@@ -5446,7 +5446,7 @@
             <a:r>
               <a:rPr lang="en-US" sz="1600" dirty="0">
                 <a:solidFill>
-                  <a:srgbClr val="F8FAFC"/>
+                  <a:srgbClr val="F8F8F8"/>
                 </a:solidFill>
                 <a:latin typeface="Pretendard" pitchFamily="34" charset="0"/>
                 <a:ea typeface="Pretendard" pitchFamily="34" charset="-122"/>
@@ -5627,7 +5627,7 @@
             <a:r>
               <a:rPr lang="en-US" sz="1600" dirty="0">
                 <a:solidFill>
-                  <a:srgbClr val="F8FAFC"/>
+                  <a:srgbClr val="F8F8F8"/>
                 </a:solidFill>
                 <a:latin typeface="Pretendard" pitchFamily="34" charset="0"/>
                 <a:ea typeface="Pretendard" pitchFamily="34" charset="-122"/>
@@ -5808,7 +5808,7 @@
             <a:r>
               <a:rPr lang="en-US" sz="1600" dirty="0">
                 <a:solidFill>
-                  <a:srgbClr val="F8FAFC"/>
+                  <a:srgbClr val="F8F8F8"/>
                 </a:solidFill>
                 <a:latin typeface="Pretendard" pitchFamily="34" charset="0"/>
                 <a:ea typeface="Pretendard" pitchFamily="34" charset="-122"/>
@@ -5989,7 +5989,7 @@
             <a:r>
               <a:rPr lang="en-US" sz="1600" dirty="0">
                 <a:solidFill>
-                  <a:srgbClr val="F8FAFC"/>
+                  <a:srgbClr val="F8F8F8"/>
                 </a:solidFill>
                 <a:latin typeface="Pretendard" pitchFamily="34" charset="0"/>
                 <a:ea typeface="Pretendard" pitchFamily="34" charset="-122"/>
@@ -6716,7 +6716,7 @@
             <a:r>
               <a:rPr lang="en-US" sz="3400" b="1" dirty="0">
                 <a:solidFill>
-                  <a:srgbClr val="F8FAFC"/>
+                  <a:srgbClr val="F8F8F8"/>
                 </a:solidFill>
                 <a:latin typeface="Pretendard" pitchFamily="34" charset="0"/>
                 <a:ea typeface="Pretendard" pitchFamily="34" charset="-122"/>
@@ -6832,7 +6832,7 @@
             <a:r>
               <a:rPr lang="en-US" sz="2200" dirty="0">
                 <a:solidFill>
-                  <a:srgbClr val="F8FAFC"/>
+                  <a:srgbClr val="F8F8F8"/>
                 </a:solidFill>
                 <a:latin typeface="Pretendard" pitchFamily="34" charset="0"/>
                 <a:ea typeface="Pretendard" pitchFamily="34" charset="-122"/>
@@ -6948,7 +6948,7 @@
             <a:r>
               <a:rPr lang="en-US" sz="2200" dirty="0">
                 <a:solidFill>
-                  <a:srgbClr val="F8FAFC"/>
+                  <a:srgbClr val="F8F8F8"/>
                 </a:solidFill>
                 <a:latin typeface="Pretendard" pitchFamily="34" charset="0"/>
                 <a:ea typeface="Pretendard" pitchFamily="34" charset="-122"/>
@@ -7064,7 +7064,7 @@
             <a:r>
               <a:rPr lang="en-US" sz="2200" dirty="0">
                 <a:solidFill>
-                  <a:srgbClr val="F8FAFC"/>
+                  <a:srgbClr val="F8F8F8"/>
                 </a:solidFill>
                 <a:latin typeface="Pretendard" pitchFamily="34" charset="0"/>
                 <a:ea typeface="Pretendard" pitchFamily="34" charset="-122"/>
@@ -7180,7 +7180,7 @@
             <a:r>
               <a:rPr lang="en-US" sz="2200" dirty="0">
                 <a:solidFill>
-                  <a:srgbClr val="F8FAFC"/>
+                  <a:srgbClr val="F8F8F8"/>
                 </a:solidFill>
                 <a:latin typeface="Pretendard" pitchFamily="34" charset="0"/>
                 <a:ea typeface="Pretendard" pitchFamily="34" charset="-122"/>
@@ -7569,7 +7569,7 @@
             <a:r>
               <a:rPr lang="en-US" sz="3400" b="1" dirty="0">
                 <a:solidFill>
-                  <a:srgbClr val="F8FAFC"/>
+                  <a:srgbClr val="F8F8F8"/>
                 </a:solidFill>
                 <a:latin typeface="Pretendard" pitchFamily="34" charset="0"/>
                 <a:ea typeface="Pretendard" pitchFamily="34" charset="-122"/>
@@ -7628,7 +7628,7 @@
             <a:r>
               <a:rPr lang="en-US" sz="2200" dirty="0">
                 <a:solidFill>
-                  <a:srgbClr val="F8FAFC"/>
+                  <a:srgbClr val="F8F8F8"/>
                 </a:solidFill>
                 <a:latin typeface="Pretendard" pitchFamily="34" charset="0"/>
                 <a:ea typeface="Pretendard" pitchFamily="34" charset="-122"/>
@@ -7687,7 +7687,7 @@
             <a:r>
               <a:rPr lang="en-US" sz="2200" dirty="0">
                 <a:solidFill>
-                  <a:srgbClr val="F8FAFC"/>
+                  <a:srgbClr val="F8F8F8"/>
                 </a:solidFill>
                 <a:latin typeface="Pretendard" pitchFamily="34" charset="0"/>
                 <a:ea typeface="Pretendard" pitchFamily="34" charset="-122"/>
@@ -8093,7 +8093,7 @@
             <a:r>
               <a:rPr lang="en-US" sz="3400" b="1" dirty="0">
                 <a:solidFill>
-                  <a:srgbClr val="F8FAFC"/>
+                  <a:srgbClr val="F8F8F8"/>
                 </a:solidFill>
                 <a:latin typeface="Pretendard" pitchFamily="34" charset="0"/>
                 <a:ea typeface="Pretendard" pitchFamily="34" charset="-122"/>
@@ -8350,7 +8350,7 @@
                       <a:r>
                         <a:rPr lang="en-US" sz="1800" b="1" dirty="0">
                           <a:solidFill>
-                            <a:srgbClr val="F8FAFC"/>
+                            <a:srgbClr val="F8F8F8"/>
                           </a:solidFill>
                           <a:latin typeface="Pretendard" pitchFamily="34" charset="0"/>
                           <a:ea typeface="Pretendard" pitchFamily="34" charset="-122"/>
@@ -8415,7 +8415,7 @@
                       <a:r>
                         <a:rPr lang="en-US" sz="1800" dirty="0">
                           <a:solidFill>
-                            <a:srgbClr val="F8FAFC"/>
+                            <a:srgbClr val="F8F8F8"/>
                           </a:solidFill>
                           <a:latin typeface="Pretendard" pitchFamily="34" charset="0"/>
                           <a:ea typeface="Pretendard" pitchFamily="34" charset="-122"/>
@@ -8480,7 +8480,7 @@
                       <a:r>
                         <a:rPr lang="en-US" sz="1800" dirty="0">
                           <a:solidFill>
-                            <a:srgbClr val="F8FAFC"/>
+                            <a:srgbClr val="F8F8F8"/>
                           </a:solidFill>
                           <a:latin typeface="Pretendard" pitchFamily="34" charset="0"/>
                           <a:ea typeface="Pretendard" pitchFamily="34" charset="-122"/>
@@ -8547,7 +8547,7 @@
                       <a:r>
                         <a:rPr lang="en-US" sz="1800" b="1" dirty="0">
                           <a:solidFill>
-                            <a:srgbClr val="F8FAFC"/>
+                            <a:srgbClr val="F8F8F8"/>
                           </a:solidFill>
                           <a:latin typeface="Pretendard" pitchFamily="34" charset="0"/>
                           <a:ea typeface="Pretendard" pitchFamily="34" charset="-122"/>
@@ -8617,7 +8617,7 @@
                       <a:r>
                         <a:rPr lang="en-US" sz="1800" dirty="0">
                           <a:solidFill>
-                            <a:srgbClr val="F8FAFC"/>
+                            <a:srgbClr val="F8F8F8"/>
                           </a:solidFill>
                           <a:latin typeface="Pretendard" pitchFamily="34" charset="0"/>
                           <a:ea typeface="Pretendard" pitchFamily="34" charset="-122"/>
@@ -8687,7 +8687,7 @@
                       <a:r>
                         <a:rPr lang="en-US" sz="1800" dirty="0">
                           <a:solidFill>
-                            <a:srgbClr val="F8FAFC"/>
+                            <a:srgbClr val="F8F8F8"/>
                           </a:solidFill>
                           <a:latin typeface="Pretendard" pitchFamily="34" charset="0"/>
                           <a:ea typeface="Pretendard" pitchFamily="34" charset="-122"/>
@@ -8759,7 +8759,7 @@
                       <a:r>
                         <a:rPr lang="en-US" sz="1800" b="1" dirty="0">
                           <a:solidFill>
-                            <a:srgbClr val="F8FAFC"/>
+                            <a:srgbClr val="F8F8F8"/>
                           </a:solidFill>
                           <a:latin typeface="Pretendard" pitchFamily="34" charset="0"/>
                           <a:ea typeface="Pretendard" pitchFamily="34" charset="-122"/>
@@ -8824,7 +8824,7 @@
                       <a:r>
                         <a:rPr lang="en-US" sz="1800" dirty="0">
                           <a:solidFill>
-                            <a:srgbClr val="F8FAFC"/>
+                            <a:srgbClr val="F8F8F8"/>
                           </a:solidFill>
                           <a:latin typeface="Pretendard" pitchFamily="34" charset="0"/>
                           <a:ea typeface="Pretendard" pitchFamily="34" charset="-122"/>
@@ -8889,7 +8889,7 @@
                       <a:r>
                         <a:rPr lang="en-US" sz="1800" dirty="0">
                           <a:solidFill>
-                            <a:srgbClr val="F8FAFC"/>
+                            <a:srgbClr val="F8F8F8"/>
                           </a:solidFill>
                           <a:latin typeface="Pretendard" pitchFamily="34" charset="0"/>
                           <a:ea typeface="Pretendard" pitchFamily="34" charset="-122"/>
@@ -8956,7 +8956,7 @@
                       <a:r>
                         <a:rPr lang="en-US" sz="1800" b="1" dirty="0">
                           <a:solidFill>
-                            <a:srgbClr val="F8FAFC"/>
+                            <a:srgbClr val="F8F8F8"/>
                           </a:solidFill>
                           <a:latin typeface="Pretendard" pitchFamily="34" charset="0"/>
                           <a:ea typeface="Pretendard" pitchFamily="34" charset="-122"/>
@@ -9026,7 +9026,7 @@
                       <a:r>
                         <a:rPr lang="en-US" sz="1800" dirty="0">
                           <a:solidFill>
-                            <a:srgbClr val="F8FAFC"/>
+                            <a:srgbClr val="F8F8F8"/>
                           </a:solidFill>
                           <a:latin typeface="Pretendard" pitchFamily="34" charset="0"/>
                           <a:ea typeface="Pretendard" pitchFamily="34" charset="-122"/>
@@ -9096,7 +9096,7 @@
                       <a:r>
                         <a:rPr lang="en-US" sz="1800" dirty="0">
                           <a:solidFill>
-                            <a:srgbClr val="F8FAFC"/>
+                            <a:srgbClr val="F8F8F8"/>
                           </a:solidFill>
                           <a:latin typeface="Pretendard" pitchFamily="34" charset="0"/>
                           <a:ea typeface="Pretendard" pitchFamily="34" charset="-122"/>
@@ -9581,7 +9581,7 @@
             <a:r>
               <a:rPr lang="en-US" sz="3400" b="1" dirty="0">
                 <a:solidFill>
-                  <a:srgbClr val="F8FAFC"/>
+                  <a:srgbClr val="F8F8F8"/>
                 </a:solidFill>
                 <a:latin typeface="Pretendard" pitchFamily="34" charset="0"/>
                 <a:ea typeface="Pretendard" pitchFamily="34" charset="-122"/>
@@ -9640,7 +9640,7 @@
             <a:r>
               <a:rPr lang="en-US" sz="2200" dirty="0">
                 <a:solidFill>
-                  <a:srgbClr val="F8FAFC"/>
+                  <a:srgbClr val="F8F8F8"/>
                 </a:solidFill>
                 <a:latin typeface="Pretendard" pitchFamily="34" charset="0"/>
                 <a:ea typeface="Pretendard" pitchFamily="34" charset="-122"/>
@@ -9680,7 +9680,7 @@
             <a:r>
               <a:rPr lang="en-US" sz="2200" dirty="0">
                 <a:solidFill>
-                  <a:srgbClr val="F8FAFC"/>
+                  <a:srgbClr val="F8F8F8"/>
                 </a:solidFill>
                 <a:latin typeface="Pretendard" pitchFamily="34" charset="0"/>
                 <a:ea typeface="Pretendard" pitchFamily="34" charset="-122"/>
@@ -9720,7 +9720,7 @@
             <a:r>
               <a:rPr lang="en-US" sz="2200" dirty="0">
                 <a:solidFill>
-                  <a:srgbClr val="F8FAFC"/>
+                  <a:srgbClr val="F8F8F8"/>
                 </a:solidFill>
                 <a:latin typeface="Pretendard" pitchFamily="34" charset="0"/>
                 <a:ea typeface="Pretendard" pitchFamily="34" charset="-122"/>
@@ -10142,7 +10142,7 @@
             <a:r>
               <a:rPr lang="en-US" sz="3400" b="1" dirty="0">
                 <a:solidFill>
-                  <a:srgbClr val="F8FAFC"/>
+                  <a:srgbClr val="F8F8F8"/>
                 </a:solidFill>
                 <a:latin typeface="Pretendard" pitchFamily="34" charset="0"/>
                 <a:ea typeface="Pretendard" pitchFamily="34" charset="-122"/>
@@ -10399,7 +10399,7 @@
                       <a:r>
                         <a:rPr lang="en-US" sz="1800" b="1" dirty="0">
                           <a:solidFill>
-                            <a:srgbClr val="F8FAFC"/>
+                            <a:srgbClr val="F8F8F8"/>
                           </a:solidFill>
                           <a:latin typeface="Pretendard" pitchFamily="34" charset="0"/>
                           <a:ea typeface="Pretendard" pitchFamily="34" charset="-122"/>
@@ -10464,7 +10464,7 @@
                       <a:r>
                         <a:rPr lang="en-US" sz="1800" dirty="0">
                           <a:solidFill>
-                            <a:srgbClr val="F8FAFC"/>
+                            <a:srgbClr val="F8F8F8"/>
                           </a:solidFill>
                           <a:latin typeface="Pretendard" pitchFamily="34" charset="0"/>
                           <a:ea typeface="Pretendard" pitchFamily="34" charset="-122"/>
@@ -10529,7 +10529,7 @@
                       <a:r>
                         <a:rPr lang="en-US" sz="1800" dirty="0">
                           <a:solidFill>
-                            <a:srgbClr val="F8FAFC"/>
+                            <a:srgbClr val="F8F8F8"/>
                           </a:solidFill>
                           <a:latin typeface="Pretendard" pitchFamily="34" charset="0"/>
                           <a:ea typeface="Pretendard" pitchFamily="34" charset="-122"/>
@@ -10596,7 +10596,7 @@
                       <a:r>
                         <a:rPr lang="en-US" sz="1800" b="1" dirty="0">
                           <a:solidFill>
-                            <a:srgbClr val="F8FAFC"/>
+                            <a:srgbClr val="F8F8F8"/>
                           </a:solidFill>
                           <a:latin typeface="Pretendard" pitchFamily="34" charset="0"/>
                           <a:ea typeface="Pretendard" pitchFamily="34" charset="-122"/>
@@ -10666,7 +10666,7 @@
                       <a:r>
                         <a:rPr lang="en-US" sz="1800" dirty="0">
                           <a:solidFill>
-                            <a:srgbClr val="F8FAFC"/>
+                            <a:srgbClr val="F8F8F8"/>
                           </a:solidFill>
                           <a:latin typeface="Pretendard" pitchFamily="34" charset="0"/>
                           <a:ea typeface="Pretendard" pitchFamily="34" charset="-122"/>
@@ -10736,7 +10736,7 @@
                       <a:r>
                         <a:rPr lang="en-US" sz="1800" dirty="0">
                           <a:solidFill>
-                            <a:srgbClr val="F8FAFC"/>
+                            <a:srgbClr val="F8F8F8"/>
                           </a:solidFill>
                           <a:latin typeface="Pretendard" pitchFamily="34" charset="0"/>
                           <a:ea typeface="Pretendard" pitchFamily="34" charset="-122"/>
@@ -10808,7 +10808,7 @@
                       <a:r>
                         <a:rPr lang="en-US" sz="1800" b="1" dirty="0">
                           <a:solidFill>
-                            <a:srgbClr val="F8FAFC"/>
+                            <a:srgbClr val="F8F8F8"/>
                           </a:solidFill>
                           <a:latin typeface="Pretendard" pitchFamily="34" charset="0"/>
                           <a:ea typeface="Pretendard" pitchFamily="34" charset="-122"/>
@@ -10873,7 +10873,7 @@
                       <a:r>
                         <a:rPr lang="en-US" sz="1800" dirty="0">
                           <a:solidFill>
-                            <a:srgbClr val="F8FAFC"/>
+                            <a:srgbClr val="F8F8F8"/>
                           </a:solidFill>
                           <a:latin typeface="Pretendard" pitchFamily="34" charset="0"/>
                           <a:ea typeface="Pretendard" pitchFamily="34" charset="-122"/>
@@ -10938,7 +10938,7 @@
                       <a:r>
                         <a:rPr lang="en-US" sz="1800" dirty="0">
                           <a:solidFill>
-                            <a:srgbClr val="F8FAFC"/>
+                            <a:srgbClr val="F8F8F8"/>
                           </a:solidFill>
                           <a:latin typeface="Pretendard" pitchFamily="34" charset="0"/>
                           <a:ea typeface="Pretendard" pitchFamily="34" charset="-122"/>
@@ -11391,7 +11391,7 @@
             <a:r>
               <a:rPr lang="en-US" sz="3400" b="1" dirty="0">
                 <a:solidFill>
-                  <a:srgbClr val="F8FAFC"/>
+                  <a:srgbClr val="F8F8F8"/>
                 </a:solidFill>
                 <a:latin typeface="Pretendard" pitchFamily="34" charset="0"/>
                 <a:ea typeface="Pretendard" pitchFamily="34" charset="-122"/>
@@ -11582,7 +11582,7 @@
             <a:r>
               <a:rPr lang="en-US" sz="3000" b="1" dirty="0">
                 <a:solidFill>
-                  <a:srgbClr val="F8FAFC"/>
+                  <a:srgbClr val="F8F8F8"/>
                 </a:solidFill>
                 <a:latin typeface="Pretendard" pitchFamily="34" charset="0"/>
                 <a:ea typeface="Pretendard" pitchFamily="34" charset="-122"/>
@@ -11624,7 +11624,7 @@
             <a:r>
               <a:rPr lang="en-US" sz="1600" dirty="0">
                 <a:solidFill>
-                  <a:srgbClr val="CBD5E1"/>
+                  <a:srgbClr val="6C6C6C"/>
                 </a:solidFill>
                 <a:latin typeface="Pretendard" pitchFamily="34" charset="0"/>
                 <a:ea typeface="Pretendard" pitchFamily="34" charset="-122"/>
@@ -11695,7 +11695,7 @@
             <a:r>
               <a:rPr lang="en-US" sz="1600" b="1" dirty="0">
                 <a:solidFill>
-                  <a:srgbClr val="F8FAFC"/>
+                  <a:srgbClr val="F8F8F8"/>
                 </a:solidFill>
                 <a:latin typeface="Pretendard" pitchFamily="34" charset="0"/>
                 <a:ea typeface="Pretendard" pitchFamily="34" charset="-122"/>
@@ -11766,7 +11766,7 @@
             <a:r>
               <a:rPr lang="en-US" sz="1600" dirty="0">
                 <a:solidFill>
-                  <a:srgbClr val="CBD5E1"/>
+                  <a:srgbClr val="6C6C6C"/>
                 </a:solidFill>
                 <a:latin typeface="Pretendard" pitchFamily="34" charset="0"/>
                 <a:ea typeface="Pretendard" pitchFamily="34" charset="-122"/>
@@ -11855,7 +11855,7 @@
           <a:noFill/>
           <a:ln w="12700">
             <a:solidFill>
-              <a:srgbClr val="F8FAFC"/>
+              <a:srgbClr val="F8F8F8"/>
             </a:solidFill>
             <a:prstDash val="solid"/>
           </a:ln>
@@ -11968,7 +11968,7 @@
             <a:r>
               <a:rPr lang="en-US" sz="3200" b="1" dirty="0">
                 <a:solidFill>
-                  <a:srgbClr val="F8FAFC"/>
+                  <a:srgbClr val="F8F8F8"/>
                 </a:solidFill>
                 <a:latin typeface="Pretendard" pitchFamily="34" charset="0"/>
                 <a:ea typeface="Pretendard" pitchFamily="34" charset="-122"/>
@@ -12010,7 +12010,7 @@
             <a:r>
               <a:rPr lang="en-US" sz="1700" dirty="0">
                 <a:solidFill>
-                  <a:srgbClr val="CBD5E1"/>
+                  <a:srgbClr val="6C6C6C"/>
                 </a:solidFill>
                 <a:latin typeface="Pretendard" pitchFamily="34" charset="0"/>
                 <a:ea typeface="Pretendard" pitchFamily="34" charset="-122"/>
@@ -12052,7 +12052,7 @@
             <a:r>
               <a:rPr lang="en-US" sz="1400" dirty="0">
                 <a:solidFill>
-                  <a:srgbClr val="CBD5E1"/>
+                  <a:srgbClr val="6C6C6C"/>
                 </a:solidFill>
                 <a:latin typeface="Pretendard" pitchFamily="34" charset="0"/>
                 <a:ea typeface="Pretendard" pitchFamily="34" charset="-122"/>
@@ -12094,7 +12094,7 @@
             <a:r>
               <a:rPr lang="en-US" sz="1400" dirty="0">
                 <a:solidFill>
-                  <a:srgbClr val="CBD5E1"/>
+                  <a:srgbClr val="6C6C6C"/>
                 </a:solidFill>
                 <a:latin typeface="Pretendard" pitchFamily="34" charset="0"/>
                 <a:ea typeface="Pretendard" pitchFamily="34" charset="-122"/>
@@ -12500,7 +12500,7 @@
             <a:r>
               <a:rPr lang="en-US" sz="3400" b="1" dirty="0">
                 <a:solidFill>
-                  <a:srgbClr val="F8FAFC"/>
+                  <a:srgbClr val="F8F8F8"/>
                 </a:solidFill>
                 <a:latin typeface="Pretendard" pitchFamily="34" charset="0"/>
                 <a:ea typeface="Pretendard" pitchFamily="34" charset="-122"/>
@@ -12598,7 +12598,7 @@
             <a:r>
               <a:rPr lang="en-US" sz="1800" b="1" dirty="0">
                 <a:solidFill>
-                  <a:srgbClr val="F8FAFC"/>
+                  <a:srgbClr val="F8F8F8"/>
                 </a:solidFill>
                 <a:latin typeface="Pretendard" pitchFamily="34" charset="0"/>
                 <a:ea typeface="Pretendard" pitchFamily="34" charset="-122"/>
@@ -12740,7 +12740,7 @@
             <a:r>
               <a:rPr lang="en-US" sz="1800" b="1" dirty="0">
                 <a:solidFill>
-                  <a:srgbClr val="F8FAFC"/>
+                  <a:srgbClr val="F8F8F8"/>
                 </a:solidFill>
                 <a:latin typeface="Pretendard" pitchFamily="34" charset="0"/>
                 <a:ea typeface="Pretendard" pitchFamily="34" charset="-122"/>
@@ -12882,7 +12882,7 @@
             <a:r>
               <a:rPr lang="en-US" sz="1800" b="1" dirty="0">
                 <a:solidFill>
-                  <a:srgbClr val="F8FAFC"/>
+                  <a:srgbClr val="F8F8F8"/>
                 </a:solidFill>
                 <a:latin typeface="Pretendard" pitchFamily="34" charset="0"/>
                 <a:ea typeface="Pretendard" pitchFamily="34" charset="-122"/>
@@ -13024,7 +13024,7 @@
             <a:r>
               <a:rPr lang="en-US" sz="1800" b="1" dirty="0">
                 <a:solidFill>
-                  <a:srgbClr val="F8FAFC"/>
+                  <a:srgbClr val="F8F8F8"/>
                 </a:solidFill>
                 <a:latin typeface="Pretendard" pitchFamily="34" charset="0"/>
                 <a:ea typeface="Pretendard" pitchFamily="34" charset="-122"/>
@@ -13798,7 +13798,7 @@
             <a:r>
               <a:rPr lang="en-US" sz="3400" b="1" dirty="0">
                 <a:solidFill>
-                  <a:srgbClr val="F8FAFC"/>
+                  <a:srgbClr val="F8F8F8"/>
                 </a:solidFill>
                 <a:latin typeface="Pretendard" pitchFamily="34" charset="0"/>
                 <a:ea typeface="Pretendard" pitchFamily="34" charset="-122"/>
@@ -13914,7 +13914,7 @@
             <a:r>
               <a:rPr lang="en-US" sz="2200" dirty="0">
                 <a:solidFill>
-                  <a:srgbClr val="F8FAFC"/>
+                  <a:srgbClr val="F8F8F8"/>
                 </a:solidFill>
                 <a:latin typeface="Pretendard" pitchFamily="34" charset="0"/>
                 <a:ea typeface="Pretendard" pitchFamily="34" charset="-122"/>
@@ -14030,7 +14030,7 @@
             <a:r>
               <a:rPr lang="en-US" sz="2200" dirty="0">
                 <a:solidFill>
-                  <a:srgbClr val="F8FAFC"/>
+                  <a:srgbClr val="F8F8F8"/>
                 </a:solidFill>
                 <a:latin typeface="Pretendard" pitchFamily="34" charset="0"/>
                 <a:ea typeface="Pretendard" pitchFamily="34" charset="-122"/>
@@ -14146,7 +14146,7 @@
             <a:r>
               <a:rPr lang="en-US" sz="2200" dirty="0">
                 <a:solidFill>
-                  <a:srgbClr val="F8FAFC"/>
+                  <a:srgbClr val="F8F8F8"/>
                 </a:solidFill>
                 <a:latin typeface="Pretendard" pitchFamily="34" charset="0"/>
                 <a:ea typeface="Pretendard" pitchFamily="34" charset="-122"/>
@@ -14942,7 +14942,7 @@
             <a:r>
               <a:rPr lang="en-US" sz="3800" b="1" dirty="0">
                 <a:solidFill>
-                  <a:srgbClr val="F8FAFC"/>
+                  <a:srgbClr val="F8F8F8"/>
                 </a:solidFill>
                 <a:latin typeface="Pretendard" pitchFamily="34" charset="0"/>
                 <a:ea typeface="Pretendard" pitchFamily="34" charset="-122"/>
@@ -14984,7 +14984,7 @@
             <a:r>
               <a:rPr lang="en-US" sz="1800" dirty="0">
                 <a:solidFill>
-                  <a:srgbClr val="F8FAFC"/>
+                  <a:srgbClr val="F8F8F8"/>
                 </a:solidFill>
                 <a:latin typeface="Pretendard" pitchFamily="34" charset="0"/>
                 <a:ea typeface="Pretendard" pitchFamily="34" charset="-122"/>
@@ -15026,7 +15026,7 @@
             <a:r>
               <a:rPr lang="en-US" sz="1800" dirty="0">
                 <a:solidFill>
-                  <a:srgbClr val="F8FAFC"/>
+                  <a:srgbClr val="F8F8F8"/>
                 </a:solidFill>
                 <a:latin typeface="Pretendard" pitchFamily="34" charset="0"/>
                 <a:ea typeface="Pretendard" pitchFamily="34" charset="-122"/>
@@ -15068,7 +15068,7 @@
             <a:r>
               <a:rPr lang="en-US" sz="1800" dirty="0">
                 <a:solidFill>
-                  <a:srgbClr val="F8FAFC"/>
+                  <a:srgbClr val="F8F8F8"/>
                 </a:solidFill>
                 <a:latin typeface="Pretendard" pitchFamily="34" charset="0"/>
                 <a:ea typeface="Pretendard" pitchFamily="34" charset="-122"/>
@@ -15110,7 +15110,7 @@
             <a:r>
               <a:rPr lang="en-US" sz="1800" dirty="0">
                 <a:solidFill>
-                  <a:srgbClr val="F8FAFC"/>
+                  <a:srgbClr val="F8F8F8"/>
                 </a:solidFill>
                 <a:latin typeface="Pretendard" pitchFamily="34" charset="0"/>
                 <a:ea typeface="Pretendard" pitchFamily="34" charset="-122"/>
@@ -15152,7 +15152,7 @@
             <a:r>
               <a:rPr lang="en-US" sz="1800" dirty="0">
                 <a:solidFill>
-                  <a:srgbClr val="F8FAFC"/>
+                  <a:srgbClr val="F8F8F8"/>
                 </a:solidFill>
                 <a:latin typeface="Pretendard" pitchFamily="34" charset="0"/>
                 <a:ea typeface="Pretendard" pitchFamily="34" charset="-122"/>
@@ -15194,7 +15194,7 @@
             <a:r>
               <a:rPr lang="en-US" sz="1800" dirty="0">
                 <a:solidFill>
-                  <a:srgbClr val="F8FAFC"/>
+                  <a:srgbClr val="F8F8F8"/>
                 </a:solidFill>
                 <a:latin typeface="Pretendard" pitchFamily="34" charset="0"/>
                 <a:ea typeface="Pretendard" pitchFamily="34" charset="-122"/>
@@ -15236,7 +15236,7 @@
             <a:r>
               <a:rPr lang="en-US" sz="1800" dirty="0">
                 <a:solidFill>
-                  <a:srgbClr val="F8FAFC"/>
+                  <a:srgbClr val="F8F8F8"/>
                 </a:solidFill>
                 <a:latin typeface="Pretendard" pitchFamily="34" charset="0"/>
                 <a:ea typeface="Pretendard" pitchFamily="34" charset="-122"/>
@@ -15278,7 +15278,7 @@
             <a:r>
               <a:rPr lang="en-US" sz="1800" dirty="0">
                 <a:solidFill>
-                  <a:srgbClr val="F8FAFC"/>
+                  <a:srgbClr val="F8F8F8"/>
                 </a:solidFill>
                 <a:latin typeface="Pretendard" pitchFamily="34" charset="0"/>
                 <a:ea typeface="Pretendard" pitchFamily="34" charset="-122"/>
@@ -15320,7 +15320,7 @@
             <a:r>
               <a:rPr lang="en-US" sz="1800" dirty="0">
                 <a:solidFill>
-                  <a:srgbClr val="F8FAFC"/>
+                  <a:srgbClr val="F8F8F8"/>
                 </a:solidFill>
                 <a:latin typeface="Pretendard" pitchFamily="34" charset="0"/>
                 <a:ea typeface="Pretendard" pitchFamily="34" charset="-122"/>
@@ -15362,7 +15362,7 @@
             <a:r>
               <a:rPr lang="en-US" sz="1800" dirty="0">
                 <a:solidFill>
-                  <a:srgbClr val="F8FAFC"/>
+                  <a:srgbClr val="F8F8F8"/>
                 </a:solidFill>
                 <a:latin typeface="Pretendard" pitchFamily="34" charset="0"/>
                 <a:ea typeface="Pretendard" pitchFamily="34" charset="-122"/>
@@ -15404,7 +15404,7 @@
             <a:r>
               <a:rPr lang="en-US" sz="1800" dirty="0">
                 <a:solidFill>
-                  <a:srgbClr val="F8FAFC"/>
+                  <a:srgbClr val="F8F8F8"/>
                 </a:solidFill>
                 <a:latin typeface="Pretendard" pitchFamily="34" charset="0"/>
                 <a:ea typeface="Pretendard" pitchFamily="34" charset="-122"/>
@@ -15446,7 +15446,7 @@
             <a:r>
               <a:rPr lang="en-US" sz="1800" dirty="0">
                 <a:solidFill>
-                  <a:srgbClr val="F8FAFC"/>
+                  <a:srgbClr val="F8F8F8"/>
                 </a:solidFill>
                 <a:latin typeface="Pretendard" pitchFamily="34" charset="0"/>
                 <a:ea typeface="Pretendard" pitchFamily="34" charset="-122"/>
@@ -15488,7 +15488,7 @@
             <a:r>
               <a:rPr lang="en-US" sz="1800" dirty="0">
                 <a:solidFill>
-                  <a:srgbClr val="F8FAFC"/>
+                  <a:srgbClr val="F8F8F8"/>
                 </a:solidFill>
                 <a:latin typeface="Pretendard" pitchFamily="34" charset="0"/>
                 <a:ea typeface="Pretendard" pitchFamily="34" charset="-122"/>
@@ -15530,7 +15530,7 @@
             <a:r>
               <a:rPr lang="en-US" sz="1800" dirty="0">
                 <a:solidFill>
-                  <a:srgbClr val="F8FAFC"/>
+                  <a:srgbClr val="F8F8F8"/>
                 </a:solidFill>
                 <a:latin typeface="Pretendard" pitchFamily="34" charset="0"/>
                 <a:ea typeface="Pretendard" pitchFamily="34" charset="-122"/>
@@ -15919,7 +15919,7 @@
             <a:r>
               <a:rPr lang="en-US" sz="3400" b="1" dirty="0">
                 <a:solidFill>
-                  <a:srgbClr val="F8FAFC"/>
+                  <a:srgbClr val="F8F8F8"/>
                 </a:solidFill>
                 <a:latin typeface="Pretendard" pitchFamily="34" charset="0"/>
                 <a:ea typeface="Pretendard" pitchFamily="34" charset="-122"/>
@@ -15978,7 +15978,7 @@
             <a:r>
               <a:rPr lang="en-US" sz="2200" dirty="0">
                 <a:solidFill>
-                  <a:srgbClr val="F8FAFC"/>
+                  <a:srgbClr val="F8F8F8"/>
                 </a:solidFill>
                 <a:latin typeface="Pretendard" pitchFamily="34" charset="0"/>
                 <a:ea typeface="Pretendard" pitchFamily="34" charset="-122"/>
@@ -16037,7 +16037,7 @@
             <a:r>
               <a:rPr lang="en-US" sz="2200" dirty="0">
                 <a:solidFill>
-                  <a:srgbClr val="F8FAFC"/>
+                  <a:srgbClr val="F8F8F8"/>
                 </a:solidFill>
                 <a:latin typeface="Pretendard" pitchFamily="34" charset="0"/>
                 <a:ea typeface="Pretendard" pitchFamily="34" charset="-122"/>
@@ -16764,7 +16764,7 @@
             <a:r>
               <a:rPr lang="en-US" sz="3400" b="1" dirty="0">
                 <a:solidFill>
-                  <a:srgbClr val="F8FAFC"/>
+                  <a:srgbClr val="F8F8F8"/>
                 </a:solidFill>
                 <a:latin typeface="Pretendard" pitchFamily="34" charset="0"/>
                 <a:ea typeface="Pretendard" pitchFamily="34" charset="-122"/>
@@ -16880,7 +16880,7 @@
             <a:r>
               <a:rPr lang="en-US" sz="2200" dirty="0">
                 <a:solidFill>
-                  <a:srgbClr val="F8FAFC"/>
+                  <a:srgbClr val="F8F8F8"/>
                 </a:solidFill>
                 <a:latin typeface="Pretendard" pitchFamily="34" charset="0"/>
                 <a:ea typeface="Pretendard" pitchFamily="34" charset="-122"/>
@@ -16996,7 +16996,7 @@
             <a:r>
               <a:rPr lang="en-US" sz="2200" dirty="0">
                 <a:solidFill>
-                  <a:srgbClr val="F8FAFC"/>
+                  <a:srgbClr val="F8F8F8"/>
                 </a:solidFill>
                 <a:latin typeface="Pretendard" pitchFamily="34" charset="0"/>
                 <a:ea typeface="Pretendard" pitchFamily="34" charset="-122"/>
@@ -17112,7 +17112,7 @@
             <a:r>
               <a:rPr lang="en-US" sz="2200" dirty="0">
                 <a:solidFill>
-                  <a:srgbClr val="F8FAFC"/>
+                  <a:srgbClr val="F8F8F8"/>
                 </a:solidFill>
                 <a:latin typeface="Pretendard" pitchFamily="34" charset="0"/>
                 <a:ea typeface="Pretendard" pitchFamily="34" charset="-122"/>
@@ -17228,7 +17228,7 @@
             <a:r>
               <a:rPr lang="en-US" sz="2200" dirty="0">
                 <a:solidFill>
-                  <a:srgbClr val="F8FAFC"/>
+                  <a:srgbClr val="F8F8F8"/>
                 </a:solidFill>
                 <a:latin typeface="Pretendard" pitchFamily="34" charset="0"/>
                 <a:ea typeface="Pretendard" pitchFamily="34" charset="-122"/>
@@ -17955,7 +17955,7 @@
             <a:r>
               <a:rPr lang="en-US" sz="3400" b="1" dirty="0">
                 <a:solidFill>
-                  <a:srgbClr val="F8FAFC"/>
+                  <a:srgbClr val="F8F8F8"/>
                 </a:solidFill>
                 <a:latin typeface="Pretendard" pitchFamily="34" charset="0"/>
                 <a:ea typeface="Pretendard" pitchFamily="34" charset="-122"/>
@@ -18071,7 +18071,7 @@
             <a:r>
               <a:rPr lang="en-US" sz="2200" dirty="0">
                 <a:solidFill>
-                  <a:srgbClr val="F8FAFC"/>
+                  <a:srgbClr val="F8F8F8"/>
                 </a:solidFill>
                 <a:latin typeface="Pretendard" pitchFamily="34" charset="0"/>
                 <a:ea typeface="Pretendard" pitchFamily="34" charset="-122"/>
@@ -18187,7 +18187,7 @@
             <a:r>
               <a:rPr lang="en-US" sz="2200" dirty="0">
                 <a:solidFill>
-                  <a:srgbClr val="F8FAFC"/>
+                  <a:srgbClr val="F8F8F8"/>
                 </a:solidFill>
                 <a:latin typeface="Pretendard" pitchFamily="34" charset="0"/>
                 <a:ea typeface="Pretendard" pitchFamily="34" charset="-122"/>
@@ -18303,7 +18303,7 @@
             <a:r>
               <a:rPr lang="en-US" sz="2200" dirty="0">
                 <a:solidFill>
-                  <a:srgbClr val="F8FAFC"/>
+                  <a:srgbClr val="F8F8F8"/>
                 </a:solidFill>
                 <a:latin typeface="Pretendard" pitchFamily="34" charset="0"/>
                 <a:ea typeface="Pretendard" pitchFamily="34" charset="-122"/>
@@ -18419,7 +18419,7 @@
             <a:r>
               <a:rPr lang="en-US" sz="2200" dirty="0">
                 <a:solidFill>
-                  <a:srgbClr val="F8FAFC"/>
+                  <a:srgbClr val="F8F8F8"/>
                 </a:solidFill>
                 <a:latin typeface="Pretendard" pitchFamily="34" charset="0"/>
                 <a:ea typeface="Pretendard" pitchFamily="34" charset="-122"/>
@@ -18852,7 +18852,7 @@
             <a:r>
               <a:rPr lang="en-US" sz="3400" b="1" dirty="0">
                 <a:solidFill>
-                  <a:srgbClr val="F8FAFC"/>
+                  <a:srgbClr val="F8F8F8"/>
                 </a:solidFill>
                 <a:latin typeface="Pretendard" pitchFamily="34" charset="0"/>
                 <a:ea typeface="Pretendard" pitchFamily="34" charset="-122"/>
@@ -18911,7 +18911,7 @@
             <a:r>
               <a:rPr lang="en-US" sz="2200" dirty="0">
                 <a:solidFill>
-                  <a:srgbClr val="F8FAFC"/>
+                  <a:srgbClr val="F8F8F8"/>
                 </a:solidFill>
                 <a:latin typeface="Pretendard" pitchFamily="34" charset="0"/>
                 <a:ea typeface="Pretendard" pitchFamily="34" charset="-122"/>
@@ -18951,7 +18951,7 @@
             <a:r>
               <a:rPr lang="en-US" sz="2200" dirty="0">
                 <a:solidFill>
-                  <a:srgbClr val="F8FAFC"/>
+                  <a:srgbClr val="F8F8F8"/>
                 </a:solidFill>
                 <a:latin typeface="Pretendard" pitchFamily="34" charset="0"/>
                 <a:ea typeface="Pretendard" pitchFamily="34" charset="-122"/>
@@ -18991,7 +18991,7 @@
             <a:r>
               <a:rPr lang="en-US" sz="2200" dirty="0">
                 <a:solidFill>
-                  <a:srgbClr val="F8FAFC"/>
+                  <a:srgbClr val="F8F8F8"/>
                 </a:solidFill>
                 <a:latin typeface="Pretendard" pitchFamily="34" charset="0"/>
                 <a:ea typeface="Pretendard" pitchFamily="34" charset="-122"/>
@@ -19596,7 +19596,7 @@
             <a:r>
               <a:rPr lang="en-US" sz="3400" b="1" dirty="0">
                 <a:solidFill>
-                  <a:srgbClr val="F8FAFC"/>
+                  <a:srgbClr val="F8F8F8"/>
                 </a:solidFill>
                 <a:latin typeface="Pretendard" pitchFamily="34" charset="0"/>
                 <a:ea typeface="Pretendard" pitchFamily="34" charset="-122"/>
@@ -19800,7 +19800,7 @@
                       <a:r>
                         <a:rPr lang="en-US" sz="1800" b="1" dirty="0">
                           <a:solidFill>
-                            <a:srgbClr val="F8FAFC"/>
+                            <a:srgbClr val="F8F8F8"/>
                           </a:solidFill>
                           <a:latin typeface="Pretendard" pitchFamily="34" charset="0"/>
                           <a:ea typeface="Pretendard" pitchFamily="34" charset="-122"/>
@@ -19865,7 +19865,7 @@
                       <a:r>
                         <a:rPr lang="en-US" sz="1800" dirty="0">
                           <a:solidFill>
-                            <a:srgbClr val="F8FAFC"/>
+                            <a:srgbClr val="F8F8F8"/>
                           </a:solidFill>
                           <a:latin typeface="Pretendard" pitchFamily="34" charset="0"/>
                           <a:ea typeface="Pretendard" pitchFamily="34" charset="-122"/>
@@ -19932,7 +19932,7 @@
                       <a:r>
                         <a:rPr lang="en-US" sz="1800" b="1" dirty="0">
                           <a:solidFill>
-                            <a:srgbClr val="F8FAFC"/>
+                            <a:srgbClr val="F8F8F8"/>
                           </a:solidFill>
                           <a:latin typeface="Pretendard" pitchFamily="34" charset="0"/>
                           <a:ea typeface="Pretendard" pitchFamily="34" charset="-122"/>
@@ -20002,7 +20002,7 @@
                       <a:r>
                         <a:rPr lang="en-US" sz="1800" dirty="0">
                           <a:solidFill>
-                            <a:srgbClr val="F8FAFC"/>
+                            <a:srgbClr val="F8F8F8"/>
                           </a:solidFill>
                           <a:latin typeface="Pretendard" pitchFamily="34" charset="0"/>
                           <a:ea typeface="Pretendard" pitchFamily="34" charset="-122"/>
@@ -20113,7 +20113,7 @@
             <a:r>
               <a:rPr lang="en-US" sz="1800" dirty="0">
                 <a:solidFill>
-                  <a:srgbClr val="F8FAFC"/>
+                  <a:srgbClr val="F8F8F8"/>
                 </a:solidFill>
                 <a:latin typeface="Pretendard" pitchFamily="34" charset="0"/>
                 <a:ea typeface="Pretendard" pitchFamily="34" charset="-122"/>
@@ -20153,7 +20153,7 @@
             <a:r>
               <a:rPr lang="en-US" sz="1800" dirty="0">
                 <a:solidFill>
-                  <a:srgbClr val="F8FAFC"/>
+                  <a:srgbClr val="F8F8F8"/>
                 </a:solidFill>
                 <a:latin typeface="Pretendard" pitchFamily="34" charset="0"/>
                 <a:ea typeface="Pretendard" pitchFamily="34" charset="-122"/>
@@ -20841,7 +20841,7 @@
             <a:r>
               <a:rPr lang="en-US" sz="3400" b="1" dirty="0">
                 <a:solidFill>
-                  <a:srgbClr val="F8FAFC"/>
+                  <a:srgbClr val="F8F8F8"/>
                 </a:solidFill>
                 <a:latin typeface="Pretendard" pitchFamily="34" charset="0"/>
                 <a:ea typeface="Pretendard" pitchFamily="34" charset="-122"/>
@@ -20957,7 +20957,7 @@
             <a:r>
               <a:rPr lang="en-US" sz="2200" dirty="0">
                 <a:solidFill>
-                  <a:srgbClr val="F8FAFC"/>
+                  <a:srgbClr val="F8F8F8"/>
                 </a:solidFill>
                 <a:latin typeface="Pretendard" pitchFamily="34" charset="0"/>
                 <a:ea typeface="Pretendard" pitchFamily="34" charset="-122"/>
@@ -21073,7 +21073,7 @@
             <a:r>
               <a:rPr lang="en-US" sz="2200" dirty="0">
                 <a:solidFill>
-                  <a:srgbClr val="F8FAFC"/>
+                  <a:srgbClr val="F8F8F8"/>
                 </a:solidFill>
                 <a:latin typeface="Pretendard" pitchFamily="34" charset="0"/>
                 <a:ea typeface="Pretendard" pitchFamily="34" charset="-122"/>
@@ -21189,7 +21189,7 @@
             <a:r>
               <a:rPr lang="en-US" sz="2200" dirty="0">
                 <a:solidFill>
-                  <a:srgbClr val="F8FAFC"/>
+                  <a:srgbClr val="F8F8F8"/>
                 </a:solidFill>
                 <a:latin typeface="Pretendard" pitchFamily="34" charset="0"/>
                 <a:ea typeface="Pretendard" pitchFamily="34" charset="-122"/>
@@ -21605,7 +21605,7 @@
             <a:r>
               <a:rPr lang="en-US" sz="3800" b="1" dirty="0">
                 <a:solidFill>
-                  <a:srgbClr val="F8FAFC"/>
+                  <a:srgbClr val="F8F8F8"/>
                 </a:solidFill>
                 <a:latin typeface="Pretendard" pitchFamily="34" charset="0"/>
                 <a:ea typeface="Pretendard" pitchFamily="34" charset="-122"/>
@@ -21647,7 +21647,7 @@
             <a:r>
               <a:rPr lang="en-US" sz="2200" dirty="0">
                 <a:solidFill>
-                  <a:srgbClr val="F8FAFC"/>
+                  <a:srgbClr val="F8F8F8"/>
                 </a:solidFill>
                 <a:latin typeface="Pretendard" pitchFamily="34" charset="0"/>
                 <a:ea typeface="Pretendard" pitchFamily="34" charset="-122"/>
@@ -22109,7 +22109,7 @@
             <a:r>
               <a:rPr lang="en-US" sz="3400" b="1" dirty="0">
                 <a:solidFill>
-                  <a:srgbClr val="F8FAFC"/>
+                  <a:srgbClr val="F8F8F8"/>
                 </a:solidFill>
                 <a:latin typeface="Pretendard" pitchFamily="34" charset="0"/>
                 <a:ea typeface="Pretendard" pitchFamily="34" charset="-122"/>
@@ -22151,7 +22151,7 @@
             <a:r>
               <a:rPr lang="en-US" sz="2200" b="1" dirty="0">
                 <a:solidFill>
-                  <a:srgbClr val="F8FAFC"/>
+                  <a:srgbClr val="F8F8F8"/>
                 </a:solidFill>
                 <a:latin typeface="Pretendard" pitchFamily="34" charset="0"/>
                 <a:ea typeface="Pretendard" pitchFamily="34" charset="-122"/>
@@ -22210,7 +22210,7 @@
             <a:r>
               <a:rPr lang="en-US" sz="2200" dirty="0">
                 <a:solidFill>
-                  <a:srgbClr val="F8FAFC"/>
+                  <a:srgbClr val="F8F8F8"/>
                 </a:solidFill>
                 <a:latin typeface="Pretendard" pitchFamily="34" charset="0"/>
                 <a:ea typeface="Pretendard" pitchFamily="34" charset="-122"/>
@@ -22250,7 +22250,7 @@
             <a:r>
               <a:rPr lang="en-US" sz="2200" dirty="0">
                 <a:solidFill>
-                  <a:srgbClr val="F8FAFC"/>
+                  <a:srgbClr val="F8F8F8"/>
                 </a:solidFill>
                 <a:latin typeface="Pretendard" pitchFamily="34" charset="0"/>
                 <a:ea typeface="Pretendard" pitchFamily="34" charset="-122"/>
@@ -22290,7 +22290,7 @@
             <a:r>
               <a:rPr lang="en-US" sz="2200" dirty="0">
                 <a:solidFill>
-                  <a:srgbClr val="F8FAFC"/>
+                  <a:srgbClr val="F8F8F8"/>
                 </a:solidFill>
                 <a:latin typeface="Pretendard" pitchFamily="34" charset="0"/>
                 <a:ea typeface="Pretendard" pitchFamily="34" charset="-122"/>
@@ -22330,7 +22330,7 @@
             <a:r>
               <a:rPr lang="en-US" sz="2200" dirty="0">
                 <a:solidFill>
-                  <a:srgbClr val="F8FAFC"/>
+                  <a:srgbClr val="F8F8F8"/>
                 </a:solidFill>
                 <a:latin typeface="Pretendard" pitchFamily="34" charset="0"/>
                 <a:ea typeface="Pretendard" pitchFamily="34" charset="-122"/>
@@ -22988,7 +22988,7 @@
             <a:r>
               <a:rPr lang="en-US" sz="3400" b="1" dirty="0">
                 <a:solidFill>
-                  <a:srgbClr val="F8FAFC"/>
+                  <a:srgbClr val="F8F8F8"/>
                 </a:solidFill>
                 <a:latin typeface="Pretendard" pitchFamily="34" charset="0"/>
                 <a:ea typeface="Pretendard" pitchFamily="34" charset="-122"/>
@@ -23104,7 +23104,7 @@
             <a:r>
               <a:rPr lang="en-US" sz="2200" dirty="0">
                 <a:solidFill>
-                  <a:srgbClr val="F8FAFC"/>
+                  <a:srgbClr val="F8F8F8"/>
                 </a:solidFill>
                 <a:latin typeface="Pretendard" pitchFamily="34" charset="0"/>
                 <a:ea typeface="Pretendard" pitchFamily="34" charset="-122"/>
@@ -23220,7 +23220,7 @@
             <a:r>
               <a:rPr lang="en-US" sz="2200" dirty="0">
                 <a:solidFill>
-                  <a:srgbClr val="F8FAFC"/>
+                  <a:srgbClr val="F8F8F8"/>
                 </a:solidFill>
                 <a:latin typeface="Pretendard" pitchFamily="34" charset="0"/>
                 <a:ea typeface="Pretendard" pitchFamily="34" charset="-122"/>
@@ -23336,7 +23336,7 @@
             <a:r>
               <a:rPr lang="en-US" sz="2200" dirty="0">
                 <a:solidFill>
-                  <a:srgbClr val="F8FAFC"/>
+                  <a:srgbClr val="F8F8F8"/>
                 </a:solidFill>
                 <a:latin typeface="Pretendard" pitchFamily="34" charset="0"/>
                 <a:ea typeface="Pretendard" pitchFamily="34" charset="-122"/>
@@ -23725,7 +23725,7 @@
             <a:r>
               <a:rPr lang="en-US" sz="3400" b="1" dirty="0">
                 <a:solidFill>
-                  <a:srgbClr val="F8FAFC"/>
+                  <a:srgbClr val="F8F8F8"/>
                 </a:solidFill>
                 <a:latin typeface="Pretendard" pitchFamily="34" charset="0"/>
                 <a:ea typeface="Pretendard" pitchFamily="34" charset="-122"/>
@@ -23784,7 +23784,7 @@
             <a:r>
               <a:rPr lang="en-US" sz="2200" dirty="0">
                 <a:solidFill>
-                  <a:srgbClr val="F8FAFC"/>
+                  <a:srgbClr val="F8F8F8"/>
                 </a:solidFill>
                 <a:latin typeface="Pretendard" pitchFamily="34" charset="0"/>
                 <a:ea typeface="Pretendard" pitchFamily="34" charset="-122"/>
@@ -23843,7 +23843,7 @@
             <a:r>
               <a:rPr lang="en-US" sz="2200" dirty="0">
                 <a:solidFill>
-                  <a:srgbClr val="F8FAFC"/>
+                  <a:srgbClr val="F8F8F8"/>
                 </a:solidFill>
                 <a:latin typeface="Pretendard" pitchFamily="34" charset="0"/>
                 <a:ea typeface="Pretendard" pitchFamily="34" charset="-122"/>
@@ -24501,7 +24501,7 @@
             <a:r>
               <a:rPr lang="en-US" sz="3400" b="1" dirty="0">
                 <a:solidFill>
-                  <a:srgbClr val="F8FAFC"/>
+                  <a:srgbClr val="F8F8F8"/>
                 </a:solidFill>
                 <a:latin typeface="Pretendard" pitchFamily="34" charset="0"/>
                 <a:ea typeface="Pretendard" pitchFamily="34" charset="-122"/>
@@ -24617,7 +24617,7 @@
             <a:r>
               <a:rPr lang="en-US" sz="2200" dirty="0">
                 <a:solidFill>
-                  <a:srgbClr val="F8FAFC"/>
+                  <a:srgbClr val="F8F8F8"/>
                 </a:solidFill>
                 <a:latin typeface="Pretendard" pitchFamily="34" charset="0"/>
                 <a:ea typeface="Pretendard" pitchFamily="34" charset="-122"/>
@@ -24733,7 +24733,7 @@
             <a:r>
               <a:rPr lang="en-US" sz="2200" dirty="0">
                 <a:solidFill>
-                  <a:srgbClr val="F8FAFC"/>
+                  <a:srgbClr val="F8F8F8"/>
                 </a:solidFill>
                 <a:latin typeface="Pretendard" pitchFamily="34" charset="0"/>
                 <a:ea typeface="Pretendard" pitchFamily="34" charset="-122"/>
@@ -24849,7 +24849,7 @@
             <a:r>
               <a:rPr lang="en-US" sz="2200" dirty="0">
                 <a:solidFill>
-                  <a:srgbClr val="F8FAFC"/>
+                  <a:srgbClr val="F8F8F8"/>
                 </a:solidFill>
                 <a:latin typeface="Pretendard" pitchFamily="34" charset="0"/>
                 <a:ea typeface="Pretendard" pitchFamily="34" charset="-122"/>
@@ -25238,7 +25238,7 @@
             <a:r>
               <a:rPr lang="en-US" sz="3400" b="1" dirty="0">
                 <a:solidFill>
-                  <a:srgbClr val="F8FAFC"/>
+                  <a:srgbClr val="F8F8F8"/>
                 </a:solidFill>
                 <a:latin typeface="Pretendard" pitchFamily="34" charset="0"/>
                 <a:ea typeface="Pretendard" pitchFamily="34" charset="-122"/>
@@ -25297,7 +25297,7 @@
             <a:r>
               <a:rPr lang="en-US" sz="2200" dirty="0">
                 <a:solidFill>
-                  <a:srgbClr val="F8FAFC"/>
+                  <a:srgbClr val="F8F8F8"/>
                 </a:solidFill>
                 <a:latin typeface="Pretendard" pitchFamily="34" charset="0"/>
                 <a:ea typeface="Pretendard" pitchFamily="34" charset="-122"/>
@@ -25356,7 +25356,7 @@
             <a:r>
               <a:rPr lang="en-US" sz="2200" dirty="0">
                 <a:solidFill>
-                  <a:srgbClr val="F8FAFC"/>
+                  <a:srgbClr val="F8F8F8"/>
                 </a:solidFill>
                 <a:latin typeface="Pretendard" pitchFamily="34" charset="0"/>
                 <a:ea typeface="Pretendard" pitchFamily="34" charset="-122"/>
@@ -25745,7 +25745,7 @@
             <a:r>
               <a:rPr lang="en-US" sz="3400" b="1" dirty="0">
                 <a:solidFill>
-                  <a:srgbClr val="F8FAFC"/>
+                  <a:srgbClr val="F8F8F8"/>
                 </a:solidFill>
                 <a:latin typeface="Pretendard" pitchFamily="34" charset="0"/>
                 <a:ea typeface="Pretendard" pitchFamily="34" charset="-122"/>
@@ -25804,7 +25804,7 @@
             <a:r>
               <a:rPr lang="en-US" sz="2200" dirty="0">
                 <a:solidFill>
-                  <a:srgbClr val="F8FAFC"/>
+                  <a:srgbClr val="F8F8F8"/>
                 </a:solidFill>
                 <a:latin typeface="Pretendard" pitchFamily="34" charset="0"/>
                 <a:ea typeface="Pretendard" pitchFamily="34" charset="-122"/>
@@ -25863,7 +25863,7 @@
             <a:r>
               <a:rPr lang="en-US" sz="2200" dirty="0">
                 <a:solidFill>
-                  <a:srgbClr val="F8FAFC"/>
+                  <a:srgbClr val="F8F8F8"/>
                 </a:solidFill>
                 <a:latin typeface="Pretendard" pitchFamily="34" charset="0"/>
                 <a:ea typeface="Pretendard" pitchFamily="34" charset="-122"/>
@@ -25888,13 +25888,13 @@
   <a:themeElements>
     <a:clrScheme name="Office">
       <a:dk1>
-        <a:srgbClr val="F8FAFC"/>
+        <a:srgbClr val="F8F8F8"/>
       </a:dk1>
       <a:lt1>
         <a:srgbClr val="0B1020"/>
       </a:lt1>
       <a:dk2>
-        <a:srgbClr val="CBD5E1"/>
+        <a:srgbClr val="6C6C6C"/>
       </a:dk2>
       <a:lt2>
         <a:srgbClr val="17213A"/>
@@ -25909,13 +25909,13 @@
         <a:srgbClr val="8A4FFF"/>
       </a:accent3>
       <a:accent4>
-        <a:srgbClr val="CBD5E1"/>
+        <a:srgbClr val="6C6C6C"/>
       </a:accent4>
       <a:accent5>
         <a:srgbClr val="C4B5FD"/>
       </a:accent5>
       <a:accent6>
-        <a:srgbClr val="F8FAFC"/>
+        <a:srgbClr val="F8F8F8"/>
       </a:accent6>
       <a:hlink>
         <a:srgbClr val="8A4FFF"/>

--- a/docs/theme-preview/pptx/glassmorphism.pptx
+++ b/docs/theme-preview/pptx/glassmorphism.pptx
@@ -3602,6 +3602,49 @@
         </p:nvSpPr>
         <p:spPr>
           <a:xfrm>
+            <a:off x="310896" y="256032"/>
+            <a:ext cx="10893247" cy="5779008"/>
+          </a:xfrm>
+          <a:prstGeom prst="roundRect">
+            <a:avLst>
+              <a:gd name="adj" fmla="val 1899"/>
+            </a:avLst>
+          </a:prstGeom>
+          <a:solidFill>
+            <a:srgbClr val="8A4FFF">
+              <a:alpha val="26000"/>
+            </a:srgbClr>
+          </a:solidFill>
+          <a:ln w="12700">
+            <a:solidFill>
+              <a:srgbClr val="FFFFFF">
+                <a:alpha val="14000"/>
+              </a:srgbClr>
+            </a:solidFill>
+            <a:prstDash val="solid"/>
+          </a:ln>
+          <a:effectLst>
+            <a:outerShdw sx="100000" sy="100000" kx="0" ky="0" algn="bl" rotWithShape="0" blurRad="12700" dist="50800" dir="2700000">
+              <a:srgbClr val="8A4FFF">
+                <a:alpha val="10000"/>
+              </a:srgbClr>
+            </a:outerShdw>
+            <a:glow rad="63500">
+              <a:srgbClr val="8A4FFF">
+                <a:alpha val="23000"/>
+              </a:srgbClr>
+            </a:glow>
+          </a:effectLst>
+        </p:spPr>
+      </p:sp>
+      <p:sp>
+        <p:nvSpPr>
+          <p:cNvPr id="3" name="Shape 1"/>
+          <p:cNvSpPr/>
+          <p:nvPr/>
+        </p:nvSpPr>
+        <p:spPr>
+          <a:xfrm>
             <a:off x="566928" y="475488"/>
             <a:ext cx="11057839" cy="5907024"/>
           </a:xfrm>
@@ -3639,7 +3682,7 @@
       </p:sp>
       <p:sp>
         <p:nvSpPr>
-          <p:cNvPr id="3" name="Shape 1"/>
+          <p:cNvPr id="4" name="Shape 2"/>
           <p:cNvSpPr/>
           <p:nvPr/>
         </p:nvSpPr>
@@ -3668,7 +3711,7 @@
       </p:sp>
       <p:sp>
         <p:nvSpPr>
-          <p:cNvPr id="4" name="Shape 2"/>
+          <p:cNvPr id="5" name="Shape 3"/>
           <p:cNvSpPr/>
           <p:nvPr/>
         </p:nvSpPr>
@@ -3697,7 +3740,7 @@
       </p:sp>
       <p:sp>
         <p:nvSpPr>
-          <p:cNvPr id="5" name="Shape 3"/>
+          <p:cNvPr id="6" name="Shape 4"/>
           <p:cNvSpPr/>
           <p:nvPr/>
         </p:nvSpPr>
@@ -3726,7 +3769,7 @@
       </p:sp>
       <p:sp>
         <p:nvSpPr>
-          <p:cNvPr id="6" name="Shape 4"/>
+          <p:cNvPr id="7" name="Shape 5"/>
           <p:cNvSpPr/>
           <p:nvPr/>
         </p:nvSpPr>
@@ -3751,7 +3794,7 @@
       </p:sp>
       <p:sp>
         <p:nvSpPr>
-          <p:cNvPr id="7" name="Shape 5"/>
+          <p:cNvPr id="8" name="Shape 6"/>
           <p:cNvSpPr/>
           <p:nvPr/>
         </p:nvSpPr>
@@ -3776,7 +3819,32 @@
       </p:sp>
       <p:sp>
         <p:nvSpPr>
-          <p:cNvPr id="8" name="Shape 6"/>
+          <p:cNvPr id="9" name="Shape 7"/>
+          <p:cNvSpPr/>
+          <p:nvPr/>
+        </p:nvSpPr>
+        <p:spPr>
+          <a:xfrm>
+            <a:off x="9631375" y="603504"/>
+            <a:ext cx="1353312" cy="0"/>
+          </a:xfrm>
+          <a:prstGeom prst="line">
+            <a:avLst/>
+          </a:prstGeom>
+          <a:noFill/>
+          <a:ln w="12700">
+            <a:solidFill>
+              <a:srgbClr val="FFFFFF">
+                <a:alpha val="54000"/>
+              </a:srgbClr>
+            </a:solidFill>
+            <a:prstDash val="solid"/>
+          </a:ln>
+        </p:spPr>
+      </p:sp>
+      <p:sp>
+        <p:nvSpPr>
+          <p:cNvPr id="10" name="Shape 8"/>
           <p:cNvSpPr/>
           <p:nvPr/>
         </p:nvSpPr>
@@ -3803,7 +3871,7 @@
       </p:sp>
       <p:sp>
         <p:nvSpPr>
-          <p:cNvPr id="9" name="Shape 7"/>
+          <p:cNvPr id="11" name="Shape 9"/>
           <p:cNvSpPr/>
           <p:nvPr/>
         </p:nvSpPr>
@@ -3830,7 +3898,7 @@
       </p:sp>
       <p:sp>
         <p:nvSpPr>
-          <p:cNvPr id="10" name="Shape 8"/>
+          <p:cNvPr id="12" name="Shape 10"/>
           <p:cNvSpPr/>
           <p:nvPr/>
         </p:nvSpPr>
@@ -3857,7 +3925,7 @@
       </p:sp>
       <p:sp>
         <p:nvSpPr>
-          <p:cNvPr id="11" name="Shape 9"/>
+          <p:cNvPr id="13" name="Shape 11"/>
           <p:cNvSpPr/>
           <p:nvPr/>
         </p:nvSpPr>
@@ -3884,7 +3952,7 @@
       </p:sp>
       <p:sp>
         <p:nvSpPr>
-          <p:cNvPr id="12" name="Shape 10"/>
+          <p:cNvPr id="14" name="Shape 12"/>
           <p:cNvSpPr/>
           <p:nvPr/>
         </p:nvSpPr>
@@ -3913,7 +3981,7 @@
       </p:sp>
       <p:sp>
         <p:nvSpPr>
-          <p:cNvPr id="13" name="mdpr:mdpr-design-grammar-b3a462:title:__title:mdpr-design-grammar-b3a462"/>
+          <p:cNvPr id="15" name="mdpr:mdpr-design-grammar-b3a462:title:__title:mdpr-design-grammar-b3a462"/>
           <p:cNvSpPr txBox="1"/>
           <p:nvPr/>
         </p:nvSpPr>
@@ -3993,6 +4061,49 @@
         </p:nvSpPr>
         <p:spPr>
           <a:xfrm>
+            <a:off x="310896" y="256032"/>
+            <a:ext cx="10893247" cy="5779008"/>
+          </a:xfrm>
+          <a:prstGeom prst="roundRect">
+            <a:avLst>
+              <a:gd name="adj" fmla="val 1899"/>
+            </a:avLst>
+          </a:prstGeom>
+          <a:solidFill>
+            <a:srgbClr val="8A4FFF">
+              <a:alpha val="26000"/>
+            </a:srgbClr>
+          </a:solidFill>
+          <a:ln w="12700">
+            <a:solidFill>
+              <a:srgbClr val="FFFFFF">
+                <a:alpha val="14000"/>
+              </a:srgbClr>
+            </a:solidFill>
+            <a:prstDash val="solid"/>
+          </a:ln>
+          <a:effectLst>
+            <a:outerShdw sx="100000" sy="100000" kx="0" ky="0" algn="bl" rotWithShape="0" blurRad="12700" dist="50800" dir="2700000">
+              <a:srgbClr val="8A4FFF">
+                <a:alpha val="10000"/>
+              </a:srgbClr>
+            </a:outerShdw>
+            <a:glow rad="63500">
+              <a:srgbClr val="8A4FFF">
+                <a:alpha val="23000"/>
+              </a:srgbClr>
+            </a:glow>
+          </a:effectLst>
+        </p:spPr>
+      </p:sp>
+      <p:sp>
+        <p:nvSpPr>
+          <p:cNvPr id="3" name="Shape 1"/>
+          <p:cNvSpPr/>
+          <p:nvPr/>
+        </p:nvSpPr>
+        <p:spPr>
+          <a:xfrm>
             <a:off x="566928" y="475488"/>
             <a:ext cx="11057839" cy="5907024"/>
           </a:xfrm>
@@ -4030,7 +4141,7 @@
       </p:sp>
       <p:sp>
         <p:nvSpPr>
-          <p:cNvPr id="3" name="Shape 1"/>
+          <p:cNvPr id="4" name="Shape 2"/>
           <p:cNvSpPr/>
           <p:nvPr/>
         </p:nvSpPr>
@@ -4059,7 +4170,7 @@
       </p:sp>
       <p:sp>
         <p:nvSpPr>
-          <p:cNvPr id="4" name="Shape 2"/>
+          <p:cNvPr id="5" name="Shape 3"/>
           <p:cNvSpPr/>
           <p:nvPr/>
         </p:nvSpPr>
@@ -4088,7 +4199,7 @@
       </p:sp>
       <p:sp>
         <p:nvSpPr>
-          <p:cNvPr id="5" name="Shape 3"/>
+          <p:cNvPr id="6" name="Shape 4"/>
           <p:cNvSpPr/>
           <p:nvPr/>
         </p:nvSpPr>
@@ -4117,7 +4228,7 @@
       </p:sp>
       <p:sp>
         <p:nvSpPr>
-          <p:cNvPr id="6" name="Shape 4"/>
+          <p:cNvPr id="7" name="Shape 5"/>
           <p:cNvSpPr/>
           <p:nvPr/>
         </p:nvSpPr>
@@ -4142,7 +4253,7 @@
       </p:sp>
       <p:sp>
         <p:nvSpPr>
-          <p:cNvPr id="7" name="Shape 5"/>
+          <p:cNvPr id="8" name="Shape 6"/>
           <p:cNvSpPr/>
           <p:nvPr/>
         </p:nvSpPr>
@@ -4167,7 +4278,32 @@
       </p:sp>
       <p:sp>
         <p:nvSpPr>
-          <p:cNvPr id="8" name="Shape 6"/>
+          <p:cNvPr id="9" name="Shape 7"/>
+          <p:cNvSpPr/>
+          <p:nvPr/>
+        </p:nvSpPr>
+        <p:spPr>
+          <a:xfrm>
+            <a:off x="9631375" y="603504"/>
+            <a:ext cx="1353312" cy="0"/>
+          </a:xfrm>
+          <a:prstGeom prst="line">
+            <a:avLst/>
+          </a:prstGeom>
+          <a:noFill/>
+          <a:ln w="12700">
+            <a:solidFill>
+              <a:srgbClr val="FFFFFF">
+                <a:alpha val="54000"/>
+              </a:srgbClr>
+            </a:solidFill>
+            <a:prstDash val="solid"/>
+          </a:ln>
+        </p:spPr>
+      </p:sp>
+      <p:sp>
+        <p:nvSpPr>
+          <p:cNvPr id="10" name="Shape 8"/>
           <p:cNvSpPr/>
           <p:nvPr/>
         </p:nvSpPr>
@@ -4194,7 +4330,7 @@
       </p:sp>
       <p:sp>
         <p:nvSpPr>
-          <p:cNvPr id="9" name="Shape 7"/>
+          <p:cNvPr id="11" name="Shape 9"/>
           <p:cNvSpPr/>
           <p:nvPr/>
         </p:nvSpPr>
@@ -4221,7 +4357,7 @@
       </p:sp>
       <p:sp>
         <p:nvSpPr>
-          <p:cNvPr id="10" name="Shape 8"/>
+          <p:cNvPr id="12" name="Shape 10"/>
           <p:cNvSpPr/>
           <p:nvPr/>
         </p:nvSpPr>
@@ -4248,7 +4384,7 @@
       </p:sp>
       <p:sp>
         <p:nvSpPr>
-          <p:cNvPr id="11" name="Shape 9"/>
+          <p:cNvPr id="13" name="Shape 11"/>
           <p:cNvSpPr/>
           <p:nvPr/>
         </p:nvSpPr>
@@ -4275,7 +4411,7 @@
       </p:sp>
       <p:sp>
         <p:nvSpPr>
-          <p:cNvPr id="12" name="Shape 10"/>
+          <p:cNvPr id="14" name="Shape 12"/>
           <p:cNvSpPr/>
           <p:nvPr/>
         </p:nvSpPr>
@@ -4302,7 +4438,7 @@
       </p:sp>
       <p:sp>
         <p:nvSpPr>
-          <p:cNvPr id="13" name="mdpr:2-2-a9df10:title:__title:2-2-a9df10"/>
+          <p:cNvPr id="15" name="mdpr:2-2-a9df10:title:__title:2-2-a9df10"/>
           <p:cNvSpPr txBox="1"/>
           <p:nvPr/>
         </p:nvSpPr>
@@ -4344,7 +4480,7 @@
       </p:sp>
       <p:sp>
         <p:nvSpPr>
-          <p:cNvPr id="14" name="mdpr:2-2-a9df10:left:block-10-chunk-2"/>
+          <p:cNvPr id="16" name="mdpr:2-2-a9df10:left:block-10-chunk-2"/>
           <p:cNvSpPr txBox="1"/>
           <p:nvPr/>
         </p:nvSpPr>
@@ -4403,7 +4539,7 @@
       </p:sp>
       <p:sp>
         <p:nvSpPr>
-          <p:cNvPr id="15" name="mdpr:2-2-a9df10:right:block-10-chunk-2"/>
+          <p:cNvPr id="17" name="mdpr:2-2-a9df10:right:block-10-chunk-2"/>
           <p:cNvSpPr txBox="1"/>
           <p:nvPr/>
         </p:nvSpPr>
@@ -4500,6 +4636,49 @@
         </p:nvSpPr>
         <p:spPr>
           <a:xfrm>
+            <a:off x="310896" y="256032"/>
+            <a:ext cx="10893247" cy="5779008"/>
+          </a:xfrm>
+          <a:prstGeom prst="roundRect">
+            <a:avLst>
+              <a:gd name="adj" fmla="val 1899"/>
+            </a:avLst>
+          </a:prstGeom>
+          <a:solidFill>
+            <a:srgbClr val="8A4FFF">
+              <a:alpha val="26000"/>
+            </a:srgbClr>
+          </a:solidFill>
+          <a:ln w="12700">
+            <a:solidFill>
+              <a:srgbClr val="FFFFFF">
+                <a:alpha val="14000"/>
+              </a:srgbClr>
+            </a:solidFill>
+            <a:prstDash val="solid"/>
+          </a:ln>
+          <a:effectLst>
+            <a:outerShdw sx="100000" sy="100000" kx="0" ky="0" algn="bl" rotWithShape="0" blurRad="12700" dist="50800" dir="2700000">
+              <a:srgbClr val="8A4FFF">
+                <a:alpha val="10000"/>
+              </a:srgbClr>
+            </a:outerShdw>
+            <a:glow rad="63500">
+              <a:srgbClr val="8A4FFF">
+                <a:alpha val="23000"/>
+              </a:srgbClr>
+            </a:glow>
+          </a:effectLst>
+        </p:spPr>
+      </p:sp>
+      <p:sp>
+        <p:nvSpPr>
+          <p:cNvPr id="3" name="Shape 1"/>
+          <p:cNvSpPr/>
+          <p:nvPr/>
+        </p:nvSpPr>
+        <p:spPr>
+          <a:xfrm>
             <a:off x="566928" y="475488"/>
             <a:ext cx="11057839" cy="5907024"/>
           </a:xfrm>
@@ -4537,7 +4716,7 @@
       </p:sp>
       <p:sp>
         <p:nvSpPr>
-          <p:cNvPr id="3" name="Shape 1"/>
+          <p:cNvPr id="4" name="Shape 2"/>
           <p:cNvSpPr/>
           <p:nvPr/>
         </p:nvSpPr>
@@ -4566,7 +4745,7 @@
       </p:sp>
       <p:sp>
         <p:nvSpPr>
-          <p:cNvPr id="4" name="Shape 2"/>
+          <p:cNvPr id="5" name="Shape 3"/>
           <p:cNvSpPr/>
           <p:nvPr/>
         </p:nvSpPr>
@@ -4595,7 +4774,7 @@
       </p:sp>
       <p:sp>
         <p:nvSpPr>
-          <p:cNvPr id="5" name="Shape 3"/>
+          <p:cNvPr id="6" name="Shape 4"/>
           <p:cNvSpPr/>
           <p:nvPr/>
         </p:nvSpPr>
@@ -4624,7 +4803,7 @@
       </p:sp>
       <p:sp>
         <p:nvSpPr>
-          <p:cNvPr id="6" name="Shape 4"/>
+          <p:cNvPr id="7" name="Shape 5"/>
           <p:cNvSpPr/>
           <p:nvPr/>
         </p:nvSpPr>
@@ -4649,7 +4828,7 @@
       </p:sp>
       <p:sp>
         <p:nvSpPr>
-          <p:cNvPr id="7" name="Shape 5"/>
+          <p:cNvPr id="8" name="Shape 6"/>
           <p:cNvSpPr/>
           <p:nvPr/>
         </p:nvSpPr>
@@ -4674,7 +4853,32 @@
       </p:sp>
       <p:sp>
         <p:nvSpPr>
-          <p:cNvPr id="8" name="Shape 6"/>
+          <p:cNvPr id="9" name="Shape 7"/>
+          <p:cNvSpPr/>
+          <p:nvPr/>
+        </p:nvSpPr>
+        <p:spPr>
+          <a:xfrm>
+            <a:off x="9631375" y="603504"/>
+            <a:ext cx="1353312" cy="0"/>
+          </a:xfrm>
+          <a:prstGeom prst="line">
+            <a:avLst/>
+          </a:prstGeom>
+          <a:noFill/>
+          <a:ln w="12700">
+            <a:solidFill>
+              <a:srgbClr val="FFFFFF">
+                <a:alpha val="54000"/>
+              </a:srgbClr>
+            </a:solidFill>
+            <a:prstDash val="solid"/>
+          </a:ln>
+        </p:spPr>
+      </p:sp>
+      <p:sp>
+        <p:nvSpPr>
+          <p:cNvPr id="10" name="Shape 8"/>
           <p:cNvSpPr/>
           <p:nvPr/>
         </p:nvSpPr>
@@ -4701,7 +4905,7 @@
       </p:sp>
       <p:sp>
         <p:nvSpPr>
-          <p:cNvPr id="9" name="Shape 7"/>
+          <p:cNvPr id="11" name="Shape 9"/>
           <p:cNvSpPr/>
           <p:nvPr/>
         </p:nvSpPr>
@@ -4728,7 +4932,7 @@
       </p:sp>
       <p:sp>
         <p:nvSpPr>
-          <p:cNvPr id="10" name="Shape 8"/>
+          <p:cNvPr id="12" name="Shape 10"/>
           <p:cNvSpPr/>
           <p:nvPr/>
         </p:nvSpPr>
@@ -4755,7 +4959,7 @@
       </p:sp>
       <p:sp>
         <p:nvSpPr>
-          <p:cNvPr id="11" name="mdpr:pipeline-diagram-51792c:title:__title:pipeline-diagram-51792c"/>
+          <p:cNvPr id="13" name="mdpr:pipeline-diagram-51792c:title:__title:pipeline-diagram-51792c"/>
           <p:cNvSpPr txBox="1"/>
           <p:nvPr/>
         </p:nvSpPr>
@@ -4797,7 +5001,7 @@
       </p:sp>
       <p:sp>
         <p:nvSpPr>
-          <p:cNvPr id="12" name="Shape 10"/>
+          <p:cNvPr id="14" name="Shape 12"/>
           <p:cNvSpPr/>
           <p:nvPr/>
         </p:nvSpPr>
@@ -4821,7 +5025,7 @@
       </p:sp>
       <p:sp>
         <p:nvSpPr>
-          <p:cNvPr id="13" name="Shape 11"/>
+          <p:cNvPr id="15" name="Shape 13"/>
           <p:cNvSpPr/>
           <p:nvPr/>
         </p:nvSpPr>
@@ -4845,7 +5049,7 @@
       </p:sp>
       <p:sp>
         <p:nvSpPr>
-          <p:cNvPr id="14" name="Shape 12"/>
+          <p:cNvPr id="16" name="Shape 14"/>
           <p:cNvSpPr/>
           <p:nvPr/>
         </p:nvSpPr>
@@ -4869,7 +5073,7 @@
       </p:sp>
       <p:sp>
         <p:nvSpPr>
-          <p:cNvPr id="15" name="Shape 13"/>
+          <p:cNvPr id="17" name="Shape 15"/>
           <p:cNvSpPr/>
           <p:nvPr/>
         </p:nvSpPr>
@@ -4893,7 +5097,7 @@
       </p:sp>
       <p:sp>
         <p:nvSpPr>
-          <p:cNvPr id="16" name="Shape 14"/>
+          <p:cNvPr id="18" name="Shape 16"/>
           <p:cNvSpPr/>
           <p:nvPr/>
         </p:nvSpPr>
@@ -4917,7 +5121,7 @@
       </p:sp>
       <p:sp>
         <p:nvSpPr>
-          <p:cNvPr id="17" name="Shape 15"/>
+          <p:cNvPr id="19" name="Shape 17"/>
           <p:cNvSpPr/>
           <p:nvPr/>
         </p:nvSpPr>
@@ -4956,7 +5160,7 @@
       </p:sp>
       <p:sp>
         <p:nvSpPr>
-          <p:cNvPr id="18" name="Shape 16"/>
+          <p:cNvPr id="20" name="Shape 18"/>
           <p:cNvSpPr/>
           <p:nvPr/>
         </p:nvSpPr>
@@ -4983,7 +5187,7 @@
       </p:sp>
       <p:sp>
         <p:nvSpPr>
-          <p:cNvPr id="19" name="Shape 17"/>
+          <p:cNvPr id="21" name="Shape 19"/>
           <p:cNvSpPr/>
           <p:nvPr/>
         </p:nvSpPr>
@@ -5010,7 +5214,7 @@
       </p:sp>
       <p:sp>
         <p:nvSpPr>
-          <p:cNvPr id="20" name="Text 18"/>
+          <p:cNvPr id="22" name="Text 20"/>
           <p:cNvSpPr txBox="1"/>
           <p:nvPr/>
         </p:nvSpPr>
@@ -5054,7 +5258,7 @@
       </p:sp>
       <p:sp>
         <p:nvSpPr>
-          <p:cNvPr id="21" name="Text 19"/>
+          <p:cNvPr id="23" name="Text 21"/>
           <p:cNvSpPr txBox="1"/>
           <p:nvPr/>
         </p:nvSpPr>
@@ -5098,7 +5302,7 @@
       </p:sp>
       <p:sp>
         <p:nvSpPr>
-          <p:cNvPr id="22" name="Shape 20"/>
+          <p:cNvPr id="24" name="Shape 22"/>
           <p:cNvSpPr/>
           <p:nvPr/>
         </p:nvSpPr>
@@ -5137,7 +5341,7 @@
       </p:sp>
       <p:sp>
         <p:nvSpPr>
-          <p:cNvPr id="23" name="Shape 21"/>
+          <p:cNvPr id="25" name="Shape 23"/>
           <p:cNvSpPr/>
           <p:nvPr/>
         </p:nvSpPr>
@@ -5164,7 +5368,7 @@
       </p:sp>
       <p:sp>
         <p:nvSpPr>
-          <p:cNvPr id="24" name="Shape 22"/>
+          <p:cNvPr id="26" name="Shape 24"/>
           <p:cNvSpPr/>
           <p:nvPr/>
         </p:nvSpPr>
@@ -5191,7 +5395,7 @@
       </p:sp>
       <p:sp>
         <p:nvSpPr>
-          <p:cNvPr id="25" name="Text 23"/>
+          <p:cNvPr id="27" name="Text 25"/>
           <p:cNvSpPr txBox="1"/>
           <p:nvPr/>
         </p:nvSpPr>
@@ -5235,7 +5439,7 @@
       </p:sp>
       <p:sp>
         <p:nvSpPr>
-          <p:cNvPr id="26" name="Text 24"/>
+          <p:cNvPr id="28" name="Text 26"/>
           <p:cNvSpPr txBox="1"/>
           <p:nvPr/>
         </p:nvSpPr>
@@ -5279,7 +5483,7 @@
       </p:sp>
       <p:sp>
         <p:nvSpPr>
-          <p:cNvPr id="27" name="Shape 25"/>
+          <p:cNvPr id="29" name="Shape 27"/>
           <p:cNvSpPr/>
           <p:nvPr/>
         </p:nvSpPr>
@@ -5318,7 +5522,7 @@
       </p:sp>
       <p:sp>
         <p:nvSpPr>
-          <p:cNvPr id="28" name="Shape 26"/>
+          <p:cNvPr id="30" name="Shape 28"/>
           <p:cNvSpPr/>
           <p:nvPr/>
         </p:nvSpPr>
@@ -5345,7 +5549,7 @@
       </p:sp>
       <p:sp>
         <p:nvSpPr>
-          <p:cNvPr id="29" name="Shape 27"/>
+          <p:cNvPr id="31" name="Shape 29"/>
           <p:cNvSpPr/>
           <p:nvPr/>
         </p:nvSpPr>
@@ -5372,7 +5576,7 @@
       </p:sp>
       <p:sp>
         <p:nvSpPr>
-          <p:cNvPr id="30" name="Text 28"/>
+          <p:cNvPr id="32" name="Text 30"/>
           <p:cNvSpPr txBox="1"/>
           <p:nvPr/>
         </p:nvSpPr>
@@ -5416,7 +5620,7 @@
       </p:sp>
       <p:sp>
         <p:nvSpPr>
-          <p:cNvPr id="31" name="Text 29"/>
+          <p:cNvPr id="33" name="Text 31"/>
           <p:cNvSpPr txBox="1"/>
           <p:nvPr/>
         </p:nvSpPr>
@@ -5460,7 +5664,7 @@
       </p:sp>
       <p:sp>
         <p:nvSpPr>
-          <p:cNvPr id="32" name="Shape 30"/>
+          <p:cNvPr id="34" name="Shape 32"/>
           <p:cNvSpPr/>
           <p:nvPr/>
         </p:nvSpPr>
@@ -5499,7 +5703,7 @@
       </p:sp>
       <p:sp>
         <p:nvSpPr>
-          <p:cNvPr id="33" name="Shape 31"/>
+          <p:cNvPr id="35" name="Shape 33"/>
           <p:cNvSpPr/>
           <p:nvPr/>
         </p:nvSpPr>
@@ -5526,7 +5730,7 @@
       </p:sp>
       <p:sp>
         <p:nvSpPr>
-          <p:cNvPr id="34" name="Shape 32"/>
+          <p:cNvPr id="36" name="Shape 34"/>
           <p:cNvSpPr/>
           <p:nvPr/>
         </p:nvSpPr>
@@ -5553,7 +5757,7 @@
       </p:sp>
       <p:sp>
         <p:nvSpPr>
-          <p:cNvPr id="35" name="Text 33"/>
+          <p:cNvPr id="37" name="Text 35"/>
           <p:cNvSpPr txBox="1"/>
           <p:nvPr/>
         </p:nvSpPr>
@@ -5597,7 +5801,7 @@
       </p:sp>
       <p:sp>
         <p:nvSpPr>
-          <p:cNvPr id="36" name="Text 34"/>
+          <p:cNvPr id="38" name="Text 36"/>
           <p:cNvSpPr txBox="1"/>
           <p:nvPr/>
         </p:nvSpPr>
@@ -5641,7 +5845,7 @@
       </p:sp>
       <p:sp>
         <p:nvSpPr>
-          <p:cNvPr id="37" name="Shape 35"/>
+          <p:cNvPr id="39" name="Shape 37"/>
           <p:cNvSpPr/>
           <p:nvPr/>
         </p:nvSpPr>
@@ -5680,7 +5884,7 @@
       </p:sp>
       <p:sp>
         <p:nvSpPr>
-          <p:cNvPr id="38" name="Shape 36"/>
+          <p:cNvPr id="40" name="Shape 38"/>
           <p:cNvSpPr/>
           <p:nvPr/>
         </p:nvSpPr>
@@ -5707,7 +5911,7 @@
       </p:sp>
       <p:sp>
         <p:nvSpPr>
-          <p:cNvPr id="39" name="Shape 37"/>
+          <p:cNvPr id="41" name="Shape 39"/>
           <p:cNvSpPr/>
           <p:nvPr/>
         </p:nvSpPr>
@@ -5734,7 +5938,7 @@
       </p:sp>
       <p:sp>
         <p:nvSpPr>
-          <p:cNvPr id="40" name="Text 38"/>
+          <p:cNvPr id="42" name="Text 40"/>
           <p:cNvSpPr txBox="1"/>
           <p:nvPr/>
         </p:nvSpPr>
@@ -5778,7 +5982,7 @@
       </p:sp>
       <p:sp>
         <p:nvSpPr>
-          <p:cNvPr id="41" name="Text 39"/>
+          <p:cNvPr id="43" name="Text 41"/>
           <p:cNvSpPr txBox="1"/>
           <p:nvPr/>
         </p:nvSpPr>
@@ -5822,7 +6026,7 @@
       </p:sp>
       <p:sp>
         <p:nvSpPr>
-          <p:cNvPr id="42" name="Shape 40"/>
+          <p:cNvPr id="44" name="Shape 42"/>
           <p:cNvSpPr/>
           <p:nvPr/>
         </p:nvSpPr>
@@ -5861,7 +6065,7 @@
       </p:sp>
       <p:sp>
         <p:nvSpPr>
-          <p:cNvPr id="43" name="Shape 41"/>
+          <p:cNvPr id="45" name="Shape 43"/>
           <p:cNvSpPr/>
           <p:nvPr/>
         </p:nvSpPr>
@@ -5888,7 +6092,7 @@
       </p:sp>
       <p:sp>
         <p:nvSpPr>
-          <p:cNvPr id="44" name="Shape 42"/>
+          <p:cNvPr id="46" name="Shape 44"/>
           <p:cNvSpPr/>
           <p:nvPr/>
         </p:nvSpPr>
@@ -5915,7 +6119,7 @@
       </p:sp>
       <p:sp>
         <p:nvSpPr>
-          <p:cNvPr id="45" name="Text 43"/>
+          <p:cNvPr id="47" name="Text 45"/>
           <p:cNvSpPr txBox="1"/>
           <p:nvPr/>
         </p:nvSpPr>
@@ -5959,7 +6163,7 @@
       </p:sp>
       <p:sp>
         <p:nvSpPr>
-          <p:cNvPr id="46" name="Text 44"/>
+          <p:cNvPr id="48" name="Text 46"/>
           <p:cNvSpPr txBox="1"/>
           <p:nvPr/>
         </p:nvSpPr>
@@ -6041,6 +6245,49 @@
         </p:nvSpPr>
         <p:spPr>
           <a:xfrm>
+            <a:off x="310896" y="256032"/>
+            <a:ext cx="10893247" cy="5779008"/>
+          </a:xfrm>
+          <a:prstGeom prst="roundRect">
+            <a:avLst>
+              <a:gd name="adj" fmla="val 1899"/>
+            </a:avLst>
+          </a:prstGeom>
+          <a:solidFill>
+            <a:srgbClr val="8A4FFF">
+              <a:alpha val="26000"/>
+            </a:srgbClr>
+          </a:solidFill>
+          <a:ln w="12700">
+            <a:solidFill>
+              <a:srgbClr val="FFFFFF">
+                <a:alpha val="14000"/>
+              </a:srgbClr>
+            </a:solidFill>
+            <a:prstDash val="solid"/>
+          </a:ln>
+          <a:effectLst>
+            <a:outerShdw sx="100000" sy="100000" kx="0" ky="0" algn="bl" rotWithShape="0" blurRad="12700" dist="50800" dir="2700000">
+              <a:srgbClr val="8A4FFF">
+                <a:alpha val="10000"/>
+              </a:srgbClr>
+            </a:outerShdw>
+            <a:glow rad="63500">
+              <a:srgbClr val="8A4FFF">
+                <a:alpha val="23000"/>
+              </a:srgbClr>
+            </a:glow>
+          </a:effectLst>
+        </p:spPr>
+      </p:sp>
+      <p:sp>
+        <p:nvSpPr>
+          <p:cNvPr id="3" name="Shape 1"/>
+          <p:cNvSpPr/>
+          <p:nvPr/>
+        </p:nvSpPr>
+        <p:spPr>
+          <a:xfrm>
             <a:off x="566928" y="475488"/>
             <a:ext cx="11057839" cy="5907024"/>
           </a:xfrm>
@@ -6078,7 +6325,7 @@
       </p:sp>
       <p:sp>
         <p:nvSpPr>
-          <p:cNvPr id="3" name="Shape 1"/>
+          <p:cNvPr id="4" name="Shape 2"/>
           <p:cNvSpPr/>
           <p:nvPr/>
         </p:nvSpPr>
@@ -6107,7 +6354,7 @@
       </p:sp>
       <p:sp>
         <p:nvSpPr>
-          <p:cNvPr id="4" name="Shape 2"/>
+          <p:cNvPr id="5" name="Shape 3"/>
           <p:cNvSpPr/>
           <p:nvPr/>
         </p:nvSpPr>
@@ -6136,7 +6383,7 @@
       </p:sp>
       <p:sp>
         <p:nvSpPr>
-          <p:cNvPr id="5" name="Shape 3"/>
+          <p:cNvPr id="6" name="Shape 4"/>
           <p:cNvSpPr/>
           <p:nvPr/>
         </p:nvSpPr>
@@ -6165,7 +6412,7 @@
       </p:sp>
       <p:sp>
         <p:nvSpPr>
-          <p:cNvPr id="6" name="Shape 4"/>
+          <p:cNvPr id="7" name="Shape 5"/>
           <p:cNvSpPr/>
           <p:nvPr/>
         </p:nvSpPr>
@@ -6190,7 +6437,7 @@
       </p:sp>
       <p:sp>
         <p:nvSpPr>
-          <p:cNvPr id="7" name="Shape 5"/>
+          <p:cNvPr id="8" name="Shape 6"/>
           <p:cNvSpPr/>
           <p:nvPr/>
         </p:nvSpPr>
@@ -6215,7 +6462,32 @@
       </p:sp>
       <p:sp>
         <p:nvSpPr>
-          <p:cNvPr id="8" name="Shape 6"/>
+          <p:cNvPr id="9" name="Shape 7"/>
+          <p:cNvSpPr/>
+          <p:nvPr/>
+        </p:nvSpPr>
+        <p:spPr>
+          <a:xfrm>
+            <a:off x="9631375" y="603504"/>
+            <a:ext cx="1353312" cy="0"/>
+          </a:xfrm>
+          <a:prstGeom prst="line">
+            <a:avLst/>
+          </a:prstGeom>
+          <a:noFill/>
+          <a:ln w="12700">
+            <a:solidFill>
+              <a:srgbClr val="FFFFFF">
+                <a:alpha val="54000"/>
+              </a:srgbClr>
+            </a:solidFill>
+            <a:prstDash val="solid"/>
+          </a:ln>
+        </p:spPr>
+      </p:sp>
+      <p:sp>
+        <p:nvSpPr>
+          <p:cNvPr id="10" name="Shape 8"/>
           <p:cNvSpPr/>
           <p:nvPr/>
         </p:nvSpPr>
@@ -6242,7 +6514,7 @@
       </p:sp>
       <p:sp>
         <p:nvSpPr>
-          <p:cNvPr id="9" name="Shape 7"/>
+          <p:cNvPr id="11" name="Shape 9"/>
           <p:cNvSpPr/>
           <p:nvPr/>
         </p:nvSpPr>
@@ -6269,7 +6541,7 @@
       </p:sp>
       <p:sp>
         <p:nvSpPr>
-          <p:cNvPr id="10" name="Shape 8"/>
+          <p:cNvPr id="12" name="Shape 10"/>
           <p:cNvSpPr/>
           <p:nvPr/>
         </p:nvSpPr>
@@ -6296,7 +6568,7 @@
       </p:sp>
       <p:pic>
         <p:nvPicPr>
-          <p:cNvPr id="11" name="Image 0" descr="preencoded.png">    </p:cNvPr>
+          <p:cNvPr id="13" name="Image 0" descr="preencoded.png">    </p:cNvPr>
           <p:cNvPicPr>
             <a:picLocks noChangeAspect="1"/>
           </p:cNvPicPr>
@@ -6326,7 +6598,7 @@
       </p:pic>
       <p:sp>
         <p:nvSpPr>
-          <p:cNvPr id="12" name="Shape 9"/>
+          <p:cNvPr id="14" name="Shape 11"/>
           <p:cNvSpPr/>
           <p:nvPr/>
         </p:nvSpPr>
@@ -6367,7 +6639,7 @@
       </p:sp>
       <p:pic>
         <p:nvPicPr>
-          <p:cNvPr id="13" name="Image 1" descr="preencoded.png">    </p:cNvPr>
+          <p:cNvPr id="15" name="Image 1" descr="preencoded.png">    </p:cNvPr>
           <p:cNvPicPr>
             <a:picLocks noChangeAspect="1"/>
           </p:cNvPicPr>
@@ -6397,7 +6669,7 @@
       </p:pic>
       <p:sp>
         <p:nvSpPr>
-          <p:cNvPr id="14" name="Shape 10"/>
+          <p:cNvPr id="16" name="Shape 12"/>
           <p:cNvSpPr/>
           <p:nvPr/>
         </p:nvSpPr>
@@ -6438,7 +6710,7 @@
       </p:sp>
       <p:pic>
         <p:nvPicPr>
-          <p:cNvPr id="15" name="Image 2" descr="preencoded.png">    </p:cNvPr>
+          <p:cNvPr id="17" name="Image 2" descr="preencoded.png">    </p:cNvPr>
           <p:cNvPicPr>
             <a:picLocks noChangeAspect="1"/>
           </p:cNvPicPr>
@@ -6468,7 +6740,7 @@
       </p:pic>
       <p:sp>
         <p:nvSpPr>
-          <p:cNvPr id="16" name="Shape 11"/>
+          <p:cNvPr id="18" name="Shape 13"/>
           <p:cNvSpPr/>
           <p:nvPr/>
         </p:nvSpPr>
@@ -6509,7 +6781,7 @@
       </p:sp>
       <p:pic>
         <p:nvPicPr>
-          <p:cNvPr id="17" name="Image 3" descr="preencoded.png">    </p:cNvPr>
+          <p:cNvPr id="19" name="Image 3" descr="preencoded.png">    </p:cNvPr>
           <p:cNvPicPr>
             <a:picLocks noChangeAspect="1"/>
           </p:cNvPicPr>
@@ -6539,7 +6811,7 @@
       </p:pic>
       <p:sp>
         <p:nvSpPr>
-          <p:cNvPr id="18" name="Shape 12"/>
+          <p:cNvPr id="20" name="Shape 14"/>
           <p:cNvSpPr/>
           <p:nvPr/>
         </p:nvSpPr>
@@ -6580,7 +6852,7 @@
       </p:sp>
       <p:sp>
         <p:nvSpPr>
-          <p:cNvPr id="19" name="Shape 13"/>
+          <p:cNvPr id="21" name="Shape 15"/>
           <p:cNvSpPr/>
           <p:nvPr/>
         </p:nvSpPr>
@@ -6607,7 +6879,7 @@
       </p:sp>
       <p:sp>
         <p:nvSpPr>
-          <p:cNvPr id="20" name="Shape 14"/>
+          <p:cNvPr id="22" name="Shape 16"/>
           <p:cNvSpPr/>
           <p:nvPr/>
         </p:nvSpPr>
@@ -6634,7 +6906,7 @@
       </p:sp>
       <p:sp>
         <p:nvSpPr>
-          <p:cNvPr id="21" name="Shape 15"/>
+          <p:cNvPr id="23" name="Shape 17"/>
           <p:cNvSpPr/>
           <p:nvPr/>
         </p:nvSpPr>
@@ -6661,7 +6933,7 @@
       </p:sp>
       <p:sp>
         <p:nvSpPr>
-          <p:cNvPr id="22" name="Shape 16"/>
+          <p:cNvPr id="24" name="Shape 18"/>
           <p:cNvSpPr/>
           <p:nvPr/>
         </p:nvSpPr>
@@ -6688,7 +6960,7 @@
       </p:sp>
       <p:sp>
         <p:nvSpPr>
-          <p:cNvPr id="23" name="mdpr:1-2-e3669a:title:__title:1-2-e3669a"/>
+          <p:cNvPr id="25" name="mdpr:1-2-e3669a:title:__title:1-2-e3669a"/>
           <p:cNvSpPr txBox="1"/>
           <p:nvPr/>
         </p:nvSpPr>
@@ -6730,7 +7002,7 @@
       </p:sp>
       <p:sp>
         <p:nvSpPr>
-          <p:cNvPr id="24" name="Shape 18"/>
+          <p:cNvPr id="26" name="Shape 20"/>
           <p:cNvSpPr/>
           <p:nvPr/>
         </p:nvSpPr>
@@ -6757,7 +7029,7 @@
       </p:sp>
       <p:pic>
         <p:nvPicPr>
-          <p:cNvPr id="25" name="Image 4" descr="article icon from tabler-icons (MIT)">    </p:cNvPr>
+          <p:cNvPr id="27" name="Image 4" descr="article icon from tabler-icons (MIT)">    </p:cNvPr>
           <p:cNvPicPr>
             <a:picLocks noChangeAspect="1"/>
           </p:cNvPicPr>
@@ -6787,7 +7059,7 @@
       </p:pic>
       <p:sp>
         <p:nvSpPr>
-          <p:cNvPr id="26" name="mdpr:1-2-e3669a:item-1:block-15-chunk-1"/>
+          <p:cNvPr id="28" name="mdpr:1-2-e3669a:item-1:block-15-chunk-1"/>
           <p:cNvSpPr txBox="1"/>
           <p:nvPr/>
         </p:nvSpPr>
@@ -6846,7 +7118,7 @@
       </p:sp>
       <p:sp>
         <p:nvSpPr>
-          <p:cNvPr id="27" name="Shape 20"/>
+          <p:cNvPr id="29" name="Shape 22"/>
           <p:cNvSpPr/>
           <p:nvPr/>
         </p:nvSpPr>
@@ -6873,7 +7145,7 @@
       </p:sp>
       <p:pic>
         <p:nvPicPr>
-          <p:cNvPr id="28" name="Image 5" descr="table icon from tabler-icons (MIT)">    </p:cNvPr>
+          <p:cNvPr id="30" name="Image 5" descr="table icon from tabler-icons (MIT)">    </p:cNvPr>
           <p:cNvPicPr>
             <a:picLocks noChangeAspect="1"/>
           </p:cNvPicPr>
@@ -6903,7 +7175,7 @@
       </p:pic>
       <p:sp>
         <p:nvSpPr>
-          <p:cNvPr id="29" name="mdpr:1-2-e3669a:item-2:block-15-chunk-1"/>
+          <p:cNvPr id="31" name="mdpr:1-2-e3669a:item-2:block-15-chunk-1"/>
           <p:cNvSpPr txBox="1"/>
           <p:nvPr/>
         </p:nvSpPr>
@@ -6962,7 +7234,7 @@
       </p:sp>
       <p:sp>
         <p:nvSpPr>
-          <p:cNvPr id="30" name="Shape 22"/>
+          <p:cNvPr id="32" name="Shape 24"/>
           <p:cNvSpPr/>
           <p:nvPr/>
         </p:nvSpPr>
@@ -6989,7 +7261,7 @@
       </p:sp>
       <p:pic>
         <p:nvPicPr>
-          <p:cNvPr id="31" name="Image 6" descr="chart icon from tabler-icons (MIT)">    </p:cNvPr>
+          <p:cNvPr id="33" name="Image 6" descr="chart icon from tabler-icons (MIT)">    </p:cNvPr>
           <p:cNvPicPr>
             <a:picLocks noChangeAspect="1"/>
           </p:cNvPicPr>
@@ -7019,7 +7291,7 @@
       </p:pic>
       <p:sp>
         <p:nvSpPr>
-          <p:cNvPr id="32" name="mdpr:1-2-e3669a:item-3:block-15-chunk-1"/>
+          <p:cNvPr id="34" name="mdpr:1-2-e3669a:item-3:block-15-chunk-1"/>
           <p:cNvSpPr txBox="1"/>
           <p:nvPr/>
         </p:nvSpPr>
@@ -7078,7 +7350,7 @@
       </p:sp>
       <p:sp>
         <p:nvSpPr>
-          <p:cNvPr id="33" name="Shape 24"/>
+          <p:cNvPr id="35" name="Shape 26"/>
           <p:cNvSpPr/>
           <p:nvPr/>
         </p:nvSpPr>
@@ -7105,7 +7377,7 @@
       </p:sp>
       <p:pic>
         <p:nvPicPr>
-          <p:cNvPr id="34" name="Image 7" descr="flow icon from tabler-icons (MIT)">    </p:cNvPr>
+          <p:cNvPr id="36" name="Image 7" descr="flow icon from tabler-icons (MIT)">    </p:cNvPr>
           <p:cNvPicPr>
             <a:picLocks noChangeAspect="1"/>
           </p:cNvPicPr>
@@ -7135,7 +7407,7 @@
       </p:pic>
       <p:sp>
         <p:nvSpPr>
-          <p:cNvPr id="35" name="mdpr:1-2-e3669a:item-4:block-15-chunk-1"/>
+          <p:cNvPr id="37" name="mdpr:1-2-e3669a:item-4:block-15-chunk-1"/>
           <p:cNvSpPr txBox="1"/>
           <p:nvPr/>
         </p:nvSpPr>
@@ -7232,6 +7504,49 @@
         </p:nvSpPr>
         <p:spPr>
           <a:xfrm>
+            <a:off x="310896" y="256032"/>
+            <a:ext cx="10893247" cy="5779008"/>
+          </a:xfrm>
+          <a:prstGeom prst="roundRect">
+            <a:avLst>
+              <a:gd name="adj" fmla="val 1899"/>
+            </a:avLst>
+          </a:prstGeom>
+          <a:solidFill>
+            <a:srgbClr val="8A4FFF">
+              <a:alpha val="26000"/>
+            </a:srgbClr>
+          </a:solidFill>
+          <a:ln w="12700">
+            <a:solidFill>
+              <a:srgbClr val="FFFFFF">
+                <a:alpha val="14000"/>
+              </a:srgbClr>
+            </a:solidFill>
+            <a:prstDash val="solid"/>
+          </a:ln>
+          <a:effectLst>
+            <a:outerShdw sx="100000" sy="100000" kx="0" ky="0" algn="bl" rotWithShape="0" blurRad="12700" dist="50800" dir="2700000">
+              <a:srgbClr val="8A4FFF">
+                <a:alpha val="10000"/>
+              </a:srgbClr>
+            </a:outerShdw>
+            <a:glow rad="63500">
+              <a:srgbClr val="8A4FFF">
+                <a:alpha val="23000"/>
+              </a:srgbClr>
+            </a:glow>
+          </a:effectLst>
+        </p:spPr>
+      </p:sp>
+      <p:sp>
+        <p:nvSpPr>
+          <p:cNvPr id="3" name="Shape 1"/>
+          <p:cNvSpPr/>
+          <p:nvPr/>
+        </p:nvSpPr>
+        <p:spPr>
+          <a:xfrm>
             <a:off x="566928" y="475488"/>
             <a:ext cx="11057839" cy="5907024"/>
           </a:xfrm>
@@ -7269,7 +7584,7 @@
       </p:sp>
       <p:sp>
         <p:nvSpPr>
-          <p:cNvPr id="3" name="Shape 1"/>
+          <p:cNvPr id="4" name="Shape 2"/>
           <p:cNvSpPr/>
           <p:nvPr/>
         </p:nvSpPr>
@@ -7298,7 +7613,7 @@
       </p:sp>
       <p:sp>
         <p:nvSpPr>
-          <p:cNvPr id="4" name="Shape 2"/>
+          <p:cNvPr id="5" name="Shape 3"/>
           <p:cNvSpPr/>
           <p:nvPr/>
         </p:nvSpPr>
@@ -7327,7 +7642,7 @@
       </p:sp>
       <p:sp>
         <p:nvSpPr>
-          <p:cNvPr id="5" name="Shape 3"/>
+          <p:cNvPr id="6" name="Shape 4"/>
           <p:cNvSpPr/>
           <p:nvPr/>
         </p:nvSpPr>
@@ -7356,7 +7671,7 @@
       </p:sp>
       <p:sp>
         <p:nvSpPr>
-          <p:cNvPr id="6" name="Shape 4"/>
+          <p:cNvPr id="7" name="Shape 5"/>
           <p:cNvSpPr/>
           <p:nvPr/>
         </p:nvSpPr>
@@ -7381,7 +7696,7 @@
       </p:sp>
       <p:sp>
         <p:nvSpPr>
-          <p:cNvPr id="7" name="Shape 5"/>
+          <p:cNvPr id="8" name="Shape 6"/>
           <p:cNvSpPr/>
           <p:nvPr/>
         </p:nvSpPr>
@@ -7406,7 +7721,32 @@
       </p:sp>
       <p:sp>
         <p:nvSpPr>
-          <p:cNvPr id="8" name="Shape 6"/>
+          <p:cNvPr id="9" name="Shape 7"/>
+          <p:cNvSpPr/>
+          <p:nvPr/>
+        </p:nvSpPr>
+        <p:spPr>
+          <a:xfrm>
+            <a:off x="9631375" y="603504"/>
+            <a:ext cx="1353312" cy="0"/>
+          </a:xfrm>
+          <a:prstGeom prst="line">
+            <a:avLst/>
+          </a:prstGeom>
+          <a:noFill/>
+          <a:ln w="12700">
+            <a:solidFill>
+              <a:srgbClr val="FFFFFF">
+                <a:alpha val="54000"/>
+              </a:srgbClr>
+            </a:solidFill>
+            <a:prstDash val="solid"/>
+          </a:ln>
+        </p:spPr>
+      </p:sp>
+      <p:sp>
+        <p:nvSpPr>
+          <p:cNvPr id="10" name="Shape 8"/>
           <p:cNvSpPr/>
           <p:nvPr/>
         </p:nvSpPr>
@@ -7433,7 +7773,7 @@
       </p:sp>
       <p:sp>
         <p:nvSpPr>
-          <p:cNvPr id="9" name="Shape 7"/>
+          <p:cNvPr id="11" name="Shape 9"/>
           <p:cNvSpPr/>
           <p:nvPr/>
         </p:nvSpPr>
@@ -7460,7 +7800,7 @@
       </p:sp>
       <p:sp>
         <p:nvSpPr>
-          <p:cNvPr id="10" name="Shape 8"/>
+          <p:cNvPr id="12" name="Shape 10"/>
           <p:cNvSpPr/>
           <p:nvPr/>
         </p:nvSpPr>
@@ -7487,7 +7827,7 @@
       </p:sp>
       <p:sp>
         <p:nvSpPr>
-          <p:cNvPr id="11" name="Shape 9"/>
+          <p:cNvPr id="13" name="Shape 11"/>
           <p:cNvSpPr/>
           <p:nvPr/>
         </p:nvSpPr>
@@ -7514,7 +7854,7 @@
       </p:sp>
       <p:sp>
         <p:nvSpPr>
-          <p:cNvPr id="12" name="Shape 10"/>
+          <p:cNvPr id="14" name="Shape 12"/>
           <p:cNvSpPr/>
           <p:nvPr/>
         </p:nvSpPr>
@@ -7541,7 +7881,7 @@
       </p:sp>
       <p:sp>
         <p:nvSpPr>
-          <p:cNvPr id="13" name="mdpr:2-2-c23e9b:title:__title:2-2-c23e9b"/>
+          <p:cNvPr id="15" name="mdpr:2-2-c23e9b:title:__title:2-2-c23e9b"/>
           <p:cNvSpPr txBox="1"/>
           <p:nvPr/>
         </p:nvSpPr>
@@ -7583,7 +7923,7 @@
       </p:sp>
       <p:sp>
         <p:nvSpPr>
-          <p:cNvPr id="14" name="mdpr:2-2-c23e9b:left:block-15-chunk-2"/>
+          <p:cNvPr id="16" name="mdpr:2-2-c23e9b:left:block-15-chunk-2"/>
           <p:cNvSpPr txBox="1"/>
           <p:nvPr/>
         </p:nvSpPr>
@@ -7642,7 +7982,7 @@
       </p:sp>
       <p:sp>
         <p:nvSpPr>
-          <p:cNvPr id="15" name="mdpr:2-2-c23e9b:right:block-15-chunk-2"/>
+          <p:cNvPr id="17" name="mdpr:2-2-c23e9b:right:block-15-chunk-2"/>
           <p:cNvSpPr txBox="1"/>
           <p:nvPr/>
         </p:nvSpPr>
@@ -7739,6 +8079,49 @@
         </p:nvSpPr>
         <p:spPr>
           <a:xfrm>
+            <a:off x="310896" y="256032"/>
+            <a:ext cx="10893247" cy="5779008"/>
+          </a:xfrm>
+          <a:prstGeom prst="roundRect">
+            <a:avLst>
+              <a:gd name="adj" fmla="val 1899"/>
+            </a:avLst>
+          </a:prstGeom>
+          <a:solidFill>
+            <a:srgbClr val="8A4FFF">
+              <a:alpha val="26000"/>
+            </a:srgbClr>
+          </a:solidFill>
+          <a:ln w="12700">
+            <a:solidFill>
+              <a:srgbClr val="FFFFFF">
+                <a:alpha val="14000"/>
+              </a:srgbClr>
+            </a:solidFill>
+            <a:prstDash val="solid"/>
+          </a:ln>
+          <a:effectLst>
+            <a:outerShdw sx="100000" sy="100000" kx="0" ky="0" algn="bl" rotWithShape="0" blurRad="12700" dist="50800" dir="2700000">
+              <a:srgbClr val="8A4FFF">
+                <a:alpha val="10000"/>
+              </a:srgbClr>
+            </a:outerShdw>
+            <a:glow rad="63500">
+              <a:srgbClr val="8A4FFF">
+                <a:alpha val="23000"/>
+              </a:srgbClr>
+            </a:glow>
+          </a:effectLst>
+        </p:spPr>
+      </p:sp>
+      <p:sp>
+        <p:nvSpPr>
+          <p:cNvPr id="3" name="Shape 1"/>
+          <p:cNvSpPr/>
+          <p:nvPr/>
+        </p:nvSpPr>
+        <p:spPr>
+          <a:xfrm>
             <a:off x="566928" y="475488"/>
             <a:ext cx="11057839" cy="5907024"/>
           </a:xfrm>
@@ -7776,7 +8159,7 @@
       </p:sp>
       <p:sp>
         <p:nvSpPr>
-          <p:cNvPr id="3" name="Shape 1"/>
+          <p:cNvPr id="4" name="Shape 2"/>
           <p:cNvSpPr/>
           <p:nvPr/>
         </p:nvSpPr>
@@ -7805,7 +8188,7 @@
       </p:sp>
       <p:sp>
         <p:nvSpPr>
-          <p:cNvPr id="4" name="Shape 2"/>
+          <p:cNvPr id="5" name="Shape 3"/>
           <p:cNvSpPr/>
           <p:nvPr/>
         </p:nvSpPr>
@@ -7834,7 +8217,7 @@
       </p:sp>
       <p:sp>
         <p:nvSpPr>
-          <p:cNvPr id="5" name="Shape 3"/>
+          <p:cNvPr id="6" name="Shape 4"/>
           <p:cNvSpPr/>
           <p:nvPr/>
         </p:nvSpPr>
@@ -7863,7 +8246,7 @@
       </p:sp>
       <p:sp>
         <p:nvSpPr>
-          <p:cNvPr id="6" name="Shape 4"/>
+          <p:cNvPr id="7" name="Shape 5"/>
           <p:cNvSpPr/>
           <p:nvPr/>
         </p:nvSpPr>
@@ -7888,7 +8271,7 @@
       </p:sp>
       <p:sp>
         <p:nvSpPr>
-          <p:cNvPr id="7" name="Shape 5"/>
+          <p:cNvPr id="8" name="Shape 6"/>
           <p:cNvSpPr/>
           <p:nvPr/>
         </p:nvSpPr>
@@ -7913,7 +8296,32 @@
       </p:sp>
       <p:sp>
         <p:nvSpPr>
-          <p:cNvPr id="8" name="Shape 6"/>
+          <p:cNvPr id="9" name="Shape 7"/>
+          <p:cNvSpPr/>
+          <p:nvPr/>
+        </p:nvSpPr>
+        <p:spPr>
+          <a:xfrm>
+            <a:off x="9631375" y="603504"/>
+            <a:ext cx="1353312" cy="0"/>
+          </a:xfrm>
+          <a:prstGeom prst="line">
+            <a:avLst/>
+          </a:prstGeom>
+          <a:noFill/>
+          <a:ln w="12700">
+            <a:solidFill>
+              <a:srgbClr val="FFFFFF">
+                <a:alpha val="54000"/>
+              </a:srgbClr>
+            </a:solidFill>
+            <a:prstDash val="solid"/>
+          </a:ln>
+        </p:spPr>
+      </p:sp>
+      <p:sp>
+        <p:nvSpPr>
+          <p:cNvPr id="10" name="Shape 8"/>
           <p:cNvSpPr/>
           <p:nvPr/>
         </p:nvSpPr>
@@ -7940,7 +8348,7 @@
       </p:sp>
       <p:sp>
         <p:nvSpPr>
-          <p:cNvPr id="9" name="Shape 7"/>
+          <p:cNvPr id="11" name="Shape 9"/>
           <p:cNvSpPr/>
           <p:nvPr/>
         </p:nvSpPr>
@@ -7967,7 +8375,7 @@
       </p:sp>
       <p:sp>
         <p:nvSpPr>
-          <p:cNvPr id="10" name="Shape 8"/>
+          <p:cNvPr id="12" name="Shape 10"/>
           <p:cNvSpPr/>
           <p:nvPr/>
         </p:nvSpPr>
@@ -7994,7 +8402,7 @@
       </p:sp>
       <p:pic>
         <p:nvPicPr>
-          <p:cNvPr id="11" name="Image 0" descr="preencoded.png">    </p:cNvPr>
+          <p:cNvPr id="13" name="Image 0" descr="preencoded.png">    </p:cNvPr>
           <p:cNvPicPr>
             <a:picLocks noChangeAspect="1"/>
           </p:cNvPicPr>
@@ -8024,7 +8432,7 @@
       </p:pic>
       <p:sp>
         <p:nvSpPr>
-          <p:cNvPr id="12" name="Shape 9"/>
+          <p:cNvPr id="14" name="Shape 11"/>
           <p:cNvSpPr/>
           <p:nvPr/>
         </p:nvSpPr>
@@ -8065,7 +8473,7 @@
       </p:sp>
       <p:sp>
         <p:nvSpPr>
-          <p:cNvPr id="13" name="mdpr:table-coherence-2f9a7b:title:__title:table-coherence-2f9a7b"/>
+          <p:cNvPr id="15" name="mdpr:table-coherence-2f9a7b:title:__title:table-coherence-2f9a7b"/>
           <p:cNvSpPr txBox="1"/>
           <p:nvPr/>
         </p:nvSpPr>
@@ -9200,6 +9608,49 @@
         </p:nvSpPr>
         <p:spPr>
           <a:xfrm>
+            <a:off x="310896" y="256032"/>
+            <a:ext cx="10893247" cy="5779008"/>
+          </a:xfrm>
+          <a:prstGeom prst="roundRect">
+            <a:avLst>
+              <a:gd name="adj" fmla="val 1899"/>
+            </a:avLst>
+          </a:prstGeom>
+          <a:solidFill>
+            <a:srgbClr val="8A4FFF">
+              <a:alpha val="26000"/>
+            </a:srgbClr>
+          </a:solidFill>
+          <a:ln w="12700">
+            <a:solidFill>
+              <a:srgbClr val="FFFFFF">
+                <a:alpha val="14000"/>
+              </a:srgbClr>
+            </a:solidFill>
+            <a:prstDash val="solid"/>
+          </a:ln>
+          <a:effectLst>
+            <a:outerShdw sx="100000" sy="100000" kx="0" ky="0" algn="bl" rotWithShape="0" blurRad="12700" dist="50800" dir="2700000">
+              <a:srgbClr val="8A4FFF">
+                <a:alpha val="10000"/>
+              </a:srgbClr>
+            </a:outerShdw>
+            <a:glow rad="63500">
+              <a:srgbClr val="8A4FFF">
+                <a:alpha val="23000"/>
+              </a:srgbClr>
+            </a:glow>
+          </a:effectLst>
+        </p:spPr>
+      </p:sp>
+      <p:sp>
+        <p:nvSpPr>
+          <p:cNvPr id="3" name="Shape 1"/>
+          <p:cNvSpPr/>
+          <p:nvPr/>
+        </p:nvSpPr>
+        <p:spPr>
+          <a:xfrm>
             <a:off x="566928" y="475488"/>
             <a:ext cx="11057839" cy="5907024"/>
           </a:xfrm>
@@ -9237,7 +9688,7 @@
       </p:sp>
       <p:sp>
         <p:nvSpPr>
-          <p:cNvPr id="3" name="Shape 1"/>
+          <p:cNvPr id="4" name="Shape 2"/>
           <p:cNvSpPr/>
           <p:nvPr/>
         </p:nvSpPr>
@@ -9266,7 +9717,7 @@
       </p:sp>
       <p:sp>
         <p:nvSpPr>
-          <p:cNvPr id="4" name="Shape 2"/>
+          <p:cNvPr id="5" name="Shape 3"/>
           <p:cNvSpPr/>
           <p:nvPr/>
         </p:nvSpPr>
@@ -9295,7 +9746,7 @@
       </p:sp>
       <p:sp>
         <p:nvSpPr>
-          <p:cNvPr id="5" name="Shape 3"/>
+          <p:cNvPr id="6" name="Shape 4"/>
           <p:cNvSpPr/>
           <p:nvPr/>
         </p:nvSpPr>
@@ -9324,7 +9775,7 @@
       </p:sp>
       <p:sp>
         <p:nvSpPr>
-          <p:cNvPr id="6" name="Shape 4"/>
+          <p:cNvPr id="7" name="Shape 5"/>
           <p:cNvSpPr/>
           <p:nvPr/>
         </p:nvSpPr>
@@ -9349,7 +9800,7 @@
       </p:sp>
       <p:sp>
         <p:nvSpPr>
-          <p:cNvPr id="7" name="Shape 5"/>
+          <p:cNvPr id="8" name="Shape 6"/>
           <p:cNvSpPr/>
           <p:nvPr/>
         </p:nvSpPr>
@@ -9374,7 +9825,32 @@
       </p:sp>
       <p:sp>
         <p:nvSpPr>
-          <p:cNvPr id="8" name="Shape 6"/>
+          <p:cNvPr id="9" name="Shape 7"/>
+          <p:cNvSpPr/>
+          <p:nvPr/>
+        </p:nvSpPr>
+        <p:spPr>
+          <a:xfrm>
+            <a:off x="9631375" y="603504"/>
+            <a:ext cx="1353312" cy="0"/>
+          </a:xfrm>
+          <a:prstGeom prst="line">
+            <a:avLst/>
+          </a:prstGeom>
+          <a:noFill/>
+          <a:ln w="12700">
+            <a:solidFill>
+              <a:srgbClr val="FFFFFF">
+                <a:alpha val="54000"/>
+              </a:srgbClr>
+            </a:solidFill>
+            <a:prstDash val="solid"/>
+          </a:ln>
+        </p:spPr>
+      </p:sp>
+      <p:sp>
+        <p:nvSpPr>
+          <p:cNvPr id="10" name="Shape 8"/>
           <p:cNvSpPr/>
           <p:nvPr/>
         </p:nvSpPr>
@@ -9401,7 +9877,7 @@
       </p:sp>
       <p:sp>
         <p:nvSpPr>
-          <p:cNvPr id="9" name="Shape 7"/>
+          <p:cNvPr id="11" name="Shape 9"/>
           <p:cNvSpPr/>
           <p:nvPr/>
         </p:nvSpPr>
@@ -9428,7 +9904,7 @@
       </p:sp>
       <p:sp>
         <p:nvSpPr>
-          <p:cNvPr id="10" name="Shape 8"/>
+          <p:cNvPr id="12" name="Shape 10"/>
           <p:cNvSpPr/>
           <p:nvPr/>
         </p:nvSpPr>
@@ -9455,7 +9931,7 @@
       </p:sp>
       <p:pic>
         <p:nvPicPr>
-          <p:cNvPr id="11" name="Image 0" descr="preencoded.png">    </p:cNvPr>
+          <p:cNvPr id="13" name="Image 0" descr="preencoded.png">    </p:cNvPr>
           <p:cNvPicPr>
             <a:picLocks noChangeAspect="1"/>
           </p:cNvPicPr>
@@ -9485,7 +9961,7 @@
       </p:pic>
       <p:sp>
         <p:nvSpPr>
-          <p:cNvPr id="12" name="Shape 9"/>
+          <p:cNvPr id="14" name="Shape 11"/>
           <p:cNvSpPr/>
           <p:nvPr/>
         </p:nvSpPr>
@@ -9526,7 +10002,7 @@
       </p:sp>
       <p:sp>
         <p:nvSpPr>
-          <p:cNvPr id="13" name="Shape 10"/>
+          <p:cNvPr id="15" name="Shape 12"/>
           <p:cNvSpPr/>
           <p:nvPr/>
         </p:nvSpPr>
@@ -9553,7 +10029,7 @@
       </p:sp>
       <p:sp>
         <p:nvSpPr>
-          <p:cNvPr id="14" name="mdpr:1-2-2ff3f0:title:__title:1-2-2ff3f0"/>
+          <p:cNvPr id="16" name="mdpr:1-2-2ff3f0:title:__title:1-2-2ff3f0"/>
           <p:cNvSpPr txBox="1"/>
           <p:nvPr/>
         </p:nvSpPr>
@@ -9595,7 +10071,7 @@
       </p:sp>
       <p:sp>
         <p:nvSpPr>
-          <p:cNvPr id="15" name="mdpr:1-2-2ff3f0:body:block-19"/>
+          <p:cNvPr id="17" name="mdpr:1-2-2ff3f0:body:block-19"/>
           <p:cNvSpPr txBox="1"/>
           <p:nvPr/>
         </p:nvSpPr>
@@ -9734,7 +10210,7 @@
       </p:sp>
       <p:graphicFrame>
         <p:nvGraphicFramePr>
-          <p:cNvPr id="16" name="Chart 0" descr=""/>
+          <p:cNvPr id="18" name="Chart 0" descr=""/>
           <p:cNvGraphicFramePr/>
           <p:nvPr/>
         </p:nvGraphicFramePr>
@@ -9788,6 +10264,49 @@
         </p:nvSpPr>
         <p:spPr>
           <a:xfrm>
+            <a:off x="310896" y="256032"/>
+            <a:ext cx="10893247" cy="5779008"/>
+          </a:xfrm>
+          <a:prstGeom prst="roundRect">
+            <a:avLst>
+              <a:gd name="adj" fmla="val 1899"/>
+            </a:avLst>
+          </a:prstGeom>
+          <a:solidFill>
+            <a:srgbClr val="8A4FFF">
+              <a:alpha val="26000"/>
+            </a:srgbClr>
+          </a:solidFill>
+          <a:ln w="12700">
+            <a:solidFill>
+              <a:srgbClr val="FFFFFF">
+                <a:alpha val="14000"/>
+              </a:srgbClr>
+            </a:solidFill>
+            <a:prstDash val="solid"/>
+          </a:ln>
+          <a:effectLst>
+            <a:outerShdw sx="100000" sy="100000" kx="0" ky="0" algn="bl" rotWithShape="0" blurRad="12700" dist="50800" dir="2700000">
+              <a:srgbClr val="8A4FFF">
+                <a:alpha val="10000"/>
+              </a:srgbClr>
+            </a:outerShdw>
+            <a:glow rad="63500">
+              <a:srgbClr val="8A4FFF">
+                <a:alpha val="23000"/>
+              </a:srgbClr>
+            </a:glow>
+          </a:effectLst>
+        </p:spPr>
+      </p:sp>
+      <p:sp>
+        <p:nvSpPr>
+          <p:cNvPr id="3" name="Shape 1"/>
+          <p:cNvSpPr/>
+          <p:nvPr/>
+        </p:nvSpPr>
+        <p:spPr>
+          <a:xfrm>
             <a:off x="566928" y="475488"/>
             <a:ext cx="11057839" cy="5907024"/>
           </a:xfrm>
@@ -9825,7 +10344,7 @@
       </p:sp>
       <p:sp>
         <p:nvSpPr>
-          <p:cNvPr id="3" name="Shape 1"/>
+          <p:cNvPr id="4" name="Shape 2"/>
           <p:cNvSpPr/>
           <p:nvPr/>
         </p:nvSpPr>
@@ -9854,7 +10373,7 @@
       </p:sp>
       <p:sp>
         <p:nvSpPr>
-          <p:cNvPr id="4" name="Shape 2"/>
+          <p:cNvPr id="5" name="Shape 3"/>
           <p:cNvSpPr/>
           <p:nvPr/>
         </p:nvSpPr>
@@ -9883,7 +10402,7 @@
       </p:sp>
       <p:sp>
         <p:nvSpPr>
-          <p:cNvPr id="5" name="Shape 3"/>
+          <p:cNvPr id="6" name="Shape 4"/>
           <p:cNvSpPr/>
           <p:nvPr/>
         </p:nvSpPr>
@@ -9912,7 +10431,7 @@
       </p:sp>
       <p:sp>
         <p:nvSpPr>
-          <p:cNvPr id="6" name="Shape 4"/>
+          <p:cNvPr id="7" name="Shape 5"/>
           <p:cNvSpPr/>
           <p:nvPr/>
         </p:nvSpPr>
@@ -9937,7 +10456,7 @@
       </p:sp>
       <p:sp>
         <p:nvSpPr>
-          <p:cNvPr id="7" name="Shape 5"/>
+          <p:cNvPr id="8" name="Shape 6"/>
           <p:cNvSpPr/>
           <p:nvPr/>
         </p:nvSpPr>
@@ -9962,7 +10481,32 @@
       </p:sp>
       <p:sp>
         <p:nvSpPr>
-          <p:cNvPr id="8" name="Shape 6"/>
+          <p:cNvPr id="9" name="Shape 7"/>
+          <p:cNvSpPr/>
+          <p:nvPr/>
+        </p:nvSpPr>
+        <p:spPr>
+          <a:xfrm>
+            <a:off x="9631375" y="603504"/>
+            <a:ext cx="1353312" cy="0"/>
+          </a:xfrm>
+          <a:prstGeom prst="line">
+            <a:avLst/>
+          </a:prstGeom>
+          <a:noFill/>
+          <a:ln w="12700">
+            <a:solidFill>
+              <a:srgbClr val="FFFFFF">
+                <a:alpha val="54000"/>
+              </a:srgbClr>
+            </a:solidFill>
+            <a:prstDash val="solid"/>
+          </a:ln>
+        </p:spPr>
+      </p:sp>
+      <p:sp>
+        <p:nvSpPr>
+          <p:cNvPr id="10" name="Shape 8"/>
           <p:cNvSpPr/>
           <p:nvPr/>
         </p:nvSpPr>
@@ -9989,7 +10533,7 @@
       </p:sp>
       <p:sp>
         <p:nvSpPr>
-          <p:cNvPr id="9" name="Shape 7"/>
+          <p:cNvPr id="11" name="Shape 9"/>
           <p:cNvSpPr/>
           <p:nvPr/>
         </p:nvSpPr>
@@ -10016,7 +10560,7 @@
       </p:sp>
       <p:sp>
         <p:nvSpPr>
-          <p:cNvPr id="10" name="Shape 8"/>
+          <p:cNvPr id="12" name="Shape 10"/>
           <p:cNvSpPr/>
           <p:nvPr/>
         </p:nvSpPr>
@@ -10043,7 +10587,7 @@
       </p:sp>
       <p:pic>
         <p:nvPicPr>
-          <p:cNvPr id="11" name="Image 0" descr="preencoded.png">    </p:cNvPr>
+          <p:cNvPr id="13" name="Image 0" descr="preencoded.png">    </p:cNvPr>
           <p:cNvPicPr>
             <a:picLocks noChangeAspect="1"/>
           </p:cNvPicPr>
@@ -10073,7 +10617,7 @@
       </p:pic>
       <p:sp>
         <p:nvSpPr>
-          <p:cNvPr id="12" name="Shape 9"/>
+          <p:cNvPr id="14" name="Shape 11"/>
           <p:cNvSpPr/>
           <p:nvPr/>
         </p:nvSpPr>
@@ -10114,7 +10658,7 @@
       </p:sp>
       <p:sp>
         <p:nvSpPr>
-          <p:cNvPr id="13" name="mdpr:2-2-542095:title:__title:2-2-542095"/>
+          <p:cNvPr id="15" name="mdpr:2-2-542095:title:__title:2-2-542095"/>
           <p:cNvSpPr txBox="1"/>
           <p:nvPr/>
         </p:nvSpPr>
@@ -11037,6 +11581,49 @@
         </p:nvSpPr>
         <p:spPr>
           <a:xfrm>
+            <a:off x="310896" y="256032"/>
+            <a:ext cx="10893247" cy="5779008"/>
+          </a:xfrm>
+          <a:prstGeom prst="roundRect">
+            <a:avLst>
+              <a:gd name="adj" fmla="val 1899"/>
+            </a:avLst>
+          </a:prstGeom>
+          <a:solidFill>
+            <a:srgbClr val="8A4FFF">
+              <a:alpha val="26000"/>
+            </a:srgbClr>
+          </a:solidFill>
+          <a:ln w="12700">
+            <a:solidFill>
+              <a:srgbClr val="FFFFFF">
+                <a:alpha val="14000"/>
+              </a:srgbClr>
+            </a:solidFill>
+            <a:prstDash val="solid"/>
+          </a:ln>
+          <a:effectLst>
+            <a:outerShdw sx="100000" sy="100000" kx="0" ky="0" algn="bl" rotWithShape="0" blurRad="12700" dist="50800" dir="2700000">
+              <a:srgbClr val="8A4FFF">
+                <a:alpha val="10000"/>
+              </a:srgbClr>
+            </a:outerShdw>
+            <a:glow rad="63500">
+              <a:srgbClr val="8A4FFF">
+                <a:alpha val="23000"/>
+              </a:srgbClr>
+            </a:glow>
+          </a:effectLst>
+        </p:spPr>
+      </p:sp>
+      <p:sp>
+        <p:nvSpPr>
+          <p:cNvPr id="3" name="Shape 1"/>
+          <p:cNvSpPr/>
+          <p:nvPr/>
+        </p:nvSpPr>
+        <p:spPr>
+          <a:xfrm>
             <a:off x="566928" y="475488"/>
             <a:ext cx="11057839" cy="5907024"/>
           </a:xfrm>
@@ -11074,7 +11661,7 @@
       </p:sp>
       <p:sp>
         <p:nvSpPr>
-          <p:cNvPr id="3" name="Shape 1"/>
+          <p:cNvPr id="4" name="Shape 2"/>
           <p:cNvSpPr/>
           <p:nvPr/>
         </p:nvSpPr>
@@ -11103,7 +11690,7 @@
       </p:sp>
       <p:sp>
         <p:nvSpPr>
-          <p:cNvPr id="4" name="Shape 2"/>
+          <p:cNvPr id="5" name="Shape 3"/>
           <p:cNvSpPr/>
           <p:nvPr/>
         </p:nvSpPr>
@@ -11132,7 +11719,7 @@
       </p:sp>
       <p:sp>
         <p:nvSpPr>
-          <p:cNvPr id="5" name="Shape 3"/>
+          <p:cNvPr id="6" name="Shape 4"/>
           <p:cNvSpPr/>
           <p:nvPr/>
         </p:nvSpPr>
@@ -11161,7 +11748,7 @@
       </p:sp>
       <p:sp>
         <p:nvSpPr>
-          <p:cNvPr id="6" name="Shape 4"/>
+          <p:cNvPr id="7" name="Shape 5"/>
           <p:cNvSpPr/>
           <p:nvPr/>
         </p:nvSpPr>
@@ -11186,7 +11773,7 @@
       </p:sp>
       <p:sp>
         <p:nvSpPr>
-          <p:cNvPr id="7" name="Shape 5"/>
+          <p:cNvPr id="8" name="Shape 6"/>
           <p:cNvSpPr/>
           <p:nvPr/>
         </p:nvSpPr>
@@ -11211,7 +11798,32 @@
       </p:sp>
       <p:sp>
         <p:nvSpPr>
-          <p:cNvPr id="8" name="Shape 6"/>
+          <p:cNvPr id="9" name="Shape 7"/>
+          <p:cNvSpPr/>
+          <p:nvPr/>
+        </p:nvSpPr>
+        <p:spPr>
+          <a:xfrm>
+            <a:off x="9631375" y="603504"/>
+            <a:ext cx="1353312" cy="0"/>
+          </a:xfrm>
+          <a:prstGeom prst="line">
+            <a:avLst/>
+          </a:prstGeom>
+          <a:noFill/>
+          <a:ln w="12700">
+            <a:solidFill>
+              <a:srgbClr val="FFFFFF">
+                <a:alpha val="54000"/>
+              </a:srgbClr>
+            </a:solidFill>
+            <a:prstDash val="solid"/>
+          </a:ln>
+        </p:spPr>
+      </p:sp>
+      <p:sp>
+        <p:nvSpPr>
+          <p:cNvPr id="10" name="Shape 8"/>
           <p:cNvSpPr/>
           <p:nvPr/>
         </p:nvSpPr>
@@ -11238,7 +11850,7 @@
       </p:sp>
       <p:sp>
         <p:nvSpPr>
-          <p:cNvPr id="9" name="Shape 7"/>
+          <p:cNvPr id="11" name="Shape 9"/>
           <p:cNvSpPr/>
           <p:nvPr/>
         </p:nvSpPr>
@@ -11265,7 +11877,7 @@
       </p:sp>
       <p:sp>
         <p:nvSpPr>
-          <p:cNvPr id="10" name="Shape 8"/>
+          <p:cNvPr id="12" name="Shape 10"/>
           <p:cNvSpPr/>
           <p:nvPr/>
         </p:nvSpPr>
@@ -11292,7 +11904,7 @@
       </p:sp>
       <p:pic>
         <p:nvPicPr>
-          <p:cNvPr id="11" name="Image 0" descr="preencoded.png">    </p:cNvPr>
+          <p:cNvPr id="13" name="Image 0" descr="preencoded.png">    </p:cNvPr>
           <p:cNvPicPr>
             <a:picLocks noChangeAspect="1"/>
           </p:cNvPicPr>
@@ -11322,7 +11934,7 @@
       </p:pic>
       <p:sp>
         <p:nvSpPr>
-          <p:cNvPr id="12" name="Shape 9"/>
+          <p:cNvPr id="14" name="Shape 11"/>
           <p:cNvSpPr/>
           <p:nvPr/>
         </p:nvSpPr>
@@ -11363,7 +11975,7 @@
       </p:sp>
       <p:sp>
         <p:nvSpPr>
-          <p:cNvPr id="13" name="mdpr:1-2-b8955f:title:__title:1-2-b8955f"/>
+          <p:cNvPr id="15" name="mdpr:1-2-b8955f:title:__title:1-2-b8955f"/>
           <p:cNvSpPr txBox="1"/>
           <p:nvPr/>
         </p:nvSpPr>
@@ -11405,7 +12017,7 @@
       </p:sp>
       <p:sp>
         <p:nvSpPr>
-          <p:cNvPr id="14" name="Shape 11"/>
+          <p:cNvPr id="16" name="Shape 13"/>
           <p:cNvSpPr/>
           <p:nvPr/>
         </p:nvSpPr>
@@ -11438,7 +12050,7 @@
       </p:sp>
       <p:sp>
         <p:nvSpPr>
-          <p:cNvPr id="15" name="Shape 12"/>
+          <p:cNvPr id="17" name="Shape 14"/>
           <p:cNvSpPr/>
           <p:nvPr/>
         </p:nvSpPr>
@@ -11469,7 +12081,7 @@
       </p:sp>
       <p:sp>
         <p:nvSpPr>
-          <p:cNvPr id="16" name="Shape 13"/>
+          <p:cNvPr id="18" name="Shape 15"/>
           <p:cNvSpPr/>
           <p:nvPr/>
         </p:nvSpPr>
@@ -11500,7 +12112,7 @@
       </p:sp>
       <p:sp>
         <p:nvSpPr>
-          <p:cNvPr id="17" name="Shape 14"/>
+          <p:cNvPr id="19" name="Shape 16"/>
           <p:cNvSpPr/>
           <p:nvPr/>
         </p:nvSpPr>
@@ -11525,7 +12137,7 @@
       </p:sp>
       <p:sp>
         <p:nvSpPr>
-          <p:cNvPr id="18" name="Shape 15"/>
+          <p:cNvPr id="20" name="Shape 17"/>
           <p:cNvSpPr/>
           <p:nvPr/>
         </p:nvSpPr>
@@ -11552,7 +12164,7 @@
       </p:sp>
       <p:sp>
         <p:nvSpPr>
-          <p:cNvPr id="19" name="Text 16"/>
+          <p:cNvPr id="21" name="Text 18"/>
           <p:cNvSpPr txBox="1"/>
           <p:nvPr/>
         </p:nvSpPr>
@@ -11596,7 +12208,7 @@
       </p:sp>
       <p:sp>
         <p:nvSpPr>
-          <p:cNvPr id="20" name="Text 17"/>
+          <p:cNvPr id="22" name="Text 19"/>
           <p:cNvSpPr txBox="1"/>
           <p:nvPr/>
         </p:nvSpPr>
@@ -11638,7 +12250,7 @@
       </p:sp>
       <p:sp>
         <p:nvSpPr>
-          <p:cNvPr id="21" name="Shape 18"/>
+          <p:cNvPr id="23" name="Shape 20"/>
           <p:cNvSpPr/>
           <p:nvPr/>
         </p:nvSpPr>
@@ -11665,7 +12277,7 @@
       </p:sp>
       <p:sp>
         <p:nvSpPr>
-          <p:cNvPr id="22" name="Text 19"/>
+          <p:cNvPr id="24" name="Text 21"/>
           <p:cNvSpPr txBox="1"/>
           <p:nvPr/>
         </p:nvSpPr>
@@ -11709,7 +12321,7 @@
       </p:sp>
       <p:sp>
         <p:nvSpPr>
-          <p:cNvPr id="23" name="Shape 20"/>
+          <p:cNvPr id="25" name="Shape 22"/>
           <p:cNvSpPr/>
           <p:nvPr/>
         </p:nvSpPr>
@@ -11736,7 +12348,7 @@
       </p:sp>
       <p:sp>
         <p:nvSpPr>
-          <p:cNvPr id="24" name="Text 21"/>
+          <p:cNvPr id="26" name="Text 23"/>
           <p:cNvSpPr txBox="1"/>
           <p:nvPr/>
         </p:nvSpPr>
@@ -11780,7 +12392,7 @@
       </p:sp>
       <p:sp>
         <p:nvSpPr>
-          <p:cNvPr id="25" name="Shape 22"/>
+          <p:cNvPr id="27" name="Shape 24"/>
           <p:cNvSpPr/>
           <p:nvPr/>
         </p:nvSpPr>
@@ -11811,7 +12423,7 @@
       </p:sp>
       <p:sp>
         <p:nvSpPr>
-          <p:cNvPr id="26" name="Shape 23"/>
+          <p:cNvPr id="28" name="Shape 25"/>
           <p:cNvSpPr/>
           <p:nvPr/>
         </p:nvSpPr>
@@ -11840,7 +12452,7 @@
       </p:sp>
       <p:sp>
         <p:nvSpPr>
-          <p:cNvPr id="27" name="Shape 24"/>
+          <p:cNvPr id="29" name="Shape 26"/>
           <p:cNvSpPr/>
           <p:nvPr/>
         </p:nvSpPr>
@@ -11863,7 +12475,7 @@
       </p:sp>
       <p:sp>
         <p:nvSpPr>
-          <p:cNvPr id="28" name="Shape 25"/>
+          <p:cNvPr id="30" name="Shape 27"/>
           <p:cNvSpPr/>
           <p:nvPr/>
         </p:nvSpPr>
@@ -11888,7 +12500,7 @@
       </p:sp>
       <p:sp>
         <p:nvSpPr>
-          <p:cNvPr id="29" name="Shape 26"/>
+          <p:cNvPr id="31" name="Shape 28"/>
           <p:cNvSpPr/>
           <p:nvPr/>
         </p:nvSpPr>
@@ -11913,7 +12525,7 @@
       </p:sp>
       <p:sp>
         <p:nvSpPr>
-          <p:cNvPr id="30" name="Shape 27"/>
+          <p:cNvPr id="32" name="Shape 29"/>
           <p:cNvSpPr/>
           <p:nvPr/>
         </p:nvSpPr>
@@ -11938,7 +12550,7 @@
       </p:sp>
       <p:sp>
         <p:nvSpPr>
-          <p:cNvPr id="31" name="Text 28"/>
+          <p:cNvPr id="33" name="Text 30"/>
           <p:cNvSpPr txBox="1"/>
           <p:nvPr/>
         </p:nvSpPr>
@@ -11982,7 +12594,7 @@
       </p:sp>
       <p:sp>
         <p:nvSpPr>
-          <p:cNvPr id="32" name="Text 29"/>
+          <p:cNvPr id="34" name="Text 31"/>
           <p:cNvSpPr txBox="1"/>
           <p:nvPr/>
         </p:nvSpPr>
@@ -12024,7 +12636,7 @@
       </p:sp>
       <p:sp>
         <p:nvSpPr>
-          <p:cNvPr id="33" name="Text 30"/>
+          <p:cNvPr id="35" name="Text 32"/>
           <p:cNvSpPr txBox="1"/>
           <p:nvPr/>
         </p:nvSpPr>
@@ -12066,7 +12678,7 @@
       </p:sp>
       <p:sp>
         <p:nvSpPr>
-          <p:cNvPr id="34" name="Text 31"/>
+          <p:cNvPr id="36" name="Text 33"/>
           <p:cNvSpPr txBox="1"/>
           <p:nvPr/>
         </p:nvSpPr>
@@ -12146,6 +12758,49 @@
         </p:nvSpPr>
         <p:spPr>
           <a:xfrm>
+            <a:off x="310896" y="256032"/>
+            <a:ext cx="10893247" cy="5779008"/>
+          </a:xfrm>
+          <a:prstGeom prst="roundRect">
+            <a:avLst>
+              <a:gd name="adj" fmla="val 1899"/>
+            </a:avLst>
+          </a:prstGeom>
+          <a:solidFill>
+            <a:srgbClr val="8A4FFF">
+              <a:alpha val="26000"/>
+            </a:srgbClr>
+          </a:solidFill>
+          <a:ln w="12700">
+            <a:solidFill>
+              <a:srgbClr val="FFFFFF">
+                <a:alpha val="14000"/>
+              </a:srgbClr>
+            </a:solidFill>
+            <a:prstDash val="solid"/>
+          </a:ln>
+          <a:effectLst>
+            <a:outerShdw sx="100000" sy="100000" kx="0" ky="0" algn="bl" rotWithShape="0" blurRad="12700" dist="50800" dir="2700000">
+              <a:srgbClr val="8A4FFF">
+                <a:alpha val="10000"/>
+              </a:srgbClr>
+            </a:outerShdw>
+            <a:glow rad="63500">
+              <a:srgbClr val="8A4FFF">
+                <a:alpha val="23000"/>
+              </a:srgbClr>
+            </a:glow>
+          </a:effectLst>
+        </p:spPr>
+      </p:sp>
+      <p:sp>
+        <p:nvSpPr>
+          <p:cNvPr id="3" name="Shape 1"/>
+          <p:cNvSpPr/>
+          <p:nvPr/>
+        </p:nvSpPr>
+        <p:spPr>
+          <a:xfrm>
             <a:off x="566928" y="475488"/>
             <a:ext cx="11057839" cy="5907024"/>
           </a:xfrm>
@@ -12183,7 +12838,7 @@
       </p:sp>
       <p:sp>
         <p:nvSpPr>
-          <p:cNvPr id="3" name="Shape 1"/>
+          <p:cNvPr id="4" name="Shape 2"/>
           <p:cNvSpPr/>
           <p:nvPr/>
         </p:nvSpPr>
@@ -12212,7 +12867,7 @@
       </p:sp>
       <p:sp>
         <p:nvSpPr>
-          <p:cNvPr id="4" name="Shape 2"/>
+          <p:cNvPr id="5" name="Shape 3"/>
           <p:cNvSpPr/>
           <p:nvPr/>
         </p:nvSpPr>
@@ -12241,7 +12896,7 @@
       </p:sp>
       <p:sp>
         <p:nvSpPr>
-          <p:cNvPr id="5" name="Shape 3"/>
+          <p:cNvPr id="6" name="Shape 4"/>
           <p:cNvSpPr/>
           <p:nvPr/>
         </p:nvSpPr>
@@ -12270,7 +12925,7 @@
       </p:sp>
       <p:sp>
         <p:nvSpPr>
-          <p:cNvPr id="6" name="Shape 4"/>
+          <p:cNvPr id="7" name="Shape 5"/>
           <p:cNvSpPr/>
           <p:nvPr/>
         </p:nvSpPr>
@@ -12295,7 +12950,7 @@
       </p:sp>
       <p:sp>
         <p:nvSpPr>
-          <p:cNvPr id="7" name="Shape 5"/>
+          <p:cNvPr id="8" name="Shape 6"/>
           <p:cNvSpPr/>
           <p:nvPr/>
         </p:nvSpPr>
@@ -12320,7 +12975,32 @@
       </p:sp>
       <p:sp>
         <p:nvSpPr>
-          <p:cNvPr id="8" name="Shape 6"/>
+          <p:cNvPr id="9" name="Shape 7"/>
+          <p:cNvSpPr/>
+          <p:nvPr/>
+        </p:nvSpPr>
+        <p:spPr>
+          <a:xfrm>
+            <a:off x="9631375" y="603504"/>
+            <a:ext cx="1353312" cy="0"/>
+          </a:xfrm>
+          <a:prstGeom prst="line">
+            <a:avLst/>
+          </a:prstGeom>
+          <a:noFill/>
+          <a:ln w="12700">
+            <a:solidFill>
+              <a:srgbClr val="FFFFFF">
+                <a:alpha val="54000"/>
+              </a:srgbClr>
+            </a:solidFill>
+            <a:prstDash val="solid"/>
+          </a:ln>
+        </p:spPr>
+      </p:sp>
+      <p:sp>
+        <p:nvSpPr>
+          <p:cNvPr id="10" name="Shape 8"/>
           <p:cNvSpPr/>
           <p:nvPr/>
         </p:nvSpPr>
@@ -12347,7 +13027,7 @@
       </p:sp>
       <p:sp>
         <p:nvSpPr>
-          <p:cNvPr id="9" name="Shape 7"/>
+          <p:cNvPr id="11" name="Shape 9"/>
           <p:cNvSpPr/>
           <p:nvPr/>
         </p:nvSpPr>
@@ -12374,7 +13054,7 @@
       </p:sp>
       <p:sp>
         <p:nvSpPr>
-          <p:cNvPr id="10" name="Shape 8"/>
+          <p:cNvPr id="12" name="Shape 10"/>
           <p:cNvSpPr/>
           <p:nvPr/>
         </p:nvSpPr>
@@ -12401,7 +13081,7 @@
       </p:sp>
       <p:pic>
         <p:nvPicPr>
-          <p:cNvPr id="11" name="Image 0" descr="preencoded.png">    </p:cNvPr>
+          <p:cNvPr id="13" name="Image 0" descr="preencoded.png">    </p:cNvPr>
           <p:cNvPicPr>
             <a:picLocks noChangeAspect="1"/>
           </p:cNvPicPr>
@@ -12431,7 +13111,7 @@
       </p:pic>
       <p:sp>
         <p:nvSpPr>
-          <p:cNvPr id="12" name="Shape 9"/>
+          <p:cNvPr id="14" name="Shape 11"/>
           <p:cNvSpPr/>
           <p:nvPr/>
         </p:nvSpPr>
@@ -12472,7 +13152,7 @@
       </p:sp>
       <p:sp>
         <p:nvSpPr>
-          <p:cNvPr id="13" name="mdpr:2-2-4dc4c1:title:__title:2-2-4dc4c1"/>
+          <p:cNvPr id="15" name="mdpr:2-2-4dc4c1:title:__title:2-2-4dc4c1"/>
           <p:cNvSpPr txBox="1"/>
           <p:nvPr/>
         </p:nvSpPr>
@@ -12514,7 +13194,7 @@
       </p:sp>
       <p:sp>
         <p:nvSpPr>
-          <p:cNvPr id="14" name="Shape 11"/>
+          <p:cNvPr id="16" name="Shape 13"/>
           <p:cNvSpPr/>
           <p:nvPr/>
         </p:nvSpPr>
@@ -12541,7 +13221,7 @@
       </p:sp>
       <p:sp>
         <p:nvSpPr>
-          <p:cNvPr id="15" name="Shape 12"/>
+          <p:cNvPr id="17" name="Shape 14"/>
           <p:cNvSpPr/>
           <p:nvPr/>
         </p:nvSpPr>
@@ -12568,7 +13248,7 @@
       </p:sp>
       <p:sp>
         <p:nvSpPr>
-          <p:cNvPr id="16" name="Text 13"/>
+          <p:cNvPr id="18" name="Text 15"/>
           <p:cNvSpPr txBox="1"/>
           <p:nvPr/>
         </p:nvSpPr>
@@ -12612,7 +13292,7 @@
       </p:sp>
       <p:sp>
         <p:nvSpPr>
-          <p:cNvPr id="17" name="Text 14"/>
+          <p:cNvPr id="19" name="Text 16"/>
           <p:cNvSpPr txBox="1"/>
           <p:nvPr/>
         </p:nvSpPr>
@@ -12656,7 +13336,7 @@
       </p:sp>
       <p:sp>
         <p:nvSpPr>
-          <p:cNvPr id="18" name="Shape 15"/>
+          <p:cNvPr id="20" name="Shape 17"/>
           <p:cNvSpPr/>
           <p:nvPr/>
         </p:nvSpPr>
@@ -12683,7 +13363,7 @@
       </p:sp>
       <p:sp>
         <p:nvSpPr>
-          <p:cNvPr id="19" name="Shape 16"/>
+          <p:cNvPr id="21" name="Shape 18"/>
           <p:cNvSpPr/>
           <p:nvPr/>
         </p:nvSpPr>
@@ -12710,7 +13390,7 @@
       </p:sp>
       <p:sp>
         <p:nvSpPr>
-          <p:cNvPr id="20" name="Text 17"/>
+          <p:cNvPr id="22" name="Text 19"/>
           <p:cNvSpPr txBox="1"/>
           <p:nvPr/>
         </p:nvSpPr>
@@ -12754,7 +13434,7 @@
       </p:sp>
       <p:sp>
         <p:nvSpPr>
-          <p:cNvPr id="21" name="Text 18"/>
+          <p:cNvPr id="23" name="Text 20"/>
           <p:cNvSpPr txBox="1"/>
           <p:nvPr/>
         </p:nvSpPr>
@@ -12798,7 +13478,7 @@
       </p:sp>
       <p:sp>
         <p:nvSpPr>
-          <p:cNvPr id="22" name="Shape 19"/>
+          <p:cNvPr id="24" name="Shape 21"/>
           <p:cNvSpPr/>
           <p:nvPr/>
         </p:nvSpPr>
@@ -12825,7 +13505,7 @@
       </p:sp>
       <p:sp>
         <p:nvSpPr>
-          <p:cNvPr id="23" name="Shape 20"/>
+          <p:cNvPr id="25" name="Shape 22"/>
           <p:cNvSpPr/>
           <p:nvPr/>
         </p:nvSpPr>
@@ -12852,7 +13532,7 @@
       </p:sp>
       <p:sp>
         <p:nvSpPr>
-          <p:cNvPr id="24" name="Text 21"/>
+          <p:cNvPr id="26" name="Text 23"/>
           <p:cNvSpPr txBox="1"/>
           <p:nvPr/>
         </p:nvSpPr>
@@ -12896,7 +13576,7 @@
       </p:sp>
       <p:sp>
         <p:nvSpPr>
-          <p:cNvPr id="25" name="Text 22"/>
+          <p:cNvPr id="27" name="Text 24"/>
           <p:cNvSpPr txBox="1"/>
           <p:nvPr/>
         </p:nvSpPr>
@@ -12940,7 +13620,7 @@
       </p:sp>
       <p:sp>
         <p:nvSpPr>
-          <p:cNvPr id="26" name="Shape 23"/>
+          <p:cNvPr id="28" name="Shape 25"/>
           <p:cNvSpPr/>
           <p:nvPr/>
         </p:nvSpPr>
@@ -12967,7 +13647,7 @@
       </p:sp>
       <p:sp>
         <p:nvSpPr>
-          <p:cNvPr id="27" name="Shape 24"/>
+          <p:cNvPr id="29" name="Shape 26"/>
           <p:cNvSpPr/>
           <p:nvPr/>
         </p:nvSpPr>
@@ -12994,7 +13674,7 @@
       </p:sp>
       <p:sp>
         <p:nvSpPr>
-          <p:cNvPr id="28" name="Text 25"/>
+          <p:cNvPr id="30" name="Text 27"/>
           <p:cNvSpPr txBox="1"/>
           <p:nvPr/>
         </p:nvSpPr>
@@ -13038,7 +13718,7 @@
       </p:sp>
       <p:sp>
         <p:nvSpPr>
-          <p:cNvPr id="29" name="Text 26"/>
+          <p:cNvPr id="31" name="Text 28"/>
           <p:cNvSpPr txBox="1"/>
           <p:nvPr/>
         </p:nvSpPr>
@@ -13082,7 +13762,7 @@
       </p:sp>
       <p:sp>
         <p:nvSpPr>
-          <p:cNvPr id="30" name="Shape 27"/>
+          <p:cNvPr id="32" name="Shape 29"/>
           <p:cNvSpPr/>
           <p:nvPr/>
         </p:nvSpPr>
@@ -13106,7 +13786,7 @@
       </p:sp>
       <p:sp>
         <p:nvSpPr>
-          <p:cNvPr id="31" name="Shape 28"/>
+          <p:cNvPr id="33" name="Shape 30"/>
           <p:cNvSpPr/>
           <p:nvPr/>
         </p:nvSpPr>
@@ -13130,7 +13810,7 @@
       </p:sp>
       <p:sp>
         <p:nvSpPr>
-          <p:cNvPr id="32" name="Shape 29"/>
+          <p:cNvPr id="34" name="Shape 31"/>
           <p:cNvSpPr/>
           <p:nvPr/>
         </p:nvSpPr>
@@ -13192,6 +13872,49 @@
         </p:nvSpPr>
         <p:spPr>
           <a:xfrm>
+            <a:off x="310896" y="256032"/>
+            <a:ext cx="10893247" cy="5779008"/>
+          </a:xfrm>
+          <a:prstGeom prst="roundRect">
+            <a:avLst>
+              <a:gd name="adj" fmla="val 1899"/>
+            </a:avLst>
+          </a:prstGeom>
+          <a:solidFill>
+            <a:srgbClr val="8A4FFF">
+              <a:alpha val="26000"/>
+            </a:srgbClr>
+          </a:solidFill>
+          <a:ln w="12700">
+            <a:solidFill>
+              <a:srgbClr val="FFFFFF">
+                <a:alpha val="14000"/>
+              </a:srgbClr>
+            </a:solidFill>
+            <a:prstDash val="solid"/>
+          </a:ln>
+          <a:effectLst>
+            <a:outerShdw sx="100000" sy="100000" kx="0" ky="0" algn="bl" rotWithShape="0" blurRad="12700" dist="50800" dir="2700000">
+              <a:srgbClr val="8A4FFF">
+                <a:alpha val="10000"/>
+              </a:srgbClr>
+            </a:outerShdw>
+            <a:glow rad="63500">
+              <a:srgbClr val="8A4FFF">
+                <a:alpha val="23000"/>
+              </a:srgbClr>
+            </a:glow>
+          </a:effectLst>
+        </p:spPr>
+      </p:sp>
+      <p:sp>
+        <p:nvSpPr>
+          <p:cNvPr id="3" name="Shape 1"/>
+          <p:cNvSpPr/>
+          <p:nvPr/>
+        </p:nvSpPr>
+        <p:spPr>
+          <a:xfrm>
             <a:off x="566928" y="475488"/>
             <a:ext cx="11057839" cy="5907024"/>
           </a:xfrm>
@@ -13229,7 +13952,7 @@
       </p:sp>
       <p:sp>
         <p:nvSpPr>
-          <p:cNvPr id="3" name="Shape 1"/>
+          <p:cNvPr id="4" name="Shape 2"/>
           <p:cNvSpPr/>
           <p:nvPr/>
         </p:nvSpPr>
@@ -13258,7 +13981,7 @@
       </p:sp>
       <p:sp>
         <p:nvSpPr>
-          <p:cNvPr id="4" name="Shape 2"/>
+          <p:cNvPr id="5" name="Shape 3"/>
           <p:cNvSpPr/>
           <p:nvPr/>
         </p:nvSpPr>
@@ -13287,7 +14010,7 @@
       </p:sp>
       <p:sp>
         <p:nvSpPr>
-          <p:cNvPr id="5" name="Shape 3"/>
+          <p:cNvPr id="6" name="Shape 4"/>
           <p:cNvSpPr/>
           <p:nvPr/>
         </p:nvSpPr>
@@ -13316,7 +14039,7 @@
       </p:sp>
       <p:sp>
         <p:nvSpPr>
-          <p:cNvPr id="6" name="Shape 4"/>
+          <p:cNvPr id="7" name="Shape 5"/>
           <p:cNvSpPr/>
           <p:nvPr/>
         </p:nvSpPr>
@@ -13341,7 +14064,7 @@
       </p:sp>
       <p:sp>
         <p:nvSpPr>
-          <p:cNvPr id="7" name="Shape 5"/>
+          <p:cNvPr id="8" name="Shape 6"/>
           <p:cNvSpPr/>
           <p:nvPr/>
         </p:nvSpPr>
@@ -13366,7 +14089,32 @@
       </p:sp>
       <p:sp>
         <p:nvSpPr>
-          <p:cNvPr id="8" name="Shape 6"/>
+          <p:cNvPr id="9" name="Shape 7"/>
+          <p:cNvSpPr/>
+          <p:nvPr/>
+        </p:nvSpPr>
+        <p:spPr>
+          <a:xfrm>
+            <a:off x="9631375" y="603504"/>
+            <a:ext cx="1353312" cy="0"/>
+          </a:xfrm>
+          <a:prstGeom prst="line">
+            <a:avLst/>
+          </a:prstGeom>
+          <a:noFill/>
+          <a:ln w="12700">
+            <a:solidFill>
+              <a:srgbClr val="FFFFFF">
+                <a:alpha val="54000"/>
+              </a:srgbClr>
+            </a:solidFill>
+            <a:prstDash val="solid"/>
+          </a:ln>
+        </p:spPr>
+      </p:sp>
+      <p:sp>
+        <p:nvSpPr>
+          <p:cNvPr id="10" name="Shape 8"/>
           <p:cNvSpPr/>
           <p:nvPr/>
         </p:nvSpPr>
@@ -13393,7 +14141,7 @@
       </p:sp>
       <p:sp>
         <p:nvSpPr>
-          <p:cNvPr id="9" name="Shape 7"/>
+          <p:cNvPr id="11" name="Shape 9"/>
           <p:cNvSpPr/>
           <p:nvPr/>
         </p:nvSpPr>
@@ -13420,7 +14168,7 @@
       </p:sp>
       <p:sp>
         <p:nvSpPr>
-          <p:cNvPr id="10" name="Shape 8"/>
+          <p:cNvPr id="12" name="Shape 10"/>
           <p:cNvSpPr/>
           <p:nvPr/>
         </p:nvSpPr>
@@ -13447,7 +14195,7 @@
       </p:sp>
       <p:pic>
         <p:nvPicPr>
-          <p:cNvPr id="11" name="Image 0" descr="preencoded.png">    </p:cNvPr>
+          <p:cNvPr id="13" name="Image 0" descr="preencoded.png">    </p:cNvPr>
           <p:cNvPicPr>
             <a:picLocks noChangeAspect="1"/>
           </p:cNvPicPr>
@@ -13477,7 +14225,7 @@
       </p:pic>
       <p:sp>
         <p:nvSpPr>
-          <p:cNvPr id="12" name="Shape 9"/>
+          <p:cNvPr id="14" name="Shape 11"/>
           <p:cNvSpPr/>
           <p:nvPr/>
         </p:nvSpPr>
@@ -13518,7 +14266,7 @@
       </p:sp>
       <p:pic>
         <p:nvPicPr>
-          <p:cNvPr id="13" name="Image 1" descr="preencoded.png">    </p:cNvPr>
+          <p:cNvPr id="15" name="Image 1" descr="preencoded.png">    </p:cNvPr>
           <p:cNvPicPr>
             <a:picLocks noChangeAspect="1"/>
           </p:cNvPicPr>
@@ -13548,7 +14296,7 @@
       </p:pic>
       <p:sp>
         <p:nvSpPr>
-          <p:cNvPr id="14" name="Shape 10"/>
+          <p:cNvPr id="16" name="Shape 12"/>
           <p:cNvSpPr/>
           <p:nvPr/>
         </p:nvSpPr>
@@ -13589,7 +14337,7 @@
       </p:sp>
       <p:pic>
         <p:nvPicPr>
-          <p:cNvPr id="15" name="Image 2" descr="preencoded.png">    </p:cNvPr>
+          <p:cNvPr id="17" name="Image 2" descr="preencoded.png">    </p:cNvPr>
           <p:cNvPicPr>
             <a:picLocks noChangeAspect="1"/>
           </p:cNvPicPr>
@@ -13619,7 +14367,7 @@
       </p:pic>
       <p:sp>
         <p:nvSpPr>
-          <p:cNvPr id="16" name="Shape 11"/>
+          <p:cNvPr id="18" name="Shape 13"/>
           <p:cNvSpPr/>
           <p:nvPr/>
         </p:nvSpPr>
@@ -13660,7 +14408,7 @@
       </p:sp>
       <p:sp>
         <p:nvSpPr>
-          <p:cNvPr id="17" name="Shape 12"/>
+          <p:cNvPr id="19" name="Shape 14"/>
           <p:cNvSpPr/>
           <p:nvPr/>
         </p:nvSpPr>
@@ -13689,7 +14437,7 @@
       </p:sp>
       <p:sp>
         <p:nvSpPr>
-          <p:cNvPr id="18" name="Shape 13"/>
+          <p:cNvPr id="20" name="Shape 15"/>
           <p:cNvSpPr/>
           <p:nvPr/>
         </p:nvSpPr>
@@ -13716,7 +14464,7 @@
       </p:sp>
       <p:sp>
         <p:nvSpPr>
-          <p:cNvPr id="19" name="Shape 14"/>
+          <p:cNvPr id="21" name="Shape 16"/>
           <p:cNvSpPr/>
           <p:nvPr/>
         </p:nvSpPr>
@@ -13743,7 +14491,7 @@
       </p:sp>
       <p:sp>
         <p:nvSpPr>
-          <p:cNvPr id="20" name="Shape 15"/>
+          <p:cNvPr id="22" name="Shape 17"/>
           <p:cNvSpPr/>
           <p:nvPr/>
         </p:nvSpPr>
@@ -13770,7 +14518,7 @@
       </p:sp>
       <p:sp>
         <p:nvSpPr>
-          <p:cNvPr id="21" name="mdpr:1-2-ea42c8:title:__title:1-2-ea42c8"/>
+          <p:cNvPr id="23" name="mdpr:1-2-ea42c8:title:__title:1-2-ea42c8"/>
           <p:cNvSpPr txBox="1"/>
           <p:nvPr/>
         </p:nvSpPr>
@@ -13812,7 +14560,7 @@
       </p:sp>
       <p:sp>
         <p:nvSpPr>
-          <p:cNvPr id="22" name="Shape 17"/>
+          <p:cNvPr id="24" name="Shape 19"/>
           <p:cNvSpPr/>
           <p:nvPr/>
         </p:nvSpPr>
@@ -13839,7 +14587,7 @@
       </p:sp>
       <p:pic>
         <p:nvPicPr>
-          <p:cNvPr id="23" name="Image 3" descr="article icon from tabler-icons (MIT)">    </p:cNvPr>
+          <p:cNvPr id="25" name="Image 3" descr="article icon from tabler-icons (MIT)">    </p:cNvPr>
           <p:cNvPicPr>
             <a:picLocks noChangeAspect="1"/>
           </p:cNvPicPr>
@@ -13869,7 +14617,7 @@
       </p:pic>
       <p:sp>
         <p:nvSpPr>
-          <p:cNvPr id="24" name="mdpr:1-2-ea42c8:item-1:block-27-chunk-1"/>
+          <p:cNvPr id="26" name="mdpr:1-2-ea42c8:item-1:block-27-chunk-1"/>
           <p:cNvSpPr txBox="1"/>
           <p:nvPr/>
         </p:nvSpPr>
@@ -13928,7 +14676,7 @@
       </p:sp>
       <p:sp>
         <p:nvSpPr>
-          <p:cNvPr id="25" name="Shape 19"/>
+          <p:cNvPr id="27" name="Shape 21"/>
           <p:cNvSpPr/>
           <p:nvPr/>
         </p:nvSpPr>
@@ -13955,7 +14703,7 @@
       </p:sp>
       <p:pic>
         <p:nvPicPr>
-          <p:cNvPr id="26" name="Image 4" descr="article icon from tabler-icons (MIT)">    </p:cNvPr>
+          <p:cNvPr id="28" name="Image 4" descr="article icon from tabler-icons (MIT)">    </p:cNvPr>
           <p:cNvPicPr>
             <a:picLocks noChangeAspect="1"/>
           </p:cNvPicPr>
@@ -13985,7 +14733,7 @@
       </p:pic>
       <p:sp>
         <p:nvSpPr>
-          <p:cNvPr id="27" name="mdpr:1-2-ea42c8:item-2:block-27-chunk-1"/>
+          <p:cNvPr id="29" name="mdpr:1-2-ea42c8:item-2:block-27-chunk-1"/>
           <p:cNvSpPr txBox="1"/>
           <p:nvPr/>
         </p:nvSpPr>
@@ -14044,7 +14792,7 @@
       </p:sp>
       <p:sp>
         <p:nvSpPr>
-          <p:cNvPr id="28" name="Shape 21"/>
+          <p:cNvPr id="30" name="Shape 23"/>
           <p:cNvSpPr/>
           <p:nvPr/>
         </p:nvSpPr>
@@ -14071,7 +14819,7 @@
       </p:sp>
       <p:pic>
         <p:nvPicPr>
-          <p:cNvPr id="29" name="Image 5" descr="article icon from tabler-icons (MIT)">    </p:cNvPr>
+          <p:cNvPr id="31" name="Image 5" descr="article icon from tabler-icons (MIT)">    </p:cNvPr>
           <p:cNvPicPr>
             <a:picLocks noChangeAspect="1"/>
           </p:cNvPicPr>
@@ -14101,7 +14849,7 @@
       </p:pic>
       <p:sp>
         <p:nvSpPr>
-          <p:cNvPr id="30" name="mdpr:1-2-ea42c8:item-3:block-27-chunk-1"/>
+          <p:cNvPr id="32" name="mdpr:1-2-ea42c8:item-3:block-27-chunk-1"/>
           <p:cNvSpPr txBox="1"/>
           <p:nvPr/>
         </p:nvSpPr>
@@ -14198,6 +14946,49 @@
         </p:nvSpPr>
         <p:spPr>
           <a:xfrm>
+            <a:off x="310896" y="256032"/>
+            <a:ext cx="10893247" cy="5779008"/>
+          </a:xfrm>
+          <a:prstGeom prst="roundRect">
+            <a:avLst>
+              <a:gd name="adj" fmla="val 1899"/>
+            </a:avLst>
+          </a:prstGeom>
+          <a:solidFill>
+            <a:srgbClr val="8A4FFF">
+              <a:alpha val="26000"/>
+            </a:srgbClr>
+          </a:solidFill>
+          <a:ln w="12700">
+            <a:solidFill>
+              <a:srgbClr val="FFFFFF">
+                <a:alpha val="14000"/>
+              </a:srgbClr>
+            </a:solidFill>
+            <a:prstDash val="solid"/>
+          </a:ln>
+          <a:effectLst>
+            <a:outerShdw sx="100000" sy="100000" kx="0" ky="0" algn="bl" rotWithShape="0" blurRad="12700" dist="50800" dir="2700000">
+              <a:srgbClr val="8A4FFF">
+                <a:alpha val="10000"/>
+              </a:srgbClr>
+            </a:outerShdw>
+            <a:glow rad="63500">
+              <a:srgbClr val="8A4FFF">
+                <a:alpha val="23000"/>
+              </a:srgbClr>
+            </a:glow>
+          </a:effectLst>
+        </p:spPr>
+      </p:sp>
+      <p:sp>
+        <p:nvSpPr>
+          <p:cNvPr id="3" name="Shape 1"/>
+          <p:cNvSpPr/>
+          <p:nvPr/>
+        </p:nvSpPr>
+        <p:spPr>
+          <a:xfrm>
             <a:off x="566928" y="475488"/>
             <a:ext cx="11057839" cy="5907024"/>
           </a:xfrm>
@@ -14235,7 +15026,7 @@
       </p:sp>
       <p:sp>
         <p:nvSpPr>
-          <p:cNvPr id="3" name="Shape 1"/>
+          <p:cNvPr id="4" name="Shape 2"/>
           <p:cNvSpPr/>
           <p:nvPr/>
         </p:nvSpPr>
@@ -14264,7 +15055,7 @@
       </p:sp>
       <p:sp>
         <p:nvSpPr>
-          <p:cNvPr id="4" name="Shape 2"/>
+          <p:cNvPr id="5" name="Shape 3"/>
           <p:cNvSpPr/>
           <p:nvPr/>
         </p:nvSpPr>
@@ -14293,7 +15084,7 @@
       </p:sp>
       <p:sp>
         <p:nvSpPr>
-          <p:cNvPr id="5" name="Shape 3"/>
+          <p:cNvPr id="6" name="Shape 4"/>
           <p:cNvSpPr/>
           <p:nvPr/>
         </p:nvSpPr>
@@ -14322,7 +15113,7 @@
       </p:sp>
       <p:sp>
         <p:nvSpPr>
-          <p:cNvPr id="6" name="Shape 4"/>
+          <p:cNvPr id="7" name="Shape 5"/>
           <p:cNvSpPr/>
           <p:nvPr/>
         </p:nvSpPr>
@@ -14347,7 +15138,7 @@
       </p:sp>
       <p:sp>
         <p:nvSpPr>
-          <p:cNvPr id="7" name="Shape 5"/>
+          <p:cNvPr id="8" name="Shape 6"/>
           <p:cNvSpPr/>
           <p:nvPr/>
         </p:nvSpPr>
@@ -14372,7 +15163,32 @@
       </p:sp>
       <p:sp>
         <p:nvSpPr>
-          <p:cNvPr id="8" name="Shape 6"/>
+          <p:cNvPr id="9" name="Shape 7"/>
+          <p:cNvSpPr/>
+          <p:nvPr/>
+        </p:nvSpPr>
+        <p:spPr>
+          <a:xfrm>
+            <a:off x="9631375" y="603504"/>
+            <a:ext cx="1353312" cy="0"/>
+          </a:xfrm>
+          <a:prstGeom prst="line">
+            <a:avLst/>
+          </a:prstGeom>
+          <a:noFill/>
+          <a:ln w="12700">
+            <a:solidFill>
+              <a:srgbClr val="FFFFFF">
+                <a:alpha val="54000"/>
+              </a:srgbClr>
+            </a:solidFill>
+            <a:prstDash val="solid"/>
+          </a:ln>
+        </p:spPr>
+      </p:sp>
+      <p:sp>
+        <p:nvSpPr>
+          <p:cNvPr id="10" name="Shape 8"/>
           <p:cNvSpPr/>
           <p:nvPr/>
         </p:nvSpPr>
@@ -14399,7 +15215,7 @@
       </p:sp>
       <p:sp>
         <p:nvSpPr>
-          <p:cNvPr id="9" name="Shape 7"/>
+          <p:cNvPr id="11" name="Shape 9"/>
           <p:cNvSpPr/>
           <p:nvPr/>
         </p:nvSpPr>
@@ -14426,7 +15242,7 @@
       </p:sp>
       <p:sp>
         <p:nvSpPr>
-          <p:cNvPr id="10" name="Shape 8"/>
+          <p:cNvPr id="12" name="Shape 10"/>
           <p:cNvSpPr/>
           <p:nvPr/>
         </p:nvSpPr>
@@ -14453,7 +15269,7 @@
       </p:sp>
       <p:sp>
         <p:nvSpPr>
-          <p:cNvPr id="11" name="Shape 9"/>
+          <p:cNvPr id="13" name="Shape 11"/>
           <p:cNvSpPr/>
           <p:nvPr/>
         </p:nvSpPr>
@@ -14480,7 +15296,7 @@
       </p:sp>
       <p:sp>
         <p:nvSpPr>
-          <p:cNvPr id="12" name="Shape 10"/>
+          <p:cNvPr id="14" name="Shape 12"/>
           <p:cNvSpPr/>
           <p:nvPr/>
         </p:nvSpPr>
@@ -14507,7 +15323,7 @@
       </p:sp>
       <p:sp>
         <p:nvSpPr>
-          <p:cNvPr id="13" name="Shape 11"/>
+          <p:cNvPr id="15" name="Shape 13"/>
           <p:cNvSpPr/>
           <p:nvPr/>
         </p:nvSpPr>
@@ -14536,7 +15352,7 @@
       </p:sp>
       <p:sp>
         <p:nvSpPr>
-          <p:cNvPr id="14" name="Shape 12"/>
+          <p:cNvPr id="16" name="Shape 14"/>
           <p:cNvSpPr/>
           <p:nvPr/>
         </p:nvSpPr>
@@ -14563,7 +15379,7 @@
       </p:sp>
       <p:sp>
         <p:nvSpPr>
-          <p:cNvPr id="15" name="Shape 13"/>
+          <p:cNvPr id="17" name="Shape 15"/>
           <p:cNvSpPr/>
           <p:nvPr/>
         </p:nvSpPr>
@@ -14590,7 +15406,7 @@
       </p:sp>
       <p:sp>
         <p:nvSpPr>
-          <p:cNvPr id="16" name="Shape 14"/>
+          <p:cNvPr id="18" name="Shape 16"/>
           <p:cNvSpPr/>
           <p:nvPr/>
         </p:nvSpPr>
@@ -14617,7 +15433,7 @@
       </p:sp>
       <p:sp>
         <p:nvSpPr>
-          <p:cNvPr id="17" name="Shape 15"/>
+          <p:cNvPr id="19" name="Shape 17"/>
           <p:cNvSpPr/>
           <p:nvPr/>
         </p:nvSpPr>
@@ -14644,7 +15460,7 @@
       </p:sp>
       <p:sp>
         <p:nvSpPr>
-          <p:cNvPr id="18" name="Shape 16"/>
+          <p:cNvPr id="20" name="Shape 18"/>
           <p:cNvSpPr/>
           <p:nvPr/>
         </p:nvSpPr>
@@ -14671,7 +15487,7 @@
       </p:sp>
       <p:sp>
         <p:nvSpPr>
-          <p:cNvPr id="19" name="Shape 17"/>
+          <p:cNvPr id="21" name="Shape 19"/>
           <p:cNvSpPr/>
           <p:nvPr/>
         </p:nvSpPr>
@@ -14698,7 +15514,7 @@
       </p:sp>
       <p:sp>
         <p:nvSpPr>
-          <p:cNvPr id="20" name="Shape 18"/>
+          <p:cNvPr id="22" name="Shape 20"/>
           <p:cNvSpPr/>
           <p:nvPr/>
         </p:nvSpPr>
@@ -14725,7 +15541,7 @@
       </p:sp>
       <p:sp>
         <p:nvSpPr>
-          <p:cNvPr id="21" name="Shape 19"/>
+          <p:cNvPr id="23" name="Shape 21"/>
           <p:cNvSpPr/>
           <p:nvPr/>
         </p:nvSpPr>
@@ -14752,7 +15568,7 @@
       </p:sp>
       <p:sp>
         <p:nvSpPr>
-          <p:cNvPr id="22" name="Shape 20"/>
+          <p:cNvPr id="24" name="Shape 22"/>
           <p:cNvSpPr/>
           <p:nvPr/>
         </p:nvSpPr>
@@ -14779,7 +15595,7 @@
       </p:sp>
       <p:sp>
         <p:nvSpPr>
-          <p:cNvPr id="23" name="Shape 21"/>
+          <p:cNvPr id="25" name="Shape 23"/>
           <p:cNvSpPr/>
           <p:nvPr/>
         </p:nvSpPr>
@@ -14806,7 +15622,7 @@
       </p:sp>
       <p:sp>
         <p:nvSpPr>
-          <p:cNvPr id="24" name="Shape 22"/>
+          <p:cNvPr id="26" name="Shape 24"/>
           <p:cNvSpPr/>
           <p:nvPr/>
         </p:nvSpPr>
@@ -14833,7 +15649,7 @@
       </p:sp>
       <p:sp>
         <p:nvSpPr>
-          <p:cNvPr id="25" name="Shape 23"/>
+          <p:cNvPr id="27" name="Shape 25"/>
           <p:cNvSpPr/>
           <p:nvPr/>
         </p:nvSpPr>
@@ -14860,7 +15676,7 @@
       </p:sp>
       <p:sp>
         <p:nvSpPr>
-          <p:cNvPr id="26" name="Shape 24"/>
+          <p:cNvPr id="28" name="Shape 26"/>
           <p:cNvSpPr/>
           <p:nvPr/>
         </p:nvSpPr>
@@ -14887,7 +15703,7 @@
       </p:sp>
       <p:sp>
         <p:nvSpPr>
-          <p:cNvPr id="27" name="Shape 25"/>
+          <p:cNvPr id="29" name="Shape 27"/>
           <p:cNvSpPr/>
           <p:nvPr/>
         </p:nvSpPr>
@@ -14914,7 +15730,7 @@
       </p:sp>
       <p:sp>
         <p:nvSpPr>
-          <p:cNvPr id="28" name="mdpr:1-2-0772f8:title:__title:1-2-0772f8"/>
+          <p:cNvPr id="30" name="mdpr:1-2-0772f8:title:__title:1-2-0772f8"/>
           <p:cNvSpPr txBox="1"/>
           <p:nvPr/>
         </p:nvSpPr>
@@ -14956,7 +15772,7 @@
       </p:sp>
       <p:sp>
         <p:nvSpPr>
-          <p:cNvPr id="29" name="mdpr:1-2-0772f8:toc-item-1:toc-item-1"/>
+          <p:cNvPr id="31" name="mdpr:1-2-0772f8:toc-item-1:toc-item-1"/>
           <p:cNvSpPr txBox="1"/>
           <p:nvPr/>
         </p:nvSpPr>
@@ -14998,7 +15814,7 @@
       </p:sp>
       <p:sp>
         <p:nvSpPr>
-          <p:cNvPr id="30" name="mdpr:1-2-0772f8:toc-item-2:toc-item-2"/>
+          <p:cNvPr id="32" name="mdpr:1-2-0772f8:toc-item-2:toc-item-2"/>
           <p:cNvSpPr txBox="1"/>
           <p:nvPr/>
         </p:nvSpPr>
@@ -15040,7 +15856,7 @@
       </p:sp>
       <p:sp>
         <p:nvSpPr>
-          <p:cNvPr id="31" name="mdpr:1-2-0772f8:toc-item-3:toc-item-3"/>
+          <p:cNvPr id="33" name="mdpr:1-2-0772f8:toc-item-3:toc-item-3"/>
           <p:cNvSpPr txBox="1"/>
           <p:nvPr/>
         </p:nvSpPr>
@@ -15082,7 +15898,7 @@
       </p:sp>
       <p:sp>
         <p:nvSpPr>
-          <p:cNvPr id="32" name="mdpr:1-2-0772f8:toc-item-4:toc-item-4"/>
+          <p:cNvPr id="34" name="mdpr:1-2-0772f8:toc-item-4:toc-item-4"/>
           <p:cNvSpPr txBox="1"/>
           <p:nvPr/>
         </p:nvSpPr>
@@ -15124,7 +15940,7 @@
       </p:sp>
       <p:sp>
         <p:nvSpPr>
-          <p:cNvPr id="33" name="mdpr:1-2-0772f8:toc-item-5:toc-item-5"/>
+          <p:cNvPr id="35" name="mdpr:1-2-0772f8:toc-item-5:toc-item-5"/>
           <p:cNvSpPr txBox="1"/>
           <p:nvPr/>
         </p:nvSpPr>
@@ -15166,7 +15982,7 @@
       </p:sp>
       <p:sp>
         <p:nvSpPr>
-          <p:cNvPr id="34" name="mdpr:1-2-0772f8:toc-item-6:toc-item-6"/>
+          <p:cNvPr id="36" name="mdpr:1-2-0772f8:toc-item-6:toc-item-6"/>
           <p:cNvSpPr txBox="1"/>
           <p:nvPr/>
         </p:nvSpPr>
@@ -15208,7 +16024,7 @@
       </p:sp>
       <p:sp>
         <p:nvSpPr>
-          <p:cNvPr id="35" name="mdpr:1-2-0772f8:toc-item-7:toc-item-7"/>
+          <p:cNvPr id="37" name="mdpr:1-2-0772f8:toc-item-7:toc-item-7"/>
           <p:cNvSpPr txBox="1"/>
           <p:nvPr/>
         </p:nvSpPr>
@@ -15250,7 +16066,7 @@
       </p:sp>
       <p:sp>
         <p:nvSpPr>
-          <p:cNvPr id="36" name="mdpr:1-2-0772f8:toc-item-8:toc-item-8"/>
+          <p:cNvPr id="38" name="mdpr:1-2-0772f8:toc-item-8:toc-item-8"/>
           <p:cNvSpPr txBox="1"/>
           <p:nvPr/>
         </p:nvSpPr>
@@ -15292,7 +16108,7 @@
       </p:sp>
       <p:sp>
         <p:nvSpPr>
-          <p:cNvPr id="37" name="mdpr:1-2-0772f8:toc-item-9:toc-item-9"/>
+          <p:cNvPr id="39" name="mdpr:1-2-0772f8:toc-item-9:toc-item-9"/>
           <p:cNvSpPr txBox="1"/>
           <p:nvPr/>
         </p:nvSpPr>
@@ -15334,7 +16150,7 @@
       </p:sp>
       <p:sp>
         <p:nvSpPr>
-          <p:cNvPr id="38" name="mdpr:1-2-0772f8:toc-item-10:toc-item-10"/>
+          <p:cNvPr id="40" name="mdpr:1-2-0772f8:toc-item-10:toc-item-10"/>
           <p:cNvSpPr txBox="1"/>
           <p:nvPr/>
         </p:nvSpPr>
@@ -15376,7 +16192,7 @@
       </p:sp>
       <p:sp>
         <p:nvSpPr>
-          <p:cNvPr id="39" name="mdpr:1-2-0772f8:toc-item-11:toc-item-11"/>
+          <p:cNvPr id="41" name="mdpr:1-2-0772f8:toc-item-11:toc-item-11"/>
           <p:cNvSpPr txBox="1"/>
           <p:nvPr/>
         </p:nvSpPr>
@@ -15418,7 +16234,7 @@
       </p:sp>
       <p:sp>
         <p:nvSpPr>
-          <p:cNvPr id="40" name="mdpr:1-2-0772f8:toc-item-12:toc-item-12"/>
+          <p:cNvPr id="42" name="mdpr:1-2-0772f8:toc-item-12:toc-item-12"/>
           <p:cNvSpPr txBox="1"/>
           <p:nvPr/>
         </p:nvSpPr>
@@ -15460,7 +16276,7 @@
       </p:sp>
       <p:sp>
         <p:nvSpPr>
-          <p:cNvPr id="41" name="mdpr:1-2-0772f8:toc-item-13:toc-item-13"/>
+          <p:cNvPr id="43" name="mdpr:1-2-0772f8:toc-item-13:toc-item-13"/>
           <p:cNvSpPr txBox="1"/>
           <p:nvPr/>
         </p:nvSpPr>
@@ -15502,7 +16318,7 @@
       </p:sp>
       <p:sp>
         <p:nvSpPr>
-          <p:cNvPr id="42" name="mdpr:1-2-0772f8:toc-item-14:toc-item-14"/>
+          <p:cNvPr id="44" name="mdpr:1-2-0772f8:toc-item-14:toc-item-14"/>
           <p:cNvSpPr txBox="1"/>
           <p:nvPr/>
         </p:nvSpPr>
@@ -15582,6 +16398,49 @@
         </p:nvSpPr>
         <p:spPr>
           <a:xfrm>
+            <a:off x="310896" y="256032"/>
+            <a:ext cx="10893247" cy="5779008"/>
+          </a:xfrm>
+          <a:prstGeom prst="roundRect">
+            <a:avLst>
+              <a:gd name="adj" fmla="val 1899"/>
+            </a:avLst>
+          </a:prstGeom>
+          <a:solidFill>
+            <a:srgbClr val="8A4FFF">
+              <a:alpha val="26000"/>
+            </a:srgbClr>
+          </a:solidFill>
+          <a:ln w="12700">
+            <a:solidFill>
+              <a:srgbClr val="FFFFFF">
+                <a:alpha val="14000"/>
+              </a:srgbClr>
+            </a:solidFill>
+            <a:prstDash val="solid"/>
+          </a:ln>
+          <a:effectLst>
+            <a:outerShdw sx="100000" sy="100000" kx="0" ky="0" algn="bl" rotWithShape="0" blurRad="12700" dist="50800" dir="2700000">
+              <a:srgbClr val="8A4FFF">
+                <a:alpha val="10000"/>
+              </a:srgbClr>
+            </a:outerShdw>
+            <a:glow rad="63500">
+              <a:srgbClr val="8A4FFF">
+                <a:alpha val="23000"/>
+              </a:srgbClr>
+            </a:glow>
+          </a:effectLst>
+        </p:spPr>
+      </p:sp>
+      <p:sp>
+        <p:nvSpPr>
+          <p:cNvPr id="3" name="Shape 1"/>
+          <p:cNvSpPr/>
+          <p:nvPr/>
+        </p:nvSpPr>
+        <p:spPr>
+          <a:xfrm>
             <a:off x="566928" y="475488"/>
             <a:ext cx="11057839" cy="5907024"/>
           </a:xfrm>
@@ -15619,7 +16478,7 @@
       </p:sp>
       <p:sp>
         <p:nvSpPr>
-          <p:cNvPr id="3" name="Shape 1"/>
+          <p:cNvPr id="4" name="Shape 2"/>
           <p:cNvSpPr/>
           <p:nvPr/>
         </p:nvSpPr>
@@ -15648,7 +16507,7 @@
       </p:sp>
       <p:sp>
         <p:nvSpPr>
-          <p:cNvPr id="4" name="Shape 2"/>
+          <p:cNvPr id="5" name="Shape 3"/>
           <p:cNvSpPr/>
           <p:nvPr/>
         </p:nvSpPr>
@@ -15677,7 +16536,7 @@
       </p:sp>
       <p:sp>
         <p:nvSpPr>
-          <p:cNvPr id="5" name="Shape 3"/>
+          <p:cNvPr id="6" name="Shape 4"/>
           <p:cNvSpPr/>
           <p:nvPr/>
         </p:nvSpPr>
@@ -15706,7 +16565,7 @@
       </p:sp>
       <p:sp>
         <p:nvSpPr>
-          <p:cNvPr id="6" name="Shape 4"/>
+          <p:cNvPr id="7" name="Shape 5"/>
           <p:cNvSpPr/>
           <p:nvPr/>
         </p:nvSpPr>
@@ -15731,7 +16590,7 @@
       </p:sp>
       <p:sp>
         <p:nvSpPr>
-          <p:cNvPr id="7" name="Shape 5"/>
+          <p:cNvPr id="8" name="Shape 6"/>
           <p:cNvSpPr/>
           <p:nvPr/>
         </p:nvSpPr>
@@ -15756,7 +16615,32 @@
       </p:sp>
       <p:sp>
         <p:nvSpPr>
-          <p:cNvPr id="8" name="Shape 6"/>
+          <p:cNvPr id="9" name="Shape 7"/>
+          <p:cNvSpPr/>
+          <p:nvPr/>
+        </p:nvSpPr>
+        <p:spPr>
+          <a:xfrm>
+            <a:off x="9631375" y="603504"/>
+            <a:ext cx="1353312" cy="0"/>
+          </a:xfrm>
+          <a:prstGeom prst="line">
+            <a:avLst/>
+          </a:prstGeom>
+          <a:noFill/>
+          <a:ln w="12700">
+            <a:solidFill>
+              <a:srgbClr val="FFFFFF">
+                <a:alpha val="54000"/>
+              </a:srgbClr>
+            </a:solidFill>
+            <a:prstDash val="solid"/>
+          </a:ln>
+        </p:spPr>
+      </p:sp>
+      <p:sp>
+        <p:nvSpPr>
+          <p:cNvPr id="10" name="Shape 8"/>
           <p:cNvSpPr/>
           <p:nvPr/>
         </p:nvSpPr>
@@ -15783,7 +16667,7 @@
       </p:sp>
       <p:sp>
         <p:nvSpPr>
-          <p:cNvPr id="9" name="Shape 7"/>
+          <p:cNvPr id="11" name="Shape 9"/>
           <p:cNvSpPr/>
           <p:nvPr/>
         </p:nvSpPr>
@@ -15810,7 +16694,7 @@
       </p:sp>
       <p:sp>
         <p:nvSpPr>
-          <p:cNvPr id="10" name="Shape 8"/>
+          <p:cNvPr id="12" name="Shape 10"/>
           <p:cNvSpPr/>
           <p:nvPr/>
         </p:nvSpPr>
@@ -15837,7 +16721,7 @@
       </p:sp>
       <p:sp>
         <p:nvSpPr>
-          <p:cNvPr id="11" name="Shape 9"/>
+          <p:cNvPr id="13" name="Shape 11"/>
           <p:cNvSpPr/>
           <p:nvPr/>
         </p:nvSpPr>
@@ -15864,7 +16748,7 @@
       </p:sp>
       <p:sp>
         <p:nvSpPr>
-          <p:cNvPr id="12" name="Shape 10"/>
+          <p:cNvPr id="14" name="Shape 12"/>
           <p:cNvSpPr/>
           <p:nvPr/>
         </p:nvSpPr>
@@ -15891,7 +16775,7 @@
       </p:sp>
       <p:sp>
         <p:nvSpPr>
-          <p:cNvPr id="13" name="mdpr:2-2-4f71ba:title:__title:2-2-4f71ba"/>
+          <p:cNvPr id="15" name="mdpr:2-2-4f71ba:title:__title:2-2-4f71ba"/>
           <p:cNvSpPr txBox="1"/>
           <p:nvPr/>
         </p:nvSpPr>
@@ -15933,7 +16817,7 @@
       </p:sp>
       <p:sp>
         <p:nvSpPr>
-          <p:cNvPr id="14" name="mdpr:2-2-4f71ba:left:block-27-chunk-2"/>
+          <p:cNvPr id="16" name="mdpr:2-2-4f71ba:left:block-27-chunk-2"/>
           <p:cNvSpPr txBox="1"/>
           <p:nvPr/>
         </p:nvSpPr>
@@ -15992,7 +16876,7 @@
       </p:sp>
       <p:sp>
         <p:nvSpPr>
-          <p:cNvPr id="15" name="mdpr:2-2-4f71ba:right:block-27-chunk-2"/>
+          <p:cNvPr id="17" name="mdpr:2-2-4f71ba:right:block-27-chunk-2"/>
           <p:cNvSpPr txBox="1"/>
           <p:nvPr/>
         </p:nvSpPr>
@@ -16089,6 +16973,49 @@
         </p:nvSpPr>
         <p:spPr>
           <a:xfrm>
+            <a:off x="310896" y="256032"/>
+            <a:ext cx="10893247" cy="5779008"/>
+          </a:xfrm>
+          <a:prstGeom prst="roundRect">
+            <a:avLst>
+              <a:gd name="adj" fmla="val 1899"/>
+            </a:avLst>
+          </a:prstGeom>
+          <a:solidFill>
+            <a:srgbClr val="8A4FFF">
+              <a:alpha val="26000"/>
+            </a:srgbClr>
+          </a:solidFill>
+          <a:ln w="12700">
+            <a:solidFill>
+              <a:srgbClr val="FFFFFF">
+                <a:alpha val="14000"/>
+              </a:srgbClr>
+            </a:solidFill>
+            <a:prstDash val="solid"/>
+          </a:ln>
+          <a:effectLst>
+            <a:outerShdw sx="100000" sy="100000" kx="0" ky="0" algn="bl" rotWithShape="0" blurRad="12700" dist="50800" dir="2700000">
+              <a:srgbClr val="8A4FFF">
+                <a:alpha val="10000"/>
+              </a:srgbClr>
+            </a:outerShdw>
+            <a:glow rad="63500">
+              <a:srgbClr val="8A4FFF">
+                <a:alpha val="23000"/>
+              </a:srgbClr>
+            </a:glow>
+          </a:effectLst>
+        </p:spPr>
+      </p:sp>
+      <p:sp>
+        <p:nvSpPr>
+          <p:cNvPr id="3" name="Shape 1"/>
+          <p:cNvSpPr/>
+          <p:nvPr/>
+        </p:nvSpPr>
+        <p:spPr>
+          <a:xfrm>
             <a:off x="566928" y="475488"/>
             <a:ext cx="11057839" cy="5907024"/>
           </a:xfrm>
@@ -16126,7 +17053,7 @@
       </p:sp>
       <p:sp>
         <p:nvSpPr>
-          <p:cNvPr id="3" name="Shape 1"/>
+          <p:cNvPr id="4" name="Shape 2"/>
           <p:cNvSpPr/>
           <p:nvPr/>
         </p:nvSpPr>
@@ -16155,7 +17082,7 @@
       </p:sp>
       <p:sp>
         <p:nvSpPr>
-          <p:cNvPr id="4" name="Shape 2"/>
+          <p:cNvPr id="5" name="Shape 3"/>
           <p:cNvSpPr/>
           <p:nvPr/>
         </p:nvSpPr>
@@ -16184,7 +17111,7 @@
       </p:sp>
       <p:sp>
         <p:nvSpPr>
-          <p:cNvPr id="5" name="Shape 3"/>
+          <p:cNvPr id="6" name="Shape 4"/>
           <p:cNvSpPr/>
           <p:nvPr/>
         </p:nvSpPr>
@@ -16213,7 +17140,7 @@
       </p:sp>
       <p:sp>
         <p:nvSpPr>
-          <p:cNvPr id="6" name="Shape 4"/>
+          <p:cNvPr id="7" name="Shape 5"/>
           <p:cNvSpPr/>
           <p:nvPr/>
         </p:nvSpPr>
@@ -16238,7 +17165,7 @@
       </p:sp>
       <p:sp>
         <p:nvSpPr>
-          <p:cNvPr id="7" name="Shape 5"/>
+          <p:cNvPr id="8" name="Shape 6"/>
           <p:cNvSpPr/>
           <p:nvPr/>
         </p:nvSpPr>
@@ -16263,7 +17190,32 @@
       </p:sp>
       <p:sp>
         <p:nvSpPr>
-          <p:cNvPr id="8" name="Shape 6"/>
+          <p:cNvPr id="9" name="Shape 7"/>
+          <p:cNvSpPr/>
+          <p:nvPr/>
+        </p:nvSpPr>
+        <p:spPr>
+          <a:xfrm>
+            <a:off x="9631375" y="603504"/>
+            <a:ext cx="1353312" cy="0"/>
+          </a:xfrm>
+          <a:prstGeom prst="line">
+            <a:avLst/>
+          </a:prstGeom>
+          <a:noFill/>
+          <a:ln w="12700">
+            <a:solidFill>
+              <a:srgbClr val="FFFFFF">
+                <a:alpha val="54000"/>
+              </a:srgbClr>
+            </a:solidFill>
+            <a:prstDash val="solid"/>
+          </a:ln>
+        </p:spPr>
+      </p:sp>
+      <p:sp>
+        <p:nvSpPr>
+          <p:cNvPr id="10" name="Shape 8"/>
           <p:cNvSpPr/>
           <p:nvPr/>
         </p:nvSpPr>
@@ -16290,7 +17242,7 @@
       </p:sp>
       <p:sp>
         <p:nvSpPr>
-          <p:cNvPr id="9" name="Shape 7"/>
+          <p:cNvPr id="11" name="Shape 9"/>
           <p:cNvSpPr/>
           <p:nvPr/>
         </p:nvSpPr>
@@ -16317,7 +17269,7 @@
       </p:sp>
       <p:sp>
         <p:nvSpPr>
-          <p:cNvPr id="10" name="Shape 8"/>
+          <p:cNvPr id="12" name="Shape 10"/>
           <p:cNvSpPr/>
           <p:nvPr/>
         </p:nvSpPr>
@@ -16344,7 +17296,7 @@
       </p:sp>
       <p:pic>
         <p:nvPicPr>
-          <p:cNvPr id="11" name="Image 0" descr="preencoded.png">    </p:cNvPr>
+          <p:cNvPr id="13" name="Image 0" descr="preencoded.png">    </p:cNvPr>
           <p:cNvPicPr>
             <a:picLocks noChangeAspect="1"/>
           </p:cNvPicPr>
@@ -16374,7 +17326,7 @@
       </p:pic>
       <p:sp>
         <p:nvSpPr>
-          <p:cNvPr id="12" name="Shape 9"/>
+          <p:cNvPr id="14" name="Shape 11"/>
           <p:cNvSpPr/>
           <p:nvPr/>
         </p:nvSpPr>
@@ -16415,7 +17367,7 @@
       </p:sp>
       <p:pic>
         <p:nvPicPr>
-          <p:cNvPr id="13" name="Image 1" descr="preencoded.png">    </p:cNvPr>
+          <p:cNvPr id="15" name="Image 1" descr="preencoded.png">    </p:cNvPr>
           <p:cNvPicPr>
             <a:picLocks noChangeAspect="1"/>
           </p:cNvPicPr>
@@ -16445,7 +17397,7 @@
       </p:pic>
       <p:sp>
         <p:nvSpPr>
-          <p:cNvPr id="14" name="Shape 10"/>
+          <p:cNvPr id="16" name="Shape 12"/>
           <p:cNvSpPr/>
           <p:nvPr/>
         </p:nvSpPr>
@@ -16486,7 +17438,7 @@
       </p:sp>
       <p:pic>
         <p:nvPicPr>
-          <p:cNvPr id="15" name="Image 2" descr="preencoded.png">    </p:cNvPr>
+          <p:cNvPr id="17" name="Image 2" descr="preencoded.png">    </p:cNvPr>
           <p:cNvPicPr>
             <a:picLocks noChangeAspect="1"/>
           </p:cNvPicPr>
@@ -16516,7 +17468,7 @@
       </p:pic>
       <p:sp>
         <p:nvSpPr>
-          <p:cNvPr id="16" name="Shape 11"/>
+          <p:cNvPr id="18" name="Shape 13"/>
           <p:cNvSpPr/>
           <p:nvPr/>
         </p:nvSpPr>
@@ -16557,7 +17509,7 @@
       </p:sp>
       <p:pic>
         <p:nvPicPr>
-          <p:cNvPr id="17" name="Image 3" descr="preencoded.png">    </p:cNvPr>
+          <p:cNvPr id="19" name="Image 3" descr="preencoded.png">    </p:cNvPr>
           <p:cNvPicPr>
             <a:picLocks noChangeAspect="1"/>
           </p:cNvPicPr>
@@ -16587,7 +17539,7 @@
       </p:pic>
       <p:sp>
         <p:nvSpPr>
-          <p:cNvPr id="18" name="Shape 12"/>
+          <p:cNvPr id="20" name="Shape 14"/>
           <p:cNvSpPr/>
           <p:nvPr/>
         </p:nvSpPr>
@@ -16628,7 +17580,7 @@
       </p:sp>
       <p:sp>
         <p:nvSpPr>
-          <p:cNvPr id="19" name="Shape 13"/>
+          <p:cNvPr id="21" name="Shape 15"/>
           <p:cNvSpPr/>
           <p:nvPr/>
         </p:nvSpPr>
@@ -16655,7 +17607,7 @@
       </p:sp>
       <p:sp>
         <p:nvSpPr>
-          <p:cNvPr id="20" name="Shape 14"/>
+          <p:cNvPr id="22" name="Shape 16"/>
           <p:cNvSpPr/>
           <p:nvPr/>
         </p:nvSpPr>
@@ -16682,7 +17634,7 @@
       </p:sp>
       <p:sp>
         <p:nvSpPr>
-          <p:cNvPr id="21" name="Shape 15"/>
+          <p:cNvPr id="23" name="Shape 17"/>
           <p:cNvSpPr/>
           <p:nvPr/>
         </p:nvSpPr>
@@ -16709,7 +17661,7 @@
       </p:sp>
       <p:sp>
         <p:nvSpPr>
-          <p:cNvPr id="22" name="Shape 16"/>
+          <p:cNvPr id="24" name="Shape 18"/>
           <p:cNvSpPr/>
           <p:nvPr/>
         </p:nvSpPr>
@@ -16736,7 +17688,7 @@
       </p:sp>
       <p:sp>
         <p:nvSpPr>
-          <p:cNvPr id="23" name="mdpr:icon-and-text-aside-8429fc:title:__title:icon-and-text-aside-8429fc"/>
+          <p:cNvPr id="25" name="mdpr:icon-and-text-aside-8429fc:title:__title:icon-and-text-aside-8429fc"/>
           <p:cNvSpPr txBox="1"/>
           <p:nvPr/>
         </p:nvSpPr>
@@ -16778,7 +17730,7 @@
       </p:sp>
       <p:sp>
         <p:nvSpPr>
-          <p:cNvPr id="24" name="Shape 18"/>
+          <p:cNvPr id="26" name="Shape 20"/>
           <p:cNvSpPr/>
           <p:nvPr/>
         </p:nvSpPr>
@@ -16805,7 +17757,7 @@
       </p:sp>
       <p:pic>
         <p:nvPicPr>
-          <p:cNvPr id="25" name="Image 4" descr="article icon from tabler-icons (MIT)">    </p:cNvPr>
+          <p:cNvPr id="27" name="Image 4" descr="article icon from tabler-icons (MIT)">    </p:cNvPr>
           <p:cNvPicPr>
             <a:picLocks noChangeAspect="1"/>
           </p:cNvPicPr>
@@ -16835,7 +17787,7 @@
       </p:pic>
       <p:sp>
         <p:nvSpPr>
-          <p:cNvPr id="26" name="mdpr:icon-and-text-aside-8429fc:item-1:block-29"/>
+          <p:cNvPr id="28" name="mdpr:icon-and-text-aside-8429fc:item-1:block-29"/>
           <p:cNvSpPr txBox="1"/>
           <p:nvPr/>
         </p:nvSpPr>
@@ -16894,7 +17846,7 @@
       </p:sp>
       <p:sp>
         <p:nvSpPr>
-          <p:cNvPr id="27" name="Shape 20"/>
+          <p:cNvPr id="29" name="Shape 22"/>
           <p:cNvSpPr/>
           <p:nvPr/>
         </p:nvSpPr>
@@ -16921,7 +17873,7 @@
       </p:sp>
       <p:pic>
         <p:nvPicPr>
-          <p:cNvPr id="28" name="Image 5" descr="article icon from tabler-icons (MIT)">    </p:cNvPr>
+          <p:cNvPr id="30" name="Image 5" descr="article icon from tabler-icons (MIT)">    </p:cNvPr>
           <p:cNvPicPr>
             <a:picLocks noChangeAspect="1"/>
           </p:cNvPicPr>
@@ -16951,7 +17903,7 @@
       </p:pic>
       <p:sp>
         <p:nvSpPr>
-          <p:cNvPr id="29" name="mdpr:icon-and-text-aside-8429fc:item-2:block-29"/>
+          <p:cNvPr id="31" name="mdpr:icon-and-text-aside-8429fc:item-2:block-29"/>
           <p:cNvSpPr txBox="1"/>
           <p:nvPr/>
         </p:nvSpPr>
@@ -17010,7 +17962,7 @@
       </p:sp>
       <p:sp>
         <p:nvSpPr>
-          <p:cNvPr id="30" name="Shape 22"/>
+          <p:cNvPr id="32" name="Shape 24"/>
           <p:cNvSpPr/>
           <p:nvPr/>
         </p:nvSpPr>
@@ -17037,7 +17989,7 @@
       </p:sp>
       <p:pic>
         <p:nvPicPr>
-          <p:cNvPr id="31" name="Image 6" descr="article icon from tabler-icons (MIT)">    </p:cNvPr>
+          <p:cNvPr id="33" name="Image 6" descr="article icon from tabler-icons (MIT)">    </p:cNvPr>
           <p:cNvPicPr>
             <a:picLocks noChangeAspect="1"/>
           </p:cNvPicPr>
@@ -17067,7 +18019,7 @@
       </p:pic>
       <p:sp>
         <p:nvSpPr>
-          <p:cNvPr id="32" name="mdpr:icon-and-text-aside-8429fc:item-3:block-29"/>
+          <p:cNvPr id="34" name="mdpr:icon-and-text-aside-8429fc:item-3:block-29"/>
           <p:cNvSpPr txBox="1"/>
           <p:nvPr/>
         </p:nvSpPr>
@@ -17126,7 +18078,7 @@
       </p:sp>
       <p:sp>
         <p:nvSpPr>
-          <p:cNvPr id="33" name="Shape 24"/>
+          <p:cNvPr id="35" name="Shape 26"/>
           <p:cNvSpPr/>
           <p:nvPr/>
         </p:nvSpPr>
@@ -17153,7 +18105,7 @@
       </p:sp>
       <p:pic>
         <p:nvPicPr>
-          <p:cNvPr id="34" name="Image 7" descr="table icon from tabler-icons (MIT)">    </p:cNvPr>
+          <p:cNvPr id="36" name="Image 7" descr="table icon from tabler-icons (MIT)">    </p:cNvPr>
           <p:cNvPicPr>
             <a:picLocks noChangeAspect="1"/>
           </p:cNvPicPr>
@@ -17183,7 +18135,7 @@
       </p:pic>
       <p:sp>
         <p:nvSpPr>
-          <p:cNvPr id="35" name="mdpr:icon-and-text-aside-8429fc:item-4:block-29"/>
+          <p:cNvPr id="37" name="mdpr:icon-and-text-aside-8429fc:item-4:block-29"/>
           <p:cNvSpPr txBox="1"/>
           <p:nvPr/>
         </p:nvSpPr>
@@ -17280,6 +18232,49 @@
         </p:nvSpPr>
         <p:spPr>
           <a:xfrm>
+            <a:off x="310896" y="256032"/>
+            <a:ext cx="10893247" cy="5779008"/>
+          </a:xfrm>
+          <a:prstGeom prst="roundRect">
+            <a:avLst>
+              <a:gd name="adj" fmla="val 1899"/>
+            </a:avLst>
+          </a:prstGeom>
+          <a:solidFill>
+            <a:srgbClr val="8A4FFF">
+              <a:alpha val="26000"/>
+            </a:srgbClr>
+          </a:solidFill>
+          <a:ln w="12700">
+            <a:solidFill>
+              <a:srgbClr val="FFFFFF">
+                <a:alpha val="14000"/>
+              </a:srgbClr>
+            </a:solidFill>
+            <a:prstDash val="solid"/>
+          </a:ln>
+          <a:effectLst>
+            <a:outerShdw sx="100000" sy="100000" kx="0" ky="0" algn="bl" rotWithShape="0" blurRad="12700" dist="50800" dir="2700000">
+              <a:srgbClr val="8A4FFF">
+                <a:alpha val="10000"/>
+              </a:srgbClr>
+            </a:outerShdw>
+            <a:glow rad="63500">
+              <a:srgbClr val="8A4FFF">
+                <a:alpha val="23000"/>
+              </a:srgbClr>
+            </a:glow>
+          </a:effectLst>
+        </p:spPr>
+      </p:sp>
+      <p:sp>
+        <p:nvSpPr>
+          <p:cNvPr id="3" name="Shape 1"/>
+          <p:cNvSpPr/>
+          <p:nvPr/>
+        </p:nvSpPr>
+        <p:spPr>
+          <a:xfrm>
             <a:off x="566928" y="475488"/>
             <a:ext cx="11057839" cy="5907024"/>
           </a:xfrm>
@@ -17317,7 +18312,7 @@
       </p:sp>
       <p:sp>
         <p:nvSpPr>
-          <p:cNvPr id="3" name="Shape 1"/>
+          <p:cNvPr id="4" name="Shape 2"/>
           <p:cNvSpPr/>
           <p:nvPr/>
         </p:nvSpPr>
@@ -17346,7 +18341,7 @@
       </p:sp>
       <p:sp>
         <p:nvSpPr>
-          <p:cNvPr id="4" name="Shape 2"/>
+          <p:cNvPr id="5" name="Shape 3"/>
           <p:cNvSpPr/>
           <p:nvPr/>
         </p:nvSpPr>
@@ -17375,7 +18370,7 @@
       </p:sp>
       <p:sp>
         <p:nvSpPr>
-          <p:cNvPr id="5" name="Shape 3"/>
+          <p:cNvPr id="6" name="Shape 4"/>
           <p:cNvSpPr/>
           <p:nvPr/>
         </p:nvSpPr>
@@ -17404,7 +18399,7 @@
       </p:sp>
       <p:sp>
         <p:nvSpPr>
-          <p:cNvPr id="6" name="Shape 4"/>
+          <p:cNvPr id="7" name="Shape 5"/>
           <p:cNvSpPr/>
           <p:nvPr/>
         </p:nvSpPr>
@@ -17429,7 +18424,7 @@
       </p:sp>
       <p:sp>
         <p:nvSpPr>
-          <p:cNvPr id="7" name="Shape 5"/>
+          <p:cNvPr id="8" name="Shape 6"/>
           <p:cNvSpPr/>
           <p:nvPr/>
         </p:nvSpPr>
@@ -17454,7 +18449,32 @@
       </p:sp>
       <p:sp>
         <p:nvSpPr>
-          <p:cNvPr id="8" name="Shape 6"/>
+          <p:cNvPr id="9" name="Shape 7"/>
+          <p:cNvSpPr/>
+          <p:nvPr/>
+        </p:nvSpPr>
+        <p:spPr>
+          <a:xfrm>
+            <a:off x="9631375" y="603504"/>
+            <a:ext cx="1353312" cy="0"/>
+          </a:xfrm>
+          <a:prstGeom prst="line">
+            <a:avLst/>
+          </a:prstGeom>
+          <a:noFill/>
+          <a:ln w="12700">
+            <a:solidFill>
+              <a:srgbClr val="FFFFFF">
+                <a:alpha val="54000"/>
+              </a:srgbClr>
+            </a:solidFill>
+            <a:prstDash val="solid"/>
+          </a:ln>
+        </p:spPr>
+      </p:sp>
+      <p:sp>
+        <p:nvSpPr>
+          <p:cNvPr id="10" name="Shape 8"/>
           <p:cNvSpPr/>
           <p:nvPr/>
         </p:nvSpPr>
@@ -17481,7 +18501,7 @@
       </p:sp>
       <p:sp>
         <p:nvSpPr>
-          <p:cNvPr id="9" name="Shape 7"/>
+          <p:cNvPr id="11" name="Shape 9"/>
           <p:cNvSpPr/>
           <p:nvPr/>
         </p:nvSpPr>
@@ -17508,7 +18528,7 @@
       </p:sp>
       <p:sp>
         <p:nvSpPr>
-          <p:cNvPr id="10" name="Shape 8"/>
+          <p:cNvPr id="12" name="Shape 10"/>
           <p:cNvSpPr/>
           <p:nvPr/>
         </p:nvSpPr>
@@ -17535,7 +18555,7 @@
       </p:sp>
       <p:pic>
         <p:nvPicPr>
-          <p:cNvPr id="11" name="Image 0" descr="preencoded.png">    </p:cNvPr>
+          <p:cNvPr id="13" name="Image 0" descr="preencoded.png">    </p:cNvPr>
           <p:cNvPicPr>
             <a:picLocks noChangeAspect="1"/>
           </p:cNvPicPr>
@@ -17565,7 +18585,7 @@
       </p:pic>
       <p:sp>
         <p:nvSpPr>
-          <p:cNvPr id="12" name="Shape 9"/>
+          <p:cNvPr id="14" name="Shape 11"/>
           <p:cNvSpPr/>
           <p:nvPr/>
         </p:nvSpPr>
@@ -17606,7 +18626,7 @@
       </p:sp>
       <p:pic>
         <p:nvPicPr>
-          <p:cNvPr id="13" name="Image 1" descr="preencoded.png">    </p:cNvPr>
+          <p:cNvPr id="15" name="Image 1" descr="preencoded.png">    </p:cNvPr>
           <p:cNvPicPr>
             <a:picLocks noChangeAspect="1"/>
           </p:cNvPicPr>
@@ -17636,7 +18656,7 @@
       </p:pic>
       <p:sp>
         <p:nvSpPr>
-          <p:cNvPr id="14" name="Shape 10"/>
+          <p:cNvPr id="16" name="Shape 12"/>
           <p:cNvSpPr/>
           <p:nvPr/>
         </p:nvSpPr>
@@ -17677,7 +18697,7 @@
       </p:sp>
       <p:pic>
         <p:nvPicPr>
-          <p:cNvPr id="15" name="Image 2" descr="preencoded.png">    </p:cNvPr>
+          <p:cNvPr id="17" name="Image 2" descr="preencoded.png">    </p:cNvPr>
           <p:cNvPicPr>
             <a:picLocks noChangeAspect="1"/>
           </p:cNvPicPr>
@@ -17707,7 +18727,7 @@
       </p:pic>
       <p:sp>
         <p:nvSpPr>
-          <p:cNvPr id="16" name="Shape 11"/>
+          <p:cNvPr id="18" name="Shape 13"/>
           <p:cNvSpPr/>
           <p:nvPr/>
         </p:nvSpPr>
@@ -17748,7 +18768,7 @@
       </p:sp>
       <p:pic>
         <p:nvPicPr>
-          <p:cNvPr id="17" name="Image 3" descr="preencoded.png">    </p:cNvPr>
+          <p:cNvPr id="19" name="Image 3" descr="preencoded.png">    </p:cNvPr>
           <p:cNvPicPr>
             <a:picLocks noChangeAspect="1"/>
           </p:cNvPicPr>
@@ -17778,7 +18798,7 @@
       </p:pic>
       <p:sp>
         <p:nvSpPr>
-          <p:cNvPr id="18" name="Shape 12"/>
+          <p:cNvPr id="20" name="Shape 14"/>
           <p:cNvSpPr/>
           <p:nvPr/>
         </p:nvSpPr>
@@ -17819,7 +18839,7 @@
       </p:sp>
       <p:sp>
         <p:nvSpPr>
-          <p:cNvPr id="19" name="Shape 13"/>
+          <p:cNvPr id="21" name="Shape 15"/>
           <p:cNvSpPr/>
           <p:nvPr/>
         </p:nvSpPr>
@@ -17846,7 +18866,7 @@
       </p:sp>
       <p:sp>
         <p:nvSpPr>
-          <p:cNvPr id="20" name="Shape 14"/>
+          <p:cNvPr id="22" name="Shape 16"/>
           <p:cNvSpPr/>
           <p:nvPr/>
         </p:nvSpPr>
@@ -17873,7 +18893,7 @@
       </p:sp>
       <p:sp>
         <p:nvSpPr>
-          <p:cNvPr id="21" name="Shape 15"/>
+          <p:cNvPr id="23" name="Shape 17"/>
           <p:cNvSpPr/>
           <p:nvPr/>
         </p:nvSpPr>
@@ -17900,7 +18920,7 @@
       </p:sp>
       <p:sp>
         <p:nvSpPr>
-          <p:cNvPr id="22" name="Shape 16"/>
+          <p:cNvPr id="24" name="Shape 18"/>
           <p:cNvSpPr/>
           <p:nvPr/>
         </p:nvSpPr>
@@ -17927,7 +18947,7 @@
       </p:sp>
       <p:sp>
         <p:nvSpPr>
-          <p:cNvPr id="23" name="mdpr:overflow-guard-f8d03e:title:__title:overflow-guard-f8d03e"/>
+          <p:cNvPr id="25" name="mdpr:overflow-guard-f8d03e:title:__title:overflow-guard-f8d03e"/>
           <p:cNvSpPr txBox="1"/>
           <p:nvPr/>
         </p:nvSpPr>
@@ -17969,7 +18989,7 @@
       </p:sp>
       <p:sp>
         <p:nvSpPr>
-          <p:cNvPr id="24" name="Shape 18"/>
+          <p:cNvPr id="26" name="Shape 20"/>
           <p:cNvSpPr/>
           <p:nvPr/>
         </p:nvSpPr>
@@ -17996,7 +19016,7 @@
       </p:sp>
       <p:pic>
         <p:nvPicPr>
-          <p:cNvPr id="25" name="Image 4" descr="verified icon from tabler-icons (MIT)">    </p:cNvPr>
+          <p:cNvPr id="27" name="Image 4" descr="verified icon from tabler-icons (MIT)">    </p:cNvPr>
           <p:cNvPicPr>
             <a:picLocks noChangeAspect="1"/>
           </p:cNvPicPr>
@@ -18026,7 +19046,7 @@
       </p:pic>
       <p:sp>
         <p:nvSpPr>
-          <p:cNvPr id="26" name="mdpr:overflow-guard-f8d03e:item-1:block-31"/>
+          <p:cNvPr id="28" name="mdpr:overflow-guard-f8d03e:item-1:block-31"/>
           <p:cNvSpPr txBox="1"/>
           <p:nvPr/>
         </p:nvSpPr>
@@ -18085,7 +19105,7 @@
       </p:sp>
       <p:sp>
         <p:nvSpPr>
-          <p:cNvPr id="27" name="Shape 20"/>
+          <p:cNvPr id="29" name="Shape 22"/>
           <p:cNvSpPr/>
           <p:nvPr/>
         </p:nvSpPr>
@@ -18112,7 +19132,7 @@
       </p:sp>
       <p:pic>
         <p:nvPicPr>
-          <p:cNvPr id="28" name="Image 5" descr="table icon from tabler-icons (MIT)">    </p:cNvPr>
+          <p:cNvPr id="30" name="Image 5" descr="table icon from tabler-icons (MIT)">    </p:cNvPr>
           <p:cNvPicPr>
             <a:picLocks noChangeAspect="1"/>
           </p:cNvPicPr>
@@ -18142,7 +19162,7 @@
       </p:pic>
       <p:sp>
         <p:nvSpPr>
-          <p:cNvPr id="29" name="mdpr:overflow-guard-f8d03e:item-2:block-31"/>
+          <p:cNvPr id="31" name="mdpr:overflow-guard-f8d03e:item-2:block-31"/>
           <p:cNvSpPr txBox="1"/>
           <p:nvPr/>
         </p:nvSpPr>
@@ -18201,7 +19221,7 @@
       </p:sp>
       <p:sp>
         <p:nvSpPr>
-          <p:cNvPr id="30" name="Shape 22"/>
+          <p:cNvPr id="32" name="Shape 24"/>
           <p:cNvSpPr/>
           <p:nvPr/>
         </p:nvSpPr>
@@ -18228,7 +19248,7 @@
       </p:sp>
       <p:pic>
         <p:nvPicPr>
-          <p:cNvPr id="31" name="Image 6" descr="article icon from tabler-icons (MIT)">    </p:cNvPr>
+          <p:cNvPr id="33" name="Image 6" descr="article icon from tabler-icons (MIT)">    </p:cNvPr>
           <p:cNvPicPr>
             <a:picLocks noChangeAspect="1"/>
           </p:cNvPicPr>
@@ -18258,7 +19278,7 @@
       </p:pic>
       <p:sp>
         <p:nvSpPr>
-          <p:cNvPr id="32" name="mdpr:overflow-guard-f8d03e:item-3:block-31"/>
+          <p:cNvPr id="34" name="mdpr:overflow-guard-f8d03e:item-3:block-31"/>
           <p:cNvSpPr txBox="1"/>
           <p:nvPr/>
         </p:nvSpPr>
@@ -18317,7 +19337,7 @@
       </p:sp>
       <p:sp>
         <p:nvSpPr>
-          <p:cNvPr id="33" name="Shape 24"/>
+          <p:cNvPr id="35" name="Shape 26"/>
           <p:cNvSpPr/>
           <p:nvPr/>
         </p:nvSpPr>
@@ -18344,7 +19364,7 @@
       </p:sp>
       <p:pic>
         <p:nvPicPr>
-          <p:cNvPr id="34" name="Image 7" descr="article icon from tabler-icons (MIT)">    </p:cNvPr>
+          <p:cNvPr id="36" name="Image 7" descr="article icon from tabler-icons (MIT)">    </p:cNvPr>
           <p:cNvPicPr>
             <a:picLocks noChangeAspect="1"/>
           </p:cNvPicPr>
@@ -18374,7 +19394,7 @@
       </p:pic>
       <p:sp>
         <p:nvSpPr>
-          <p:cNvPr id="35" name="mdpr:overflow-guard-f8d03e:item-4:block-31"/>
+          <p:cNvPr id="37" name="mdpr:overflow-guard-f8d03e:item-4:block-31"/>
           <p:cNvSpPr txBox="1"/>
           <p:nvPr/>
         </p:nvSpPr>
@@ -18471,6 +19491,49 @@
         </p:nvSpPr>
         <p:spPr>
           <a:xfrm>
+            <a:off x="310896" y="256032"/>
+            <a:ext cx="10893247" cy="5779008"/>
+          </a:xfrm>
+          <a:prstGeom prst="roundRect">
+            <a:avLst>
+              <a:gd name="adj" fmla="val 1899"/>
+            </a:avLst>
+          </a:prstGeom>
+          <a:solidFill>
+            <a:srgbClr val="8A4FFF">
+              <a:alpha val="26000"/>
+            </a:srgbClr>
+          </a:solidFill>
+          <a:ln w="12700">
+            <a:solidFill>
+              <a:srgbClr val="FFFFFF">
+                <a:alpha val="14000"/>
+              </a:srgbClr>
+            </a:solidFill>
+            <a:prstDash val="solid"/>
+          </a:ln>
+          <a:effectLst>
+            <a:outerShdw sx="100000" sy="100000" kx="0" ky="0" algn="bl" rotWithShape="0" blurRad="12700" dist="50800" dir="2700000">
+              <a:srgbClr val="8A4FFF">
+                <a:alpha val="10000"/>
+              </a:srgbClr>
+            </a:outerShdw>
+            <a:glow rad="63500">
+              <a:srgbClr val="8A4FFF">
+                <a:alpha val="23000"/>
+              </a:srgbClr>
+            </a:glow>
+          </a:effectLst>
+        </p:spPr>
+      </p:sp>
+      <p:sp>
+        <p:nvSpPr>
+          <p:cNvPr id="3" name="Shape 1"/>
+          <p:cNvSpPr/>
+          <p:nvPr/>
+        </p:nvSpPr>
+        <p:spPr>
+          <a:xfrm>
             <a:off x="566928" y="475488"/>
             <a:ext cx="11057839" cy="5907024"/>
           </a:xfrm>
@@ -18508,7 +19571,7 @@
       </p:sp>
       <p:sp>
         <p:nvSpPr>
-          <p:cNvPr id="3" name="Shape 1"/>
+          <p:cNvPr id="4" name="Shape 2"/>
           <p:cNvSpPr/>
           <p:nvPr/>
         </p:nvSpPr>
@@ -18537,7 +19600,7 @@
       </p:sp>
       <p:sp>
         <p:nvSpPr>
-          <p:cNvPr id="4" name="Shape 2"/>
+          <p:cNvPr id="5" name="Shape 3"/>
           <p:cNvSpPr/>
           <p:nvPr/>
         </p:nvSpPr>
@@ -18566,7 +19629,7 @@
       </p:sp>
       <p:sp>
         <p:nvSpPr>
-          <p:cNvPr id="5" name="Shape 3"/>
+          <p:cNvPr id="6" name="Shape 4"/>
           <p:cNvSpPr/>
           <p:nvPr/>
         </p:nvSpPr>
@@ -18595,7 +19658,7 @@
       </p:sp>
       <p:sp>
         <p:nvSpPr>
-          <p:cNvPr id="6" name="Shape 4"/>
+          <p:cNvPr id="7" name="Shape 5"/>
           <p:cNvSpPr/>
           <p:nvPr/>
         </p:nvSpPr>
@@ -18620,7 +19683,7 @@
       </p:sp>
       <p:sp>
         <p:nvSpPr>
-          <p:cNvPr id="7" name="Shape 5"/>
+          <p:cNvPr id="8" name="Shape 6"/>
           <p:cNvSpPr/>
           <p:nvPr/>
         </p:nvSpPr>
@@ -18645,7 +19708,32 @@
       </p:sp>
       <p:sp>
         <p:nvSpPr>
-          <p:cNvPr id="8" name="Shape 6"/>
+          <p:cNvPr id="9" name="Shape 7"/>
+          <p:cNvSpPr/>
+          <p:nvPr/>
+        </p:nvSpPr>
+        <p:spPr>
+          <a:xfrm>
+            <a:off x="9631375" y="603504"/>
+            <a:ext cx="1353312" cy="0"/>
+          </a:xfrm>
+          <a:prstGeom prst="line">
+            <a:avLst/>
+          </a:prstGeom>
+          <a:noFill/>
+          <a:ln w="12700">
+            <a:solidFill>
+              <a:srgbClr val="FFFFFF">
+                <a:alpha val="54000"/>
+              </a:srgbClr>
+            </a:solidFill>
+            <a:prstDash val="solid"/>
+          </a:ln>
+        </p:spPr>
+      </p:sp>
+      <p:sp>
+        <p:nvSpPr>
+          <p:cNvPr id="10" name="Shape 8"/>
           <p:cNvSpPr/>
           <p:nvPr/>
         </p:nvSpPr>
@@ -18672,7 +19760,7 @@
       </p:sp>
       <p:sp>
         <p:nvSpPr>
-          <p:cNvPr id="9" name="Shape 7"/>
+          <p:cNvPr id="11" name="Shape 9"/>
           <p:cNvSpPr/>
           <p:nvPr/>
         </p:nvSpPr>
@@ -18699,7 +19787,7 @@
       </p:sp>
       <p:sp>
         <p:nvSpPr>
-          <p:cNvPr id="10" name="Shape 8"/>
+          <p:cNvPr id="12" name="Shape 10"/>
           <p:cNvSpPr/>
           <p:nvPr/>
         </p:nvSpPr>
@@ -18726,7 +19814,7 @@
       </p:sp>
       <p:pic>
         <p:nvPicPr>
-          <p:cNvPr id="11" name="Image 0" descr="preencoded.png">    </p:cNvPr>
+          <p:cNvPr id="13" name="Image 0" descr="preencoded.png">    </p:cNvPr>
           <p:cNvPicPr>
             <a:picLocks noChangeAspect="1"/>
           </p:cNvPicPr>
@@ -18756,7 +19844,7 @@
       </p:pic>
       <p:sp>
         <p:nvSpPr>
-          <p:cNvPr id="12" name="Shape 9"/>
+          <p:cNvPr id="14" name="Shape 11"/>
           <p:cNvSpPr/>
           <p:nvPr/>
         </p:nvSpPr>
@@ -18797,7 +19885,7 @@
       </p:sp>
       <p:sp>
         <p:nvSpPr>
-          <p:cNvPr id="13" name="Shape 10"/>
+          <p:cNvPr id="15" name="Shape 12"/>
           <p:cNvSpPr/>
           <p:nvPr/>
         </p:nvSpPr>
@@ -18824,7 +19912,7 @@
       </p:sp>
       <p:sp>
         <p:nvSpPr>
-          <p:cNvPr id="14" name="mdpr:image-safe-frame-d4d6a4:title:__title:image-safe-frame-d4d6a4"/>
+          <p:cNvPr id="16" name="mdpr:image-safe-frame-d4d6a4:title:__title:image-safe-frame-d4d6a4"/>
           <p:cNvSpPr txBox="1"/>
           <p:nvPr/>
         </p:nvSpPr>
@@ -18866,7 +19954,7 @@
       </p:sp>
       <p:sp>
         <p:nvSpPr>
-          <p:cNvPr id="15" name="mdpr:image-safe-frame-d4d6a4:body:block-33-block-33-block-33"/>
+          <p:cNvPr id="17" name="mdpr:image-safe-frame-d4d6a4:body:block-33-block-33-block-33"/>
           <p:cNvSpPr txBox="1"/>
           <p:nvPr/>
         </p:nvSpPr>
@@ -19005,7 +20093,7 @@
       </p:sp>
       <p:pic>
         <p:nvPicPr>
-          <p:cNvPr id="16" name="mdpr:image-safe-frame-d4d6a4:image-1:block-34" descr="{&quot;mdpr&quot;:{&quot;slideId&quot;:&quot;image-safe-frame-d4d6a4&quot;,&quot;layoutSlideId&quot;:&quot;layout-image-safe-frame-d4d6a4&quot;,&quot;regionId&quot;:&quot;image-1&quot;,&quot;blockIds&quot;:[&quot;block-34&quot;],&quot;objectKind&quot;:&quot;native-image&quot;,&quot;role&quot;:&quot;image&quot;,&quot;editable&quot;:false}}">    </p:cNvPr>
+          <p:cNvPr id="18" name="mdpr:image-safe-frame-d4d6a4:image-1:block-34" descr="{&quot;mdpr&quot;:{&quot;slideId&quot;:&quot;image-safe-frame-d4d6a4&quot;,&quot;layoutSlideId&quot;:&quot;layout-image-safe-frame-d4d6a4&quot;,&quot;regionId&quot;:&quot;image-1&quot;,&quot;blockIds&quot;:[&quot;block-34&quot;],&quot;objectKind&quot;:&quot;native-image&quot;,&quot;role&quot;:&quot;image&quot;,&quot;editable&quot;:false}}">    </p:cNvPr>
           <p:cNvPicPr>
             <a:picLocks noChangeAspect="1"/>
           </p:cNvPicPr>
@@ -19073,6 +20161,49 @@
         </p:nvSpPr>
         <p:spPr>
           <a:xfrm>
+            <a:off x="310896" y="256032"/>
+            <a:ext cx="10893247" cy="5779008"/>
+          </a:xfrm>
+          <a:prstGeom prst="roundRect">
+            <a:avLst>
+              <a:gd name="adj" fmla="val 1899"/>
+            </a:avLst>
+          </a:prstGeom>
+          <a:solidFill>
+            <a:srgbClr val="8A4FFF">
+              <a:alpha val="26000"/>
+            </a:srgbClr>
+          </a:solidFill>
+          <a:ln w="12700">
+            <a:solidFill>
+              <a:srgbClr val="FFFFFF">
+                <a:alpha val="14000"/>
+              </a:srgbClr>
+            </a:solidFill>
+            <a:prstDash val="solid"/>
+          </a:ln>
+          <a:effectLst>
+            <a:outerShdw sx="100000" sy="100000" kx="0" ky="0" algn="bl" rotWithShape="0" blurRad="12700" dist="50800" dir="2700000">
+              <a:srgbClr val="8A4FFF">
+                <a:alpha val="10000"/>
+              </a:srgbClr>
+            </a:outerShdw>
+            <a:glow rad="63500">
+              <a:srgbClr val="8A4FFF">
+                <a:alpha val="23000"/>
+              </a:srgbClr>
+            </a:glow>
+          </a:effectLst>
+        </p:spPr>
+      </p:sp>
+      <p:sp>
+        <p:nvSpPr>
+          <p:cNvPr id="3" name="Shape 1"/>
+          <p:cNvSpPr/>
+          <p:nvPr/>
+        </p:nvSpPr>
+        <p:spPr>
+          <a:xfrm>
             <a:off x="566928" y="475488"/>
             <a:ext cx="11057839" cy="5907024"/>
           </a:xfrm>
@@ -19110,7 +20241,7 @@
       </p:sp>
       <p:sp>
         <p:nvSpPr>
-          <p:cNvPr id="3" name="Shape 1"/>
+          <p:cNvPr id="4" name="Shape 2"/>
           <p:cNvSpPr/>
           <p:nvPr/>
         </p:nvSpPr>
@@ -19139,7 +20270,7 @@
       </p:sp>
       <p:sp>
         <p:nvSpPr>
-          <p:cNvPr id="4" name="Shape 2"/>
+          <p:cNvPr id="5" name="Shape 3"/>
           <p:cNvSpPr/>
           <p:nvPr/>
         </p:nvSpPr>
@@ -19168,7 +20299,7 @@
       </p:sp>
       <p:sp>
         <p:nvSpPr>
-          <p:cNvPr id="5" name="Shape 3"/>
+          <p:cNvPr id="6" name="Shape 4"/>
           <p:cNvSpPr/>
           <p:nvPr/>
         </p:nvSpPr>
@@ -19197,7 +20328,7 @@
       </p:sp>
       <p:sp>
         <p:nvSpPr>
-          <p:cNvPr id="6" name="Shape 4"/>
+          <p:cNvPr id="7" name="Shape 5"/>
           <p:cNvSpPr/>
           <p:nvPr/>
         </p:nvSpPr>
@@ -19222,7 +20353,7 @@
       </p:sp>
       <p:sp>
         <p:nvSpPr>
-          <p:cNvPr id="7" name="Shape 5"/>
+          <p:cNvPr id="8" name="Shape 6"/>
           <p:cNvSpPr/>
           <p:nvPr/>
         </p:nvSpPr>
@@ -19247,7 +20378,32 @@
       </p:sp>
       <p:sp>
         <p:nvSpPr>
-          <p:cNvPr id="8" name="Shape 6"/>
+          <p:cNvPr id="9" name="Shape 7"/>
+          <p:cNvSpPr/>
+          <p:nvPr/>
+        </p:nvSpPr>
+        <p:spPr>
+          <a:xfrm>
+            <a:off x="9631375" y="603504"/>
+            <a:ext cx="1353312" cy="0"/>
+          </a:xfrm>
+          <a:prstGeom prst="line">
+            <a:avLst/>
+          </a:prstGeom>
+          <a:noFill/>
+          <a:ln w="12700">
+            <a:solidFill>
+              <a:srgbClr val="FFFFFF">
+                <a:alpha val="54000"/>
+              </a:srgbClr>
+            </a:solidFill>
+            <a:prstDash val="solid"/>
+          </a:ln>
+        </p:spPr>
+      </p:sp>
+      <p:sp>
+        <p:nvSpPr>
+          <p:cNvPr id="10" name="Shape 8"/>
           <p:cNvSpPr/>
           <p:nvPr/>
         </p:nvSpPr>
@@ -19274,7 +20430,7 @@
       </p:sp>
       <p:sp>
         <p:nvSpPr>
-          <p:cNvPr id="9" name="Shape 7"/>
+          <p:cNvPr id="11" name="Shape 9"/>
           <p:cNvSpPr/>
           <p:nvPr/>
         </p:nvSpPr>
@@ -19301,7 +20457,7 @@
       </p:sp>
       <p:sp>
         <p:nvSpPr>
-          <p:cNvPr id="10" name="Shape 8"/>
+          <p:cNvPr id="12" name="Shape 10"/>
           <p:cNvSpPr/>
           <p:nvPr/>
         </p:nvSpPr>
@@ -19328,7 +20484,7 @@
       </p:sp>
       <p:pic>
         <p:nvPicPr>
-          <p:cNvPr id="11" name="Image 0" descr="preencoded.png">    </p:cNvPr>
+          <p:cNvPr id="13" name="Image 0" descr="preencoded.png">    </p:cNvPr>
           <p:cNvPicPr>
             <a:picLocks noChangeAspect="1"/>
           </p:cNvPicPr>
@@ -19358,7 +20514,7 @@
       </p:pic>
       <p:sp>
         <p:nvSpPr>
-          <p:cNvPr id="12" name="Shape 9"/>
+          <p:cNvPr id="14" name="Shape 11"/>
           <p:cNvSpPr/>
           <p:nvPr/>
         </p:nvSpPr>
@@ -19399,7 +20555,7 @@
       </p:sp>
       <p:pic>
         <p:nvPicPr>
-          <p:cNvPr id="13" name="Image 1" descr="preencoded.png">    </p:cNvPr>
+          <p:cNvPr id="15" name="Image 1" descr="preencoded.png">    </p:cNvPr>
           <p:cNvPicPr>
             <a:picLocks noChangeAspect="1"/>
           </p:cNvPicPr>
@@ -19429,7 +20585,7 @@
       </p:pic>
       <p:sp>
         <p:nvSpPr>
-          <p:cNvPr id="14" name="Shape 10"/>
+          <p:cNvPr id="16" name="Shape 12"/>
           <p:cNvSpPr/>
           <p:nvPr/>
         </p:nvSpPr>
@@ -19470,7 +20626,7 @@
       </p:sp>
       <p:pic>
         <p:nvPicPr>
-          <p:cNvPr id="15" name="Image 2" descr="preencoded.png">    </p:cNvPr>
+          <p:cNvPr id="17" name="Image 2" descr="preencoded.png">    </p:cNvPr>
           <p:cNvPicPr>
             <a:picLocks noChangeAspect="1"/>
           </p:cNvPicPr>
@@ -19500,7 +20656,7 @@
       </p:pic>
       <p:sp>
         <p:nvSpPr>
-          <p:cNvPr id="16" name="Shape 11"/>
+          <p:cNvPr id="18" name="Shape 13"/>
           <p:cNvSpPr/>
           <p:nvPr/>
         </p:nvSpPr>
@@ -19541,7 +20697,7 @@
       </p:sp>
       <p:sp>
         <p:nvSpPr>
-          <p:cNvPr id="17" name="Shape 12"/>
+          <p:cNvPr id="19" name="Shape 14"/>
           <p:cNvSpPr/>
           <p:nvPr/>
         </p:nvSpPr>
@@ -19568,7 +20724,7 @@
       </p:sp>
       <p:sp>
         <p:nvSpPr>
-          <p:cNvPr id="18" name="mdpr:mixed-object-packing-438299:title:__title:mixed-object-packing-438299"/>
+          <p:cNvPr id="20" name="mdpr:mixed-object-packing-438299:title:__title:mixed-object-packing-438299"/>
           <p:cNvSpPr txBox="1"/>
           <p:nvPr/>
         </p:nvSpPr>
@@ -19610,7 +20766,7 @@
       </p:sp>
       <p:graphicFrame>
         <p:nvGraphicFramePr>
-          <p:cNvPr id="19" name="Chart 0" descr=""/>
+          <p:cNvPr id="21" name="Chart 0" descr=""/>
           <p:cNvGraphicFramePr/>
           <p:nvPr/>
         </p:nvGraphicFramePr>
@@ -20068,7 +21224,7 @@
       </p:graphicFrame>
       <p:sp>
         <p:nvSpPr>
-          <p:cNvPr id="21" name="mdpr:mixed-object-packing-438299:body:block-36"/>
+          <p:cNvPr id="23" name="mdpr:mixed-object-packing-438299:body:block-36"/>
           <p:cNvSpPr txBox="1"/>
           <p:nvPr/>
         </p:nvSpPr>
@@ -20167,7 +21323,7 @@
       </p:sp>
       <p:pic>
         <p:nvPicPr>
-          <p:cNvPr id="22" name="mdpr:mixed-object-packing-438299:image-1:block-39" descr="{&quot;mdpr&quot;:{&quot;slideId&quot;:&quot;mixed-object-packing-438299&quot;,&quot;layoutSlideId&quot;:&quot;layout-mixed-object-packing-438299&quot;,&quot;regionId&quot;:&quot;image-1&quot;,&quot;blockIds&quot;:[&quot;block-39&quot;],&quot;objectKind&quot;:&quot;native-image&quot;,&quot;role&quot;:&quot;image&quot;,&quot;editable&quot;:false}}">    </p:cNvPr>
+          <p:cNvPr id="24" name="mdpr:mixed-object-packing-438299:image-1:block-39" descr="{&quot;mdpr&quot;:{&quot;slideId&quot;:&quot;mixed-object-packing-438299&quot;,&quot;layoutSlideId&quot;:&quot;layout-mixed-object-packing-438299&quot;,&quot;regionId&quot;:&quot;image-1&quot;,&quot;blockIds&quot;:[&quot;block-39&quot;],&quot;objectKind&quot;:&quot;native-image&quot;,&quot;role&quot;:&quot;image&quot;,&quot;editable&quot;:false}}">    </p:cNvPr>
           <p:cNvPicPr>
             <a:picLocks noChangeAspect="1"/>
           </p:cNvPicPr>
@@ -20235,6 +21391,49 @@
         </p:nvSpPr>
         <p:spPr>
           <a:xfrm>
+            <a:off x="310896" y="256032"/>
+            <a:ext cx="10893247" cy="5779008"/>
+          </a:xfrm>
+          <a:prstGeom prst="roundRect">
+            <a:avLst>
+              <a:gd name="adj" fmla="val 1899"/>
+            </a:avLst>
+          </a:prstGeom>
+          <a:solidFill>
+            <a:srgbClr val="8A4FFF">
+              <a:alpha val="26000"/>
+            </a:srgbClr>
+          </a:solidFill>
+          <a:ln w="12700">
+            <a:solidFill>
+              <a:srgbClr val="FFFFFF">
+                <a:alpha val="14000"/>
+              </a:srgbClr>
+            </a:solidFill>
+            <a:prstDash val="solid"/>
+          </a:ln>
+          <a:effectLst>
+            <a:outerShdw sx="100000" sy="100000" kx="0" ky="0" algn="bl" rotWithShape="0" blurRad="12700" dist="50800" dir="2700000">
+              <a:srgbClr val="8A4FFF">
+                <a:alpha val="10000"/>
+              </a:srgbClr>
+            </a:outerShdw>
+            <a:glow rad="63500">
+              <a:srgbClr val="8A4FFF">
+                <a:alpha val="23000"/>
+              </a:srgbClr>
+            </a:glow>
+          </a:effectLst>
+        </p:spPr>
+      </p:sp>
+      <p:sp>
+        <p:nvSpPr>
+          <p:cNvPr id="3" name="Shape 1"/>
+          <p:cNvSpPr/>
+          <p:nvPr/>
+        </p:nvSpPr>
+        <p:spPr>
+          <a:xfrm>
             <a:off x="566928" y="475488"/>
             <a:ext cx="11057839" cy="5907024"/>
           </a:xfrm>
@@ -20272,7 +21471,7 @@
       </p:sp>
       <p:sp>
         <p:nvSpPr>
-          <p:cNvPr id="3" name="Shape 1"/>
+          <p:cNvPr id="4" name="Shape 2"/>
           <p:cNvSpPr/>
           <p:nvPr/>
         </p:nvSpPr>
@@ -20301,7 +21500,7 @@
       </p:sp>
       <p:sp>
         <p:nvSpPr>
-          <p:cNvPr id="4" name="Shape 2"/>
+          <p:cNvPr id="5" name="Shape 3"/>
           <p:cNvSpPr/>
           <p:nvPr/>
         </p:nvSpPr>
@@ -20330,7 +21529,7 @@
       </p:sp>
       <p:sp>
         <p:nvSpPr>
-          <p:cNvPr id="5" name="Shape 3"/>
+          <p:cNvPr id="6" name="Shape 4"/>
           <p:cNvSpPr/>
           <p:nvPr/>
         </p:nvSpPr>
@@ -20359,7 +21558,7 @@
       </p:sp>
       <p:sp>
         <p:nvSpPr>
-          <p:cNvPr id="6" name="Shape 4"/>
+          <p:cNvPr id="7" name="Shape 5"/>
           <p:cNvSpPr/>
           <p:nvPr/>
         </p:nvSpPr>
@@ -20384,7 +21583,7 @@
       </p:sp>
       <p:sp>
         <p:nvSpPr>
-          <p:cNvPr id="7" name="Shape 5"/>
+          <p:cNvPr id="8" name="Shape 6"/>
           <p:cNvSpPr/>
           <p:nvPr/>
         </p:nvSpPr>
@@ -20409,7 +21608,32 @@
       </p:sp>
       <p:sp>
         <p:nvSpPr>
-          <p:cNvPr id="8" name="Shape 6"/>
+          <p:cNvPr id="9" name="Shape 7"/>
+          <p:cNvSpPr/>
+          <p:nvPr/>
+        </p:nvSpPr>
+        <p:spPr>
+          <a:xfrm>
+            <a:off x="9631375" y="603504"/>
+            <a:ext cx="1353312" cy="0"/>
+          </a:xfrm>
+          <a:prstGeom prst="line">
+            <a:avLst/>
+          </a:prstGeom>
+          <a:noFill/>
+          <a:ln w="12700">
+            <a:solidFill>
+              <a:srgbClr val="FFFFFF">
+                <a:alpha val="54000"/>
+              </a:srgbClr>
+            </a:solidFill>
+            <a:prstDash val="solid"/>
+          </a:ln>
+        </p:spPr>
+      </p:sp>
+      <p:sp>
+        <p:nvSpPr>
+          <p:cNvPr id="10" name="Shape 8"/>
           <p:cNvSpPr/>
           <p:nvPr/>
         </p:nvSpPr>
@@ -20436,7 +21660,7 @@
       </p:sp>
       <p:sp>
         <p:nvSpPr>
-          <p:cNvPr id="9" name="Shape 7"/>
+          <p:cNvPr id="11" name="Shape 9"/>
           <p:cNvSpPr/>
           <p:nvPr/>
         </p:nvSpPr>
@@ -20463,7 +21687,7 @@
       </p:sp>
       <p:sp>
         <p:nvSpPr>
-          <p:cNvPr id="10" name="Shape 8"/>
+          <p:cNvPr id="12" name="Shape 10"/>
           <p:cNvSpPr/>
           <p:nvPr/>
         </p:nvSpPr>
@@ -20490,7 +21714,7 @@
       </p:sp>
       <p:pic>
         <p:nvPicPr>
-          <p:cNvPr id="11" name="Image 0" descr="preencoded.png">    </p:cNvPr>
+          <p:cNvPr id="13" name="Image 0" descr="preencoded.png">    </p:cNvPr>
           <p:cNvPicPr>
             <a:picLocks noChangeAspect="1"/>
           </p:cNvPicPr>
@@ -20520,7 +21744,7 @@
       </p:pic>
       <p:sp>
         <p:nvSpPr>
-          <p:cNvPr id="12" name="Shape 9"/>
+          <p:cNvPr id="14" name="Shape 11"/>
           <p:cNvSpPr/>
           <p:nvPr/>
         </p:nvSpPr>
@@ -20561,7 +21785,7 @@
       </p:sp>
       <p:pic>
         <p:nvPicPr>
-          <p:cNvPr id="13" name="Image 1" descr="preencoded.png">    </p:cNvPr>
+          <p:cNvPr id="15" name="Image 1" descr="preencoded.png">    </p:cNvPr>
           <p:cNvPicPr>
             <a:picLocks noChangeAspect="1"/>
           </p:cNvPicPr>
@@ -20591,7 +21815,7 @@
       </p:pic>
       <p:sp>
         <p:nvSpPr>
-          <p:cNvPr id="14" name="Shape 10"/>
+          <p:cNvPr id="16" name="Shape 12"/>
           <p:cNvSpPr/>
           <p:nvPr/>
         </p:nvSpPr>
@@ -20632,7 +21856,7 @@
       </p:sp>
       <p:pic>
         <p:nvPicPr>
-          <p:cNvPr id="15" name="Image 2" descr="preencoded.png">    </p:cNvPr>
+          <p:cNvPr id="17" name="Image 2" descr="preencoded.png">    </p:cNvPr>
           <p:cNvPicPr>
             <a:picLocks noChangeAspect="1"/>
           </p:cNvPicPr>
@@ -20662,7 +21886,7 @@
       </p:pic>
       <p:sp>
         <p:nvSpPr>
-          <p:cNvPr id="16" name="Shape 11"/>
+          <p:cNvPr id="18" name="Shape 13"/>
           <p:cNvSpPr/>
           <p:nvPr/>
         </p:nvSpPr>
@@ -20703,7 +21927,7 @@
       </p:sp>
       <p:sp>
         <p:nvSpPr>
-          <p:cNvPr id="17" name="Shape 12"/>
+          <p:cNvPr id="19" name="Shape 14"/>
           <p:cNvSpPr/>
           <p:nvPr/>
         </p:nvSpPr>
@@ -20732,7 +21956,7 @@
       </p:sp>
       <p:sp>
         <p:nvSpPr>
-          <p:cNvPr id="18" name="Shape 13"/>
+          <p:cNvPr id="20" name="Shape 15"/>
           <p:cNvSpPr/>
           <p:nvPr/>
         </p:nvSpPr>
@@ -20759,7 +21983,7 @@
       </p:sp>
       <p:sp>
         <p:nvSpPr>
-          <p:cNvPr id="19" name="Shape 14"/>
+          <p:cNvPr id="21" name="Shape 16"/>
           <p:cNvSpPr/>
           <p:nvPr/>
         </p:nvSpPr>
@@ -20786,7 +22010,7 @@
       </p:sp>
       <p:sp>
         <p:nvSpPr>
-          <p:cNvPr id="20" name="Shape 15"/>
+          <p:cNvPr id="22" name="Shape 17"/>
           <p:cNvSpPr/>
           <p:nvPr/>
         </p:nvSpPr>
@@ -20813,7 +22037,7 @@
       </p:sp>
       <p:sp>
         <p:nvSpPr>
-          <p:cNvPr id="21" name="mdpr:actions-output-review-326e07:title:__title:actions-output-review-326e07"/>
+          <p:cNvPr id="23" name="mdpr:actions-output-review-326e07:title:__title:actions-output-review-326e07"/>
           <p:cNvSpPr txBox="1"/>
           <p:nvPr/>
         </p:nvSpPr>
@@ -20855,7 +22079,7 @@
       </p:sp>
       <p:sp>
         <p:nvSpPr>
-          <p:cNvPr id="22" name="Shape 17"/>
+          <p:cNvPr id="24" name="Shape 19"/>
           <p:cNvSpPr/>
           <p:nvPr/>
         </p:nvSpPr>
@@ -20882,7 +22106,7 @@
       </p:sp>
       <p:pic>
         <p:nvPicPr>
-          <p:cNvPr id="23" name="Image 3" descr="flow icon from tabler-icons (MIT)">    </p:cNvPr>
+          <p:cNvPr id="25" name="Image 3" descr="flow icon from tabler-icons (MIT)">    </p:cNvPr>
           <p:cNvPicPr>
             <a:picLocks noChangeAspect="1"/>
           </p:cNvPicPr>
@@ -20912,7 +22136,7 @@
       </p:pic>
       <p:sp>
         <p:nvSpPr>
-          <p:cNvPr id="24" name="mdpr:actions-output-review-326e07:item-1:block-41"/>
+          <p:cNvPr id="26" name="mdpr:actions-output-review-326e07:item-1:block-41"/>
           <p:cNvSpPr txBox="1"/>
           <p:nvPr/>
         </p:nvSpPr>
@@ -20971,7 +22195,7 @@
       </p:sp>
       <p:sp>
         <p:nvSpPr>
-          <p:cNvPr id="25" name="Shape 19"/>
+          <p:cNvPr id="27" name="Shape 21"/>
           <p:cNvSpPr/>
           <p:nvPr/>
         </p:nvSpPr>
@@ -20998,7 +22222,7 @@
       </p:sp>
       <p:pic>
         <p:nvPicPr>
-          <p:cNvPr id="26" name="Image 4" descr="verified icon from tabler-icons (MIT)">    </p:cNvPr>
+          <p:cNvPr id="28" name="Image 4" descr="verified icon from tabler-icons (MIT)">    </p:cNvPr>
           <p:cNvPicPr>
             <a:picLocks noChangeAspect="1"/>
           </p:cNvPicPr>
@@ -21028,7 +22252,7 @@
       </p:pic>
       <p:sp>
         <p:nvSpPr>
-          <p:cNvPr id="27" name="mdpr:actions-output-review-326e07:item-2:block-41"/>
+          <p:cNvPr id="29" name="mdpr:actions-output-review-326e07:item-2:block-41"/>
           <p:cNvSpPr txBox="1"/>
           <p:nvPr/>
         </p:nvSpPr>
@@ -21087,7 +22311,7 @@
       </p:sp>
       <p:sp>
         <p:nvSpPr>
-          <p:cNvPr id="28" name="Shape 21"/>
+          <p:cNvPr id="30" name="Shape 23"/>
           <p:cNvSpPr/>
           <p:nvPr/>
         </p:nvSpPr>
@@ -21114,7 +22338,7 @@
       </p:sp>
       <p:pic>
         <p:nvPicPr>
-          <p:cNvPr id="29" name="Image 5" descr="spark icon from tabler-icons (MIT)">    </p:cNvPr>
+          <p:cNvPr id="31" name="Image 5" descr="spark icon from tabler-icons (MIT)">    </p:cNvPr>
           <p:cNvPicPr>
             <a:picLocks noChangeAspect="1"/>
           </p:cNvPicPr>
@@ -21144,7 +22368,7 @@
       </p:pic>
       <p:sp>
         <p:nvSpPr>
-          <p:cNvPr id="30" name="mdpr:actions-output-review-326e07:item-3:block-41"/>
+          <p:cNvPr id="32" name="mdpr:actions-output-review-326e07:item-3:block-41"/>
           <p:cNvSpPr txBox="1"/>
           <p:nvPr/>
         </p:nvSpPr>
@@ -21241,6 +22465,49 @@
         </p:nvSpPr>
         <p:spPr>
           <a:xfrm>
+            <a:off x="310896" y="256032"/>
+            <a:ext cx="10893247" cy="5779008"/>
+          </a:xfrm>
+          <a:prstGeom prst="roundRect">
+            <a:avLst>
+              <a:gd name="adj" fmla="val 1899"/>
+            </a:avLst>
+          </a:prstGeom>
+          <a:solidFill>
+            <a:srgbClr val="8A4FFF">
+              <a:alpha val="26000"/>
+            </a:srgbClr>
+          </a:solidFill>
+          <a:ln w="12700">
+            <a:solidFill>
+              <a:srgbClr val="FFFFFF">
+                <a:alpha val="14000"/>
+              </a:srgbClr>
+            </a:solidFill>
+            <a:prstDash val="solid"/>
+          </a:ln>
+          <a:effectLst>
+            <a:outerShdw sx="100000" sy="100000" kx="0" ky="0" algn="bl" rotWithShape="0" blurRad="12700" dist="50800" dir="2700000">
+              <a:srgbClr val="8A4FFF">
+                <a:alpha val="10000"/>
+              </a:srgbClr>
+            </a:outerShdw>
+            <a:glow rad="63500">
+              <a:srgbClr val="8A4FFF">
+                <a:alpha val="23000"/>
+              </a:srgbClr>
+            </a:glow>
+          </a:effectLst>
+        </p:spPr>
+      </p:sp>
+      <p:sp>
+        <p:nvSpPr>
+          <p:cNvPr id="3" name="Shape 1"/>
+          <p:cNvSpPr/>
+          <p:nvPr/>
+        </p:nvSpPr>
+        <p:spPr>
+          <a:xfrm>
             <a:off x="566928" y="475488"/>
             <a:ext cx="11057839" cy="5907024"/>
           </a:xfrm>
@@ -21278,7 +22545,7 @@
       </p:sp>
       <p:sp>
         <p:nvSpPr>
-          <p:cNvPr id="3" name="Shape 1"/>
+          <p:cNvPr id="4" name="Shape 2"/>
           <p:cNvSpPr/>
           <p:nvPr/>
         </p:nvSpPr>
@@ -21307,7 +22574,7 @@
       </p:sp>
       <p:sp>
         <p:nvSpPr>
-          <p:cNvPr id="4" name="Shape 2"/>
+          <p:cNvPr id="5" name="Shape 3"/>
           <p:cNvSpPr/>
           <p:nvPr/>
         </p:nvSpPr>
@@ -21336,7 +22603,7 @@
       </p:sp>
       <p:sp>
         <p:nvSpPr>
-          <p:cNvPr id="5" name="Shape 3"/>
+          <p:cNvPr id="6" name="Shape 4"/>
           <p:cNvSpPr/>
           <p:nvPr/>
         </p:nvSpPr>
@@ -21365,7 +22632,7 @@
       </p:sp>
       <p:sp>
         <p:nvSpPr>
-          <p:cNvPr id="6" name="Shape 4"/>
+          <p:cNvPr id="7" name="Shape 5"/>
           <p:cNvSpPr/>
           <p:nvPr/>
         </p:nvSpPr>
@@ -21390,7 +22657,7 @@
       </p:sp>
       <p:sp>
         <p:nvSpPr>
-          <p:cNvPr id="7" name="Shape 5"/>
+          <p:cNvPr id="8" name="Shape 6"/>
           <p:cNvSpPr/>
           <p:nvPr/>
         </p:nvSpPr>
@@ -21415,7 +22682,32 @@
       </p:sp>
       <p:sp>
         <p:nvSpPr>
-          <p:cNvPr id="8" name="Shape 6"/>
+          <p:cNvPr id="9" name="Shape 7"/>
+          <p:cNvSpPr/>
+          <p:nvPr/>
+        </p:nvSpPr>
+        <p:spPr>
+          <a:xfrm>
+            <a:off x="9631375" y="603504"/>
+            <a:ext cx="1353312" cy="0"/>
+          </a:xfrm>
+          <a:prstGeom prst="line">
+            <a:avLst/>
+          </a:prstGeom>
+          <a:noFill/>
+          <a:ln w="12700">
+            <a:solidFill>
+              <a:srgbClr val="FFFFFF">
+                <a:alpha val="54000"/>
+              </a:srgbClr>
+            </a:solidFill>
+            <a:prstDash val="solid"/>
+          </a:ln>
+        </p:spPr>
+      </p:sp>
+      <p:sp>
+        <p:nvSpPr>
+          <p:cNvPr id="10" name="Shape 8"/>
           <p:cNvSpPr/>
           <p:nvPr/>
         </p:nvSpPr>
@@ -21442,7 +22734,7 @@
       </p:sp>
       <p:sp>
         <p:nvSpPr>
-          <p:cNvPr id="9" name="Shape 7"/>
+          <p:cNvPr id="11" name="Shape 9"/>
           <p:cNvSpPr/>
           <p:nvPr/>
         </p:nvSpPr>
@@ -21469,7 +22761,7 @@
       </p:sp>
       <p:sp>
         <p:nvSpPr>
-          <p:cNvPr id="10" name="Shape 8"/>
+          <p:cNvPr id="12" name="Shape 10"/>
           <p:cNvSpPr/>
           <p:nvPr/>
         </p:nvSpPr>
@@ -21496,7 +22788,7 @@
       </p:sp>
       <p:sp>
         <p:nvSpPr>
-          <p:cNvPr id="11" name="Shape 9"/>
+          <p:cNvPr id="13" name="Shape 11"/>
           <p:cNvSpPr/>
           <p:nvPr/>
         </p:nvSpPr>
@@ -21523,7 +22815,7 @@
       </p:sp>
       <p:sp>
         <p:nvSpPr>
-          <p:cNvPr id="12" name="Shape 10"/>
+          <p:cNvPr id="14" name="Shape 12"/>
           <p:cNvSpPr/>
           <p:nvPr/>
         </p:nvSpPr>
@@ -21550,7 +22842,7 @@
       </p:sp>
       <p:sp>
         <p:nvSpPr>
-          <p:cNvPr id="13" name="Shape 11"/>
+          <p:cNvPr id="15" name="Shape 13"/>
           <p:cNvSpPr/>
           <p:nvPr/>
         </p:nvSpPr>
@@ -21577,7 +22869,7 @@
       </p:sp>
       <p:sp>
         <p:nvSpPr>
-          <p:cNvPr id="14" name="mdpr:2-2-7bfb60:title:__title:2-2-7bfb60"/>
+          <p:cNvPr id="16" name="mdpr:2-2-7bfb60:title:__title:2-2-7bfb60"/>
           <p:cNvSpPr txBox="1"/>
           <p:nvPr/>
         </p:nvSpPr>
@@ -21619,7 +22911,7 @@
       </p:sp>
       <p:sp>
         <p:nvSpPr>
-          <p:cNvPr id="15" name="mdpr:2-2-7bfb60:toc-item-1:toc-item-15"/>
+          <p:cNvPr id="17" name="mdpr:2-2-7bfb60:toc-item-1:toc-item-15"/>
           <p:cNvSpPr txBox="1"/>
           <p:nvPr/>
         </p:nvSpPr>
@@ -21699,6 +22991,49 @@
         </p:nvSpPr>
         <p:spPr>
           <a:xfrm>
+            <a:off x="310896" y="256032"/>
+            <a:ext cx="10893247" cy="5779008"/>
+          </a:xfrm>
+          <a:prstGeom prst="roundRect">
+            <a:avLst>
+              <a:gd name="adj" fmla="val 1899"/>
+            </a:avLst>
+          </a:prstGeom>
+          <a:solidFill>
+            <a:srgbClr val="8A4FFF">
+              <a:alpha val="26000"/>
+            </a:srgbClr>
+          </a:solidFill>
+          <a:ln w="12700">
+            <a:solidFill>
+              <a:srgbClr val="FFFFFF">
+                <a:alpha val="14000"/>
+              </a:srgbClr>
+            </a:solidFill>
+            <a:prstDash val="solid"/>
+          </a:ln>
+          <a:effectLst>
+            <a:outerShdw sx="100000" sy="100000" kx="0" ky="0" algn="bl" rotWithShape="0" blurRad="12700" dist="50800" dir="2700000">
+              <a:srgbClr val="8A4FFF">
+                <a:alpha val="10000"/>
+              </a:srgbClr>
+            </a:outerShdw>
+            <a:glow rad="63500">
+              <a:srgbClr val="8A4FFF">
+                <a:alpha val="23000"/>
+              </a:srgbClr>
+            </a:glow>
+          </a:effectLst>
+        </p:spPr>
+      </p:sp>
+      <p:sp>
+        <p:nvSpPr>
+          <p:cNvPr id="3" name="Shape 1"/>
+          <p:cNvSpPr/>
+          <p:nvPr/>
+        </p:nvSpPr>
+        <p:spPr>
+          <a:xfrm>
             <a:off x="566928" y="475488"/>
             <a:ext cx="11057839" cy="5907024"/>
           </a:xfrm>
@@ -21736,7 +23071,7 @@
       </p:sp>
       <p:sp>
         <p:nvSpPr>
-          <p:cNvPr id="3" name="Shape 1"/>
+          <p:cNvPr id="4" name="Shape 2"/>
           <p:cNvSpPr/>
           <p:nvPr/>
         </p:nvSpPr>
@@ -21765,7 +23100,7 @@
       </p:sp>
       <p:sp>
         <p:nvSpPr>
-          <p:cNvPr id="4" name="Shape 2"/>
+          <p:cNvPr id="5" name="Shape 3"/>
           <p:cNvSpPr/>
           <p:nvPr/>
         </p:nvSpPr>
@@ -21794,7 +23129,7 @@
       </p:sp>
       <p:sp>
         <p:nvSpPr>
-          <p:cNvPr id="5" name="Shape 3"/>
+          <p:cNvPr id="6" name="Shape 4"/>
           <p:cNvSpPr/>
           <p:nvPr/>
         </p:nvSpPr>
@@ -21823,7 +23158,7 @@
       </p:sp>
       <p:sp>
         <p:nvSpPr>
-          <p:cNvPr id="6" name="Shape 4"/>
+          <p:cNvPr id="7" name="Shape 5"/>
           <p:cNvSpPr/>
           <p:nvPr/>
         </p:nvSpPr>
@@ -21848,7 +23183,7 @@
       </p:sp>
       <p:sp>
         <p:nvSpPr>
-          <p:cNvPr id="7" name="Shape 5"/>
+          <p:cNvPr id="8" name="Shape 6"/>
           <p:cNvSpPr/>
           <p:nvPr/>
         </p:nvSpPr>
@@ -21873,7 +23208,32 @@
       </p:sp>
       <p:sp>
         <p:nvSpPr>
-          <p:cNvPr id="8" name="Shape 6"/>
+          <p:cNvPr id="9" name="Shape 7"/>
+          <p:cNvSpPr/>
+          <p:nvPr/>
+        </p:nvSpPr>
+        <p:spPr>
+          <a:xfrm>
+            <a:off x="9631375" y="603504"/>
+            <a:ext cx="1353312" cy="0"/>
+          </a:xfrm>
+          <a:prstGeom prst="line">
+            <a:avLst/>
+          </a:prstGeom>
+          <a:noFill/>
+          <a:ln w="12700">
+            <a:solidFill>
+              <a:srgbClr val="FFFFFF">
+                <a:alpha val="54000"/>
+              </a:srgbClr>
+            </a:solidFill>
+            <a:prstDash val="solid"/>
+          </a:ln>
+        </p:spPr>
+      </p:sp>
+      <p:sp>
+        <p:nvSpPr>
+          <p:cNvPr id="10" name="Shape 8"/>
           <p:cNvSpPr/>
           <p:nvPr/>
         </p:nvSpPr>
@@ -21900,7 +23260,7 @@
       </p:sp>
       <p:sp>
         <p:nvSpPr>
-          <p:cNvPr id="9" name="Shape 7"/>
+          <p:cNvPr id="11" name="Shape 9"/>
           <p:cNvSpPr/>
           <p:nvPr/>
         </p:nvSpPr>
@@ -21927,7 +23287,7 @@
       </p:sp>
       <p:sp>
         <p:nvSpPr>
-          <p:cNvPr id="10" name="Shape 8"/>
+          <p:cNvPr id="12" name="Shape 10"/>
           <p:cNvSpPr/>
           <p:nvPr/>
         </p:nvSpPr>
@@ -21954,7 +23314,7 @@
       </p:sp>
       <p:pic>
         <p:nvPicPr>
-          <p:cNvPr id="11" name="Image 0" descr="preencoded.png">    </p:cNvPr>
+          <p:cNvPr id="13" name="Image 0" descr="preencoded.png">    </p:cNvPr>
           <p:cNvPicPr>
             <a:picLocks noChangeAspect="1"/>
           </p:cNvPicPr>
@@ -21984,7 +23344,7 @@
       </p:pic>
       <p:sp>
         <p:nvSpPr>
-          <p:cNvPr id="12" name="Shape 9"/>
+          <p:cNvPr id="14" name="Shape 11"/>
           <p:cNvSpPr/>
           <p:nvPr/>
         </p:nvSpPr>
@@ -22025,7 +23385,7 @@
       </p:sp>
       <p:sp>
         <p:nvSpPr>
-          <p:cNvPr id="13" name="Shape 10"/>
+          <p:cNvPr id="15" name="Shape 12"/>
           <p:cNvSpPr/>
           <p:nvPr/>
         </p:nvSpPr>
@@ -22054,7 +23414,7 @@
       </p:sp>
       <p:sp>
         <p:nvSpPr>
-          <p:cNvPr id="14" name="Shape 11"/>
+          <p:cNvPr id="16" name="Shape 13"/>
           <p:cNvSpPr/>
           <p:nvPr/>
         </p:nvSpPr>
@@ -22081,7 +23441,7 @@
       </p:sp>
       <p:sp>
         <p:nvSpPr>
-          <p:cNvPr id="15" name="mdpr:teaser-summary-7731dc:title:__title:teaser-summary-7731dc"/>
+          <p:cNvPr id="17" name="mdpr:teaser-summary-7731dc:title:__title:teaser-summary-7731dc"/>
           <p:cNvSpPr txBox="1"/>
           <p:nvPr/>
         </p:nvSpPr>
@@ -22123,7 +23483,7 @@
       </p:sp>
       <p:sp>
         <p:nvSpPr>
-          <p:cNvPr id="16" name="mdpr:teaser-summary-7731dc:key-message:block-3"/>
+          <p:cNvPr id="18" name="mdpr:teaser-summary-7731dc:key-message:block-3"/>
           <p:cNvSpPr txBox="1"/>
           <p:nvPr/>
         </p:nvSpPr>
@@ -22165,7 +23525,7 @@
       </p:sp>
       <p:sp>
         <p:nvSpPr>
-          <p:cNvPr id="17" name="mdpr:teaser-summary-7731dc:body:block-4"/>
+          <p:cNvPr id="19" name="mdpr:teaser-summary-7731dc:body:block-4"/>
           <p:cNvSpPr txBox="1"/>
           <p:nvPr/>
         </p:nvSpPr>
@@ -22382,6 +23742,49 @@
         </p:nvSpPr>
         <p:spPr>
           <a:xfrm>
+            <a:off x="310896" y="256032"/>
+            <a:ext cx="10893247" cy="5779008"/>
+          </a:xfrm>
+          <a:prstGeom prst="roundRect">
+            <a:avLst>
+              <a:gd name="adj" fmla="val 1899"/>
+            </a:avLst>
+          </a:prstGeom>
+          <a:solidFill>
+            <a:srgbClr val="8A4FFF">
+              <a:alpha val="26000"/>
+            </a:srgbClr>
+          </a:solidFill>
+          <a:ln w="12700">
+            <a:solidFill>
+              <a:srgbClr val="FFFFFF">
+                <a:alpha val="14000"/>
+              </a:srgbClr>
+            </a:solidFill>
+            <a:prstDash val="solid"/>
+          </a:ln>
+          <a:effectLst>
+            <a:outerShdw sx="100000" sy="100000" kx="0" ky="0" algn="bl" rotWithShape="0" blurRad="12700" dist="50800" dir="2700000">
+              <a:srgbClr val="8A4FFF">
+                <a:alpha val="10000"/>
+              </a:srgbClr>
+            </a:outerShdw>
+            <a:glow rad="63500">
+              <a:srgbClr val="8A4FFF">
+                <a:alpha val="23000"/>
+              </a:srgbClr>
+            </a:glow>
+          </a:effectLst>
+        </p:spPr>
+      </p:sp>
+      <p:sp>
+        <p:nvSpPr>
+          <p:cNvPr id="3" name="Shape 1"/>
+          <p:cNvSpPr/>
+          <p:nvPr/>
+        </p:nvSpPr>
+        <p:spPr>
+          <a:xfrm>
             <a:off x="566928" y="475488"/>
             <a:ext cx="11057839" cy="5907024"/>
           </a:xfrm>
@@ -22419,7 +23822,7 @@
       </p:sp>
       <p:sp>
         <p:nvSpPr>
-          <p:cNvPr id="3" name="Shape 1"/>
+          <p:cNvPr id="4" name="Shape 2"/>
           <p:cNvSpPr/>
           <p:nvPr/>
         </p:nvSpPr>
@@ -22448,7 +23851,7 @@
       </p:sp>
       <p:sp>
         <p:nvSpPr>
-          <p:cNvPr id="4" name="Shape 2"/>
+          <p:cNvPr id="5" name="Shape 3"/>
           <p:cNvSpPr/>
           <p:nvPr/>
         </p:nvSpPr>
@@ -22477,7 +23880,7 @@
       </p:sp>
       <p:sp>
         <p:nvSpPr>
-          <p:cNvPr id="5" name="Shape 3"/>
+          <p:cNvPr id="6" name="Shape 4"/>
           <p:cNvSpPr/>
           <p:nvPr/>
         </p:nvSpPr>
@@ -22506,7 +23909,7 @@
       </p:sp>
       <p:sp>
         <p:nvSpPr>
-          <p:cNvPr id="6" name="Shape 4"/>
+          <p:cNvPr id="7" name="Shape 5"/>
           <p:cNvSpPr/>
           <p:nvPr/>
         </p:nvSpPr>
@@ -22531,7 +23934,7 @@
       </p:sp>
       <p:sp>
         <p:nvSpPr>
-          <p:cNvPr id="7" name="Shape 5"/>
+          <p:cNvPr id="8" name="Shape 6"/>
           <p:cNvSpPr/>
           <p:nvPr/>
         </p:nvSpPr>
@@ -22556,7 +23959,32 @@
       </p:sp>
       <p:sp>
         <p:nvSpPr>
-          <p:cNvPr id="8" name="Shape 6"/>
+          <p:cNvPr id="9" name="Shape 7"/>
+          <p:cNvSpPr/>
+          <p:nvPr/>
+        </p:nvSpPr>
+        <p:spPr>
+          <a:xfrm>
+            <a:off x="9631375" y="603504"/>
+            <a:ext cx="1353312" cy="0"/>
+          </a:xfrm>
+          <a:prstGeom prst="line">
+            <a:avLst/>
+          </a:prstGeom>
+          <a:noFill/>
+          <a:ln w="12700">
+            <a:solidFill>
+              <a:srgbClr val="FFFFFF">
+                <a:alpha val="54000"/>
+              </a:srgbClr>
+            </a:solidFill>
+            <a:prstDash val="solid"/>
+          </a:ln>
+        </p:spPr>
+      </p:sp>
+      <p:sp>
+        <p:nvSpPr>
+          <p:cNvPr id="10" name="Shape 8"/>
           <p:cNvSpPr/>
           <p:nvPr/>
         </p:nvSpPr>
@@ -22583,7 +24011,7 @@
       </p:sp>
       <p:sp>
         <p:nvSpPr>
-          <p:cNvPr id="9" name="Shape 7"/>
+          <p:cNvPr id="11" name="Shape 9"/>
           <p:cNvSpPr/>
           <p:nvPr/>
         </p:nvSpPr>
@@ -22610,7 +24038,7 @@
       </p:sp>
       <p:sp>
         <p:nvSpPr>
-          <p:cNvPr id="10" name="Shape 8"/>
+          <p:cNvPr id="12" name="Shape 10"/>
           <p:cNvSpPr/>
           <p:nvPr/>
         </p:nvSpPr>
@@ -22637,7 +24065,7 @@
       </p:sp>
       <p:pic>
         <p:nvPicPr>
-          <p:cNvPr id="11" name="Image 0" descr="preencoded.png">    </p:cNvPr>
+          <p:cNvPr id="13" name="Image 0" descr="preencoded.png">    </p:cNvPr>
           <p:cNvPicPr>
             <a:picLocks noChangeAspect="1"/>
           </p:cNvPicPr>
@@ -22667,7 +24095,7 @@
       </p:pic>
       <p:sp>
         <p:nvSpPr>
-          <p:cNvPr id="12" name="Shape 9"/>
+          <p:cNvPr id="14" name="Shape 11"/>
           <p:cNvSpPr/>
           <p:nvPr/>
         </p:nvSpPr>
@@ -22708,7 +24136,7 @@
       </p:sp>
       <p:pic>
         <p:nvPicPr>
-          <p:cNvPr id="13" name="Image 1" descr="preencoded.png">    </p:cNvPr>
+          <p:cNvPr id="15" name="Image 1" descr="preencoded.png">    </p:cNvPr>
           <p:cNvPicPr>
             <a:picLocks noChangeAspect="1"/>
           </p:cNvPicPr>
@@ -22738,7 +24166,7 @@
       </p:pic>
       <p:sp>
         <p:nvSpPr>
-          <p:cNvPr id="14" name="Shape 10"/>
+          <p:cNvPr id="16" name="Shape 12"/>
           <p:cNvSpPr/>
           <p:nvPr/>
         </p:nvSpPr>
@@ -22779,7 +24207,7 @@
       </p:sp>
       <p:pic>
         <p:nvPicPr>
-          <p:cNvPr id="15" name="Image 2" descr="preencoded.png">    </p:cNvPr>
+          <p:cNvPr id="17" name="Image 2" descr="preencoded.png">    </p:cNvPr>
           <p:cNvPicPr>
             <a:picLocks noChangeAspect="1"/>
           </p:cNvPicPr>
@@ -22809,7 +24237,7 @@
       </p:pic>
       <p:sp>
         <p:nvSpPr>
-          <p:cNvPr id="16" name="Shape 11"/>
+          <p:cNvPr id="18" name="Shape 13"/>
           <p:cNvSpPr/>
           <p:nvPr/>
         </p:nvSpPr>
@@ -22850,7 +24278,7 @@
       </p:sp>
       <p:sp>
         <p:nvSpPr>
-          <p:cNvPr id="17" name="Shape 12"/>
+          <p:cNvPr id="19" name="Shape 14"/>
           <p:cNvSpPr/>
           <p:nvPr/>
         </p:nvSpPr>
@@ -22879,7 +24307,7 @@
       </p:sp>
       <p:sp>
         <p:nvSpPr>
-          <p:cNvPr id="18" name="Shape 13"/>
+          <p:cNvPr id="20" name="Shape 15"/>
           <p:cNvSpPr/>
           <p:nvPr/>
         </p:nvSpPr>
@@ -22906,7 +24334,7 @@
       </p:sp>
       <p:sp>
         <p:nvSpPr>
-          <p:cNvPr id="19" name="Shape 14"/>
+          <p:cNvPr id="21" name="Shape 16"/>
           <p:cNvSpPr/>
           <p:nvPr/>
         </p:nvSpPr>
@@ -22933,7 +24361,7 @@
       </p:sp>
       <p:sp>
         <p:nvSpPr>
-          <p:cNvPr id="20" name="Shape 15"/>
+          <p:cNvPr id="22" name="Shape 17"/>
           <p:cNvSpPr/>
           <p:nvPr/>
         </p:nvSpPr>
@@ -22960,7 +24388,7 @@
       </p:sp>
       <p:sp>
         <p:nvSpPr>
-          <p:cNvPr id="21" name="mdpr:1-2-32ac08:title:__title:1-2-32ac08"/>
+          <p:cNvPr id="23" name="mdpr:1-2-32ac08:title:__title:1-2-32ac08"/>
           <p:cNvSpPr txBox="1"/>
           <p:nvPr/>
         </p:nvSpPr>
@@ -23002,7 +24430,7 @@
       </p:sp>
       <p:sp>
         <p:nvSpPr>
-          <p:cNvPr id="22" name="Shape 17"/>
+          <p:cNvPr id="24" name="Shape 19"/>
           <p:cNvSpPr/>
           <p:nvPr/>
         </p:nvSpPr>
@@ -23029,7 +24457,7 @@
       </p:sp>
       <p:pic>
         <p:nvPicPr>
-          <p:cNvPr id="23" name="Image 3" descr="article icon from tabler-icons (MIT)">    </p:cNvPr>
+          <p:cNvPr id="25" name="Image 3" descr="article icon from tabler-icons (MIT)">    </p:cNvPr>
           <p:cNvPicPr>
             <a:picLocks noChangeAspect="1"/>
           </p:cNvPicPr>
@@ -23059,7 +24487,7 @@
       </p:pic>
       <p:sp>
         <p:nvSpPr>
-          <p:cNvPr id="24" name="mdpr:1-2-32ac08:item-1:block-6-chunk-1"/>
+          <p:cNvPr id="26" name="mdpr:1-2-32ac08:item-1:block-6-chunk-1"/>
           <p:cNvSpPr txBox="1"/>
           <p:nvPr/>
         </p:nvSpPr>
@@ -23118,7 +24546,7 @@
       </p:sp>
       <p:sp>
         <p:nvSpPr>
-          <p:cNvPr id="25" name="Shape 19"/>
+          <p:cNvPr id="27" name="Shape 21"/>
           <p:cNvSpPr/>
           <p:nvPr/>
         </p:nvSpPr>
@@ -23145,7 +24573,7 @@
       </p:sp>
       <p:pic>
         <p:nvPicPr>
-          <p:cNvPr id="26" name="Image 4" descr="chart icon from tabler-icons (MIT)">    </p:cNvPr>
+          <p:cNvPr id="28" name="Image 4" descr="chart icon from tabler-icons (MIT)">    </p:cNvPr>
           <p:cNvPicPr>
             <a:picLocks noChangeAspect="1"/>
           </p:cNvPicPr>
@@ -23175,7 +24603,7 @@
       </p:pic>
       <p:sp>
         <p:nvSpPr>
-          <p:cNvPr id="27" name="mdpr:1-2-32ac08:item-2:block-6-chunk-1"/>
+          <p:cNvPr id="29" name="mdpr:1-2-32ac08:item-2:block-6-chunk-1"/>
           <p:cNvSpPr txBox="1"/>
           <p:nvPr/>
         </p:nvSpPr>
@@ -23234,7 +24662,7 @@
       </p:sp>
       <p:sp>
         <p:nvSpPr>
-          <p:cNvPr id="28" name="Shape 21"/>
+          <p:cNvPr id="30" name="Shape 23"/>
           <p:cNvSpPr/>
           <p:nvPr/>
         </p:nvSpPr>
@@ -23261,7 +24689,7 @@
       </p:sp>
       <p:pic>
         <p:nvPicPr>
-          <p:cNvPr id="29" name="Image 5" descr="article icon from tabler-icons (MIT)">    </p:cNvPr>
+          <p:cNvPr id="31" name="Image 5" descr="article icon from tabler-icons (MIT)">    </p:cNvPr>
           <p:cNvPicPr>
             <a:picLocks noChangeAspect="1"/>
           </p:cNvPicPr>
@@ -23291,7 +24719,7 @@
       </p:pic>
       <p:sp>
         <p:nvSpPr>
-          <p:cNvPr id="30" name="mdpr:1-2-32ac08:item-3:block-6-chunk-1"/>
+          <p:cNvPr id="32" name="mdpr:1-2-32ac08:item-3:block-6-chunk-1"/>
           <p:cNvSpPr txBox="1"/>
           <p:nvPr/>
         </p:nvSpPr>
@@ -23388,6 +24816,49 @@
         </p:nvSpPr>
         <p:spPr>
           <a:xfrm>
+            <a:off x="310896" y="256032"/>
+            <a:ext cx="10893247" cy="5779008"/>
+          </a:xfrm>
+          <a:prstGeom prst="roundRect">
+            <a:avLst>
+              <a:gd name="adj" fmla="val 1899"/>
+            </a:avLst>
+          </a:prstGeom>
+          <a:solidFill>
+            <a:srgbClr val="8A4FFF">
+              <a:alpha val="26000"/>
+            </a:srgbClr>
+          </a:solidFill>
+          <a:ln w="12700">
+            <a:solidFill>
+              <a:srgbClr val="FFFFFF">
+                <a:alpha val="14000"/>
+              </a:srgbClr>
+            </a:solidFill>
+            <a:prstDash val="solid"/>
+          </a:ln>
+          <a:effectLst>
+            <a:outerShdw sx="100000" sy="100000" kx="0" ky="0" algn="bl" rotWithShape="0" blurRad="12700" dist="50800" dir="2700000">
+              <a:srgbClr val="8A4FFF">
+                <a:alpha val="10000"/>
+              </a:srgbClr>
+            </a:outerShdw>
+            <a:glow rad="63500">
+              <a:srgbClr val="8A4FFF">
+                <a:alpha val="23000"/>
+              </a:srgbClr>
+            </a:glow>
+          </a:effectLst>
+        </p:spPr>
+      </p:sp>
+      <p:sp>
+        <p:nvSpPr>
+          <p:cNvPr id="3" name="Shape 1"/>
+          <p:cNvSpPr/>
+          <p:nvPr/>
+        </p:nvSpPr>
+        <p:spPr>
+          <a:xfrm>
             <a:off x="566928" y="475488"/>
             <a:ext cx="11057839" cy="5907024"/>
           </a:xfrm>
@@ -23425,7 +24896,7 @@
       </p:sp>
       <p:sp>
         <p:nvSpPr>
-          <p:cNvPr id="3" name="Shape 1"/>
+          <p:cNvPr id="4" name="Shape 2"/>
           <p:cNvSpPr/>
           <p:nvPr/>
         </p:nvSpPr>
@@ -23454,7 +24925,7 @@
       </p:sp>
       <p:sp>
         <p:nvSpPr>
-          <p:cNvPr id="4" name="Shape 2"/>
+          <p:cNvPr id="5" name="Shape 3"/>
           <p:cNvSpPr/>
           <p:nvPr/>
         </p:nvSpPr>
@@ -23483,7 +24954,7 @@
       </p:sp>
       <p:sp>
         <p:nvSpPr>
-          <p:cNvPr id="5" name="Shape 3"/>
+          <p:cNvPr id="6" name="Shape 4"/>
           <p:cNvSpPr/>
           <p:nvPr/>
         </p:nvSpPr>
@@ -23512,7 +24983,7 @@
       </p:sp>
       <p:sp>
         <p:nvSpPr>
-          <p:cNvPr id="6" name="Shape 4"/>
+          <p:cNvPr id="7" name="Shape 5"/>
           <p:cNvSpPr/>
           <p:nvPr/>
         </p:nvSpPr>
@@ -23537,7 +25008,7 @@
       </p:sp>
       <p:sp>
         <p:nvSpPr>
-          <p:cNvPr id="7" name="Shape 5"/>
+          <p:cNvPr id="8" name="Shape 6"/>
           <p:cNvSpPr/>
           <p:nvPr/>
         </p:nvSpPr>
@@ -23562,7 +25033,32 @@
       </p:sp>
       <p:sp>
         <p:nvSpPr>
-          <p:cNvPr id="8" name="Shape 6"/>
+          <p:cNvPr id="9" name="Shape 7"/>
+          <p:cNvSpPr/>
+          <p:nvPr/>
+        </p:nvSpPr>
+        <p:spPr>
+          <a:xfrm>
+            <a:off x="9631375" y="603504"/>
+            <a:ext cx="1353312" cy="0"/>
+          </a:xfrm>
+          <a:prstGeom prst="line">
+            <a:avLst/>
+          </a:prstGeom>
+          <a:noFill/>
+          <a:ln w="12700">
+            <a:solidFill>
+              <a:srgbClr val="FFFFFF">
+                <a:alpha val="54000"/>
+              </a:srgbClr>
+            </a:solidFill>
+            <a:prstDash val="solid"/>
+          </a:ln>
+        </p:spPr>
+      </p:sp>
+      <p:sp>
+        <p:nvSpPr>
+          <p:cNvPr id="10" name="Shape 8"/>
           <p:cNvSpPr/>
           <p:nvPr/>
         </p:nvSpPr>
@@ -23589,7 +25085,7 @@
       </p:sp>
       <p:sp>
         <p:nvSpPr>
-          <p:cNvPr id="9" name="Shape 7"/>
+          <p:cNvPr id="11" name="Shape 9"/>
           <p:cNvSpPr/>
           <p:nvPr/>
         </p:nvSpPr>
@@ -23616,7 +25112,7 @@
       </p:sp>
       <p:sp>
         <p:nvSpPr>
-          <p:cNvPr id="10" name="Shape 8"/>
+          <p:cNvPr id="12" name="Shape 10"/>
           <p:cNvSpPr/>
           <p:nvPr/>
         </p:nvSpPr>
@@ -23643,7 +25139,7 @@
       </p:sp>
       <p:sp>
         <p:nvSpPr>
-          <p:cNvPr id="11" name="Shape 9"/>
+          <p:cNvPr id="13" name="Shape 11"/>
           <p:cNvSpPr/>
           <p:nvPr/>
         </p:nvSpPr>
@@ -23670,7 +25166,7 @@
       </p:sp>
       <p:sp>
         <p:nvSpPr>
-          <p:cNvPr id="12" name="Shape 10"/>
+          <p:cNvPr id="14" name="Shape 12"/>
           <p:cNvSpPr/>
           <p:nvPr/>
         </p:nvSpPr>
@@ -23697,7 +25193,7 @@
       </p:sp>
       <p:sp>
         <p:nvSpPr>
-          <p:cNvPr id="13" name="mdpr:2-2-14f8eb:title:__title:2-2-14f8eb"/>
+          <p:cNvPr id="15" name="mdpr:2-2-14f8eb:title:__title:2-2-14f8eb"/>
           <p:cNvSpPr txBox="1"/>
           <p:nvPr/>
         </p:nvSpPr>
@@ -23739,7 +25235,7 @@
       </p:sp>
       <p:sp>
         <p:nvSpPr>
-          <p:cNvPr id="14" name="mdpr:2-2-14f8eb:left:block-6-chunk-2"/>
+          <p:cNvPr id="16" name="mdpr:2-2-14f8eb:left:block-6-chunk-2"/>
           <p:cNvSpPr txBox="1"/>
           <p:nvPr/>
         </p:nvSpPr>
@@ -23798,7 +25294,7 @@
       </p:sp>
       <p:sp>
         <p:nvSpPr>
-          <p:cNvPr id="15" name="mdpr:2-2-14f8eb:right:block-6-chunk-2"/>
+          <p:cNvPr id="17" name="mdpr:2-2-14f8eb:right:block-6-chunk-2"/>
           <p:cNvSpPr txBox="1"/>
           <p:nvPr/>
         </p:nvSpPr>
@@ -23895,6 +25391,49 @@
         </p:nvSpPr>
         <p:spPr>
           <a:xfrm>
+            <a:off x="310896" y="256032"/>
+            <a:ext cx="10893247" cy="5779008"/>
+          </a:xfrm>
+          <a:prstGeom prst="roundRect">
+            <a:avLst>
+              <a:gd name="adj" fmla="val 1899"/>
+            </a:avLst>
+          </a:prstGeom>
+          <a:solidFill>
+            <a:srgbClr val="8A4FFF">
+              <a:alpha val="26000"/>
+            </a:srgbClr>
+          </a:solidFill>
+          <a:ln w="12700">
+            <a:solidFill>
+              <a:srgbClr val="FFFFFF">
+                <a:alpha val="14000"/>
+              </a:srgbClr>
+            </a:solidFill>
+            <a:prstDash val="solid"/>
+          </a:ln>
+          <a:effectLst>
+            <a:outerShdw sx="100000" sy="100000" kx="0" ky="0" algn="bl" rotWithShape="0" blurRad="12700" dist="50800" dir="2700000">
+              <a:srgbClr val="8A4FFF">
+                <a:alpha val="10000"/>
+              </a:srgbClr>
+            </a:outerShdw>
+            <a:glow rad="63500">
+              <a:srgbClr val="8A4FFF">
+                <a:alpha val="23000"/>
+              </a:srgbClr>
+            </a:glow>
+          </a:effectLst>
+        </p:spPr>
+      </p:sp>
+      <p:sp>
+        <p:nvSpPr>
+          <p:cNvPr id="3" name="Shape 1"/>
+          <p:cNvSpPr/>
+          <p:nvPr/>
+        </p:nvSpPr>
+        <p:spPr>
+          <a:xfrm>
             <a:off x="566928" y="475488"/>
             <a:ext cx="11057839" cy="5907024"/>
           </a:xfrm>
@@ -23932,7 +25471,7 @@
       </p:sp>
       <p:sp>
         <p:nvSpPr>
-          <p:cNvPr id="3" name="Shape 1"/>
+          <p:cNvPr id="4" name="Shape 2"/>
           <p:cNvSpPr/>
           <p:nvPr/>
         </p:nvSpPr>
@@ -23961,7 +25500,7 @@
       </p:sp>
       <p:sp>
         <p:nvSpPr>
-          <p:cNvPr id="4" name="Shape 2"/>
+          <p:cNvPr id="5" name="Shape 3"/>
           <p:cNvSpPr/>
           <p:nvPr/>
         </p:nvSpPr>
@@ -23990,7 +25529,7 @@
       </p:sp>
       <p:sp>
         <p:nvSpPr>
-          <p:cNvPr id="5" name="Shape 3"/>
+          <p:cNvPr id="6" name="Shape 4"/>
           <p:cNvSpPr/>
           <p:nvPr/>
         </p:nvSpPr>
@@ -24019,7 +25558,7 @@
       </p:sp>
       <p:sp>
         <p:nvSpPr>
-          <p:cNvPr id="6" name="Shape 4"/>
+          <p:cNvPr id="7" name="Shape 5"/>
           <p:cNvSpPr/>
           <p:nvPr/>
         </p:nvSpPr>
@@ -24044,7 +25583,7 @@
       </p:sp>
       <p:sp>
         <p:nvSpPr>
-          <p:cNvPr id="7" name="Shape 5"/>
+          <p:cNvPr id="8" name="Shape 6"/>
           <p:cNvSpPr/>
           <p:nvPr/>
         </p:nvSpPr>
@@ -24069,7 +25608,32 @@
       </p:sp>
       <p:sp>
         <p:nvSpPr>
-          <p:cNvPr id="8" name="Shape 6"/>
+          <p:cNvPr id="9" name="Shape 7"/>
+          <p:cNvSpPr/>
+          <p:nvPr/>
+        </p:nvSpPr>
+        <p:spPr>
+          <a:xfrm>
+            <a:off x="9631375" y="603504"/>
+            <a:ext cx="1353312" cy="0"/>
+          </a:xfrm>
+          <a:prstGeom prst="line">
+            <a:avLst/>
+          </a:prstGeom>
+          <a:noFill/>
+          <a:ln w="12700">
+            <a:solidFill>
+              <a:srgbClr val="FFFFFF">
+                <a:alpha val="54000"/>
+              </a:srgbClr>
+            </a:solidFill>
+            <a:prstDash val="solid"/>
+          </a:ln>
+        </p:spPr>
+      </p:sp>
+      <p:sp>
+        <p:nvSpPr>
+          <p:cNvPr id="10" name="Shape 8"/>
           <p:cNvSpPr/>
           <p:nvPr/>
         </p:nvSpPr>
@@ -24096,7 +25660,7 @@
       </p:sp>
       <p:sp>
         <p:nvSpPr>
-          <p:cNvPr id="9" name="Shape 7"/>
+          <p:cNvPr id="11" name="Shape 9"/>
           <p:cNvSpPr/>
           <p:nvPr/>
         </p:nvSpPr>
@@ -24123,7 +25687,7 @@
       </p:sp>
       <p:sp>
         <p:nvSpPr>
-          <p:cNvPr id="10" name="Shape 8"/>
+          <p:cNvPr id="12" name="Shape 10"/>
           <p:cNvSpPr/>
           <p:nvPr/>
         </p:nvSpPr>
@@ -24150,7 +25714,7 @@
       </p:sp>
       <p:pic>
         <p:nvPicPr>
-          <p:cNvPr id="11" name="Image 0" descr="preencoded.png">    </p:cNvPr>
+          <p:cNvPr id="13" name="Image 0" descr="preencoded.png">    </p:cNvPr>
           <p:cNvPicPr>
             <a:picLocks noChangeAspect="1"/>
           </p:cNvPicPr>
@@ -24180,7 +25744,7 @@
       </p:pic>
       <p:sp>
         <p:nvSpPr>
-          <p:cNvPr id="12" name="Shape 9"/>
+          <p:cNvPr id="14" name="Shape 11"/>
           <p:cNvSpPr/>
           <p:nvPr/>
         </p:nvSpPr>
@@ -24221,7 +25785,7 @@
       </p:sp>
       <p:pic>
         <p:nvPicPr>
-          <p:cNvPr id="13" name="Image 1" descr="preencoded.png">    </p:cNvPr>
+          <p:cNvPr id="15" name="Image 1" descr="preencoded.png">    </p:cNvPr>
           <p:cNvPicPr>
             <a:picLocks noChangeAspect="1"/>
           </p:cNvPicPr>
@@ -24251,7 +25815,7 @@
       </p:pic>
       <p:sp>
         <p:nvSpPr>
-          <p:cNvPr id="14" name="Shape 10"/>
+          <p:cNvPr id="16" name="Shape 12"/>
           <p:cNvSpPr/>
           <p:nvPr/>
         </p:nvSpPr>
@@ -24292,7 +25856,7 @@
       </p:sp>
       <p:pic>
         <p:nvPicPr>
-          <p:cNvPr id="15" name="Image 2" descr="preencoded.png">    </p:cNvPr>
+          <p:cNvPr id="17" name="Image 2" descr="preencoded.png">    </p:cNvPr>
           <p:cNvPicPr>
             <a:picLocks noChangeAspect="1"/>
           </p:cNvPicPr>
@@ -24322,7 +25886,7 @@
       </p:pic>
       <p:sp>
         <p:nvSpPr>
-          <p:cNvPr id="16" name="Shape 11"/>
+          <p:cNvPr id="18" name="Shape 13"/>
           <p:cNvSpPr/>
           <p:nvPr/>
         </p:nvSpPr>
@@ -24363,7 +25927,7 @@
       </p:sp>
       <p:sp>
         <p:nvSpPr>
-          <p:cNvPr id="17" name="Shape 12"/>
+          <p:cNvPr id="19" name="Shape 14"/>
           <p:cNvSpPr/>
           <p:nvPr/>
         </p:nvSpPr>
@@ -24392,7 +25956,7 @@
       </p:sp>
       <p:sp>
         <p:nvSpPr>
-          <p:cNvPr id="18" name="Shape 13"/>
+          <p:cNvPr id="20" name="Shape 15"/>
           <p:cNvSpPr/>
           <p:nvPr/>
         </p:nvSpPr>
@@ -24419,7 +25983,7 @@
       </p:sp>
       <p:sp>
         <p:nvSpPr>
-          <p:cNvPr id="19" name="Shape 14"/>
+          <p:cNvPr id="21" name="Shape 16"/>
           <p:cNvSpPr/>
           <p:nvPr/>
         </p:nvSpPr>
@@ -24446,7 +26010,7 @@
       </p:sp>
       <p:sp>
         <p:nvSpPr>
-          <p:cNvPr id="20" name="Shape 15"/>
+          <p:cNvPr id="22" name="Shape 17"/>
           <p:cNvSpPr/>
           <p:nvPr/>
         </p:nvSpPr>
@@ -24473,7 +26037,7 @@
       </p:sp>
       <p:sp>
         <p:nvSpPr>
-          <p:cNvPr id="21" name="mdpr:1-2-dfa474:title:__title:1-2-dfa474"/>
+          <p:cNvPr id="23" name="mdpr:1-2-dfa474:title:__title:1-2-dfa474"/>
           <p:cNvSpPr txBox="1"/>
           <p:nvPr/>
         </p:nvSpPr>
@@ -24515,7 +26079,7 @@
       </p:sp>
       <p:sp>
         <p:nvSpPr>
-          <p:cNvPr id="22" name="Shape 17"/>
+          <p:cNvPr id="24" name="Shape 19"/>
           <p:cNvSpPr/>
           <p:nvPr/>
         </p:nvSpPr>
@@ -24542,7 +26106,7 @@
       </p:sp>
       <p:pic>
         <p:nvPicPr>
-          <p:cNvPr id="23" name="Image 3" descr="article icon from tabler-icons (MIT)">    </p:cNvPr>
+          <p:cNvPr id="25" name="Image 3" descr="article icon from tabler-icons (MIT)">    </p:cNvPr>
           <p:cNvPicPr>
             <a:picLocks noChangeAspect="1"/>
           </p:cNvPicPr>
@@ -24572,7 +26136,7 @@
       </p:pic>
       <p:sp>
         <p:nvSpPr>
-          <p:cNvPr id="24" name="mdpr:1-2-dfa474:item-1:block-8-chunk-1"/>
+          <p:cNvPr id="26" name="mdpr:1-2-dfa474:item-1:block-8-chunk-1"/>
           <p:cNvSpPr txBox="1"/>
           <p:nvPr/>
         </p:nvSpPr>
@@ -24631,7 +26195,7 @@
       </p:sp>
       <p:sp>
         <p:nvSpPr>
-          <p:cNvPr id="25" name="Shape 19"/>
+          <p:cNvPr id="27" name="Shape 21"/>
           <p:cNvSpPr/>
           <p:nvPr/>
         </p:nvSpPr>
@@ -24658,7 +26222,7 @@
       </p:sp>
       <p:pic>
         <p:nvPicPr>
-          <p:cNvPr id="26" name="Image 4" descr="article icon from tabler-icons (MIT)">    </p:cNvPr>
+          <p:cNvPr id="28" name="Image 4" descr="article icon from tabler-icons (MIT)">    </p:cNvPr>
           <p:cNvPicPr>
             <a:picLocks noChangeAspect="1"/>
           </p:cNvPicPr>
@@ -24688,7 +26252,7 @@
       </p:pic>
       <p:sp>
         <p:nvSpPr>
-          <p:cNvPr id="27" name="mdpr:1-2-dfa474:item-2:block-8-chunk-1"/>
+          <p:cNvPr id="29" name="mdpr:1-2-dfa474:item-2:block-8-chunk-1"/>
           <p:cNvSpPr txBox="1"/>
           <p:nvPr/>
         </p:nvSpPr>
@@ -24747,7 +26311,7 @@
       </p:sp>
       <p:sp>
         <p:nvSpPr>
-          <p:cNvPr id="28" name="Shape 21"/>
+          <p:cNvPr id="30" name="Shape 23"/>
           <p:cNvSpPr/>
           <p:nvPr/>
         </p:nvSpPr>
@@ -24774,7 +26338,7 @@
       </p:sp>
       <p:pic>
         <p:nvPicPr>
-          <p:cNvPr id="29" name="Image 5" descr="article icon from tabler-icons (MIT)">    </p:cNvPr>
+          <p:cNvPr id="31" name="Image 5" descr="article icon from tabler-icons (MIT)">    </p:cNvPr>
           <p:cNvPicPr>
             <a:picLocks noChangeAspect="1"/>
           </p:cNvPicPr>
@@ -24804,7 +26368,7 @@
       </p:pic>
       <p:sp>
         <p:nvSpPr>
-          <p:cNvPr id="30" name="mdpr:1-2-dfa474:item-3:block-8-chunk-1"/>
+          <p:cNvPr id="32" name="mdpr:1-2-dfa474:item-3:block-8-chunk-1"/>
           <p:cNvSpPr txBox="1"/>
           <p:nvPr/>
         </p:nvSpPr>
@@ -24901,6 +26465,49 @@
         </p:nvSpPr>
         <p:spPr>
           <a:xfrm>
+            <a:off x="310896" y="256032"/>
+            <a:ext cx="10893247" cy="5779008"/>
+          </a:xfrm>
+          <a:prstGeom prst="roundRect">
+            <a:avLst>
+              <a:gd name="adj" fmla="val 1899"/>
+            </a:avLst>
+          </a:prstGeom>
+          <a:solidFill>
+            <a:srgbClr val="8A4FFF">
+              <a:alpha val="26000"/>
+            </a:srgbClr>
+          </a:solidFill>
+          <a:ln w="12700">
+            <a:solidFill>
+              <a:srgbClr val="FFFFFF">
+                <a:alpha val="14000"/>
+              </a:srgbClr>
+            </a:solidFill>
+            <a:prstDash val="solid"/>
+          </a:ln>
+          <a:effectLst>
+            <a:outerShdw sx="100000" sy="100000" kx="0" ky="0" algn="bl" rotWithShape="0" blurRad="12700" dist="50800" dir="2700000">
+              <a:srgbClr val="8A4FFF">
+                <a:alpha val="10000"/>
+              </a:srgbClr>
+            </a:outerShdw>
+            <a:glow rad="63500">
+              <a:srgbClr val="8A4FFF">
+                <a:alpha val="23000"/>
+              </a:srgbClr>
+            </a:glow>
+          </a:effectLst>
+        </p:spPr>
+      </p:sp>
+      <p:sp>
+        <p:nvSpPr>
+          <p:cNvPr id="3" name="Shape 1"/>
+          <p:cNvSpPr/>
+          <p:nvPr/>
+        </p:nvSpPr>
+        <p:spPr>
+          <a:xfrm>
             <a:off x="566928" y="475488"/>
             <a:ext cx="11057839" cy="5907024"/>
           </a:xfrm>
@@ -24938,7 +26545,7 @@
       </p:sp>
       <p:sp>
         <p:nvSpPr>
-          <p:cNvPr id="3" name="Shape 1"/>
+          <p:cNvPr id="4" name="Shape 2"/>
           <p:cNvSpPr/>
           <p:nvPr/>
         </p:nvSpPr>
@@ -24967,7 +26574,7 @@
       </p:sp>
       <p:sp>
         <p:nvSpPr>
-          <p:cNvPr id="4" name="Shape 2"/>
+          <p:cNvPr id="5" name="Shape 3"/>
           <p:cNvSpPr/>
           <p:nvPr/>
         </p:nvSpPr>
@@ -24996,7 +26603,7 @@
       </p:sp>
       <p:sp>
         <p:nvSpPr>
-          <p:cNvPr id="5" name="Shape 3"/>
+          <p:cNvPr id="6" name="Shape 4"/>
           <p:cNvSpPr/>
           <p:nvPr/>
         </p:nvSpPr>
@@ -25025,7 +26632,7 @@
       </p:sp>
       <p:sp>
         <p:nvSpPr>
-          <p:cNvPr id="6" name="Shape 4"/>
+          <p:cNvPr id="7" name="Shape 5"/>
           <p:cNvSpPr/>
           <p:nvPr/>
         </p:nvSpPr>
@@ -25050,7 +26657,7 @@
       </p:sp>
       <p:sp>
         <p:nvSpPr>
-          <p:cNvPr id="7" name="Shape 5"/>
+          <p:cNvPr id="8" name="Shape 6"/>
           <p:cNvSpPr/>
           <p:nvPr/>
         </p:nvSpPr>
@@ -25075,7 +26682,32 @@
       </p:sp>
       <p:sp>
         <p:nvSpPr>
-          <p:cNvPr id="8" name="Shape 6"/>
+          <p:cNvPr id="9" name="Shape 7"/>
+          <p:cNvSpPr/>
+          <p:nvPr/>
+        </p:nvSpPr>
+        <p:spPr>
+          <a:xfrm>
+            <a:off x="9631375" y="603504"/>
+            <a:ext cx="1353312" cy="0"/>
+          </a:xfrm>
+          <a:prstGeom prst="line">
+            <a:avLst/>
+          </a:prstGeom>
+          <a:noFill/>
+          <a:ln w="12700">
+            <a:solidFill>
+              <a:srgbClr val="FFFFFF">
+                <a:alpha val="54000"/>
+              </a:srgbClr>
+            </a:solidFill>
+            <a:prstDash val="solid"/>
+          </a:ln>
+        </p:spPr>
+      </p:sp>
+      <p:sp>
+        <p:nvSpPr>
+          <p:cNvPr id="10" name="Shape 8"/>
           <p:cNvSpPr/>
           <p:nvPr/>
         </p:nvSpPr>
@@ -25102,7 +26734,7 @@
       </p:sp>
       <p:sp>
         <p:nvSpPr>
-          <p:cNvPr id="9" name="Shape 7"/>
+          <p:cNvPr id="11" name="Shape 9"/>
           <p:cNvSpPr/>
           <p:nvPr/>
         </p:nvSpPr>
@@ -25129,7 +26761,7 @@
       </p:sp>
       <p:sp>
         <p:nvSpPr>
-          <p:cNvPr id="10" name="Shape 8"/>
+          <p:cNvPr id="12" name="Shape 10"/>
           <p:cNvSpPr/>
           <p:nvPr/>
         </p:nvSpPr>
@@ -25156,7 +26788,7 @@
       </p:sp>
       <p:sp>
         <p:nvSpPr>
-          <p:cNvPr id="11" name="Shape 9"/>
+          <p:cNvPr id="13" name="Shape 11"/>
           <p:cNvSpPr/>
           <p:nvPr/>
         </p:nvSpPr>
@@ -25183,7 +26815,7 @@
       </p:sp>
       <p:sp>
         <p:nvSpPr>
-          <p:cNvPr id="12" name="Shape 10"/>
+          <p:cNvPr id="14" name="Shape 12"/>
           <p:cNvSpPr/>
           <p:nvPr/>
         </p:nvSpPr>
@@ -25210,7 +26842,7 @@
       </p:sp>
       <p:sp>
         <p:nvSpPr>
-          <p:cNvPr id="13" name="mdpr:2-2-149bde:title:__title:2-2-149bde"/>
+          <p:cNvPr id="15" name="mdpr:2-2-149bde:title:__title:2-2-149bde"/>
           <p:cNvSpPr txBox="1"/>
           <p:nvPr/>
         </p:nvSpPr>
@@ -25252,7 +26884,7 @@
       </p:sp>
       <p:sp>
         <p:nvSpPr>
-          <p:cNvPr id="14" name="mdpr:2-2-149bde:left:block-8-chunk-2"/>
+          <p:cNvPr id="16" name="mdpr:2-2-149bde:left:block-8-chunk-2"/>
           <p:cNvSpPr txBox="1"/>
           <p:nvPr/>
         </p:nvSpPr>
@@ -25311,7 +26943,7 @@
       </p:sp>
       <p:sp>
         <p:nvSpPr>
-          <p:cNvPr id="15" name="mdpr:2-2-149bde:right:block-8-chunk-2"/>
+          <p:cNvPr id="17" name="mdpr:2-2-149bde:right:block-8-chunk-2"/>
           <p:cNvSpPr txBox="1"/>
           <p:nvPr/>
         </p:nvSpPr>
@@ -25408,6 +27040,49 @@
         </p:nvSpPr>
         <p:spPr>
           <a:xfrm>
+            <a:off x="310896" y="256032"/>
+            <a:ext cx="10893247" cy="5779008"/>
+          </a:xfrm>
+          <a:prstGeom prst="roundRect">
+            <a:avLst>
+              <a:gd name="adj" fmla="val 1899"/>
+            </a:avLst>
+          </a:prstGeom>
+          <a:solidFill>
+            <a:srgbClr val="8A4FFF">
+              <a:alpha val="26000"/>
+            </a:srgbClr>
+          </a:solidFill>
+          <a:ln w="12700">
+            <a:solidFill>
+              <a:srgbClr val="FFFFFF">
+                <a:alpha val="14000"/>
+              </a:srgbClr>
+            </a:solidFill>
+            <a:prstDash val="solid"/>
+          </a:ln>
+          <a:effectLst>
+            <a:outerShdw sx="100000" sy="100000" kx="0" ky="0" algn="bl" rotWithShape="0" blurRad="12700" dist="50800" dir="2700000">
+              <a:srgbClr val="8A4FFF">
+                <a:alpha val="10000"/>
+              </a:srgbClr>
+            </a:outerShdw>
+            <a:glow rad="63500">
+              <a:srgbClr val="8A4FFF">
+                <a:alpha val="23000"/>
+              </a:srgbClr>
+            </a:glow>
+          </a:effectLst>
+        </p:spPr>
+      </p:sp>
+      <p:sp>
+        <p:nvSpPr>
+          <p:cNvPr id="3" name="Shape 1"/>
+          <p:cNvSpPr/>
+          <p:nvPr/>
+        </p:nvSpPr>
+        <p:spPr>
+          <a:xfrm>
             <a:off x="566928" y="475488"/>
             <a:ext cx="11057839" cy="5907024"/>
           </a:xfrm>
@@ -25445,7 +27120,7 @@
       </p:sp>
       <p:sp>
         <p:nvSpPr>
-          <p:cNvPr id="3" name="Shape 1"/>
+          <p:cNvPr id="4" name="Shape 2"/>
           <p:cNvSpPr/>
           <p:nvPr/>
         </p:nvSpPr>
@@ -25474,7 +27149,7 @@
       </p:sp>
       <p:sp>
         <p:nvSpPr>
-          <p:cNvPr id="4" name="Shape 2"/>
+          <p:cNvPr id="5" name="Shape 3"/>
           <p:cNvSpPr/>
           <p:nvPr/>
         </p:nvSpPr>
@@ -25503,7 +27178,7 @@
       </p:sp>
       <p:sp>
         <p:nvSpPr>
-          <p:cNvPr id="5" name="Shape 3"/>
+          <p:cNvPr id="6" name="Shape 4"/>
           <p:cNvSpPr/>
           <p:nvPr/>
         </p:nvSpPr>
@@ -25532,7 +27207,7 @@
       </p:sp>
       <p:sp>
         <p:nvSpPr>
-          <p:cNvPr id="6" name="Shape 4"/>
+          <p:cNvPr id="7" name="Shape 5"/>
           <p:cNvSpPr/>
           <p:nvPr/>
         </p:nvSpPr>
@@ -25557,7 +27232,7 @@
       </p:sp>
       <p:sp>
         <p:nvSpPr>
-          <p:cNvPr id="7" name="Shape 5"/>
+          <p:cNvPr id="8" name="Shape 6"/>
           <p:cNvSpPr/>
           <p:nvPr/>
         </p:nvSpPr>
@@ -25582,7 +27257,32 @@
       </p:sp>
       <p:sp>
         <p:nvSpPr>
-          <p:cNvPr id="8" name="Shape 6"/>
+          <p:cNvPr id="9" name="Shape 7"/>
+          <p:cNvSpPr/>
+          <p:nvPr/>
+        </p:nvSpPr>
+        <p:spPr>
+          <a:xfrm>
+            <a:off x="9631375" y="603504"/>
+            <a:ext cx="1353312" cy="0"/>
+          </a:xfrm>
+          <a:prstGeom prst="line">
+            <a:avLst/>
+          </a:prstGeom>
+          <a:noFill/>
+          <a:ln w="12700">
+            <a:solidFill>
+              <a:srgbClr val="FFFFFF">
+                <a:alpha val="54000"/>
+              </a:srgbClr>
+            </a:solidFill>
+            <a:prstDash val="solid"/>
+          </a:ln>
+        </p:spPr>
+      </p:sp>
+      <p:sp>
+        <p:nvSpPr>
+          <p:cNvPr id="10" name="Shape 8"/>
           <p:cNvSpPr/>
           <p:nvPr/>
         </p:nvSpPr>
@@ -25609,7 +27309,7 @@
       </p:sp>
       <p:sp>
         <p:nvSpPr>
-          <p:cNvPr id="9" name="Shape 7"/>
+          <p:cNvPr id="11" name="Shape 9"/>
           <p:cNvSpPr/>
           <p:nvPr/>
         </p:nvSpPr>
@@ -25636,7 +27336,7 @@
       </p:sp>
       <p:sp>
         <p:nvSpPr>
-          <p:cNvPr id="10" name="Shape 8"/>
+          <p:cNvPr id="12" name="Shape 10"/>
           <p:cNvSpPr/>
           <p:nvPr/>
         </p:nvSpPr>
@@ -25663,7 +27363,7 @@
       </p:sp>
       <p:sp>
         <p:nvSpPr>
-          <p:cNvPr id="11" name="Shape 9"/>
+          <p:cNvPr id="13" name="Shape 11"/>
           <p:cNvSpPr/>
           <p:nvPr/>
         </p:nvSpPr>
@@ -25690,7 +27390,7 @@
       </p:sp>
       <p:sp>
         <p:nvSpPr>
-          <p:cNvPr id="12" name="Shape 10"/>
+          <p:cNvPr id="14" name="Shape 12"/>
           <p:cNvSpPr/>
           <p:nvPr/>
         </p:nvSpPr>
@@ -25717,7 +27417,7 @@
       </p:sp>
       <p:sp>
         <p:nvSpPr>
-          <p:cNvPr id="13" name="mdpr:1-2-5a84f1:title:__title:1-2-5a84f1"/>
+          <p:cNvPr id="15" name="mdpr:1-2-5a84f1:title:__title:1-2-5a84f1"/>
           <p:cNvSpPr txBox="1"/>
           <p:nvPr/>
         </p:nvSpPr>
@@ -25759,7 +27459,7 @@
       </p:sp>
       <p:sp>
         <p:nvSpPr>
-          <p:cNvPr id="14" name="mdpr:1-2-5a84f1:left:block-10-chunk-1"/>
+          <p:cNvPr id="16" name="mdpr:1-2-5a84f1:left:block-10-chunk-1"/>
           <p:cNvSpPr txBox="1"/>
           <p:nvPr/>
         </p:nvSpPr>
@@ -25818,7 +27518,7 @@
       </p:sp>
       <p:sp>
         <p:nvSpPr>
-          <p:cNvPr id="15" name="mdpr:1-2-5a84f1:right:block-10-chunk-1"/>
+          <p:cNvPr id="17" name="mdpr:1-2-5a84f1:right:block-10-chunk-1"/>
           <p:cNvSpPr txBox="1"/>
           <p:nvPr/>
         </p:nvSpPr>

--- a/docs/theme-preview/pptx/glassmorphism.pptx
+++ b/docs/theme-preview/pptx/glassmorphism.pptx
@@ -6566,300 +6566,16 @@
           </a:ln>
         </p:spPr>
       </p:sp>
-      <p:pic>
-        <p:nvPicPr>
-          <p:cNvPr id="13" name="Image 0" descr="preencoded.png">    </p:cNvPr>
-          <p:cNvPicPr>
-            <a:picLocks noChangeAspect="1"/>
-          </p:cNvPicPr>
-          <p:nvPr/>
-        </p:nvPicPr>
-        <p:blipFill>
-          <a:blip r:embed="rId1">
-            <a:extLst>
-              <a:ext uri="{96DAC541-7B7A-43D3-8B79-37D633B846F1}">
-                <asvg:svgBlip xmlns:asvg="http://schemas.microsoft.com/office/drawing/2016/SVG/main" r:embed="rId2"/>
-              </a:ext>
-            </a:extLst>
-          </a:blip>
-          <a:stretch>
-            <a:fillRect/>
-          </a:stretch>
-        </p:blipFill>
-        <p:spPr>
-          <a:xfrm>
-            <a:off x="822960" y="1463040"/>
-            <a:ext cx="5029200" cy="1920240"/>
-          </a:xfrm>
-          <a:prstGeom prst="rect">
-            <a:avLst/>
-          </a:prstGeom>
-        </p:spPr>
-      </p:pic>
-      <p:sp>
-        <p:nvSpPr>
-          <p:cNvPr id="14" name="Shape 11"/>
-          <p:cNvSpPr/>
-          <p:nvPr/>
-        </p:nvSpPr>
-        <p:spPr>
-          <a:xfrm>
-            <a:off x="822960" y="1463040"/>
-            <a:ext cx="5029200" cy="1920240"/>
-          </a:xfrm>
-          <a:prstGeom prst="rect">
-            <a:avLst/>
-          </a:prstGeom>
-          <a:solidFill>
-            <a:srgbClr val="17213A">
-              <a:alpha val="0"/>
-            </a:srgbClr>
-          </a:solidFill>
-          <a:ln w="12700">
-            <a:solidFill>
-              <a:srgbClr val="C4B5FD">
-                <a:alpha val="0"/>
-              </a:srgbClr>
-            </a:solidFill>
-            <a:prstDash val="solid"/>
-          </a:ln>
-          <a:effectLst>
-            <a:outerShdw sx="100000" sy="100000" kx="0" ky="0" algn="bl" rotWithShape="0" blurRad="30480" dist="50800" dir="2700000">
-              <a:srgbClr val="CBD5E1">
-                <a:alpha val="20000"/>
-              </a:srgbClr>
-            </a:outerShdw>
-            <a:glow rad="63500">
-              <a:srgbClr val="8A4FFF">
-                <a:alpha val="23000"/>
-              </a:srgbClr>
-            </a:glow>
-          </a:effectLst>
-        </p:spPr>
-      </p:sp>
-      <p:pic>
-        <p:nvPicPr>
-          <p:cNvPr id="15" name="Image 1" descr="preencoded.png">    </p:cNvPr>
-          <p:cNvPicPr>
-            <a:picLocks noChangeAspect="1"/>
-          </p:cNvPicPr>
-          <p:nvPr/>
-        </p:nvPicPr>
-        <p:blipFill>
-          <a:blip r:embed="rId3">
-            <a:extLst>
-              <a:ext uri="{96DAC541-7B7A-43D3-8B79-37D633B846F1}">
-                <asvg:svgBlip xmlns:asvg="http://schemas.microsoft.com/office/drawing/2016/SVG/main" r:embed="rId4"/>
-              </a:ext>
-            </a:extLst>
-          </a:blip>
-          <a:stretch>
-            <a:fillRect/>
-          </a:stretch>
-        </p:blipFill>
-        <p:spPr>
-          <a:xfrm>
-            <a:off x="6309360" y="1463040"/>
-            <a:ext cx="5029200" cy="1920240"/>
-          </a:xfrm>
-          <a:prstGeom prst="rect">
-            <a:avLst/>
-          </a:prstGeom>
-        </p:spPr>
-      </p:pic>
-      <p:sp>
-        <p:nvSpPr>
-          <p:cNvPr id="16" name="Shape 12"/>
-          <p:cNvSpPr/>
-          <p:nvPr/>
-        </p:nvSpPr>
-        <p:spPr>
-          <a:xfrm>
-            <a:off x="6309360" y="1463040"/>
-            <a:ext cx="5029200" cy="1920240"/>
-          </a:xfrm>
-          <a:prstGeom prst="rect">
-            <a:avLst/>
-          </a:prstGeom>
-          <a:solidFill>
-            <a:srgbClr val="17213A">
-              <a:alpha val="0"/>
-            </a:srgbClr>
-          </a:solidFill>
-          <a:ln w="12700">
-            <a:solidFill>
-              <a:srgbClr val="C4B5FD">
-                <a:alpha val="0"/>
-              </a:srgbClr>
-            </a:solidFill>
-            <a:prstDash val="solid"/>
-          </a:ln>
-          <a:effectLst>
-            <a:outerShdw sx="100000" sy="100000" kx="0" ky="0" algn="bl" rotWithShape="0" blurRad="30480" dist="50800" dir="2700000">
-              <a:srgbClr val="CBD5E1">
-                <a:alpha val="20000"/>
-              </a:srgbClr>
-            </a:outerShdw>
-            <a:glow rad="63500">
-              <a:srgbClr val="8A4FFF">
-                <a:alpha val="23000"/>
-              </a:srgbClr>
-            </a:glow>
-          </a:effectLst>
-        </p:spPr>
-      </p:sp>
-      <p:pic>
-        <p:nvPicPr>
-          <p:cNvPr id="17" name="Image 2" descr="preencoded.png">    </p:cNvPr>
-          <p:cNvPicPr>
-            <a:picLocks noChangeAspect="1"/>
-          </p:cNvPicPr>
-          <p:nvPr/>
-        </p:nvPicPr>
-        <p:blipFill>
-          <a:blip r:embed="rId5">
-            <a:extLst>
-              <a:ext uri="{96DAC541-7B7A-43D3-8B79-37D633B846F1}">
-                <asvg:svgBlip xmlns:asvg="http://schemas.microsoft.com/office/drawing/2016/SVG/main" r:embed="rId6"/>
-              </a:ext>
-            </a:extLst>
-          </a:blip>
-          <a:stretch>
-            <a:fillRect/>
-          </a:stretch>
-        </p:blipFill>
-        <p:spPr>
-          <a:xfrm>
-            <a:off x="822960" y="3749040"/>
-            <a:ext cx="5029200" cy="1920240"/>
-          </a:xfrm>
-          <a:prstGeom prst="rect">
-            <a:avLst/>
-          </a:prstGeom>
-        </p:spPr>
-      </p:pic>
-      <p:sp>
-        <p:nvSpPr>
-          <p:cNvPr id="18" name="Shape 13"/>
-          <p:cNvSpPr/>
-          <p:nvPr/>
-        </p:nvSpPr>
-        <p:spPr>
-          <a:xfrm>
-            <a:off x="822960" y="3749040"/>
-            <a:ext cx="5029200" cy="1920240"/>
-          </a:xfrm>
-          <a:prstGeom prst="rect">
-            <a:avLst/>
-          </a:prstGeom>
-          <a:solidFill>
-            <a:srgbClr val="17213A">
-              <a:alpha val="0"/>
-            </a:srgbClr>
-          </a:solidFill>
-          <a:ln w="12700">
-            <a:solidFill>
-              <a:srgbClr val="C4B5FD">
-                <a:alpha val="0"/>
-              </a:srgbClr>
-            </a:solidFill>
-            <a:prstDash val="solid"/>
-          </a:ln>
-          <a:effectLst>
-            <a:outerShdw sx="100000" sy="100000" kx="0" ky="0" algn="bl" rotWithShape="0" blurRad="30480" dist="50800" dir="2700000">
-              <a:srgbClr val="CBD5E1">
-                <a:alpha val="20000"/>
-              </a:srgbClr>
-            </a:outerShdw>
-            <a:glow rad="63500">
-              <a:srgbClr val="8A4FFF">
-                <a:alpha val="23000"/>
-              </a:srgbClr>
-            </a:glow>
-          </a:effectLst>
-        </p:spPr>
-      </p:sp>
-      <p:pic>
-        <p:nvPicPr>
-          <p:cNvPr id="19" name="Image 3" descr="preencoded.png">    </p:cNvPr>
-          <p:cNvPicPr>
-            <a:picLocks noChangeAspect="1"/>
-          </p:cNvPicPr>
-          <p:nvPr/>
-        </p:nvPicPr>
-        <p:blipFill>
-          <a:blip r:embed="rId7">
-            <a:extLst>
-              <a:ext uri="{96DAC541-7B7A-43D3-8B79-37D633B846F1}">
-                <asvg:svgBlip xmlns:asvg="http://schemas.microsoft.com/office/drawing/2016/SVG/main" r:embed="rId8"/>
-              </a:ext>
-            </a:extLst>
-          </a:blip>
-          <a:stretch>
-            <a:fillRect/>
-          </a:stretch>
-        </p:blipFill>
-        <p:spPr>
-          <a:xfrm>
-            <a:off x="6309360" y="3749040"/>
-            <a:ext cx="5029200" cy="1920240"/>
-          </a:xfrm>
-          <a:prstGeom prst="rect">
-            <a:avLst/>
-          </a:prstGeom>
-        </p:spPr>
-      </p:pic>
-      <p:sp>
-        <p:nvSpPr>
-          <p:cNvPr id="20" name="Shape 14"/>
-          <p:cNvSpPr/>
-          <p:nvPr/>
-        </p:nvSpPr>
-        <p:spPr>
-          <a:xfrm>
-            <a:off x="6309360" y="3749040"/>
-            <a:ext cx="5029200" cy="1920240"/>
-          </a:xfrm>
-          <a:prstGeom prst="rect">
-            <a:avLst/>
-          </a:prstGeom>
-          <a:solidFill>
-            <a:srgbClr val="17213A">
-              <a:alpha val="0"/>
-            </a:srgbClr>
-          </a:solidFill>
-          <a:ln w="12700">
-            <a:solidFill>
-              <a:srgbClr val="C4B5FD">
-                <a:alpha val="0"/>
-              </a:srgbClr>
-            </a:solidFill>
-            <a:prstDash val="solid"/>
-          </a:ln>
-          <a:effectLst>
-            <a:outerShdw sx="100000" sy="100000" kx="0" ky="0" algn="bl" rotWithShape="0" blurRad="30480" dist="50800" dir="2700000">
-              <a:srgbClr val="CBD5E1">
-                <a:alpha val="20000"/>
-              </a:srgbClr>
-            </a:outerShdw>
-            <a:glow rad="63500">
-              <a:srgbClr val="8A4FFF">
-                <a:alpha val="23000"/>
-              </a:srgbClr>
-            </a:glow>
-          </a:effectLst>
-        </p:spPr>
-      </p:sp>
-      <p:sp>
-        <p:nvSpPr>
-          <p:cNvPr id="21" name="Shape 15"/>
-          <p:cNvSpPr/>
-          <p:nvPr/>
-        </p:nvSpPr>
-        <p:spPr>
-          <a:xfrm>
-            <a:off x="822960" y="1463040"/>
-            <a:ext cx="73152" cy="1920240"/>
+      <p:sp>
+        <p:nvSpPr>
+          <p:cNvPr id="13" name="Shape 11"/>
+          <p:cNvSpPr/>
+          <p:nvPr/>
+        </p:nvSpPr>
+        <p:spPr>
+          <a:xfrm>
+            <a:off x="822960" y="1389888"/>
+            <a:ext cx="4937760" cy="73152"/>
           </a:xfrm>
           <a:prstGeom prst="rect">
             <a:avLst/>
@@ -6879,41 +6595,14 @@
       </p:sp>
       <p:sp>
         <p:nvSpPr>
-          <p:cNvPr id="22" name="Shape 16"/>
-          <p:cNvSpPr/>
-          <p:nvPr/>
-        </p:nvSpPr>
-        <p:spPr>
-          <a:xfrm>
-            <a:off x="6309360" y="1463040"/>
-            <a:ext cx="73152" cy="1920240"/>
-          </a:xfrm>
-          <a:prstGeom prst="rect">
-            <a:avLst/>
-          </a:prstGeom>
-          <a:solidFill>
-            <a:srgbClr val="22D3EE"/>
-          </a:solidFill>
-          <a:ln w="12700">
-            <a:solidFill>
-              <a:srgbClr val="22D3EE">
-                <a:alpha val="0"/>
-              </a:srgbClr>
-            </a:solidFill>
-            <a:prstDash val="solid"/>
-          </a:ln>
-        </p:spPr>
-      </p:sp>
-      <p:sp>
-        <p:nvSpPr>
-          <p:cNvPr id="23" name="Shape 17"/>
-          <p:cNvSpPr/>
-          <p:nvPr/>
-        </p:nvSpPr>
-        <p:spPr>
-          <a:xfrm>
-            <a:off x="822960" y="3749040"/>
-            <a:ext cx="73152" cy="1920240"/>
+          <p:cNvPr id="14" name="Shape 12"/>
+          <p:cNvSpPr/>
+          <p:nvPr/>
+        </p:nvSpPr>
+        <p:spPr>
+          <a:xfrm>
+            <a:off x="6400800" y="1389888"/>
+            <a:ext cx="4937760" cy="73152"/>
           </a:xfrm>
           <a:prstGeom prst="rect">
             <a:avLst/>
@@ -6933,34 +6622,7 @@
       </p:sp>
       <p:sp>
         <p:nvSpPr>
-          <p:cNvPr id="24" name="Shape 18"/>
-          <p:cNvSpPr/>
-          <p:nvPr/>
-        </p:nvSpPr>
-        <p:spPr>
-          <a:xfrm>
-            <a:off x="6309360" y="3749040"/>
-            <a:ext cx="73152" cy="1920240"/>
-          </a:xfrm>
-          <a:prstGeom prst="rect">
-            <a:avLst/>
-          </a:prstGeom>
-          <a:solidFill>
-            <a:srgbClr val="22D3EE"/>
-          </a:solidFill>
-          <a:ln w="12700">
-            <a:solidFill>
-              <a:srgbClr val="22D3EE">
-                <a:alpha val="0"/>
-              </a:srgbClr>
-            </a:solidFill>
-            <a:prstDash val="solid"/>
-          </a:ln>
-        </p:spPr>
-      </p:sp>
-      <p:sp>
-        <p:nvSpPr>
-          <p:cNvPr id="25" name="mdpr:1-2-e3669a:title:__title:1-2-e3669a"/>
+          <p:cNvPr id="15" name="mdpr:1-2-e3669a:title:__title:1-2-e3669a"/>
           <p:cNvSpPr txBox="1"/>
           <p:nvPr/>
         </p:nvSpPr>
@@ -7002,71 +6664,14 @@
       </p:sp>
       <p:sp>
         <p:nvSpPr>
-          <p:cNvPr id="26" name="Shape 20"/>
-          <p:cNvSpPr/>
-          <p:nvPr/>
-        </p:nvSpPr>
-        <p:spPr>
-          <a:xfrm>
-            <a:off x="976122" y="2130552"/>
-            <a:ext cx="585216" cy="585216"/>
-          </a:xfrm>
-          <a:prstGeom prst="roundRect">
-            <a:avLst>
-              <a:gd name="adj" fmla="val 6250"/>
-            </a:avLst>
-          </a:prstGeom>
-          <a:solidFill>
-            <a:srgbClr val="0B1020"/>
-          </a:solidFill>
-          <a:ln w="12700">
-            <a:solidFill>
-              <a:srgbClr val="C4B5FD"/>
-            </a:solidFill>
-            <a:prstDash val="solid"/>
-          </a:ln>
-        </p:spPr>
-      </p:sp>
-      <p:pic>
-        <p:nvPicPr>
-          <p:cNvPr id="27" name="Image 4" descr="article icon from tabler-icons (MIT)">    </p:cNvPr>
-          <p:cNvPicPr>
-            <a:picLocks noChangeAspect="1"/>
-          </p:cNvPicPr>
-          <p:nvPr/>
-        </p:nvPicPr>
-        <p:blipFill>
-          <a:blip r:embed="rId9">
-            <a:extLst>
-              <a:ext uri="{96DAC541-7B7A-43D3-8B79-37D633B846F1}">
-                <asvg:svgBlip xmlns:asvg="http://schemas.microsoft.com/office/drawing/2016/SVG/main" r:embed="rId10"/>
-              </a:ext>
-            </a:extLst>
-          </a:blip>
-          <a:stretch>
-            <a:fillRect/>
-          </a:stretch>
-        </p:blipFill>
-        <p:spPr>
-          <a:xfrm>
-            <a:off x="1049274" y="2203704"/>
-            <a:ext cx="438912" cy="438912"/>
-          </a:xfrm>
-          <a:prstGeom prst="rect">
-            <a:avLst/>
-          </a:prstGeom>
-        </p:spPr>
-      </p:pic>
-      <p:sp>
-        <p:nvSpPr>
-          <p:cNvPr id="28" name="mdpr:1-2-e3669a:item-1:block-15-chunk-1"/>
+          <p:cNvPr id="16" name="mdpr:1-2-e3669a:left:block-15-chunk-1-block-15-chunk-1"/>
           <p:cNvSpPr txBox="1"/>
           <p:nvPr/>
         </p:nvSpPr>
         <p:spPr>
           <a:xfrm>
-            <a:off x="1689354" y="1627632"/>
-            <a:ext cx="3961638" cy="1591056"/>
+            <a:off x="896112" y="1499616"/>
+            <a:ext cx="4791456" cy="4398264"/>
           </a:xfrm>
           <a:prstGeom prst="rect">
             <a:avLst/>
@@ -7075,7 +6680,7 @@
           <a:ln/>
         </p:spPr>
         <p:txBody>
-          <a:bodyPr wrap="square" lIns="0" tIns="25400" rIns="25400" bIns="0" rtlCol="0" anchor="ctr"/>
+          <a:bodyPr wrap="square" lIns="0" tIns="25400" rIns="25400" bIns="0" rtlCol="0" anchor="t"/>
           <a:lstStyle/>
           <a:p>
             <a:pPr algn="l" indent="0" marL="0">
@@ -7085,7 +6690,7 @@
               <a:buNone/>
             </a:pPr>
             <a:r>
-              <a:rPr lang="en-US" sz="2200" b="1" dirty="0">
+              <a:rPr lang="en-US" sz="1800" b="1" dirty="0">
                 <a:solidFill>
                   <a:srgbClr val="8A4FFF"/>
                 </a:solidFill>
@@ -7093,7 +6698,7 @@
                 <a:ea typeface="Pretendard" pitchFamily="34" charset="-122"/>
                 <a:cs typeface="Pretendard" pitchFamily="34" charset="-120"/>
               </a:rPr>
-              <a:t>Surfaces</a:t>
+              <a:t>- Surfaces</a:t>
             </a:r>
             <a:pPr algn="l" indent="0" marL="0">
               <a:lnSpc>
@@ -7102,7 +6707,7 @@
               <a:buNone/>
             </a:pPr>
             <a:r>
-              <a:rPr lang="en-US" sz="2200" dirty="0">
+              <a:rPr lang="en-US" sz="1800" dirty="0">
                 <a:solidFill>
                   <a:srgbClr val="F8F8F8"/>
                 </a:solidFill>
@@ -7112,77 +6717,60 @@
               </a:rPr>
               <a:t>  rounded-card, two-corner-card, flag-drop, ticket-panel, notched-panel, circle-vine.</a:t>
             </a:r>
-            <a:endParaRPr lang="en-US" sz="2200" dirty="0"/>
+            <a:endParaRPr lang="en-US" sz="1800" dirty="0"/>
+          </a:p>
+          <a:p>
+            <a:pPr algn="l" indent="0" marL="0">
+              <a:lnSpc>
+                <a:spcPct val="120000"/>
+              </a:lnSpc>
+              <a:buNone/>
+            </a:pPr>
+            <a:r>
+              <a:rPr lang="en-US" sz="1800" b="1" dirty="0">
+                <a:solidFill>
+                  <a:srgbClr val="8A4FFF"/>
+                </a:solidFill>
+                <a:latin typeface="Pretendard" pitchFamily="34" charset="0"/>
+                <a:ea typeface="Pretendard" pitchFamily="34" charset="-122"/>
+                <a:cs typeface="Pretendard" pitchFamily="34" charset="-120"/>
+              </a:rPr>
+              <a:t>- Layouts</a:t>
+            </a:r>
+            <a:endParaRPr lang="en-US" sz="1800" dirty="0"/>
+          </a:p>
+          <a:p>
+            <a:pPr algn="l" indent="0" marL="0">
+              <a:lnSpc>
+                <a:spcPct val="120000"/>
+              </a:lnSpc>
+              <a:buNone/>
+            </a:pPr>
+            <a:r>
+              <a:rPr lang="en-US" sz="1800" dirty="0">
+                <a:solidFill>
+                  <a:srgbClr val="F8F8F8"/>
+                </a:solidFill>
+                <a:latin typeface="Pretendard" pitchFamily="34" charset="0"/>
+                <a:ea typeface="Pretendard" pitchFamily="34" charset="-122"/>
+                <a:cs typeface="Pretendard" pitchFamily="34" charset="-120"/>
+              </a:rPr>
+              <a:t>  toc-strips, two-column-compare, three-card-grid, six-tile-grid, timeline-rail, pipeline-chain.</a:t>
+            </a:r>
+            <a:endParaRPr lang="en-US" sz="1800" dirty="0"/>
           </a:p>
         </p:txBody>
       </p:sp>
       <p:sp>
         <p:nvSpPr>
-          <p:cNvPr id="29" name="Shape 22"/>
-          <p:cNvSpPr/>
-          <p:nvPr/>
-        </p:nvSpPr>
-        <p:spPr>
-          <a:xfrm>
-            <a:off x="6462522" y="2130552"/>
-            <a:ext cx="585216" cy="585216"/>
-          </a:xfrm>
-          <a:prstGeom prst="roundRect">
-            <a:avLst>
-              <a:gd name="adj" fmla="val 6250"/>
-            </a:avLst>
-          </a:prstGeom>
-          <a:solidFill>
-            <a:srgbClr val="0B1020"/>
-          </a:solidFill>
-          <a:ln w="12700">
-            <a:solidFill>
-              <a:srgbClr val="C4B5FD"/>
-            </a:solidFill>
-            <a:prstDash val="solid"/>
-          </a:ln>
-        </p:spPr>
-      </p:sp>
-      <p:pic>
-        <p:nvPicPr>
-          <p:cNvPr id="30" name="Image 5" descr="table icon from tabler-icons (MIT)">    </p:cNvPr>
-          <p:cNvPicPr>
-            <a:picLocks noChangeAspect="1"/>
-          </p:cNvPicPr>
-          <p:nvPr/>
-        </p:nvPicPr>
-        <p:blipFill>
-          <a:blip r:embed="rId11">
-            <a:extLst>
-              <a:ext uri="{96DAC541-7B7A-43D3-8B79-37D633B846F1}">
-                <asvg:svgBlip xmlns:asvg="http://schemas.microsoft.com/office/drawing/2016/SVG/main" r:embed="rId12"/>
-              </a:ext>
-            </a:extLst>
-          </a:blip>
-          <a:stretch>
-            <a:fillRect/>
-          </a:stretch>
-        </p:blipFill>
-        <p:spPr>
-          <a:xfrm>
-            <a:off x="6535674" y="2203704"/>
-            <a:ext cx="438912" cy="438912"/>
-          </a:xfrm>
-          <a:prstGeom prst="rect">
-            <a:avLst/>
-          </a:prstGeom>
-        </p:spPr>
-      </p:pic>
-      <p:sp>
-        <p:nvSpPr>
-          <p:cNvPr id="31" name="mdpr:1-2-e3669a:item-2:block-15-chunk-1"/>
+          <p:cNvPr id="17" name="mdpr:1-2-e3669a:right:block-15-chunk-1-block-15-chunk-1"/>
           <p:cNvSpPr txBox="1"/>
           <p:nvPr/>
         </p:nvSpPr>
         <p:spPr>
           <a:xfrm>
-            <a:off x="7175754" y="1627632"/>
-            <a:ext cx="3961638" cy="1591056"/>
+            <a:off x="6473952" y="1499616"/>
+            <a:ext cx="4791456" cy="4398264"/>
           </a:xfrm>
           <a:prstGeom prst="rect">
             <a:avLst/>
@@ -7191,7 +6779,7 @@
           <a:ln/>
         </p:spPr>
         <p:txBody>
-          <a:bodyPr wrap="square" lIns="0" tIns="25400" rIns="25400" bIns="0" rtlCol="0" anchor="ctr"/>
+          <a:bodyPr wrap="square" lIns="0" tIns="25400" rIns="25400" bIns="0" rtlCol="0" anchor="t"/>
           <a:lstStyle/>
           <a:p>
             <a:pPr algn="l" indent="0" marL="0">
@@ -7201,7 +6789,7 @@
               <a:buNone/>
             </a:pPr>
             <a:r>
-              <a:rPr lang="en-US" sz="2200" b="1" dirty="0">
+              <a:rPr lang="en-US" sz="1800" b="1" dirty="0">
                 <a:solidFill>
                   <a:srgbClr val="8A4FFF"/>
                 </a:solidFill>
@@ -7209,7 +6797,7 @@
                 <a:ea typeface="Pretendard" pitchFamily="34" charset="-122"/>
                 <a:cs typeface="Pretendard" pitchFamily="34" charset="-120"/>
               </a:rPr>
-              <a:t>Layouts</a:t>
+              <a:t>- Evidence</a:t>
             </a:r>
             <a:pPr algn="l" indent="0" marL="0">
               <a:lnSpc>
@@ -7218,123 +6806,7 @@
               <a:buNone/>
             </a:pPr>
             <a:r>
-              <a:rPr lang="en-US" sz="2200" dirty="0">
-                <a:solidFill>
-                  <a:srgbClr val="F8F8F8"/>
-                </a:solidFill>
-                <a:latin typeface="Pretendard" pitchFamily="34" charset="0"/>
-                <a:ea typeface="Pretendard" pitchFamily="34" charset="-122"/>
-                <a:cs typeface="Pretendard" pitchFamily="34" charset="-120"/>
-              </a:rPr>
-              <a:t>  toc-strips, two-column-compare, three-card-grid, six-tile-grid, timeline-rail, pipeline-chain.</a:t>
-            </a:r>
-            <a:endParaRPr lang="en-US" sz="2200" dirty="0"/>
-          </a:p>
-        </p:txBody>
-      </p:sp>
-      <p:sp>
-        <p:nvSpPr>
-          <p:cNvPr id="32" name="Shape 24"/>
-          <p:cNvSpPr/>
-          <p:nvPr/>
-        </p:nvSpPr>
-        <p:spPr>
-          <a:xfrm>
-            <a:off x="976122" y="4416552"/>
-            <a:ext cx="585216" cy="585216"/>
-          </a:xfrm>
-          <a:prstGeom prst="roundRect">
-            <a:avLst>
-              <a:gd name="adj" fmla="val 6250"/>
-            </a:avLst>
-          </a:prstGeom>
-          <a:solidFill>
-            <a:srgbClr val="0B1020"/>
-          </a:solidFill>
-          <a:ln w="12700">
-            <a:solidFill>
-              <a:srgbClr val="C4B5FD"/>
-            </a:solidFill>
-            <a:prstDash val="solid"/>
-          </a:ln>
-        </p:spPr>
-      </p:sp>
-      <p:pic>
-        <p:nvPicPr>
-          <p:cNvPr id="33" name="Image 6" descr="chart icon from tabler-icons (MIT)">    </p:cNvPr>
-          <p:cNvPicPr>
-            <a:picLocks noChangeAspect="1"/>
-          </p:cNvPicPr>
-          <p:nvPr/>
-        </p:nvPicPr>
-        <p:blipFill>
-          <a:blip r:embed="rId13">
-            <a:extLst>
-              <a:ext uri="{96DAC541-7B7A-43D3-8B79-37D633B846F1}">
-                <asvg:svgBlip xmlns:asvg="http://schemas.microsoft.com/office/drawing/2016/SVG/main" r:embed="rId14"/>
-              </a:ext>
-            </a:extLst>
-          </a:blip>
-          <a:stretch>
-            <a:fillRect/>
-          </a:stretch>
-        </p:blipFill>
-        <p:spPr>
-          <a:xfrm>
-            <a:off x="1049274" y="4489704"/>
-            <a:ext cx="438912" cy="438912"/>
-          </a:xfrm>
-          <a:prstGeom prst="rect">
-            <a:avLst/>
-          </a:prstGeom>
-        </p:spPr>
-      </p:pic>
-      <p:sp>
-        <p:nvSpPr>
-          <p:cNvPr id="34" name="mdpr:1-2-e3669a:item-3:block-15-chunk-1"/>
-          <p:cNvSpPr txBox="1"/>
-          <p:nvPr/>
-        </p:nvSpPr>
-        <p:spPr>
-          <a:xfrm>
-            <a:off x="1689354" y="3913632"/>
-            <a:ext cx="3961638" cy="1591056"/>
-          </a:xfrm>
-          <a:prstGeom prst="rect">
-            <a:avLst/>
-          </a:prstGeom>
-          <a:noFill/>
-          <a:ln/>
-        </p:spPr>
-        <p:txBody>
-          <a:bodyPr wrap="square" lIns="0" tIns="25400" rIns="25400" bIns="0" rtlCol="0" anchor="ctr"/>
-          <a:lstStyle/>
-          <a:p>
-            <a:pPr algn="l" indent="0" marL="0">
-              <a:lnSpc>
-                <a:spcPct val="120000"/>
-              </a:lnSpc>
-              <a:buNone/>
-            </a:pPr>
-            <a:r>
-              <a:rPr lang="en-US" sz="2200" b="1" dirty="0">
-                <a:solidFill>
-                  <a:srgbClr val="8A4FFF"/>
-                </a:solidFill>
-                <a:latin typeface="Pretendard" pitchFamily="34" charset="0"/>
-                <a:ea typeface="Pretendard" pitchFamily="34" charset="-122"/>
-                <a:cs typeface="Pretendard" pitchFamily="34" charset="-120"/>
-              </a:rPr>
-              <a:t>Evidence</a:t>
-            </a:r>
-            <a:pPr algn="l" indent="0" marL="0">
-              <a:lnSpc>
-                <a:spcPct val="120000"/>
-              </a:lnSpc>
-              <a:buNone/>
-            </a:pPr>
-            <a:r>
-              <a:rPr lang="en-US" sz="2200" dirty="0">
+              <a:rPr lang="en-US" sz="1800" dirty="0">
                 <a:solidFill>
                   <a:srgbClr val="F8F8F8"/>
                 </a:solidFill>
@@ -7344,87 +6816,8 @@
               </a:rPr>
               <a:t>  chart-table-pair, metric-proof, arc-ring-proof, gauge-proof, connected-strip, mixed-object-pack.</a:t>
             </a:r>
-            <a:endParaRPr lang="en-US" sz="2200" dirty="0"/>
+            <a:endParaRPr lang="en-US" sz="1800" dirty="0"/>
           </a:p>
-        </p:txBody>
-      </p:sp>
-      <p:sp>
-        <p:nvSpPr>
-          <p:cNvPr id="35" name="Shape 26"/>
-          <p:cNvSpPr/>
-          <p:nvPr/>
-        </p:nvSpPr>
-        <p:spPr>
-          <a:xfrm>
-            <a:off x="6462522" y="4416552"/>
-            <a:ext cx="585216" cy="585216"/>
-          </a:xfrm>
-          <a:prstGeom prst="roundRect">
-            <a:avLst>
-              <a:gd name="adj" fmla="val 6250"/>
-            </a:avLst>
-          </a:prstGeom>
-          <a:solidFill>
-            <a:srgbClr val="0B1020"/>
-          </a:solidFill>
-          <a:ln w="12700">
-            <a:solidFill>
-              <a:srgbClr val="C4B5FD"/>
-            </a:solidFill>
-            <a:prstDash val="solid"/>
-          </a:ln>
-        </p:spPr>
-      </p:sp>
-      <p:pic>
-        <p:nvPicPr>
-          <p:cNvPr id="36" name="Image 7" descr="flow icon from tabler-icons (MIT)">    </p:cNvPr>
-          <p:cNvPicPr>
-            <a:picLocks noChangeAspect="1"/>
-          </p:cNvPicPr>
-          <p:nvPr/>
-        </p:nvPicPr>
-        <p:blipFill>
-          <a:blip r:embed="rId15">
-            <a:extLst>
-              <a:ext uri="{96DAC541-7B7A-43D3-8B79-37D633B846F1}">
-                <asvg:svgBlip xmlns:asvg="http://schemas.microsoft.com/office/drawing/2016/SVG/main" r:embed="rId16"/>
-              </a:ext>
-            </a:extLst>
-          </a:blip>
-          <a:stretch>
-            <a:fillRect/>
-          </a:stretch>
-        </p:blipFill>
-        <p:spPr>
-          <a:xfrm>
-            <a:off x="6535674" y="4489704"/>
-            <a:ext cx="438912" cy="438912"/>
-          </a:xfrm>
-          <a:prstGeom prst="rect">
-            <a:avLst/>
-          </a:prstGeom>
-        </p:spPr>
-      </p:pic>
-      <p:sp>
-        <p:nvSpPr>
-          <p:cNvPr id="37" name="mdpr:1-2-e3669a:item-4:block-15-chunk-1"/>
-          <p:cNvSpPr txBox="1"/>
-          <p:nvPr/>
-        </p:nvSpPr>
-        <p:spPr>
-          <a:xfrm>
-            <a:off x="7175754" y="3913632"/>
-            <a:ext cx="3961638" cy="1591056"/>
-          </a:xfrm>
-          <a:prstGeom prst="rect">
-            <a:avLst/>
-          </a:prstGeom>
-          <a:noFill/>
-          <a:ln/>
-        </p:spPr>
-        <p:txBody>
-          <a:bodyPr wrap="square" lIns="0" tIns="25400" rIns="25400" bIns="0" rtlCol="0" anchor="ctr"/>
-          <a:lstStyle/>
           <a:p>
             <a:pPr algn="l" indent="0" marL="0">
               <a:lnSpc>
@@ -7433,7 +6826,7 @@
               <a:buNone/>
             </a:pPr>
             <a:r>
-              <a:rPr lang="en-US" sz="2200" b="1" dirty="0">
+              <a:rPr lang="en-US" sz="1800" b="1" dirty="0">
                 <a:solidFill>
                   <a:srgbClr val="8A4FFF"/>
                 </a:solidFill>
@@ -7441,8 +6834,11 @@
                 <a:ea typeface="Pretendard" pitchFamily="34" charset="-122"/>
                 <a:cs typeface="Pretendard" pitchFamily="34" charset="-120"/>
               </a:rPr>
-              <a:t>Connectors</a:t>
+              <a:t>- Connectors</a:t>
             </a:r>
+            <a:endParaRPr lang="en-US" sz="1800" dirty="0"/>
+          </a:p>
+          <a:p>
             <a:pPr algn="l" indent="0" marL="0">
               <a:lnSpc>
                 <a:spcPct val="120000"/>
@@ -7450,7 +6846,7 @@
               <a:buNone/>
             </a:pPr>
             <a:r>
-              <a:rPr lang="en-US" sz="2200" dirty="0">
+              <a:rPr lang="en-US" sz="1800" dirty="0">
                 <a:solidFill>
                   <a:srgbClr val="F8F8F8"/>
                 </a:solidFill>
@@ -7460,7 +6856,7 @@
               </a:rPr>
               <a:t>  straight-arrow, elbow-arrow, boundary-attach, overlap-joint, parallel-flow, contrast-flow.</a:t>
             </a:r>
-            <a:endParaRPr lang="en-US" sz="2200" dirty="0"/>
+            <a:endParaRPr lang="en-US" sz="1800" dirty="0"/>
           </a:p>
         </p:txBody>
       </p:sp>
@@ -14560,71 +13956,14 @@
       </p:sp>
       <p:sp>
         <p:nvSpPr>
-          <p:cNvPr id="24" name="Shape 19"/>
-          <p:cNvSpPr/>
-          <p:nvPr/>
-        </p:nvSpPr>
-        <p:spPr>
-          <a:xfrm>
-            <a:off x="1097280" y="2140428"/>
-            <a:ext cx="474025" cy="474025"/>
-          </a:xfrm>
-          <a:prstGeom prst="roundRect">
-            <a:avLst>
-              <a:gd name="adj" fmla="val 7716"/>
-            </a:avLst>
-          </a:prstGeom>
-          <a:solidFill>
-            <a:srgbClr val="0B1020"/>
-          </a:solidFill>
-          <a:ln w="12700">
-            <a:solidFill>
-              <a:srgbClr val="C4B5FD"/>
-            </a:solidFill>
-            <a:prstDash val="solid"/>
-          </a:ln>
-        </p:spPr>
-      </p:sp>
-      <p:pic>
-        <p:nvPicPr>
-          <p:cNvPr id="25" name="Image 3" descr="article icon from tabler-icons (MIT)">    </p:cNvPr>
-          <p:cNvPicPr>
-            <a:picLocks noChangeAspect="1"/>
-          </p:cNvPicPr>
-          <p:nvPr/>
-        </p:nvPicPr>
-        <p:blipFill>
-          <a:blip r:embed="rId7">
-            <a:extLst>
-              <a:ext uri="{96DAC541-7B7A-43D3-8B79-37D633B846F1}">
-                <asvg:svgBlip xmlns:asvg="http://schemas.microsoft.com/office/drawing/2016/SVG/main" r:embed="rId8"/>
-              </a:ext>
-            </a:extLst>
-          </a:blip>
-          <a:stretch>
-            <a:fillRect/>
-          </a:stretch>
-        </p:blipFill>
-        <p:spPr>
-          <a:xfrm>
-            <a:off x="1170432" y="2213580"/>
-            <a:ext cx="327721" cy="327721"/>
-          </a:xfrm>
-          <a:prstGeom prst="rect">
-            <a:avLst/>
-          </a:prstGeom>
-        </p:spPr>
-      </p:pic>
-      <p:sp>
-        <p:nvSpPr>
-          <p:cNvPr id="26" name="mdpr:1-2-ea42c8:item-1:block-27-chunk-1"/>
+          <p:cNvPr id="24" name="mdpr:1-2-ea42c8:item-1:block-27-chunk-1"/>
           <p:cNvSpPr txBox="1"/>
           <p:nvPr/>
         </p:nvSpPr>
         <p:spPr>
           <a:xfrm>
-            <a:off x="1699321" y="1987296"/>
-            <a:ext cx="9255191" cy="780288"/>
+            <a:off x="1133856" y="1957548"/>
+            <a:ext cx="9820656" cy="839785"/>
           </a:xfrm>
           <a:prstGeom prst="rect">
             <a:avLst/>
@@ -14676,71 +14015,14 @@
       </p:sp>
       <p:sp>
         <p:nvSpPr>
-          <p:cNvPr id="27" name="Shape 21"/>
-          <p:cNvSpPr/>
-          <p:nvPr/>
-        </p:nvSpPr>
-        <p:spPr>
-          <a:xfrm>
-            <a:off x="1097280" y="3466308"/>
-            <a:ext cx="474025" cy="474025"/>
-          </a:xfrm>
-          <a:prstGeom prst="roundRect">
-            <a:avLst>
-              <a:gd name="adj" fmla="val 7716"/>
-            </a:avLst>
-          </a:prstGeom>
-          <a:solidFill>
-            <a:srgbClr val="0B1020"/>
-          </a:solidFill>
-          <a:ln w="12700">
-            <a:solidFill>
-              <a:srgbClr val="C4B5FD"/>
-            </a:solidFill>
-            <a:prstDash val="solid"/>
-          </a:ln>
-        </p:spPr>
-      </p:sp>
-      <p:pic>
-        <p:nvPicPr>
-          <p:cNvPr id="28" name="Image 4" descr="article icon from tabler-icons (MIT)">    </p:cNvPr>
-          <p:cNvPicPr>
-            <a:picLocks noChangeAspect="1"/>
-          </p:cNvPicPr>
-          <p:nvPr/>
-        </p:nvPicPr>
-        <p:blipFill>
-          <a:blip r:embed="rId9">
-            <a:extLst>
-              <a:ext uri="{96DAC541-7B7A-43D3-8B79-37D633B846F1}">
-                <asvg:svgBlip xmlns:asvg="http://schemas.microsoft.com/office/drawing/2016/SVG/main" r:embed="rId10"/>
-              </a:ext>
-            </a:extLst>
-          </a:blip>
-          <a:stretch>
-            <a:fillRect/>
-          </a:stretch>
-        </p:blipFill>
-        <p:spPr>
-          <a:xfrm>
-            <a:off x="1170432" y="3539460"/>
-            <a:ext cx="327721" cy="327721"/>
-          </a:xfrm>
-          <a:prstGeom prst="rect">
-            <a:avLst/>
-          </a:prstGeom>
-        </p:spPr>
-      </p:pic>
-      <p:sp>
-        <p:nvSpPr>
-          <p:cNvPr id="29" name="mdpr:1-2-ea42c8:item-2:block-27-chunk-1"/>
+          <p:cNvPr id="25" name="mdpr:1-2-ea42c8:item-2:block-27-chunk-1"/>
           <p:cNvSpPr txBox="1"/>
           <p:nvPr/>
         </p:nvSpPr>
         <p:spPr>
           <a:xfrm>
-            <a:off x="1699321" y="3313176"/>
-            <a:ext cx="9255191" cy="780288"/>
+            <a:off x="1133856" y="3283428"/>
+            <a:ext cx="9820656" cy="839785"/>
           </a:xfrm>
           <a:prstGeom prst="rect">
             <a:avLst/>
@@ -14792,71 +14074,14 @@
       </p:sp>
       <p:sp>
         <p:nvSpPr>
-          <p:cNvPr id="30" name="Shape 23"/>
-          <p:cNvSpPr/>
-          <p:nvPr/>
-        </p:nvSpPr>
-        <p:spPr>
-          <a:xfrm>
-            <a:off x="1097280" y="4783044"/>
-            <a:ext cx="474025" cy="474025"/>
-          </a:xfrm>
-          <a:prstGeom prst="roundRect">
-            <a:avLst>
-              <a:gd name="adj" fmla="val 7716"/>
-            </a:avLst>
-          </a:prstGeom>
-          <a:solidFill>
-            <a:srgbClr val="0B1020"/>
-          </a:solidFill>
-          <a:ln w="12700">
-            <a:solidFill>
-              <a:srgbClr val="C4B5FD"/>
-            </a:solidFill>
-            <a:prstDash val="solid"/>
-          </a:ln>
-        </p:spPr>
-      </p:sp>
-      <p:pic>
-        <p:nvPicPr>
-          <p:cNvPr id="31" name="Image 5" descr="article icon from tabler-icons (MIT)">    </p:cNvPr>
-          <p:cNvPicPr>
-            <a:picLocks noChangeAspect="1"/>
-          </p:cNvPicPr>
-          <p:nvPr/>
-        </p:nvPicPr>
-        <p:blipFill>
-          <a:blip r:embed="rId11">
-            <a:extLst>
-              <a:ext uri="{96DAC541-7B7A-43D3-8B79-37D633B846F1}">
-                <asvg:svgBlip xmlns:asvg="http://schemas.microsoft.com/office/drawing/2016/SVG/main" r:embed="rId12"/>
-              </a:ext>
-            </a:extLst>
-          </a:blip>
-          <a:stretch>
-            <a:fillRect/>
-          </a:stretch>
-        </p:blipFill>
-        <p:spPr>
-          <a:xfrm>
-            <a:off x="1170432" y="4856196"/>
-            <a:ext cx="327721" cy="327721"/>
-          </a:xfrm>
-          <a:prstGeom prst="rect">
-            <a:avLst/>
-          </a:prstGeom>
-        </p:spPr>
-      </p:pic>
-      <p:sp>
-        <p:nvSpPr>
-          <p:cNvPr id="32" name="mdpr:1-2-ea42c8:item-3:block-27-chunk-1"/>
+          <p:cNvPr id="26" name="mdpr:1-2-ea42c8:item-3:block-27-chunk-1"/>
           <p:cNvSpPr txBox="1"/>
           <p:nvPr/>
         </p:nvSpPr>
         <p:spPr>
           <a:xfrm>
-            <a:off x="1699321" y="4629912"/>
-            <a:ext cx="9255191" cy="780288"/>
+            <a:off x="1133856" y="4600164"/>
+            <a:ext cx="9820656" cy="839785"/>
           </a:xfrm>
           <a:prstGeom prst="rect">
             <a:avLst/>
@@ -17730,71 +16955,14 @@
       </p:sp>
       <p:sp>
         <p:nvSpPr>
-          <p:cNvPr id="26" name="Shape 20"/>
-          <p:cNvSpPr/>
-          <p:nvPr/>
-        </p:nvSpPr>
-        <p:spPr>
-          <a:xfrm>
-            <a:off x="976122" y="2130552"/>
-            <a:ext cx="585216" cy="585216"/>
-          </a:xfrm>
-          <a:prstGeom prst="roundRect">
-            <a:avLst>
-              <a:gd name="adj" fmla="val 6250"/>
-            </a:avLst>
-          </a:prstGeom>
-          <a:solidFill>
-            <a:srgbClr val="0B1020"/>
-          </a:solidFill>
-          <a:ln w="12700">
-            <a:solidFill>
-              <a:srgbClr val="C4B5FD"/>
-            </a:solidFill>
-            <a:prstDash val="solid"/>
-          </a:ln>
-        </p:spPr>
-      </p:sp>
-      <p:pic>
-        <p:nvPicPr>
-          <p:cNvPr id="27" name="Image 4" descr="article icon from tabler-icons (MIT)">    </p:cNvPr>
-          <p:cNvPicPr>
-            <a:picLocks noChangeAspect="1"/>
-          </p:cNvPicPr>
-          <p:nvPr/>
-        </p:nvPicPr>
-        <p:blipFill>
-          <a:blip r:embed="rId9">
-            <a:extLst>
-              <a:ext uri="{96DAC541-7B7A-43D3-8B79-37D633B846F1}">
-                <asvg:svgBlip xmlns:asvg="http://schemas.microsoft.com/office/drawing/2016/SVG/main" r:embed="rId10"/>
-              </a:ext>
-            </a:extLst>
-          </a:blip>
-          <a:stretch>
-            <a:fillRect/>
-          </a:stretch>
-        </p:blipFill>
-        <p:spPr>
-          <a:xfrm>
-            <a:off x="1049274" y="2203704"/>
-            <a:ext cx="438912" cy="438912"/>
-          </a:xfrm>
-          <a:prstGeom prst="rect">
-            <a:avLst/>
-          </a:prstGeom>
-        </p:spPr>
-      </p:pic>
-      <p:sp>
-        <p:nvSpPr>
-          <p:cNvPr id="28" name="mdpr:icon-and-text-aside-8429fc:item-1:block-29"/>
+          <p:cNvPr id="26" name="mdpr:icon-and-text-aside-8429fc:item-1:block-29"/>
           <p:cNvSpPr txBox="1"/>
           <p:nvPr/>
         </p:nvSpPr>
         <p:spPr>
           <a:xfrm>
-            <a:off x="1689354" y="2033016"/>
-            <a:ext cx="3961638" cy="780288"/>
+            <a:off x="1042416" y="1627632"/>
+            <a:ext cx="4608576" cy="1591056"/>
           </a:xfrm>
           <a:prstGeom prst="rect">
             <a:avLst/>
@@ -17846,71 +17014,14 @@
       </p:sp>
       <p:sp>
         <p:nvSpPr>
-          <p:cNvPr id="29" name="Shape 22"/>
-          <p:cNvSpPr/>
-          <p:nvPr/>
-        </p:nvSpPr>
-        <p:spPr>
-          <a:xfrm>
-            <a:off x="6462522" y="2130552"/>
-            <a:ext cx="585216" cy="585216"/>
-          </a:xfrm>
-          <a:prstGeom prst="roundRect">
-            <a:avLst>
-              <a:gd name="adj" fmla="val 6250"/>
-            </a:avLst>
-          </a:prstGeom>
-          <a:solidFill>
-            <a:srgbClr val="0B1020"/>
-          </a:solidFill>
-          <a:ln w="12700">
-            <a:solidFill>
-              <a:srgbClr val="C4B5FD"/>
-            </a:solidFill>
-            <a:prstDash val="solid"/>
-          </a:ln>
-        </p:spPr>
-      </p:sp>
-      <p:pic>
-        <p:nvPicPr>
-          <p:cNvPr id="30" name="Image 5" descr="article icon from tabler-icons (MIT)">    </p:cNvPr>
-          <p:cNvPicPr>
-            <a:picLocks noChangeAspect="1"/>
-          </p:cNvPicPr>
-          <p:nvPr/>
-        </p:nvPicPr>
-        <p:blipFill>
-          <a:blip r:embed="rId11">
-            <a:extLst>
-              <a:ext uri="{96DAC541-7B7A-43D3-8B79-37D633B846F1}">
-                <asvg:svgBlip xmlns:asvg="http://schemas.microsoft.com/office/drawing/2016/SVG/main" r:embed="rId12"/>
-              </a:ext>
-            </a:extLst>
-          </a:blip>
-          <a:stretch>
-            <a:fillRect/>
-          </a:stretch>
-        </p:blipFill>
-        <p:spPr>
-          <a:xfrm>
-            <a:off x="6535674" y="2203704"/>
-            <a:ext cx="438912" cy="438912"/>
-          </a:xfrm>
-          <a:prstGeom prst="rect">
-            <a:avLst/>
-          </a:prstGeom>
-        </p:spPr>
-      </p:pic>
-      <p:sp>
-        <p:nvSpPr>
-          <p:cNvPr id="31" name="mdpr:icon-and-text-aside-8429fc:item-2:block-29"/>
+          <p:cNvPr id="27" name="mdpr:icon-and-text-aside-8429fc:item-2:block-29"/>
           <p:cNvSpPr txBox="1"/>
           <p:nvPr/>
         </p:nvSpPr>
         <p:spPr>
           <a:xfrm>
-            <a:off x="7175754" y="1865376"/>
-            <a:ext cx="3961638" cy="1115568"/>
+            <a:off x="6528816" y="1627632"/>
+            <a:ext cx="4608576" cy="1591056"/>
           </a:xfrm>
           <a:prstGeom prst="rect">
             <a:avLst/>
@@ -17962,71 +17073,14 @@
       </p:sp>
       <p:sp>
         <p:nvSpPr>
-          <p:cNvPr id="32" name="Shape 24"/>
-          <p:cNvSpPr/>
-          <p:nvPr/>
-        </p:nvSpPr>
-        <p:spPr>
-          <a:xfrm>
-            <a:off x="976122" y="4416552"/>
-            <a:ext cx="585216" cy="585216"/>
-          </a:xfrm>
-          <a:prstGeom prst="roundRect">
-            <a:avLst>
-              <a:gd name="adj" fmla="val 6250"/>
-            </a:avLst>
-          </a:prstGeom>
-          <a:solidFill>
-            <a:srgbClr val="0B1020"/>
-          </a:solidFill>
-          <a:ln w="12700">
-            <a:solidFill>
-              <a:srgbClr val="C4B5FD"/>
-            </a:solidFill>
-            <a:prstDash val="solid"/>
-          </a:ln>
-        </p:spPr>
-      </p:sp>
-      <p:pic>
-        <p:nvPicPr>
-          <p:cNvPr id="33" name="Image 6" descr="article icon from tabler-icons (MIT)">    </p:cNvPr>
-          <p:cNvPicPr>
-            <a:picLocks noChangeAspect="1"/>
-          </p:cNvPicPr>
-          <p:nvPr/>
-        </p:nvPicPr>
-        <p:blipFill>
-          <a:blip r:embed="rId13">
-            <a:extLst>
-              <a:ext uri="{96DAC541-7B7A-43D3-8B79-37D633B846F1}">
-                <asvg:svgBlip xmlns:asvg="http://schemas.microsoft.com/office/drawing/2016/SVG/main" r:embed="rId14"/>
-              </a:ext>
-            </a:extLst>
-          </a:blip>
-          <a:stretch>
-            <a:fillRect/>
-          </a:stretch>
-        </p:blipFill>
-        <p:spPr>
-          <a:xfrm>
-            <a:off x="1049274" y="4489704"/>
-            <a:ext cx="438912" cy="438912"/>
-          </a:xfrm>
-          <a:prstGeom prst="rect">
-            <a:avLst/>
-          </a:prstGeom>
-        </p:spPr>
-      </p:pic>
-      <p:sp>
-        <p:nvSpPr>
-          <p:cNvPr id="34" name="mdpr:icon-and-text-aside-8429fc:item-3:block-29"/>
+          <p:cNvPr id="28" name="mdpr:icon-and-text-aside-8429fc:item-3:block-29"/>
           <p:cNvSpPr txBox="1"/>
           <p:nvPr/>
         </p:nvSpPr>
         <p:spPr>
           <a:xfrm>
-            <a:off x="1689354" y="4151376"/>
-            <a:ext cx="3961638" cy="1115568"/>
+            <a:off x="1042416" y="3913632"/>
+            <a:ext cx="4608576" cy="1591056"/>
           </a:xfrm>
           <a:prstGeom prst="rect">
             <a:avLst/>
@@ -18078,71 +17132,14 @@
       </p:sp>
       <p:sp>
         <p:nvSpPr>
-          <p:cNvPr id="35" name="Shape 26"/>
-          <p:cNvSpPr/>
-          <p:nvPr/>
-        </p:nvSpPr>
-        <p:spPr>
-          <a:xfrm>
-            <a:off x="6462522" y="4416552"/>
-            <a:ext cx="585216" cy="585216"/>
-          </a:xfrm>
-          <a:prstGeom prst="roundRect">
-            <a:avLst>
-              <a:gd name="adj" fmla="val 6250"/>
-            </a:avLst>
-          </a:prstGeom>
-          <a:solidFill>
-            <a:srgbClr val="0B1020"/>
-          </a:solidFill>
-          <a:ln w="12700">
-            <a:solidFill>
-              <a:srgbClr val="C4B5FD"/>
-            </a:solidFill>
-            <a:prstDash val="solid"/>
-          </a:ln>
-        </p:spPr>
-      </p:sp>
-      <p:pic>
-        <p:nvPicPr>
-          <p:cNvPr id="36" name="Image 7" descr="table icon from tabler-icons (MIT)">    </p:cNvPr>
-          <p:cNvPicPr>
-            <a:picLocks noChangeAspect="1"/>
-          </p:cNvPicPr>
-          <p:nvPr/>
-        </p:nvPicPr>
-        <p:blipFill>
-          <a:blip r:embed="rId15">
-            <a:extLst>
-              <a:ext uri="{96DAC541-7B7A-43D3-8B79-37D633B846F1}">
-                <asvg:svgBlip xmlns:asvg="http://schemas.microsoft.com/office/drawing/2016/SVG/main" r:embed="rId16"/>
-              </a:ext>
-            </a:extLst>
-          </a:blip>
-          <a:stretch>
-            <a:fillRect/>
-          </a:stretch>
-        </p:blipFill>
-        <p:spPr>
-          <a:xfrm>
-            <a:off x="6535674" y="4489704"/>
-            <a:ext cx="438912" cy="438912"/>
-          </a:xfrm>
-          <a:prstGeom prst="rect">
-            <a:avLst/>
-          </a:prstGeom>
-        </p:spPr>
-      </p:pic>
-      <p:sp>
-        <p:nvSpPr>
-          <p:cNvPr id="37" name="mdpr:icon-and-text-aside-8429fc:item-4:block-29"/>
+          <p:cNvPr id="29" name="mdpr:icon-and-text-aside-8429fc:item-4:block-29"/>
           <p:cNvSpPr txBox="1"/>
           <p:nvPr/>
         </p:nvSpPr>
         <p:spPr>
           <a:xfrm>
-            <a:off x="7175754" y="4151376"/>
-            <a:ext cx="3961638" cy="1115568"/>
+            <a:off x="6528816" y="3913632"/>
+            <a:ext cx="4608576" cy="1591056"/>
           </a:xfrm>
           <a:prstGeom prst="rect">
             <a:avLst/>
@@ -18989,71 +17986,14 @@
       </p:sp>
       <p:sp>
         <p:nvSpPr>
-          <p:cNvPr id="26" name="Shape 20"/>
-          <p:cNvSpPr/>
-          <p:nvPr/>
-        </p:nvSpPr>
-        <p:spPr>
-          <a:xfrm>
-            <a:off x="976122" y="2130552"/>
-            <a:ext cx="585216" cy="585216"/>
-          </a:xfrm>
-          <a:prstGeom prst="roundRect">
-            <a:avLst>
-              <a:gd name="adj" fmla="val 6250"/>
-            </a:avLst>
-          </a:prstGeom>
-          <a:solidFill>
-            <a:srgbClr val="0B1020"/>
-          </a:solidFill>
-          <a:ln w="12700">
-            <a:solidFill>
-              <a:srgbClr val="C4B5FD"/>
-            </a:solidFill>
-            <a:prstDash val="solid"/>
-          </a:ln>
-        </p:spPr>
-      </p:sp>
-      <p:pic>
-        <p:nvPicPr>
-          <p:cNvPr id="27" name="Image 4" descr="verified icon from tabler-icons (MIT)">    </p:cNvPr>
-          <p:cNvPicPr>
-            <a:picLocks noChangeAspect="1"/>
-          </p:cNvPicPr>
-          <p:nvPr/>
-        </p:nvPicPr>
-        <p:blipFill>
-          <a:blip r:embed="rId9">
-            <a:extLst>
-              <a:ext uri="{96DAC541-7B7A-43D3-8B79-37D633B846F1}">
-                <asvg:svgBlip xmlns:asvg="http://schemas.microsoft.com/office/drawing/2016/SVG/main" r:embed="rId10"/>
-              </a:ext>
-            </a:extLst>
-          </a:blip>
-          <a:stretch>
-            <a:fillRect/>
-          </a:stretch>
-        </p:blipFill>
-        <p:spPr>
-          <a:xfrm>
-            <a:off x="1049274" y="2203704"/>
-            <a:ext cx="438912" cy="438912"/>
-          </a:xfrm>
-          <a:prstGeom prst="rect">
-            <a:avLst/>
-          </a:prstGeom>
-        </p:spPr>
-      </p:pic>
-      <p:sp>
-        <p:nvSpPr>
-          <p:cNvPr id="28" name="mdpr:overflow-guard-f8d03e:item-1:block-31"/>
+          <p:cNvPr id="26" name="mdpr:overflow-guard-f8d03e:item-1:block-31"/>
           <p:cNvSpPr txBox="1"/>
           <p:nvPr/>
         </p:nvSpPr>
         <p:spPr>
           <a:xfrm>
-            <a:off x="1689354" y="1865376"/>
-            <a:ext cx="3961638" cy="1115568"/>
+            <a:off x="1042416" y="1627632"/>
+            <a:ext cx="4608576" cy="1591056"/>
           </a:xfrm>
           <a:prstGeom prst="rect">
             <a:avLst/>
@@ -19105,71 +18045,14 @@
       </p:sp>
       <p:sp>
         <p:nvSpPr>
-          <p:cNvPr id="29" name="Shape 22"/>
-          <p:cNvSpPr/>
-          <p:nvPr/>
-        </p:nvSpPr>
-        <p:spPr>
-          <a:xfrm>
-            <a:off x="6462522" y="2130552"/>
-            <a:ext cx="585216" cy="585216"/>
-          </a:xfrm>
-          <a:prstGeom prst="roundRect">
-            <a:avLst>
-              <a:gd name="adj" fmla="val 6250"/>
-            </a:avLst>
-          </a:prstGeom>
-          <a:solidFill>
-            <a:srgbClr val="0B1020"/>
-          </a:solidFill>
-          <a:ln w="12700">
-            <a:solidFill>
-              <a:srgbClr val="C4B5FD"/>
-            </a:solidFill>
-            <a:prstDash val="solid"/>
-          </a:ln>
-        </p:spPr>
-      </p:sp>
-      <p:pic>
-        <p:nvPicPr>
-          <p:cNvPr id="30" name="Image 5" descr="table icon from tabler-icons (MIT)">    </p:cNvPr>
-          <p:cNvPicPr>
-            <a:picLocks noChangeAspect="1"/>
-          </p:cNvPicPr>
-          <p:nvPr/>
-        </p:nvPicPr>
-        <p:blipFill>
-          <a:blip r:embed="rId11">
-            <a:extLst>
-              <a:ext uri="{96DAC541-7B7A-43D3-8B79-37D633B846F1}">
-                <asvg:svgBlip xmlns:asvg="http://schemas.microsoft.com/office/drawing/2016/SVG/main" r:embed="rId12"/>
-              </a:ext>
-            </a:extLst>
-          </a:blip>
-          <a:stretch>
-            <a:fillRect/>
-          </a:stretch>
-        </p:blipFill>
-        <p:spPr>
-          <a:xfrm>
-            <a:off x="6535674" y="2203704"/>
-            <a:ext cx="438912" cy="438912"/>
-          </a:xfrm>
-          <a:prstGeom prst="rect">
-            <a:avLst/>
-          </a:prstGeom>
-        </p:spPr>
-      </p:pic>
-      <p:sp>
-        <p:nvSpPr>
-          <p:cNvPr id="31" name="mdpr:overflow-guard-f8d03e:item-2:block-31"/>
+          <p:cNvPr id="27" name="mdpr:overflow-guard-f8d03e:item-2:block-31"/>
           <p:cNvSpPr txBox="1"/>
           <p:nvPr/>
         </p:nvSpPr>
         <p:spPr>
           <a:xfrm>
-            <a:off x="7175754" y="1697736"/>
-            <a:ext cx="3961638" cy="1450848"/>
+            <a:off x="6528816" y="1627632"/>
+            <a:ext cx="4608576" cy="1591056"/>
           </a:xfrm>
           <a:prstGeom prst="rect">
             <a:avLst/>
@@ -19221,71 +18104,14 @@
       </p:sp>
       <p:sp>
         <p:nvSpPr>
-          <p:cNvPr id="32" name="Shape 24"/>
-          <p:cNvSpPr/>
-          <p:nvPr/>
-        </p:nvSpPr>
-        <p:spPr>
-          <a:xfrm>
-            <a:off x="976122" y="4416552"/>
-            <a:ext cx="585216" cy="585216"/>
-          </a:xfrm>
-          <a:prstGeom prst="roundRect">
-            <a:avLst>
-              <a:gd name="adj" fmla="val 6250"/>
-            </a:avLst>
-          </a:prstGeom>
-          <a:solidFill>
-            <a:srgbClr val="0B1020"/>
-          </a:solidFill>
-          <a:ln w="12700">
-            <a:solidFill>
-              <a:srgbClr val="C4B5FD"/>
-            </a:solidFill>
-            <a:prstDash val="solid"/>
-          </a:ln>
-        </p:spPr>
-      </p:sp>
-      <p:pic>
-        <p:nvPicPr>
-          <p:cNvPr id="33" name="Image 6" descr="article icon from tabler-icons (MIT)">    </p:cNvPr>
-          <p:cNvPicPr>
-            <a:picLocks noChangeAspect="1"/>
-          </p:cNvPicPr>
-          <p:nvPr/>
-        </p:nvPicPr>
-        <p:blipFill>
-          <a:blip r:embed="rId13">
-            <a:extLst>
-              <a:ext uri="{96DAC541-7B7A-43D3-8B79-37D633B846F1}">
-                <asvg:svgBlip xmlns:asvg="http://schemas.microsoft.com/office/drawing/2016/SVG/main" r:embed="rId14"/>
-              </a:ext>
-            </a:extLst>
-          </a:blip>
-          <a:stretch>
-            <a:fillRect/>
-          </a:stretch>
-        </p:blipFill>
-        <p:spPr>
-          <a:xfrm>
-            <a:off x="1049274" y="4489704"/>
-            <a:ext cx="438912" cy="438912"/>
-          </a:xfrm>
-          <a:prstGeom prst="rect">
-            <a:avLst/>
-          </a:prstGeom>
-        </p:spPr>
-      </p:pic>
-      <p:sp>
-        <p:nvSpPr>
-          <p:cNvPr id="34" name="mdpr:overflow-guard-f8d03e:item-3:block-31"/>
+          <p:cNvPr id="28" name="mdpr:overflow-guard-f8d03e:item-3:block-31"/>
           <p:cNvSpPr txBox="1"/>
           <p:nvPr/>
         </p:nvSpPr>
         <p:spPr>
           <a:xfrm>
-            <a:off x="1689354" y="4151376"/>
-            <a:ext cx="3961638" cy="1115568"/>
+            <a:off x="1042416" y="3913632"/>
+            <a:ext cx="4608576" cy="1591056"/>
           </a:xfrm>
           <a:prstGeom prst="rect">
             <a:avLst/>
@@ -19337,71 +18163,14 @@
       </p:sp>
       <p:sp>
         <p:nvSpPr>
-          <p:cNvPr id="35" name="Shape 26"/>
-          <p:cNvSpPr/>
-          <p:nvPr/>
-        </p:nvSpPr>
-        <p:spPr>
-          <a:xfrm>
-            <a:off x="6462522" y="4416552"/>
-            <a:ext cx="585216" cy="585216"/>
-          </a:xfrm>
-          <a:prstGeom prst="roundRect">
-            <a:avLst>
-              <a:gd name="adj" fmla="val 6250"/>
-            </a:avLst>
-          </a:prstGeom>
-          <a:solidFill>
-            <a:srgbClr val="0B1020"/>
-          </a:solidFill>
-          <a:ln w="12700">
-            <a:solidFill>
-              <a:srgbClr val="C4B5FD"/>
-            </a:solidFill>
-            <a:prstDash val="solid"/>
-          </a:ln>
-        </p:spPr>
-      </p:sp>
-      <p:pic>
-        <p:nvPicPr>
-          <p:cNvPr id="36" name="Image 7" descr="article icon from tabler-icons (MIT)">    </p:cNvPr>
-          <p:cNvPicPr>
-            <a:picLocks noChangeAspect="1"/>
-          </p:cNvPicPr>
-          <p:nvPr/>
-        </p:nvPicPr>
-        <p:blipFill>
-          <a:blip r:embed="rId15">
-            <a:extLst>
-              <a:ext uri="{96DAC541-7B7A-43D3-8B79-37D633B846F1}">
-                <asvg:svgBlip xmlns:asvg="http://schemas.microsoft.com/office/drawing/2016/SVG/main" r:embed="rId16"/>
-              </a:ext>
-            </a:extLst>
-          </a:blip>
-          <a:stretch>
-            <a:fillRect/>
-          </a:stretch>
-        </p:blipFill>
-        <p:spPr>
-          <a:xfrm>
-            <a:off x="6535674" y="4489704"/>
-            <a:ext cx="438912" cy="438912"/>
-          </a:xfrm>
-          <a:prstGeom prst="rect">
-            <a:avLst/>
-          </a:prstGeom>
-        </p:spPr>
-      </p:pic>
-      <p:sp>
-        <p:nvSpPr>
-          <p:cNvPr id="37" name="mdpr:overflow-guard-f8d03e:item-4:block-31"/>
+          <p:cNvPr id="29" name="mdpr:overflow-guard-f8d03e:item-4:block-31"/>
           <p:cNvSpPr txBox="1"/>
           <p:nvPr/>
         </p:nvSpPr>
         <p:spPr>
           <a:xfrm>
-            <a:off x="7175754" y="4151376"/>
-            <a:ext cx="3961638" cy="1115568"/>
+            <a:off x="6528816" y="3913632"/>
+            <a:ext cx="4608576" cy="1591056"/>
           </a:xfrm>
           <a:prstGeom prst="rect">
             <a:avLst/>
@@ -22079,71 +20848,14 @@
       </p:sp>
       <p:sp>
         <p:nvSpPr>
-          <p:cNvPr id="24" name="Shape 19"/>
-          <p:cNvSpPr/>
-          <p:nvPr/>
-        </p:nvSpPr>
-        <p:spPr>
-          <a:xfrm>
-            <a:off x="1097280" y="2140428"/>
-            <a:ext cx="474025" cy="474025"/>
-          </a:xfrm>
-          <a:prstGeom prst="roundRect">
-            <a:avLst>
-              <a:gd name="adj" fmla="val 7716"/>
-            </a:avLst>
-          </a:prstGeom>
-          <a:solidFill>
-            <a:srgbClr val="0B1020"/>
-          </a:solidFill>
-          <a:ln w="12700">
-            <a:solidFill>
-              <a:srgbClr val="C4B5FD"/>
-            </a:solidFill>
-            <a:prstDash val="solid"/>
-          </a:ln>
-        </p:spPr>
-      </p:sp>
-      <p:pic>
-        <p:nvPicPr>
-          <p:cNvPr id="25" name="Image 3" descr="flow icon from tabler-icons (MIT)">    </p:cNvPr>
-          <p:cNvPicPr>
-            <a:picLocks noChangeAspect="1"/>
-          </p:cNvPicPr>
-          <p:nvPr/>
-        </p:nvPicPr>
-        <p:blipFill>
-          <a:blip r:embed="rId7">
-            <a:extLst>
-              <a:ext uri="{96DAC541-7B7A-43D3-8B79-37D633B846F1}">
-                <asvg:svgBlip xmlns:asvg="http://schemas.microsoft.com/office/drawing/2016/SVG/main" r:embed="rId8"/>
-              </a:ext>
-            </a:extLst>
-          </a:blip>
-          <a:stretch>
-            <a:fillRect/>
-          </a:stretch>
-        </p:blipFill>
-        <p:spPr>
-          <a:xfrm>
-            <a:off x="1170432" y="2213580"/>
-            <a:ext cx="327721" cy="327721"/>
-          </a:xfrm>
-          <a:prstGeom prst="rect">
-            <a:avLst/>
-          </a:prstGeom>
-        </p:spPr>
-      </p:pic>
-      <p:sp>
-        <p:nvSpPr>
-          <p:cNvPr id="26" name="mdpr:actions-output-review-326e07:item-1:block-41"/>
+          <p:cNvPr id="24" name="mdpr:actions-output-review-326e07:item-1:block-41"/>
           <p:cNvSpPr txBox="1"/>
           <p:nvPr/>
         </p:nvSpPr>
         <p:spPr>
           <a:xfrm>
-            <a:off x="1699321" y="1987296"/>
-            <a:ext cx="9255191" cy="780288"/>
+            <a:off x="1133856" y="1957548"/>
+            <a:ext cx="9820656" cy="839785"/>
           </a:xfrm>
           <a:prstGeom prst="rect">
             <a:avLst/>
@@ -22195,71 +20907,14 @@
       </p:sp>
       <p:sp>
         <p:nvSpPr>
-          <p:cNvPr id="27" name="Shape 21"/>
-          <p:cNvSpPr/>
-          <p:nvPr/>
-        </p:nvSpPr>
-        <p:spPr>
-          <a:xfrm>
-            <a:off x="1097280" y="3466308"/>
-            <a:ext cx="474025" cy="474025"/>
-          </a:xfrm>
-          <a:prstGeom prst="roundRect">
-            <a:avLst>
-              <a:gd name="adj" fmla="val 7716"/>
-            </a:avLst>
-          </a:prstGeom>
-          <a:solidFill>
-            <a:srgbClr val="0B1020"/>
-          </a:solidFill>
-          <a:ln w="12700">
-            <a:solidFill>
-              <a:srgbClr val="C4B5FD"/>
-            </a:solidFill>
-            <a:prstDash val="solid"/>
-          </a:ln>
-        </p:spPr>
-      </p:sp>
-      <p:pic>
-        <p:nvPicPr>
-          <p:cNvPr id="28" name="Image 4" descr="verified icon from tabler-icons (MIT)">    </p:cNvPr>
-          <p:cNvPicPr>
-            <a:picLocks noChangeAspect="1"/>
-          </p:cNvPicPr>
-          <p:nvPr/>
-        </p:nvPicPr>
-        <p:blipFill>
-          <a:blip r:embed="rId9">
-            <a:extLst>
-              <a:ext uri="{96DAC541-7B7A-43D3-8B79-37D633B846F1}">
-                <asvg:svgBlip xmlns:asvg="http://schemas.microsoft.com/office/drawing/2016/SVG/main" r:embed="rId10"/>
-              </a:ext>
-            </a:extLst>
-          </a:blip>
-          <a:stretch>
-            <a:fillRect/>
-          </a:stretch>
-        </p:blipFill>
-        <p:spPr>
-          <a:xfrm>
-            <a:off x="1170432" y="3539460"/>
-            <a:ext cx="327721" cy="327721"/>
-          </a:xfrm>
-          <a:prstGeom prst="rect">
-            <a:avLst/>
-          </a:prstGeom>
-        </p:spPr>
-      </p:pic>
-      <p:sp>
-        <p:nvSpPr>
-          <p:cNvPr id="29" name="mdpr:actions-output-review-326e07:item-2:block-41"/>
+          <p:cNvPr id="25" name="mdpr:actions-output-review-326e07:item-2:block-41"/>
           <p:cNvSpPr txBox="1"/>
           <p:nvPr/>
         </p:nvSpPr>
         <p:spPr>
           <a:xfrm>
-            <a:off x="1699321" y="3313176"/>
-            <a:ext cx="9255191" cy="780288"/>
+            <a:off x="1133856" y="3283428"/>
+            <a:ext cx="9820656" cy="839785"/>
           </a:xfrm>
           <a:prstGeom prst="rect">
             <a:avLst/>
@@ -22311,71 +20966,14 @@
       </p:sp>
       <p:sp>
         <p:nvSpPr>
-          <p:cNvPr id="30" name="Shape 23"/>
-          <p:cNvSpPr/>
-          <p:nvPr/>
-        </p:nvSpPr>
-        <p:spPr>
-          <a:xfrm>
-            <a:off x="1097280" y="4783044"/>
-            <a:ext cx="474025" cy="474025"/>
-          </a:xfrm>
-          <a:prstGeom prst="roundRect">
-            <a:avLst>
-              <a:gd name="adj" fmla="val 7716"/>
-            </a:avLst>
-          </a:prstGeom>
-          <a:solidFill>
-            <a:srgbClr val="0B1020"/>
-          </a:solidFill>
-          <a:ln w="12700">
-            <a:solidFill>
-              <a:srgbClr val="C4B5FD"/>
-            </a:solidFill>
-            <a:prstDash val="solid"/>
-          </a:ln>
-        </p:spPr>
-      </p:sp>
-      <p:pic>
-        <p:nvPicPr>
-          <p:cNvPr id="31" name="Image 5" descr="spark icon from tabler-icons (MIT)">    </p:cNvPr>
-          <p:cNvPicPr>
-            <a:picLocks noChangeAspect="1"/>
-          </p:cNvPicPr>
-          <p:nvPr/>
-        </p:nvPicPr>
-        <p:blipFill>
-          <a:blip r:embed="rId11">
-            <a:extLst>
-              <a:ext uri="{96DAC541-7B7A-43D3-8B79-37D633B846F1}">
-                <asvg:svgBlip xmlns:asvg="http://schemas.microsoft.com/office/drawing/2016/SVG/main" r:embed="rId12"/>
-              </a:ext>
-            </a:extLst>
-          </a:blip>
-          <a:stretch>
-            <a:fillRect/>
-          </a:stretch>
-        </p:blipFill>
-        <p:spPr>
-          <a:xfrm>
-            <a:off x="1170432" y="4856196"/>
-            <a:ext cx="327721" cy="327721"/>
-          </a:xfrm>
-          <a:prstGeom prst="rect">
-            <a:avLst/>
-          </a:prstGeom>
-        </p:spPr>
-      </p:pic>
-      <p:sp>
-        <p:nvSpPr>
-          <p:cNvPr id="32" name="mdpr:actions-output-review-326e07:item-3:block-41"/>
+          <p:cNvPr id="26" name="mdpr:actions-output-review-326e07:item-3:block-41"/>
           <p:cNvSpPr txBox="1"/>
           <p:nvPr/>
         </p:nvSpPr>
         <p:spPr>
           <a:xfrm>
-            <a:off x="1699321" y="4629912"/>
-            <a:ext cx="9255191" cy="780288"/>
+            <a:off x="1133856" y="4600164"/>
+            <a:ext cx="9820656" cy="839785"/>
           </a:xfrm>
           <a:prstGeom prst="rect">
             <a:avLst/>
@@ -24430,71 +23028,14 @@
       </p:sp>
       <p:sp>
         <p:nvSpPr>
-          <p:cNvPr id="24" name="Shape 19"/>
-          <p:cNvSpPr/>
-          <p:nvPr/>
-        </p:nvSpPr>
-        <p:spPr>
-          <a:xfrm>
-            <a:off x="1097280" y="2140428"/>
-            <a:ext cx="474025" cy="474025"/>
-          </a:xfrm>
-          <a:prstGeom prst="roundRect">
-            <a:avLst>
-              <a:gd name="adj" fmla="val 7716"/>
-            </a:avLst>
-          </a:prstGeom>
-          <a:solidFill>
-            <a:srgbClr val="0B1020"/>
-          </a:solidFill>
-          <a:ln w="12700">
-            <a:solidFill>
-              <a:srgbClr val="C4B5FD"/>
-            </a:solidFill>
-            <a:prstDash val="solid"/>
-          </a:ln>
-        </p:spPr>
-      </p:sp>
-      <p:pic>
-        <p:nvPicPr>
-          <p:cNvPr id="25" name="Image 3" descr="article icon from tabler-icons (MIT)">    </p:cNvPr>
-          <p:cNvPicPr>
-            <a:picLocks noChangeAspect="1"/>
-          </p:cNvPicPr>
-          <p:nvPr/>
-        </p:nvPicPr>
-        <p:blipFill>
-          <a:blip r:embed="rId7">
-            <a:extLst>
-              <a:ext uri="{96DAC541-7B7A-43D3-8B79-37D633B846F1}">
-                <asvg:svgBlip xmlns:asvg="http://schemas.microsoft.com/office/drawing/2016/SVG/main" r:embed="rId8"/>
-              </a:ext>
-            </a:extLst>
-          </a:blip>
-          <a:stretch>
-            <a:fillRect/>
-          </a:stretch>
-        </p:blipFill>
-        <p:spPr>
-          <a:xfrm>
-            <a:off x="1170432" y="2213580"/>
-            <a:ext cx="327721" cy="327721"/>
-          </a:xfrm>
-          <a:prstGeom prst="rect">
-            <a:avLst/>
-          </a:prstGeom>
-        </p:spPr>
-      </p:pic>
-      <p:sp>
-        <p:nvSpPr>
-          <p:cNvPr id="26" name="mdpr:1-2-32ac08:item-1:block-6-chunk-1"/>
+          <p:cNvPr id="24" name="mdpr:1-2-32ac08:item-1:block-6-chunk-1"/>
           <p:cNvSpPr txBox="1"/>
           <p:nvPr/>
         </p:nvSpPr>
         <p:spPr>
           <a:xfrm>
-            <a:off x="1699321" y="1987296"/>
-            <a:ext cx="9255191" cy="780288"/>
+            <a:off x="1133856" y="1957548"/>
+            <a:ext cx="9820656" cy="839785"/>
           </a:xfrm>
           <a:prstGeom prst="rect">
             <a:avLst/>
@@ -24546,71 +23087,14 @@
       </p:sp>
       <p:sp>
         <p:nvSpPr>
-          <p:cNvPr id="27" name="Shape 21"/>
-          <p:cNvSpPr/>
-          <p:nvPr/>
-        </p:nvSpPr>
-        <p:spPr>
-          <a:xfrm>
-            <a:off x="1097280" y="3466308"/>
-            <a:ext cx="474025" cy="474025"/>
-          </a:xfrm>
-          <a:prstGeom prst="roundRect">
-            <a:avLst>
-              <a:gd name="adj" fmla="val 7716"/>
-            </a:avLst>
-          </a:prstGeom>
-          <a:solidFill>
-            <a:srgbClr val="0B1020"/>
-          </a:solidFill>
-          <a:ln w="12700">
-            <a:solidFill>
-              <a:srgbClr val="C4B5FD"/>
-            </a:solidFill>
-            <a:prstDash val="solid"/>
-          </a:ln>
-        </p:spPr>
-      </p:sp>
-      <p:pic>
-        <p:nvPicPr>
-          <p:cNvPr id="28" name="Image 4" descr="chart icon from tabler-icons (MIT)">    </p:cNvPr>
-          <p:cNvPicPr>
-            <a:picLocks noChangeAspect="1"/>
-          </p:cNvPicPr>
-          <p:nvPr/>
-        </p:nvPicPr>
-        <p:blipFill>
-          <a:blip r:embed="rId9">
-            <a:extLst>
-              <a:ext uri="{96DAC541-7B7A-43D3-8B79-37D633B846F1}">
-                <asvg:svgBlip xmlns:asvg="http://schemas.microsoft.com/office/drawing/2016/SVG/main" r:embed="rId10"/>
-              </a:ext>
-            </a:extLst>
-          </a:blip>
-          <a:stretch>
-            <a:fillRect/>
-          </a:stretch>
-        </p:blipFill>
-        <p:spPr>
-          <a:xfrm>
-            <a:off x="1170432" y="3539460"/>
-            <a:ext cx="327721" cy="327721"/>
-          </a:xfrm>
-          <a:prstGeom prst="rect">
-            <a:avLst/>
-          </a:prstGeom>
-        </p:spPr>
-      </p:pic>
-      <p:sp>
-        <p:nvSpPr>
-          <p:cNvPr id="29" name="mdpr:1-2-32ac08:item-2:block-6-chunk-1"/>
+          <p:cNvPr id="25" name="mdpr:1-2-32ac08:item-2:block-6-chunk-1"/>
           <p:cNvSpPr txBox="1"/>
           <p:nvPr/>
         </p:nvSpPr>
         <p:spPr>
           <a:xfrm>
-            <a:off x="1699321" y="3313176"/>
-            <a:ext cx="9255191" cy="780288"/>
+            <a:off x="1133856" y="3283428"/>
+            <a:ext cx="9820656" cy="839785"/>
           </a:xfrm>
           <a:prstGeom prst="rect">
             <a:avLst/>
@@ -24662,71 +23146,14 @@
       </p:sp>
       <p:sp>
         <p:nvSpPr>
-          <p:cNvPr id="30" name="Shape 23"/>
-          <p:cNvSpPr/>
-          <p:nvPr/>
-        </p:nvSpPr>
-        <p:spPr>
-          <a:xfrm>
-            <a:off x="1097280" y="4783044"/>
-            <a:ext cx="474025" cy="474025"/>
-          </a:xfrm>
-          <a:prstGeom prst="roundRect">
-            <a:avLst>
-              <a:gd name="adj" fmla="val 7716"/>
-            </a:avLst>
-          </a:prstGeom>
-          <a:solidFill>
-            <a:srgbClr val="0B1020"/>
-          </a:solidFill>
-          <a:ln w="12700">
-            <a:solidFill>
-              <a:srgbClr val="C4B5FD"/>
-            </a:solidFill>
-            <a:prstDash val="solid"/>
-          </a:ln>
-        </p:spPr>
-      </p:sp>
-      <p:pic>
-        <p:nvPicPr>
-          <p:cNvPr id="31" name="Image 5" descr="article icon from tabler-icons (MIT)">    </p:cNvPr>
-          <p:cNvPicPr>
-            <a:picLocks noChangeAspect="1"/>
-          </p:cNvPicPr>
-          <p:nvPr/>
-        </p:nvPicPr>
-        <p:blipFill>
-          <a:blip r:embed="rId11">
-            <a:extLst>
-              <a:ext uri="{96DAC541-7B7A-43D3-8B79-37D633B846F1}">
-                <asvg:svgBlip xmlns:asvg="http://schemas.microsoft.com/office/drawing/2016/SVG/main" r:embed="rId12"/>
-              </a:ext>
-            </a:extLst>
-          </a:blip>
-          <a:stretch>
-            <a:fillRect/>
-          </a:stretch>
-        </p:blipFill>
-        <p:spPr>
-          <a:xfrm>
-            <a:off x="1170432" y="4856196"/>
-            <a:ext cx="327721" cy="327721"/>
-          </a:xfrm>
-          <a:prstGeom prst="rect">
-            <a:avLst/>
-          </a:prstGeom>
-        </p:spPr>
-      </p:pic>
-      <p:sp>
-        <p:nvSpPr>
-          <p:cNvPr id="32" name="mdpr:1-2-32ac08:item-3:block-6-chunk-1"/>
+          <p:cNvPr id="26" name="mdpr:1-2-32ac08:item-3:block-6-chunk-1"/>
           <p:cNvSpPr txBox="1"/>
           <p:nvPr/>
         </p:nvSpPr>
         <p:spPr>
           <a:xfrm>
-            <a:off x="1699321" y="4629912"/>
-            <a:ext cx="9255191" cy="780288"/>
+            <a:off x="1133856" y="4600164"/>
+            <a:ext cx="9820656" cy="839785"/>
           </a:xfrm>
           <a:prstGeom prst="rect">
             <a:avLst/>
@@ -26079,71 +24506,14 @@
       </p:sp>
       <p:sp>
         <p:nvSpPr>
-          <p:cNvPr id="24" name="Shape 19"/>
-          <p:cNvSpPr/>
-          <p:nvPr/>
-        </p:nvSpPr>
-        <p:spPr>
-          <a:xfrm>
-            <a:off x="1097280" y="2140428"/>
-            <a:ext cx="474025" cy="474025"/>
-          </a:xfrm>
-          <a:prstGeom prst="roundRect">
-            <a:avLst>
-              <a:gd name="adj" fmla="val 7716"/>
-            </a:avLst>
-          </a:prstGeom>
-          <a:solidFill>
-            <a:srgbClr val="0B1020"/>
-          </a:solidFill>
-          <a:ln w="12700">
-            <a:solidFill>
-              <a:srgbClr val="C4B5FD"/>
-            </a:solidFill>
-            <a:prstDash val="solid"/>
-          </a:ln>
-        </p:spPr>
-      </p:sp>
-      <p:pic>
-        <p:nvPicPr>
-          <p:cNvPr id="25" name="Image 3" descr="article icon from tabler-icons (MIT)">    </p:cNvPr>
-          <p:cNvPicPr>
-            <a:picLocks noChangeAspect="1"/>
-          </p:cNvPicPr>
-          <p:nvPr/>
-        </p:nvPicPr>
-        <p:blipFill>
-          <a:blip r:embed="rId7">
-            <a:extLst>
-              <a:ext uri="{96DAC541-7B7A-43D3-8B79-37D633B846F1}">
-                <asvg:svgBlip xmlns:asvg="http://schemas.microsoft.com/office/drawing/2016/SVG/main" r:embed="rId8"/>
-              </a:ext>
-            </a:extLst>
-          </a:blip>
-          <a:stretch>
-            <a:fillRect/>
-          </a:stretch>
-        </p:blipFill>
-        <p:spPr>
-          <a:xfrm>
-            <a:off x="1170432" y="2213580"/>
-            <a:ext cx="327721" cy="327721"/>
-          </a:xfrm>
-          <a:prstGeom prst="rect">
-            <a:avLst/>
-          </a:prstGeom>
-        </p:spPr>
-      </p:pic>
-      <p:sp>
-        <p:nvSpPr>
-          <p:cNvPr id="26" name="mdpr:1-2-dfa474:item-1:block-8-chunk-1"/>
+          <p:cNvPr id="24" name="mdpr:1-2-dfa474:item-1:block-8-chunk-1"/>
           <p:cNvSpPr txBox="1"/>
           <p:nvPr/>
         </p:nvSpPr>
         <p:spPr>
           <a:xfrm>
-            <a:off x="1699321" y="1987296"/>
-            <a:ext cx="9255191" cy="780288"/>
+            <a:off x="1133856" y="1957548"/>
+            <a:ext cx="9820656" cy="839785"/>
           </a:xfrm>
           <a:prstGeom prst="rect">
             <a:avLst/>
@@ -26195,71 +24565,14 @@
       </p:sp>
       <p:sp>
         <p:nvSpPr>
-          <p:cNvPr id="27" name="Shape 21"/>
-          <p:cNvSpPr/>
-          <p:nvPr/>
-        </p:nvSpPr>
-        <p:spPr>
-          <a:xfrm>
-            <a:off x="1097280" y="3466308"/>
-            <a:ext cx="474025" cy="474025"/>
-          </a:xfrm>
-          <a:prstGeom prst="roundRect">
-            <a:avLst>
-              <a:gd name="adj" fmla="val 7716"/>
-            </a:avLst>
-          </a:prstGeom>
-          <a:solidFill>
-            <a:srgbClr val="0B1020"/>
-          </a:solidFill>
-          <a:ln w="12700">
-            <a:solidFill>
-              <a:srgbClr val="C4B5FD"/>
-            </a:solidFill>
-            <a:prstDash val="solid"/>
-          </a:ln>
-        </p:spPr>
-      </p:sp>
-      <p:pic>
-        <p:nvPicPr>
-          <p:cNvPr id="28" name="Image 4" descr="article icon from tabler-icons (MIT)">    </p:cNvPr>
-          <p:cNvPicPr>
-            <a:picLocks noChangeAspect="1"/>
-          </p:cNvPicPr>
-          <p:nvPr/>
-        </p:nvPicPr>
-        <p:blipFill>
-          <a:blip r:embed="rId9">
-            <a:extLst>
-              <a:ext uri="{96DAC541-7B7A-43D3-8B79-37D633B846F1}">
-                <asvg:svgBlip xmlns:asvg="http://schemas.microsoft.com/office/drawing/2016/SVG/main" r:embed="rId10"/>
-              </a:ext>
-            </a:extLst>
-          </a:blip>
-          <a:stretch>
-            <a:fillRect/>
-          </a:stretch>
-        </p:blipFill>
-        <p:spPr>
-          <a:xfrm>
-            <a:off x="1170432" y="3539460"/>
-            <a:ext cx="327721" cy="327721"/>
-          </a:xfrm>
-          <a:prstGeom prst="rect">
-            <a:avLst/>
-          </a:prstGeom>
-        </p:spPr>
-      </p:pic>
-      <p:sp>
-        <p:nvSpPr>
-          <p:cNvPr id="29" name="mdpr:1-2-dfa474:item-2:block-8-chunk-1"/>
+          <p:cNvPr id="25" name="mdpr:1-2-dfa474:item-2:block-8-chunk-1"/>
           <p:cNvSpPr txBox="1"/>
           <p:nvPr/>
         </p:nvSpPr>
         <p:spPr>
           <a:xfrm>
-            <a:off x="1699321" y="3313176"/>
-            <a:ext cx="9255191" cy="780288"/>
+            <a:off x="1133856" y="3283428"/>
+            <a:ext cx="9820656" cy="839785"/>
           </a:xfrm>
           <a:prstGeom prst="rect">
             <a:avLst/>
@@ -26311,71 +24624,14 @@
       </p:sp>
       <p:sp>
         <p:nvSpPr>
-          <p:cNvPr id="30" name="Shape 23"/>
-          <p:cNvSpPr/>
-          <p:nvPr/>
-        </p:nvSpPr>
-        <p:spPr>
-          <a:xfrm>
-            <a:off x="1097280" y="4783044"/>
-            <a:ext cx="474025" cy="474025"/>
-          </a:xfrm>
-          <a:prstGeom prst="roundRect">
-            <a:avLst>
-              <a:gd name="adj" fmla="val 7716"/>
-            </a:avLst>
-          </a:prstGeom>
-          <a:solidFill>
-            <a:srgbClr val="0B1020"/>
-          </a:solidFill>
-          <a:ln w="12700">
-            <a:solidFill>
-              <a:srgbClr val="C4B5FD"/>
-            </a:solidFill>
-            <a:prstDash val="solid"/>
-          </a:ln>
-        </p:spPr>
-      </p:sp>
-      <p:pic>
-        <p:nvPicPr>
-          <p:cNvPr id="31" name="Image 5" descr="article icon from tabler-icons (MIT)">    </p:cNvPr>
-          <p:cNvPicPr>
-            <a:picLocks noChangeAspect="1"/>
-          </p:cNvPicPr>
-          <p:nvPr/>
-        </p:nvPicPr>
-        <p:blipFill>
-          <a:blip r:embed="rId11">
-            <a:extLst>
-              <a:ext uri="{96DAC541-7B7A-43D3-8B79-37D633B846F1}">
-                <asvg:svgBlip xmlns:asvg="http://schemas.microsoft.com/office/drawing/2016/SVG/main" r:embed="rId12"/>
-              </a:ext>
-            </a:extLst>
-          </a:blip>
-          <a:stretch>
-            <a:fillRect/>
-          </a:stretch>
-        </p:blipFill>
-        <p:spPr>
-          <a:xfrm>
-            <a:off x="1170432" y="4856196"/>
-            <a:ext cx="327721" cy="327721"/>
-          </a:xfrm>
-          <a:prstGeom prst="rect">
-            <a:avLst/>
-          </a:prstGeom>
-        </p:spPr>
-      </p:pic>
-      <p:sp>
-        <p:nvSpPr>
-          <p:cNvPr id="32" name="mdpr:1-2-dfa474:item-3:block-8-chunk-1"/>
+          <p:cNvPr id="26" name="mdpr:1-2-dfa474:item-3:block-8-chunk-1"/>
           <p:cNvSpPr txBox="1"/>
           <p:nvPr/>
         </p:nvSpPr>
         <p:spPr>
           <a:xfrm>
-            <a:off x="1699321" y="4629912"/>
-            <a:ext cx="9255191" cy="780288"/>
+            <a:off x="1133856" y="4600164"/>
+            <a:ext cx="9820656" cy="839785"/>
           </a:xfrm>
           <a:prstGeom prst="rect">
             <a:avLst/>

--- a/docs/theme-preview/pptx/glassmorphism.pptx
+++ b/docs/theme-preview/pptx/glassmorphism.pptx
@@ -3904,33 +3904,6 @@
         </p:nvSpPr>
         <p:spPr>
           <a:xfrm>
-            <a:off x="731520" y="1207008"/>
-            <a:ext cx="1325880" cy="54864"/>
-          </a:xfrm>
-          <a:prstGeom prst="rect">
-            <a:avLst/>
-          </a:prstGeom>
-          <a:solidFill>
-            <a:srgbClr val="8A4FFF"/>
-          </a:solidFill>
-          <a:ln w="12700">
-            <a:solidFill>
-              <a:srgbClr val="8A4FFF">
-                <a:alpha val="0"/>
-              </a:srgbClr>
-            </a:solidFill>
-            <a:prstDash val="solid"/>
-          </a:ln>
-        </p:spPr>
-      </p:sp>
-      <p:sp>
-        <p:nvSpPr>
-          <p:cNvPr id="13" name="Shape 11"/>
-          <p:cNvSpPr/>
-          <p:nvPr/>
-        </p:nvSpPr>
-        <p:spPr>
-          <a:xfrm>
             <a:off x="0" y="0"/>
             <a:ext cx="12191695" cy="201168"/>
           </a:xfrm>
@@ -3952,36 +3925,7 @@
       </p:sp>
       <p:sp>
         <p:nvSpPr>
-          <p:cNvPr id="14" name="Shape 12"/>
-          <p:cNvSpPr/>
-          <p:nvPr/>
-        </p:nvSpPr>
-        <p:spPr>
-          <a:xfrm>
-            <a:off x="9357055" y="6528816"/>
-            <a:ext cx="2148840" cy="73152"/>
-          </a:xfrm>
-          <a:prstGeom prst="rect">
-            <a:avLst/>
-          </a:prstGeom>
-          <a:solidFill>
-            <a:srgbClr val="FFFFFF">
-              <a:alpha val="90000"/>
-            </a:srgbClr>
-          </a:solidFill>
-          <a:ln w="12700">
-            <a:solidFill>
-              <a:srgbClr val="FFFFFF">
-                <a:alpha val="0"/>
-              </a:srgbClr>
-            </a:solidFill>
-            <a:prstDash val="solid"/>
-          </a:ln>
-        </p:spPr>
-      </p:sp>
-      <p:sp>
-        <p:nvSpPr>
-          <p:cNvPr id="15" name="mdpr:mdpr-design-grammar-b3a462:title:__title:mdpr-design-grammar-b3a462"/>
+          <p:cNvPr id="13" name="mdpr:mdpr-design-grammar-b3a462:title:__title:mdpr-design-grammar-b3a462"/>
           <p:cNvSpPr txBox="1"/>
           <p:nvPr/>
         </p:nvSpPr>
@@ -4355,16 +4299,158 @@
           </a:ln>
         </p:spPr>
       </p:sp>
-      <p:sp>
-        <p:nvSpPr>
-          <p:cNvPr id="12" name="Shape 10"/>
-          <p:cNvSpPr/>
-          <p:nvPr/>
-        </p:nvSpPr>
-        <p:spPr>
-          <a:xfrm>
-            <a:off x="731520" y="1207008"/>
-            <a:ext cx="1325880" cy="54864"/>
+      <p:pic>
+        <p:nvPicPr>
+          <p:cNvPr id="12" name="Image 0" descr="preencoded.png">    </p:cNvPr>
+          <p:cNvPicPr>
+            <a:picLocks noChangeAspect="1"/>
+          </p:cNvPicPr>
+          <p:nvPr/>
+        </p:nvPicPr>
+        <p:blipFill>
+          <a:blip r:embed="rId1">
+            <a:extLst>
+              <a:ext uri="{96DAC541-7B7A-43D3-8B79-37D633B846F1}">
+                <asvg:svgBlip xmlns:asvg="http://schemas.microsoft.com/office/drawing/2016/SVG/main" r:embed="rId2"/>
+              </a:ext>
+            </a:extLst>
+          </a:blip>
+          <a:stretch>
+            <a:fillRect/>
+          </a:stretch>
+        </p:blipFill>
+        <p:spPr>
+          <a:xfrm>
+            <a:off x="914400" y="2523744"/>
+            <a:ext cx="10241280" cy="1024128"/>
+          </a:xfrm>
+          <a:prstGeom prst="rect">
+            <a:avLst/>
+          </a:prstGeom>
+        </p:spPr>
+      </p:pic>
+      <p:sp>
+        <p:nvSpPr>
+          <p:cNvPr id="13" name="Shape 10"/>
+          <p:cNvSpPr/>
+          <p:nvPr/>
+        </p:nvSpPr>
+        <p:spPr>
+          <a:xfrm>
+            <a:off x="914400" y="2523744"/>
+            <a:ext cx="10241280" cy="1024128"/>
+          </a:xfrm>
+          <a:prstGeom prst="rect">
+            <a:avLst/>
+          </a:prstGeom>
+          <a:solidFill>
+            <a:srgbClr val="17213A">
+              <a:alpha val="0"/>
+            </a:srgbClr>
+          </a:solidFill>
+          <a:ln w="12700">
+            <a:solidFill>
+              <a:srgbClr val="C4B5FD">
+                <a:alpha val="0"/>
+              </a:srgbClr>
+            </a:solidFill>
+            <a:prstDash val="solid"/>
+          </a:ln>
+          <a:effectLst>
+            <a:outerShdw sx="100000" sy="100000" kx="0" ky="0" algn="bl" rotWithShape="0" blurRad="30480" dist="50800" dir="2700000">
+              <a:srgbClr val="CBD5E1">
+                <a:alpha val="20000"/>
+              </a:srgbClr>
+            </a:outerShdw>
+            <a:glow rad="63500">
+              <a:srgbClr val="8A4FFF">
+                <a:alpha val="23000"/>
+              </a:srgbClr>
+            </a:glow>
+          </a:effectLst>
+        </p:spPr>
+      </p:sp>
+      <p:pic>
+        <p:nvPicPr>
+          <p:cNvPr id="14" name="Image 1" descr="preencoded.png">    </p:cNvPr>
+          <p:cNvPicPr>
+            <a:picLocks noChangeAspect="1"/>
+          </p:cNvPicPr>
+          <p:nvPr/>
+        </p:nvPicPr>
+        <p:blipFill>
+          <a:blip r:embed="rId3">
+            <a:extLst>
+              <a:ext uri="{96DAC541-7B7A-43D3-8B79-37D633B846F1}">
+                <asvg:svgBlip xmlns:asvg="http://schemas.microsoft.com/office/drawing/2016/SVG/main" r:embed="rId4"/>
+              </a:ext>
+            </a:extLst>
+          </a:blip>
+          <a:stretch>
+            <a:fillRect/>
+          </a:stretch>
+        </p:blipFill>
+        <p:spPr>
+          <a:xfrm>
+            <a:off x="914400" y="3849624"/>
+            <a:ext cx="10241280" cy="1024128"/>
+          </a:xfrm>
+          <a:prstGeom prst="rect">
+            <a:avLst/>
+          </a:prstGeom>
+        </p:spPr>
+      </p:pic>
+      <p:sp>
+        <p:nvSpPr>
+          <p:cNvPr id="15" name="Shape 11"/>
+          <p:cNvSpPr/>
+          <p:nvPr/>
+        </p:nvSpPr>
+        <p:spPr>
+          <a:xfrm>
+            <a:off x="914400" y="3849624"/>
+            <a:ext cx="10241280" cy="1024128"/>
+          </a:xfrm>
+          <a:prstGeom prst="rect">
+            <a:avLst/>
+          </a:prstGeom>
+          <a:solidFill>
+            <a:srgbClr val="17213A">
+              <a:alpha val="0"/>
+            </a:srgbClr>
+          </a:solidFill>
+          <a:ln w="12700">
+            <a:solidFill>
+              <a:srgbClr val="C4B5FD">
+                <a:alpha val="0"/>
+              </a:srgbClr>
+            </a:solidFill>
+            <a:prstDash val="solid"/>
+          </a:ln>
+          <a:effectLst>
+            <a:outerShdw sx="100000" sy="100000" kx="0" ky="0" algn="bl" rotWithShape="0" blurRad="30480" dist="50800" dir="2700000">
+              <a:srgbClr val="CBD5E1">
+                <a:alpha val="20000"/>
+              </a:srgbClr>
+            </a:outerShdw>
+            <a:glow rad="63500">
+              <a:srgbClr val="8A4FFF">
+                <a:alpha val="23000"/>
+              </a:srgbClr>
+            </a:glow>
+          </a:effectLst>
+        </p:spPr>
+      </p:sp>
+      <p:sp>
+        <p:nvSpPr>
+          <p:cNvPr id="16" name="Shape 12"/>
+          <p:cNvSpPr/>
+          <p:nvPr/>
+        </p:nvSpPr>
+        <p:spPr>
+          <a:xfrm>
+            <a:off x="914400" y="2523744"/>
+            <a:ext cx="73152" cy="1024128"/>
           </a:xfrm>
           <a:prstGeom prst="rect">
             <a:avLst/>
@@ -4384,24 +4470,24 @@
       </p:sp>
       <p:sp>
         <p:nvSpPr>
-          <p:cNvPr id="13" name="Shape 11"/>
-          <p:cNvSpPr/>
-          <p:nvPr/>
-        </p:nvSpPr>
-        <p:spPr>
-          <a:xfrm>
-            <a:off x="822960" y="1554480"/>
-            <a:ext cx="4937760" cy="73152"/>
-          </a:xfrm>
-          <a:prstGeom prst="rect">
-            <a:avLst/>
-          </a:prstGeom>
-          <a:solidFill>
-            <a:srgbClr val="8A4FFF"/>
-          </a:solidFill>
-          <a:ln w="12700">
-            <a:solidFill>
-              <a:srgbClr val="8A4FFF">
+          <p:cNvPr id="17" name="Shape 13"/>
+          <p:cNvSpPr/>
+          <p:nvPr/>
+        </p:nvSpPr>
+        <p:spPr>
+          <a:xfrm>
+            <a:off x="914400" y="3849624"/>
+            <a:ext cx="73152" cy="1024128"/>
+          </a:xfrm>
+          <a:prstGeom prst="rect">
+            <a:avLst/>
+          </a:prstGeom>
+          <a:solidFill>
+            <a:srgbClr val="22D3EE"/>
+          </a:solidFill>
+          <a:ln w="12700">
+            <a:solidFill>
+              <a:srgbClr val="22D3EE">
                 <a:alpha val="0"/>
               </a:srgbClr>
             </a:solidFill>
@@ -4411,34 +4497,7 @@
       </p:sp>
       <p:sp>
         <p:nvSpPr>
-          <p:cNvPr id="14" name="Shape 12"/>
-          <p:cNvSpPr/>
-          <p:nvPr/>
-        </p:nvSpPr>
-        <p:spPr>
-          <a:xfrm>
-            <a:off x="6400800" y="1554480"/>
-            <a:ext cx="4937760" cy="73152"/>
-          </a:xfrm>
-          <a:prstGeom prst="rect">
-            <a:avLst/>
-          </a:prstGeom>
-          <a:solidFill>
-            <a:srgbClr val="8A4FFF"/>
-          </a:solidFill>
-          <a:ln w="12700">
-            <a:solidFill>
-              <a:srgbClr val="8A4FFF">
-                <a:alpha val="0"/>
-              </a:srgbClr>
-            </a:solidFill>
-            <a:prstDash val="solid"/>
-          </a:ln>
-        </p:spPr>
-      </p:sp>
-      <p:sp>
-        <p:nvSpPr>
-          <p:cNvPr id="15" name="mdpr:2-2-a9df10:title:__title:2-2-a9df10"/>
+          <p:cNvPr id="18" name="mdpr:2-2-a9df10:title:__title:2-2-a9df10"/>
           <p:cNvSpPr txBox="1"/>
           <p:nvPr/>
         </p:nvSpPr>
@@ -4472,7 +4531,24 @@
                 <a:ea typeface="Pretendard" pitchFamily="34" charset="-122"/>
                 <a:cs typeface="Pretendard" pitchFamily="34" charset="-120"/>
               </a:rPr>
-              <a:t>Semantic Blocks (Cont. 2/2)</a:t>
+              <a:t>Semantic Blocks</a:t>
+            </a:r>
+            <a:pPr algn="ctr" indent="0" marL="0">
+              <a:lnSpc>
+                <a:spcPct val="120000"/>
+              </a:lnSpc>
+              <a:buNone/>
+            </a:pPr>
+            <a:r>
+              <a:rPr lang="en-US" sz="2000" dirty="0">
+                <a:solidFill>
+                  <a:srgbClr val="6C6C6C"/>
+                </a:solidFill>
+                <a:latin typeface="Pretendard" pitchFamily="34" charset="0"/>
+                <a:ea typeface="Pretendard" pitchFamily="34" charset="-122"/>
+                <a:cs typeface="Pretendard" pitchFamily="34" charset="-120"/>
+              </a:rPr>
+              <a:t> (Cont. 2/2)</a:t>
             </a:r>
             <a:endParaRPr lang="en-US" sz="3400" dirty="0"/>
           </a:p>
@@ -4480,14 +4556,14 @@
       </p:sp>
       <p:sp>
         <p:nvSpPr>
-          <p:cNvPr id="16" name="mdpr:2-2-a9df10:left:block-10-chunk-2"/>
+          <p:cNvPr id="19" name="mdpr:2-2-a9df10:item-1:block-10-chunk-2"/>
           <p:cNvSpPr txBox="1"/>
           <p:nvPr/>
         </p:nvSpPr>
         <p:spPr>
           <a:xfrm>
-            <a:off x="896112" y="1664208"/>
-            <a:ext cx="4791456" cy="4169664"/>
+            <a:off x="1133856" y="2615916"/>
+            <a:ext cx="9820656" cy="839785"/>
           </a:xfrm>
           <a:prstGeom prst="rect">
             <a:avLst/>
@@ -4496,7 +4572,7 @@
           <a:ln/>
         </p:spPr>
         <p:txBody>
-          <a:bodyPr wrap="square" lIns="0" tIns="25400" rIns="25400" bIns="0" rtlCol="0" anchor="t"/>
+          <a:bodyPr wrap="square" lIns="0" tIns="25400" rIns="25400" bIns="0" rtlCol="0" anchor="ctr"/>
           <a:lstStyle/>
           <a:p>
             <a:pPr algn="l" indent="0" marL="0">
@@ -4514,7 +4590,7 @@
                 <a:ea typeface="Pretendard" pitchFamily="34" charset="-122"/>
                 <a:cs typeface="Pretendard" pitchFamily="34" charset="-120"/>
               </a:rPr>
-              <a:t>- Constraint:</a:t>
+              <a:t>Constraint:</a:t>
             </a:r>
             <a:pPr algn="l" indent="0" marL="0">
               <a:lnSpc>
@@ -4539,14 +4615,14 @@
       </p:sp>
       <p:sp>
         <p:nvSpPr>
-          <p:cNvPr id="17" name="mdpr:2-2-a9df10:right:block-10-chunk-2"/>
+          <p:cNvPr id="20" name="mdpr:2-2-a9df10:item-2:block-10-chunk-2"/>
           <p:cNvSpPr txBox="1"/>
           <p:nvPr/>
         </p:nvSpPr>
         <p:spPr>
           <a:xfrm>
-            <a:off x="6473952" y="1664208"/>
-            <a:ext cx="4791456" cy="4169664"/>
+            <a:off x="1133856" y="3941796"/>
+            <a:ext cx="9820656" cy="839785"/>
           </a:xfrm>
           <a:prstGeom prst="rect">
             <a:avLst/>
@@ -4555,7 +4631,7 @@
           <a:ln/>
         </p:spPr>
         <p:txBody>
-          <a:bodyPr wrap="square" lIns="0" tIns="25400" rIns="25400" bIns="0" rtlCol="0" anchor="t"/>
+          <a:bodyPr wrap="square" lIns="0" tIns="25400" rIns="25400" bIns="0" rtlCol="0" anchor="ctr"/>
           <a:lstStyle/>
           <a:p>
             <a:pPr algn="l" indent="0" marL="0">
@@ -4573,7 +4649,7 @@
                 <a:ea typeface="Pretendard" pitchFamily="34" charset="-122"/>
                 <a:cs typeface="Pretendard" pitchFamily="34" charset="-120"/>
               </a:rPr>
-              <a:t>- Emphasis</a:t>
+              <a:t>Emphasis</a:t>
             </a:r>
             <a:pPr algn="l" indent="0" marL="0">
               <a:lnSpc>
@@ -4932,34 +5008,7 @@
       </p:sp>
       <p:sp>
         <p:nvSpPr>
-          <p:cNvPr id="12" name="Shape 10"/>
-          <p:cNvSpPr/>
-          <p:nvPr/>
-        </p:nvSpPr>
-        <p:spPr>
-          <a:xfrm>
-            <a:off x="731520" y="1207008"/>
-            <a:ext cx="1325880" cy="54864"/>
-          </a:xfrm>
-          <a:prstGeom prst="rect">
-            <a:avLst/>
-          </a:prstGeom>
-          <a:solidFill>
-            <a:srgbClr val="8A4FFF"/>
-          </a:solidFill>
-          <a:ln w="12700">
-            <a:solidFill>
-              <a:srgbClr val="8A4FFF">
-                <a:alpha val="0"/>
-              </a:srgbClr>
-            </a:solidFill>
-            <a:prstDash val="solid"/>
-          </a:ln>
-        </p:spPr>
-      </p:sp>
-      <p:sp>
-        <p:nvSpPr>
-          <p:cNvPr id="13" name="mdpr:pipeline-diagram-51792c:title:__title:pipeline-diagram-51792c"/>
+          <p:cNvPr id="12" name="mdpr:pipeline-diagram-51792c:title:__title:pipeline-diagram-51792c"/>
           <p:cNvSpPr txBox="1"/>
           <p:nvPr/>
         </p:nvSpPr>
@@ -5001,7 +5050,7 @@
       </p:sp>
       <p:sp>
         <p:nvSpPr>
-          <p:cNvPr id="14" name="Shape 12"/>
+          <p:cNvPr id="13" name="Shape 11"/>
           <p:cNvSpPr/>
           <p:nvPr/>
         </p:nvSpPr>
@@ -5025,7 +5074,7 @@
       </p:sp>
       <p:sp>
         <p:nvSpPr>
-          <p:cNvPr id="15" name="Shape 13"/>
+          <p:cNvPr id="14" name="Shape 12"/>
           <p:cNvSpPr/>
           <p:nvPr/>
         </p:nvSpPr>
@@ -5049,7 +5098,7 @@
       </p:sp>
       <p:sp>
         <p:nvSpPr>
-          <p:cNvPr id="16" name="Shape 14"/>
+          <p:cNvPr id="15" name="Shape 13"/>
           <p:cNvSpPr/>
           <p:nvPr/>
         </p:nvSpPr>
@@ -5073,7 +5122,7 @@
       </p:sp>
       <p:sp>
         <p:nvSpPr>
-          <p:cNvPr id="17" name="Shape 15"/>
+          <p:cNvPr id="16" name="Shape 14"/>
           <p:cNvSpPr/>
           <p:nvPr/>
         </p:nvSpPr>
@@ -5097,7 +5146,7 @@
       </p:sp>
       <p:sp>
         <p:nvSpPr>
-          <p:cNvPr id="18" name="Shape 16"/>
+          <p:cNvPr id="17" name="Shape 15"/>
           <p:cNvSpPr/>
           <p:nvPr/>
         </p:nvSpPr>
@@ -5121,7 +5170,7 @@
       </p:sp>
       <p:sp>
         <p:nvSpPr>
-          <p:cNvPr id="19" name="Shape 17"/>
+          <p:cNvPr id="18" name="Shape 16"/>
           <p:cNvSpPr/>
           <p:nvPr/>
         </p:nvSpPr>
@@ -5160,7 +5209,7 @@
       </p:sp>
       <p:sp>
         <p:nvSpPr>
-          <p:cNvPr id="20" name="Shape 18"/>
+          <p:cNvPr id="19" name="Shape 17"/>
           <p:cNvSpPr/>
           <p:nvPr/>
         </p:nvSpPr>
@@ -5187,7 +5236,7 @@
       </p:sp>
       <p:sp>
         <p:nvSpPr>
-          <p:cNvPr id="21" name="Shape 19"/>
+          <p:cNvPr id="20" name="Shape 18"/>
           <p:cNvSpPr/>
           <p:nvPr/>
         </p:nvSpPr>
@@ -5214,7 +5263,7 @@
       </p:sp>
       <p:sp>
         <p:nvSpPr>
-          <p:cNvPr id="22" name="Text 20"/>
+          <p:cNvPr id="21" name="Text 19"/>
           <p:cNvSpPr txBox="1"/>
           <p:nvPr/>
         </p:nvSpPr>
@@ -5242,7 +5291,7 @@
               <a:buNone/>
             </a:pPr>
             <a:r>
-              <a:rPr lang="en-US" sz="1500" b="1" dirty="0">
+              <a:rPr lang="en-US" sz="1600" b="1" dirty="0">
                 <a:solidFill>
                   <a:srgbClr val="0B1020"/>
                 </a:solidFill>
@@ -5252,13 +5301,13 @@
               </a:rPr>
               <a:t>1</a:t>
             </a:r>
-            <a:endParaRPr lang="en-US" sz="1500" dirty="0"/>
+            <a:endParaRPr lang="en-US" sz="1600" dirty="0"/>
           </a:p>
         </p:txBody>
       </p:sp>
       <p:sp>
         <p:nvSpPr>
-          <p:cNvPr id="23" name="Text 21"/>
+          <p:cNvPr id="22" name="Text 20"/>
           <p:cNvSpPr txBox="1"/>
           <p:nvPr/>
         </p:nvSpPr>
@@ -5302,7 +5351,7 @@
       </p:sp>
       <p:sp>
         <p:nvSpPr>
-          <p:cNvPr id="24" name="Shape 22"/>
+          <p:cNvPr id="23" name="Shape 21"/>
           <p:cNvSpPr/>
           <p:nvPr/>
         </p:nvSpPr>
@@ -5341,7 +5390,7 @@
       </p:sp>
       <p:sp>
         <p:nvSpPr>
-          <p:cNvPr id="25" name="Shape 23"/>
+          <p:cNvPr id="24" name="Shape 22"/>
           <p:cNvSpPr/>
           <p:nvPr/>
         </p:nvSpPr>
@@ -5368,7 +5417,7 @@
       </p:sp>
       <p:sp>
         <p:nvSpPr>
-          <p:cNvPr id="26" name="Shape 24"/>
+          <p:cNvPr id="25" name="Shape 23"/>
           <p:cNvSpPr/>
           <p:nvPr/>
         </p:nvSpPr>
@@ -5395,7 +5444,7 @@
       </p:sp>
       <p:sp>
         <p:nvSpPr>
-          <p:cNvPr id="27" name="Text 25"/>
+          <p:cNvPr id="26" name="Text 24"/>
           <p:cNvSpPr txBox="1"/>
           <p:nvPr/>
         </p:nvSpPr>
@@ -5423,7 +5472,7 @@
               <a:buNone/>
             </a:pPr>
             <a:r>
-              <a:rPr lang="en-US" sz="1500" b="1" dirty="0">
+              <a:rPr lang="en-US" sz="1600" b="1" dirty="0">
                 <a:solidFill>
                   <a:srgbClr val="0B1020"/>
                 </a:solidFill>
@@ -5433,13 +5482,13 @@
               </a:rPr>
               <a:t>2</a:t>
             </a:r>
-            <a:endParaRPr lang="en-US" sz="1500" dirty="0"/>
+            <a:endParaRPr lang="en-US" sz="1600" dirty="0"/>
           </a:p>
         </p:txBody>
       </p:sp>
       <p:sp>
         <p:nvSpPr>
-          <p:cNvPr id="28" name="Text 26"/>
+          <p:cNvPr id="27" name="Text 25"/>
           <p:cNvSpPr txBox="1"/>
           <p:nvPr/>
         </p:nvSpPr>
@@ -5483,7 +5532,7 @@
       </p:sp>
       <p:sp>
         <p:nvSpPr>
-          <p:cNvPr id="29" name="Shape 27"/>
+          <p:cNvPr id="28" name="Shape 26"/>
           <p:cNvSpPr/>
           <p:nvPr/>
         </p:nvSpPr>
@@ -5522,7 +5571,7 @@
       </p:sp>
       <p:sp>
         <p:nvSpPr>
-          <p:cNvPr id="30" name="Shape 28"/>
+          <p:cNvPr id="29" name="Shape 27"/>
           <p:cNvSpPr/>
           <p:nvPr/>
         </p:nvSpPr>
@@ -5549,7 +5598,7 @@
       </p:sp>
       <p:sp>
         <p:nvSpPr>
-          <p:cNvPr id="31" name="Shape 29"/>
+          <p:cNvPr id="30" name="Shape 28"/>
           <p:cNvSpPr/>
           <p:nvPr/>
         </p:nvSpPr>
@@ -5576,7 +5625,7 @@
       </p:sp>
       <p:sp>
         <p:nvSpPr>
-          <p:cNvPr id="32" name="Text 30"/>
+          <p:cNvPr id="31" name="Text 29"/>
           <p:cNvSpPr txBox="1"/>
           <p:nvPr/>
         </p:nvSpPr>
@@ -5604,7 +5653,7 @@
               <a:buNone/>
             </a:pPr>
             <a:r>
-              <a:rPr lang="en-US" sz="1500" b="1" dirty="0">
+              <a:rPr lang="en-US" sz="1600" b="1" dirty="0">
                 <a:solidFill>
                   <a:srgbClr val="0B1020"/>
                 </a:solidFill>
@@ -5614,13 +5663,13 @@
               </a:rPr>
               <a:t>3</a:t>
             </a:r>
-            <a:endParaRPr lang="en-US" sz="1500" dirty="0"/>
+            <a:endParaRPr lang="en-US" sz="1600" dirty="0"/>
           </a:p>
         </p:txBody>
       </p:sp>
       <p:sp>
         <p:nvSpPr>
-          <p:cNvPr id="33" name="Text 31"/>
+          <p:cNvPr id="32" name="Text 30"/>
           <p:cNvSpPr txBox="1"/>
           <p:nvPr/>
         </p:nvSpPr>
@@ -5664,7 +5713,7 @@
       </p:sp>
       <p:sp>
         <p:nvSpPr>
-          <p:cNvPr id="34" name="Shape 32"/>
+          <p:cNvPr id="33" name="Shape 31"/>
           <p:cNvSpPr/>
           <p:nvPr/>
         </p:nvSpPr>
@@ -5703,7 +5752,7 @@
       </p:sp>
       <p:sp>
         <p:nvSpPr>
-          <p:cNvPr id="35" name="Shape 33"/>
+          <p:cNvPr id="34" name="Shape 32"/>
           <p:cNvSpPr/>
           <p:nvPr/>
         </p:nvSpPr>
@@ -5730,7 +5779,7 @@
       </p:sp>
       <p:sp>
         <p:nvSpPr>
-          <p:cNvPr id="36" name="Shape 34"/>
+          <p:cNvPr id="35" name="Shape 33"/>
           <p:cNvSpPr/>
           <p:nvPr/>
         </p:nvSpPr>
@@ -5757,7 +5806,7 @@
       </p:sp>
       <p:sp>
         <p:nvSpPr>
-          <p:cNvPr id="37" name="Text 35"/>
+          <p:cNvPr id="36" name="Text 34"/>
           <p:cNvSpPr txBox="1"/>
           <p:nvPr/>
         </p:nvSpPr>
@@ -5785,7 +5834,7 @@
               <a:buNone/>
             </a:pPr>
             <a:r>
-              <a:rPr lang="en-US" sz="1500" b="1" dirty="0">
+              <a:rPr lang="en-US" sz="1600" b="1" dirty="0">
                 <a:solidFill>
                   <a:srgbClr val="0B1020"/>
                 </a:solidFill>
@@ -5795,13 +5844,13 @@
               </a:rPr>
               <a:t>4</a:t>
             </a:r>
-            <a:endParaRPr lang="en-US" sz="1500" dirty="0"/>
+            <a:endParaRPr lang="en-US" sz="1600" dirty="0"/>
           </a:p>
         </p:txBody>
       </p:sp>
       <p:sp>
         <p:nvSpPr>
-          <p:cNvPr id="38" name="Text 36"/>
+          <p:cNvPr id="37" name="Text 35"/>
           <p:cNvSpPr txBox="1"/>
           <p:nvPr/>
         </p:nvSpPr>
@@ -5845,7 +5894,7 @@
       </p:sp>
       <p:sp>
         <p:nvSpPr>
-          <p:cNvPr id="39" name="Shape 37"/>
+          <p:cNvPr id="38" name="Shape 36"/>
           <p:cNvSpPr/>
           <p:nvPr/>
         </p:nvSpPr>
@@ -5884,7 +5933,7 @@
       </p:sp>
       <p:sp>
         <p:nvSpPr>
-          <p:cNvPr id="40" name="Shape 38"/>
+          <p:cNvPr id="39" name="Shape 37"/>
           <p:cNvSpPr/>
           <p:nvPr/>
         </p:nvSpPr>
@@ -5911,7 +5960,7 @@
       </p:sp>
       <p:sp>
         <p:nvSpPr>
-          <p:cNvPr id="41" name="Shape 39"/>
+          <p:cNvPr id="40" name="Shape 38"/>
           <p:cNvSpPr/>
           <p:nvPr/>
         </p:nvSpPr>
@@ -5938,7 +5987,7 @@
       </p:sp>
       <p:sp>
         <p:nvSpPr>
-          <p:cNvPr id="42" name="Text 40"/>
+          <p:cNvPr id="41" name="Text 39"/>
           <p:cNvSpPr txBox="1"/>
           <p:nvPr/>
         </p:nvSpPr>
@@ -5966,7 +6015,7 @@
               <a:buNone/>
             </a:pPr>
             <a:r>
-              <a:rPr lang="en-US" sz="1500" b="1" dirty="0">
+              <a:rPr lang="en-US" sz="1600" b="1" dirty="0">
                 <a:solidFill>
                   <a:srgbClr val="0B1020"/>
                 </a:solidFill>
@@ -5976,13 +6025,13 @@
               </a:rPr>
               <a:t>5</a:t>
             </a:r>
-            <a:endParaRPr lang="en-US" sz="1500" dirty="0"/>
+            <a:endParaRPr lang="en-US" sz="1600" dirty="0"/>
           </a:p>
         </p:txBody>
       </p:sp>
       <p:sp>
         <p:nvSpPr>
-          <p:cNvPr id="43" name="Text 41"/>
+          <p:cNvPr id="42" name="Text 40"/>
           <p:cNvSpPr txBox="1"/>
           <p:nvPr/>
         </p:nvSpPr>
@@ -6026,7 +6075,7 @@
       </p:sp>
       <p:sp>
         <p:nvSpPr>
-          <p:cNvPr id="44" name="Shape 42"/>
+          <p:cNvPr id="43" name="Shape 41"/>
           <p:cNvSpPr/>
           <p:nvPr/>
         </p:nvSpPr>
@@ -6065,7 +6114,7 @@
       </p:sp>
       <p:sp>
         <p:nvSpPr>
-          <p:cNvPr id="45" name="Shape 43"/>
+          <p:cNvPr id="44" name="Shape 42"/>
           <p:cNvSpPr/>
           <p:nvPr/>
         </p:nvSpPr>
@@ -6092,7 +6141,7 @@
       </p:sp>
       <p:sp>
         <p:nvSpPr>
-          <p:cNvPr id="46" name="Shape 44"/>
+          <p:cNvPr id="45" name="Shape 43"/>
           <p:cNvSpPr/>
           <p:nvPr/>
         </p:nvSpPr>
@@ -6119,7 +6168,7 @@
       </p:sp>
       <p:sp>
         <p:nvSpPr>
-          <p:cNvPr id="47" name="Text 45"/>
+          <p:cNvPr id="46" name="Text 44"/>
           <p:cNvSpPr txBox="1"/>
           <p:nvPr/>
         </p:nvSpPr>
@@ -6147,7 +6196,7 @@
               <a:buNone/>
             </a:pPr>
             <a:r>
-              <a:rPr lang="en-US" sz="1500" b="1" dirty="0">
+              <a:rPr lang="en-US" sz="1600" b="1" dirty="0">
                 <a:solidFill>
                   <a:srgbClr val="0B1020"/>
                 </a:solidFill>
@@ -6157,13 +6206,13 @@
               </a:rPr>
               <a:t>6</a:t>
             </a:r>
-            <a:endParaRPr lang="en-US" sz="1500" dirty="0"/>
+            <a:endParaRPr lang="en-US" sz="1600" dirty="0"/>
           </a:p>
         </p:txBody>
       </p:sp>
       <p:sp>
         <p:nvSpPr>
-          <p:cNvPr id="48" name="Text 46"/>
+          <p:cNvPr id="47" name="Text 45"/>
           <p:cNvSpPr txBox="1"/>
           <p:nvPr/>
         </p:nvSpPr>
@@ -6541,88 +6590,7 @@
       </p:sp>
       <p:sp>
         <p:nvSpPr>
-          <p:cNvPr id="12" name="Shape 10"/>
-          <p:cNvSpPr/>
-          <p:nvPr/>
-        </p:nvSpPr>
-        <p:spPr>
-          <a:xfrm>
-            <a:off x="731520" y="1207008"/>
-            <a:ext cx="1325880" cy="54864"/>
-          </a:xfrm>
-          <a:prstGeom prst="rect">
-            <a:avLst/>
-          </a:prstGeom>
-          <a:solidFill>
-            <a:srgbClr val="8A4FFF"/>
-          </a:solidFill>
-          <a:ln w="12700">
-            <a:solidFill>
-              <a:srgbClr val="8A4FFF">
-                <a:alpha val="0"/>
-              </a:srgbClr>
-            </a:solidFill>
-            <a:prstDash val="solid"/>
-          </a:ln>
-        </p:spPr>
-      </p:sp>
-      <p:sp>
-        <p:nvSpPr>
-          <p:cNvPr id="13" name="Shape 11"/>
-          <p:cNvSpPr/>
-          <p:nvPr/>
-        </p:nvSpPr>
-        <p:spPr>
-          <a:xfrm>
-            <a:off x="822960" y="1389888"/>
-            <a:ext cx="4937760" cy="73152"/>
-          </a:xfrm>
-          <a:prstGeom prst="rect">
-            <a:avLst/>
-          </a:prstGeom>
-          <a:solidFill>
-            <a:srgbClr val="8A4FFF"/>
-          </a:solidFill>
-          <a:ln w="12700">
-            <a:solidFill>
-              <a:srgbClr val="8A4FFF">
-                <a:alpha val="0"/>
-              </a:srgbClr>
-            </a:solidFill>
-            <a:prstDash val="solid"/>
-          </a:ln>
-        </p:spPr>
-      </p:sp>
-      <p:sp>
-        <p:nvSpPr>
-          <p:cNvPr id="14" name="Shape 12"/>
-          <p:cNvSpPr/>
-          <p:nvPr/>
-        </p:nvSpPr>
-        <p:spPr>
-          <a:xfrm>
-            <a:off x="6400800" y="1389888"/>
-            <a:ext cx="4937760" cy="73152"/>
-          </a:xfrm>
-          <a:prstGeom prst="rect">
-            <a:avLst/>
-          </a:prstGeom>
-          <a:solidFill>
-            <a:srgbClr val="8A4FFF"/>
-          </a:solidFill>
-          <a:ln w="12700">
-            <a:solidFill>
-              <a:srgbClr val="8A4FFF">
-                <a:alpha val="0"/>
-              </a:srgbClr>
-            </a:solidFill>
-            <a:prstDash val="solid"/>
-          </a:ln>
-        </p:spPr>
-      </p:sp>
-      <p:sp>
-        <p:nvSpPr>
-          <p:cNvPr id="15" name="mdpr:1-2-e3669a:title:__title:1-2-e3669a"/>
+          <p:cNvPr id="12" name="mdpr:1-2-e3669a:title:__title:1-2-e3669a"/>
           <p:cNvSpPr txBox="1"/>
           <p:nvPr/>
         </p:nvSpPr>
@@ -6664,14 +6632,14 @@
       </p:sp>
       <p:sp>
         <p:nvSpPr>
-          <p:cNvPr id="16" name="mdpr:1-2-e3669a:left:block-15-chunk-1-block-15-chunk-1"/>
+          <p:cNvPr id="13" name="mdpr:1-2-e3669a:left:block-15-chunk-1-block-15-chunk-1"/>
           <p:cNvSpPr txBox="1"/>
           <p:nvPr/>
         </p:nvSpPr>
         <p:spPr>
           <a:xfrm>
-            <a:off x="896112" y="1499616"/>
-            <a:ext cx="4791456" cy="4398264"/>
+            <a:off x="896112" y="1463040"/>
+            <a:ext cx="4791456" cy="4261104"/>
           </a:xfrm>
           <a:prstGeom prst="rect">
             <a:avLst/>
@@ -6763,14 +6731,14 @@
       </p:sp>
       <p:sp>
         <p:nvSpPr>
-          <p:cNvPr id="17" name="mdpr:1-2-e3669a:right:block-15-chunk-1-block-15-chunk-1"/>
+          <p:cNvPr id="14" name="mdpr:1-2-e3669a:right:block-15-chunk-1"/>
           <p:cNvSpPr txBox="1"/>
           <p:nvPr/>
         </p:nvSpPr>
         <p:spPr>
           <a:xfrm>
-            <a:off x="6473952" y="1499616"/>
-            <a:ext cx="4791456" cy="4398264"/>
+            <a:off x="6473952" y="1463040"/>
+            <a:ext cx="4791456" cy="4261104"/>
           </a:xfrm>
           <a:prstGeom prst="rect">
             <a:avLst/>
@@ -6818,46 +6786,6 @@
             </a:r>
             <a:endParaRPr lang="en-US" sz="1800" dirty="0"/>
           </a:p>
-          <a:p>
-            <a:pPr algn="l" indent="0" marL="0">
-              <a:lnSpc>
-                <a:spcPct val="120000"/>
-              </a:lnSpc>
-              <a:buNone/>
-            </a:pPr>
-            <a:r>
-              <a:rPr lang="en-US" sz="1800" b="1" dirty="0">
-                <a:solidFill>
-                  <a:srgbClr val="8A4FFF"/>
-                </a:solidFill>
-                <a:latin typeface="Pretendard" pitchFamily="34" charset="0"/>
-                <a:ea typeface="Pretendard" pitchFamily="34" charset="-122"/>
-                <a:cs typeface="Pretendard" pitchFamily="34" charset="-120"/>
-              </a:rPr>
-              <a:t>- Connectors</a:t>
-            </a:r>
-            <a:endParaRPr lang="en-US" sz="1800" dirty="0"/>
-          </a:p>
-          <a:p>
-            <a:pPr algn="l" indent="0" marL="0">
-              <a:lnSpc>
-                <a:spcPct val="120000"/>
-              </a:lnSpc>
-              <a:buNone/>
-            </a:pPr>
-            <a:r>
-              <a:rPr lang="en-US" sz="1800" dirty="0">
-                <a:solidFill>
-                  <a:srgbClr val="F8F8F8"/>
-                </a:solidFill>
-                <a:latin typeface="Pretendard" pitchFamily="34" charset="0"/>
-                <a:ea typeface="Pretendard" pitchFamily="34" charset="-122"/>
-                <a:cs typeface="Pretendard" pitchFamily="34" charset="-120"/>
-              </a:rPr>
-              <a:t>  straight-arrow, elbow-arrow, boundary-attach, overlap-joint, parallel-flow, contrast-flow.</a:t>
-            </a:r>
-            <a:endParaRPr lang="en-US" sz="1800" dirty="0"/>
-          </a:p>
         </p:txBody>
       </p:sp>
     </p:spTree>
@@ -7196,88 +7124,7 @@
       </p:sp>
       <p:sp>
         <p:nvSpPr>
-          <p:cNvPr id="12" name="Shape 10"/>
-          <p:cNvSpPr/>
-          <p:nvPr/>
-        </p:nvSpPr>
-        <p:spPr>
-          <a:xfrm>
-            <a:off x="731520" y="1207008"/>
-            <a:ext cx="1325880" cy="54864"/>
-          </a:xfrm>
-          <a:prstGeom prst="rect">
-            <a:avLst/>
-          </a:prstGeom>
-          <a:solidFill>
-            <a:srgbClr val="8A4FFF"/>
-          </a:solidFill>
-          <a:ln w="12700">
-            <a:solidFill>
-              <a:srgbClr val="8A4FFF">
-                <a:alpha val="0"/>
-              </a:srgbClr>
-            </a:solidFill>
-            <a:prstDash val="solid"/>
-          </a:ln>
-        </p:spPr>
-      </p:sp>
-      <p:sp>
-        <p:nvSpPr>
-          <p:cNvPr id="13" name="Shape 11"/>
-          <p:cNvSpPr/>
-          <p:nvPr/>
-        </p:nvSpPr>
-        <p:spPr>
-          <a:xfrm>
-            <a:off x="822960" y="1554480"/>
-            <a:ext cx="4937760" cy="73152"/>
-          </a:xfrm>
-          <a:prstGeom prst="rect">
-            <a:avLst/>
-          </a:prstGeom>
-          <a:solidFill>
-            <a:srgbClr val="8A4FFF"/>
-          </a:solidFill>
-          <a:ln w="12700">
-            <a:solidFill>
-              <a:srgbClr val="8A4FFF">
-                <a:alpha val="0"/>
-              </a:srgbClr>
-            </a:solidFill>
-            <a:prstDash val="solid"/>
-          </a:ln>
-        </p:spPr>
-      </p:sp>
-      <p:sp>
-        <p:nvSpPr>
-          <p:cNvPr id="14" name="Shape 12"/>
-          <p:cNvSpPr/>
-          <p:nvPr/>
-        </p:nvSpPr>
-        <p:spPr>
-          <a:xfrm>
-            <a:off x="6400800" y="1554480"/>
-            <a:ext cx="4937760" cy="73152"/>
-          </a:xfrm>
-          <a:prstGeom prst="rect">
-            <a:avLst/>
-          </a:prstGeom>
-          <a:solidFill>
-            <a:srgbClr val="8A4FFF"/>
-          </a:solidFill>
-          <a:ln w="12700">
-            <a:solidFill>
-              <a:srgbClr val="8A4FFF">
-                <a:alpha val="0"/>
-              </a:srgbClr>
-            </a:solidFill>
-            <a:prstDash val="solid"/>
-          </a:ln>
-        </p:spPr>
-      </p:sp>
-      <p:sp>
-        <p:nvSpPr>
-          <p:cNvPr id="15" name="mdpr:2-2-c23e9b:title:__title:2-2-c23e9b"/>
+          <p:cNvPr id="12" name="mdpr:2-2-c23e9b:title:__title:2-2-c23e9b"/>
           <p:cNvSpPr txBox="1"/>
           <p:nvPr/>
         </p:nvSpPr>
@@ -7311,7 +7158,24 @@
                 <a:ea typeface="Pretendard" pitchFamily="34" charset="-122"/>
                 <a:cs typeface="Pretendard" pitchFamily="34" charset="-120"/>
               </a:rPr>
-              <a:t>Decoration Pattern Catalog (Cont. 2/2)</a:t>
+              <a:t>Decoration Pattern Catalog</a:t>
+            </a:r>
+            <a:pPr algn="ctr" indent="0" marL="0">
+              <a:lnSpc>
+                <a:spcPct val="120000"/>
+              </a:lnSpc>
+              <a:buNone/>
+            </a:pPr>
+            <a:r>
+              <a:rPr lang="en-US" sz="2000" dirty="0">
+                <a:solidFill>
+                  <a:srgbClr val="6C6C6C"/>
+                </a:solidFill>
+                <a:latin typeface="Pretendard" pitchFamily="34" charset="0"/>
+                <a:ea typeface="Pretendard" pitchFamily="34" charset="-122"/>
+                <a:cs typeface="Pretendard" pitchFamily="34" charset="-120"/>
+              </a:rPr>
+              <a:t> (Cont. 2/2)</a:t>
             </a:r>
             <a:endParaRPr lang="en-US" sz="3400" dirty="0"/>
           </a:p>
@@ -7319,14 +7183,14 @@
       </p:sp>
       <p:sp>
         <p:nvSpPr>
-          <p:cNvPr id="16" name="mdpr:2-2-c23e9b:left:block-15-chunk-2"/>
+          <p:cNvPr id="13" name="mdpr:2-2-c23e9b:left:block-15-chunk-2-block-15-chunk-2"/>
           <p:cNvSpPr txBox="1"/>
           <p:nvPr/>
         </p:nvSpPr>
         <p:spPr>
           <a:xfrm>
-            <a:off x="896112" y="1664208"/>
-            <a:ext cx="4791456" cy="4169664"/>
+            <a:off x="896112" y="1463040"/>
+            <a:ext cx="4791456" cy="4261104"/>
           </a:xfrm>
           <a:prstGeom prst="rect">
             <a:avLst/>
@@ -7345,7 +7209,44 @@
               <a:buNone/>
             </a:pPr>
             <a:r>
-              <a:rPr lang="en-US" sz="2200" b="1" dirty="0">
+              <a:rPr lang="en-US" sz="1800" b="1" dirty="0">
+                <a:solidFill>
+                  <a:srgbClr val="8A4FFF"/>
+                </a:solidFill>
+                <a:latin typeface="Pretendard" pitchFamily="34" charset="0"/>
+                <a:ea typeface="Pretendard" pitchFamily="34" charset="-122"/>
+                <a:cs typeface="Pretendard" pitchFamily="34" charset="-120"/>
+              </a:rPr>
+              <a:t>- Connectors</a:t>
+            </a:r>
+            <a:pPr algn="l" indent="0" marL="0">
+              <a:lnSpc>
+                <a:spcPct val="120000"/>
+              </a:lnSpc>
+              <a:buNone/>
+            </a:pPr>
+            <a:r>
+              <a:rPr lang="en-US" sz="1800" dirty="0">
+                <a:solidFill>
+                  <a:srgbClr val="F8F8F8"/>
+                </a:solidFill>
+                <a:latin typeface="Pretendard" pitchFamily="34" charset="0"/>
+                <a:ea typeface="Pretendard" pitchFamily="34" charset="-122"/>
+                <a:cs typeface="Pretendard" pitchFamily="34" charset="-120"/>
+              </a:rPr>
+              <a:t>  straight-arrow, elbow-arrow, boundary-attach, overlap-joint, parallel-flow, contrast-flow.</a:t>
+            </a:r>
+            <a:endParaRPr lang="en-US" sz="1800" dirty="0"/>
+          </a:p>
+          <a:p>
+            <a:pPr algn="l" indent="0" marL="0">
+              <a:lnSpc>
+                <a:spcPct val="120000"/>
+              </a:lnSpc>
+              <a:buNone/>
+            </a:pPr>
+            <a:r>
+              <a:rPr lang="en-US" sz="1800" b="1" dirty="0">
                 <a:solidFill>
                   <a:srgbClr val="8A4FFF"/>
                 </a:solidFill>
@@ -7355,6 +7256,9 @@
               </a:rPr>
               <a:t>- Icons</a:t>
             </a:r>
+            <a:endParaRPr lang="en-US" sz="1800" dirty="0"/>
+          </a:p>
+          <a:p>
             <a:pPr algn="l" indent="0" marL="0">
               <a:lnSpc>
                 <a:spcPct val="120000"/>
@@ -7362,7 +7266,7 @@
               <a:buNone/>
             </a:pPr>
             <a:r>
-              <a:rPr lang="en-US" sz="2200" dirty="0">
+              <a:rPr lang="en-US" sz="1800" dirty="0">
                 <a:solidFill>
                   <a:srgbClr val="F8F8F8"/>
                 </a:solidFill>
@@ -7372,20 +7276,20 @@
               </a:rPr>
               <a:t>  number-badge, mono-icon-slot, letter-disc, quiet-aside, image-safe-frame, brand-glyph.</a:t>
             </a:r>
-            <a:endParaRPr lang="en-US" sz="2200" dirty="0"/>
+            <a:endParaRPr lang="en-US" sz="1800" dirty="0"/>
           </a:p>
         </p:txBody>
       </p:sp>
       <p:sp>
         <p:nvSpPr>
-          <p:cNvPr id="17" name="mdpr:2-2-c23e9b:right:block-15-chunk-2"/>
+          <p:cNvPr id="14" name="mdpr:2-2-c23e9b:right:block-15-chunk-2"/>
           <p:cNvSpPr txBox="1"/>
           <p:nvPr/>
         </p:nvSpPr>
         <p:spPr>
           <a:xfrm>
-            <a:off x="6473952" y="1664208"/>
-            <a:ext cx="4791456" cy="4169664"/>
+            <a:off x="6473952" y="1463040"/>
+            <a:ext cx="4791456" cy="4261104"/>
           </a:xfrm>
           <a:prstGeom prst="rect">
             <a:avLst/>
@@ -7404,7 +7308,7 @@
               <a:buNone/>
             </a:pPr>
             <a:r>
-              <a:rPr lang="en-US" sz="2200" b="1" dirty="0">
+              <a:rPr lang="en-US" sz="1800" b="1" dirty="0">
                 <a:solidFill>
                   <a:srgbClr val="8A4FFF"/>
                 </a:solidFill>
@@ -7421,7 +7325,7 @@
               <a:buNone/>
             </a:pPr>
             <a:r>
-              <a:rPr lang="en-US" sz="2200" dirty="0">
+              <a:rPr lang="en-US" sz="1800" dirty="0">
                 <a:solidFill>
                   <a:srgbClr val="F8F8F8"/>
                 </a:solidFill>
@@ -7431,7 +7335,7 @@
               </a:rPr>
               <a:t>  skeuomorphic-bevel, glassmorphism-surface, newmorphic-panel, clay-blob, bento-tile, liquid-lens.</a:t>
             </a:r>
-            <a:endParaRPr lang="en-US" sz="2200" dirty="0"/>
+            <a:endParaRPr lang="en-US" sz="1800" dirty="0"/>
           </a:p>
         </p:txBody>
       </p:sp>
@@ -7769,36 +7673,9 @@
           </a:ln>
         </p:spPr>
       </p:sp>
-      <p:sp>
-        <p:nvSpPr>
-          <p:cNvPr id="12" name="Shape 10"/>
-          <p:cNvSpPr/>
-          <p:nvPr/>
-        </p:nvSpPr>
-        <p:spPr>
-          <a:xfrm>
-            <a:off x="731520" y="1207008"/>
-            <a:ext cx="1325880" cy="54864"/>
-          </a:xfrm>
-          <a:prstGeom prst="rect">
-            <a:avLst/>
-          </a:prstGeom>
-          <a:solidFill>
-            <a:srgbClr val="8A4FFF"/>
-          </a:solidFill>
-          <a:ln w="12700">
-            <a:solidFill>
-              <a:srgbClr val="8A4FFF">
-                <a:alpha val="0"/>
-              </a:srgbClr>
-            </a:solidFill>
-            <a:prstDash val="solid"/>
-          </a:ln>
-        </p:spPr>
-      </p:sp>
       <p:pic>
         <p:nvPicPr>
-          <p:cNvPr id="13" name="Image 0" descr="preencoded.png">    </p:cNvPr>
+          <p:cNvPr id="12" name="Image 0" descr="preencoded.png">    </p:cNvPr>
           <p:cNvPicPr>
             <a:picLocks noChangeAspect="1"/>
           </p:cNvPicPr>
@@ -7828,7 +7705,7 @@
       </p:pic>
       <p:sp>
         <p:nvSpPr>
-          <p:cNvPr id="14" name="Shape 11"/>
+          <p:cNvPr id="13" name="Shape 10"/>
           <p:cNvSpPr/>
           <p:nvPr/>
         </p:nvSpPr>
@@ -7869,7 +7746,7 @@
       </p:sp>
       <p:sp>
         <p:nvSpPr>
-          <p:cNvPr id="15" name="mdpr:table-coherence-2f9a7b:title:__title:table-coherence-2f9a7b"/>
+          <p:cNvPr id="14" name="mdpr:table-coherence-2f9a7b:title:__title:table-coherence-2f9a7b"/>
           <p:cNvSpPr txBox="1"/>
           <p:nvPr/>
         </p:nvSpPr>
@@ -9298,36 +9175,9 @@
           </a:ln>
         </p:spPr>
       </p:sp>
-      <p:sp>
-        <p:nvSpPr>
-          <p:cNvPr id="12" name="Shape 10"/>
-          <p:cNvSpPr/>
-          <p:nvPr/>
-        </p:nvSpPr>
-        <p:spPr>
-          <a:xfrm>
-            <a:off x="731520" y="1207008"/>
-            <a:ext cx="1325880" cy="54864"/>
-          </a:xfrm>
-          <a:prstGeom prst="rect">
-            <a:avLst/>
-          </a:prstGeom>
-          <a:solidFill>
-            <a:srgbClr val="8A4FFF"/>
-          </a:solidFill>
-          <a:ln w="12700">
-            <a:solidFill>
-              <a:srgbClr val="8A4FFF">
-                <a:alpha val="0"/>
-              </a:srgbClr>
-            </a:solidFill>
-            <a:prstDash val="solid"/>
-          </a:ln>
-        </p:spPr>
-      </p:sp>
       <p:pic>
         <p:nvPicPr>
-          <p:cNvPr id="13" name="Image 0" descr="preencoded.png">    </p:cNvPr>
+          <p:cNvPr id="12" name="Image 0" descr="preencoded.png">    </p:cNvPr>
           <p:cNvPicPr>
             <a:picLocks noChangeAspect="1"/>
           </p:cNvPicPr>
@@ -9357,7 +9207,7 @@
       </p:pic>
       <p:sp>
         <p:nvSpPr>
-          <p:cNvPr id="14" name="Shape 11"/>
+          <p:cNvPr id="13" name="Shape 10"/>
           <p:cNvSpPr/>
           <p:nvPr/>
         </p:nvSpPr>
@@ -9398,7 +9248,7 @@
       </p:sp>
       <p:sp>
         <p:nvSpPr>
-          <p:cNvPr id="15" name="Shape 12"/>
+          <p:cNvPr id="14" name="Shape 11"/>
           <p:cNvSpPr/>
           <p:nvPr/>
         </p:nvSpPr>
@@ -9425,7 +9275,7 @@
       </p:sp>
       <p:sp>
         <p:nvSpPr>
-          <p:cNvPr id="16" name="mdpr:1-2-2ff3f0:title:__title:1-2-2ff3f0"/>
+          <p:cNvPr id="15" name="mdpr:1-2-2ff3f0:title:__title:1-2-2ff3f0"/>
           <p:cNvSpPr txBox="1"/>
           <p:nvPr/>
         </p:nvSpPr>
@@ -9467,7 +9317,7 @@
       </p:sp>
       <p:sp>
         <p:nvSpPr>
-          <p:cNvPr id="17" name="mdpr:1-2-2ff3f0:body:block-19"/>
+          <p:cNvPr id="16" name="mdpr:1-2-2ff3f0:body:block-19"/>
           <p:cNvSpPr txBox="1"/>
           <p:nvPr/>
         </p:nvSpPr>
@@ -9606,7 +9456,7 @@
       </p:sp>
       <p:graphicFrame>
         <p:nvGraphicFramePr>
-          <p:cNvPr id="18" name="Chart 0" descr=""/>
+          <p:cNvPr id="17" name="Chart 0" descr=""/>
           <p:cNvGraphicFramePr/>
           <p:nvPr/>
         </p:nvGraphicFramePr>
@@ -9954,36 +9804,9 @@
           </a:ln>
         </p:spPr>
       </p:sp>
-      <p:sp>
-        <p:nvSpPr>
-          <p:cNvPr id="12" name="Shape 10"/>
-          <p:cNvSpPr/>
-          <p:nvPr/>
-        </p:nvSpPr>
-        <p:spPr>
-          <a:xfrm>
-            <a:off x="731520" y="1207008"/>
-            <a:ext cx="1325880" cy="54864"/>
-          </a:xfrm>
-          <a:prstGeom prst="rect">
-            <a:avLst/>
-          </a:prstGeom>
-          <a:solidFill>
-            <a:srgbClr val="8A4FFF"/>
-          </a:solidFill>
-          <a:ln w="12700">
-            <a:solidFill>
-              <a:srgbClr val="8A4FFF">
-                <a:alpha val="0"/>
-              </a:srgbClr>
-            </a:solidFill>
-            <a:prstDash val="solid"/>
-          </a:ln>
-        </p:spPr>
-      </p:sp>
       <p:pic>
         <p:nvPicPr>
-          <p:cNvPr id="13" name="Image 0" descr="preencoded.png">    </p:cNvPr>
+          <p:cNvPr id="12" name="Image 0" descr="preencoded.png">    </p:cNvPr>
           <p:cNvPicPr>
             <a:picLocks noChangeAspect="1"/>
           </p:cNvPicPr>
@@ -10013,7 +9836,7 @@
       </p:pic>
       <p:sp>
         <p:nvSpPr>
-          <p:cNvPr id="14" name="Shape 11"/>
+          <p:cNvPr id="13" name="Shape 10"/>
           <p:cNvSpPr/>
           <p:nvPr/>
         </p:nvSpPr>
@@ -10054,7 +9877,7 @@
       </p:sp>
       <p:sp>
         <p:nvSpPr>
-          <p:cNvPr id="15" name="mdpr:2-2-542095:title:__title:2-2-542095"/>
+          <p:cNvPr id="14" name="mdpr:2-2-542095:title:__title:2-2-542095"/>
           <p:cNvSpPr txBox="1"/>
           <p:nvPr/>
         </p:nvSpPr>
@@ -10088,7 +9911,24 @@
                 <a:ea typeface="Pretendard" pitchFamily="34" charset="-122"/>
                 <a:cs typeface="Pretendard" pitchFamily="34" charset="-120"/>
               </a:rPr>
-              <a:t>Chart and Table Pair (Cont. 2/2)</a:t>
+              <a:t>Chart and Table Pair</a:t>
+            </a:r>
+            <a:pPr algn="ctr" indent="0" marL="0">
+              <a:lnSpc>
+                <a:spcPct val="120000"/>
+              </a:lnSpc>
+              <a:buNone/>
+            </a:pPr>
+            <a:r>
+              <a:rPr lang="en-US" sz="2000" dirty="0">
+                <a:solidFill>
+                  <a:srgbClr val="6C6C6C"/>
+                </a:solidFill>
+                <a:latin typeface="Pretendard" pitchFamily="34" charset="0"/>
+                <a:ea typeface="Pretendard" pitchFamily="34" charset="-122"/>
+                <a:cs typeface="Pretendard" pitchFamily="34" charset="-120"/>
+              </a:rPr>
+              <a:t> (Cont. 2/2)</a:t>
             </a:r>
             <a:endParaRPr lang="en-US" sz="3400" dirty="0"/>
           </a:p>
@@ -11271,36 +11111,9 @@
           </a:ln>
         </p:spPr>
       </p:sp>
-      <p:sp>
-        <p:nvSpPr>
-          <p:cNvPr id="12" name="Shape 10"/>
-          <p:cNvSpPr/>
-          <p:nvPr/>
-        </p:nvSpPr>
-        <p:spPr>
-          <a:xfrm>
-            <a:off x="731520" y="1207008"/>
-            <a:ext cx="1325880" cy="54864"/>
-          </a:xfrm>
-          <a:prstGeom prst="rect">
-            <a:avLst/>
-          </a:prstGeom>
-          <a:solidFill>
-            <a:srgbClr val="8A4FFF"/>
-          </a:solidFill>
-          <a:ln w="12700">
-            <a:solidFill>
-              <a:srgbClr val="8A4FFF">
-                <a:alpha val="0"/>
-              </a:srgbClr>
-            </a:solidFill>
-            <a:prstDash val="solid"/>
-          </a:ln>
-        </p:spPr>
-      </p:sp>
       <p:pic>
         <p:nvPicPr>
-          <p:cNvPr id="13" name="Image 0" descr="preencoded.png">    </p:cNvPr>
+          <p:cNvPr id="12" name="Image 0" descr="preencoded.png">    </p:cNvPr>
           <p:cNvPicPr>
             <a:picLocks noChangeAspect="1"/>
           </p:cNvPicPr>
@@ -11330,7 +11143,7 @@
       </p:pic>
       <p:sp>
         <p:nvSpPr>
-          <p:cNvPr id="14" name="Shape 11"/>
+          <p:cNvPr id="13" name="Shape 10"/>
           <p:cNvSpPr/>
           <p:nvPr/>
         </p:nvSpPr>
@@ -11371,7 +11184,7 @@
       </p:sp>
       <p:sp>
         <p:nvSpPr>
-          <p:cNvPr id="15" name="mdpr:1-2-b8955f:title:__title:1-2-b8955f"/>
+          <p:cNvPr id="14" name="mdpr:1-2-b8955f:title:__title:1-2-b8955f"/>
           <p:cNvSpPr txBox="1"/>
           <p:nvPr/>
         </p:nvSpPr>
@@ -11413,7 +11226,7 @@
       </p:sp>
       <p:sp>
         <p:nvSpPr>
-          <p:cNvPr id="16" name="Shape 13"/>
+          <p:cNvPr id="15" name="Shape 12"/>
           <p:cNvSpPr/>
           <p:nvPr/>
         </p:nvSpPr>
@@ -11446,7 +11259,7 @@
       </p:sp>
       <p:sp>
         <p:nvSpPr>
-          <p:cNvPr id="17" name="Shape 14"/>
+          <p:cNvPr id="16" name="Shape 13"/>
           <p:cNvSpPr/>
           <p:nvPr/>
         </p:nvSpPr>
@@ -11477,7 +11290,7 @@
       </p:sp>
       <p:sp>
         <p:nvSpPr>
-          <p:cNvPr id="18" name="Shape 15"/>
+          <p:cNvPr id="17" name="Shape 14"/>
           <p:cNvSpPr/>
           <p:nvPr/>
         </p:nvSpPr>
@@ -11508,7 +11321,7 @@
       </p:sp>
       <p:sp>
         <p:nvSpPr>
-          <p:cNvPr id="19" name="Shape 16"/>
+          <p:cNvPr id="18" name="Shape 15"/>
           <p:cNvSpPr/>
           <p:nvPr/>
         </p:nvSpPr>
@@ -11533,7 +11346,7 @@
       </p:sp>
       <p:sp>
         <p:nvSpPr>
-          <p:cNvPr id="20" name="Shape 17"/>
+          <p:cNvPr id="19" name="Shape 16"/>
           <p:cNvSpPr/>
           <p:nvPr/>
         </p:nvSpPr>
@@ -11560,7 +11373,7 @@
       </p:sp>
       <p:sp>
         <p:nvSpPr>
-          <p:cNvPr id="21" name="Text 18"/>
+          <p:cNvPr id="20" name="Text 17"/>
           <p:cNvSpPr txBox="1"/>
           <p:nvPr/>
         </p:nvSpPr>
@@ -11604,7 +11417,7 @@
       </p:sp>
       <p:sp>
         <p:nvSpPr>
-          <p:cNvPr id="22" name="Text 19"/>
+          <p:cNvPr id="21" name="Text 18"/>
           <p:cNvSpPr txBox="1"/>
           <p:nvPr/>
         </p:nvSpPr>
@@ -11646,7 +11459,7 @@
       </p:sp>
       <p:sp>
         <p:nvSpPr>
-          <p:cNvPr id="23" name="Shape 20"/>
+          <p:cNvPr id="22" name="Shape 19"/>
           <p:cNvSpPr/>
           <p:nvPr/>
         </p:nvSpPr>
@@ -11673,7 +11486,7 @@
       </p:sp>
       <p:sp>
         <p:nvSpPr>
-          <p:cNvPr id="24" name="Text 21"/>
+          <p:cNvPr id="23" name="Text 20"/>
           <p:cNvSpPr txBox="1"/>
           <p:nvPr/>
         </p:nvSpPr>
@@ -11717,7 +11530,7 @@
       </p:sp>
       <p:sp>
         <p:nvSpPr>
-          <p:cNvPr id="25" name="Shape 22"/>
+          <p:cNvPr id="24" name="Shape 21"/>
           <p:cNvSpPr/>
           <p:nvPr/>
         </p:nvSpPr>
@@ -11744,7 +11557,7 @@
       </p:sp>
       <p:sp>
         <p:nvSpPr>
-          <p:cNvPr id="26" name="Text 23"/>
+          <p:cNvPr id="25" name="Text 22"/>
           <p:cNvSpPr txBox="1"/>
           <p:nvPr/>
         </p:nvSpPr>
@@ -11788,7 +11601,7 @@
       </p:sp>
       <p:sp>
         <p:nvSpPr>
-          <p:cNvPr id="27" name="Shape 24"/>
+          <p:cNvPr id="26" name="Shape 23"/>
           <p:cNvSpPr/>
           <p:nvPr/>
         </p:nvSpPr>
@@ -11819,7 +11632,7 @@
       </p:sp>
       <p:sp>
         <p:nvSpPr>
-          <p:cNvPr id="28" name="Shape 25"/>
+          <p:cNvPr id="27" name="Shape 24"/>
           <p:cNvSpPr/>
           <p:nvPr/>
         </p:nvSpPr>
@@ -11848,7 +11661,7 @@
       </p:sp>
       <p:sp>
         <p:nvSpPr>
-          <p:cNvPr id="29" name="Shape 26"/>
+          <p:cNvPr id="28" name="Shape 25"/>
           <p:cNvSpPr/>
           <p:nvPr/>
         </p:nvSpPr>
@@ -11871,7 +11684,7 @@
       </p:sp>
       <p:sp>
         <p:nvSpPr>
-          <p:cNvPr id="30" name="Shape 27"/>
+          <p:cNvPr id="29" name="Shape 26"/>
           <p:cNvSpPr/>
           <p:nvPr/>
         </p:nvSpPr>
@@ -11896,7 +11709,7 @@
       </p:sp>
       <p:sp>
         <p:nvSpPr>
-          <p:cNvPr id="31" name="Shape 28"/>
+          <p:cNvPr id="30" name="Shape 27"/>
           <p:cNvSpPr/>
           <p:nvPr/>
         </p:nvSpPr>
@@ -11921,7 +11734,7 @@
       </p:sp>
       <p:sp>
         <p:nvSpPr>
-          <p:cNvPr id="32" name="Shape 29"/>
+          <p:cNvPr id="31" name="Shape 28"/>
           <p:cNvSpPr/>
           <p:nvPr/>
         </p:nvSpPr>
@@ -11946,7 +11759,7 @@
       </p:sp>
       <p:sp>
         <p:nvSpPr>
-          <p:cNvPr id="33" name="Text 30"/>
+          <p:cNvPr id="32" name="Text 29"/>
           <p:cNvSpPr txBox="1"/>
           <p:nvPr/>
         </p:nvSpPr>
@@ -11990,7 +11803,7 @@
       </p:sp>
       <p:sp>
         <p:nvSpPr>
-          <p:cNvPr id="34" name="Text 31"/>
+          <p:cNvPr id="33" name="Text 30"/>
           <p:cNvSpPr txBox="1"/>
           <p:nvPr/>
         </p:nvSpPr>
@@ -12032,7 +11845,7 @@
       </p:sp>
       <p:sp>
         <p:nvSpPr>
-          <p:cNvPr id="35" name="Text 32"/>
+          <p:cNvPr id="34" name="Text 31"/>
           <p:cNvSpPr txBox="1"/>
           <p:nvPr/>
         </p:nvSpPr>
@@ -12074,7 +11887,7 @@
       </p:sp>
       <p:sp>
         <p:nvSpPr>
-          <p:cNvPr id="36" name="Text 33"/>
+          <p:cNvPr id="35" name="Text 32"/>
           <p:cNvSpPr txBox="1"/>
           <p:nvPr/>
         </p:nvSpPr>
@@ -12448,36 +12261,9 @@
           </a:ln>
         </p:spPr>
       </p:sp>
-      <p:sp>
-        <p:nvSpPr>
-          <p:cNvPr id="12" name="Shape 10"/>
-          <p:cNvSpPr/>
-          <p:nvPr/>
-        </p:nvSpPr>
-        <p:spPr>
-          <a:xfrm>
-            <a:off x="731520" y="1207008"/>
-            <a:ext cx="1325880" cy="54864"/>
-          </a:xfrm>
-          <a:prstGeom prst="rect">
-            <a:avLst/>
-          </a:prstGeom>
-          <a:solidFill>
-            <a:srgbClr val="8A4FFF"/>
-          </a:solidFill>
-          <a:ln w="12700">
-            <a:solidFill>
-              <a:srgbClr val="8A4FFF">
-                <a:alpha val="0"/>
-              </a:srgbClr>
-            </a:solidFill>
-            <a:prstDash val="solid"/>
-          </a:ln>
-        </p:spPr>
-      </p:sp>
       <p:pic>
         <p:nvPicPr>
-          <p:cNvPr id="13" name="Image 0" descr="preencoded.png">    </p:cNvPr>
+          <p:cNvPr id="12" name="Image 0" descr="preencoded.png">    </p:cNvPr>
           <p:cNvPicPr>
             <a:picLocks noChangeAspect="1"/>
           </p:cNvPicPr>
@@ -12507,7 +12293,7 @@
       </p:pic>
       <p:sp>
         <p:nvSpPr>
-          <p:cNvPr id="14" name="Shape 11"/>
+          <p:cNvPr id="13" name="Shape 10"/>
           <p:cNvSpPr/>
           <p:nvPr/>
         </p:nvSpPr>
@@ -12548,7 +12334,7 @@
       </p:sp>
       <p:sp>
         <p:nvSpPr>
-          <p:cNvPr id="15" name="mdpr:2-2-4dc4c1:title:__title:2-2-4dc4c1"/>
+          <p:cNvPr id="14" name="mdpr:2-2-4dc4c1:title:__title:2-2-4dc4c1"/>
           <p:cNvSpPr txBox="1"/>
           <p:nvPr/>
         </p:nvSpPr>
@@ -12582,7 +12368,24 @@
                 <a:ea typeface="Pretendard" pitchFamily="34" charset="-122"/>
                 <a:cs typeface="Pretendard" pitchFamily="34" charset="-120"/>
               </a:rPr>
-              <a:t>Editable Proof Objects (Cont. 2/2)</a:t>
+              <a:t>Editable Proof Objects</a:t>
+            </a:r>
+            <a:pPr algn="ctr" indent="0" marL="0">
+              <a:lnSpc>
+                <a:spcPct val="120000"/>
+              </a:lnSpc>
+              <a:buNone/>
+            </a:pPr>
+            <a:r>
+              <a:rPr lang="en-US" sz="2000" dirty="0">
+                <a:solidFill>
+                  <a:srgbClr val="6C6C6C"/>
+                </a:solidFill>
+                <a:latin typeface="Pretendard" pitchFamily="34" charset="0"/>
+                <a:ea typeface="Pretendard" pitchFamily="34" charset="-122"/>
+                <a:cs typeface="Pretendard" pitchFamily="34" charset="-120"/>
+              </a:rPr>
+              <a:t> (Cont. 2/2)</a:t>
             </a:r>
             <a:endParaRPr lang="en-US" sz="3400" dirty="0"/>
           </a:p>
@@ -12590,7 +12393,7 @@
       </p:sp>
       <p:sp>
         <p:nvSpPr>
-          <p:cNvPr id="16" name="Shape 13"/>
+          <p:cNvPr id="15" name="Shape 12"/>
           <p:cNvSpPr/>
           <p:nvPr/>
         </p:nvSpPr>
@@ -12617,7 +12420,7 @@
       </p:sp>
       <p:sp>
         <p:nvSpPr>
-          <p:cNvPr id="17" name="Shape 14"/>
+          <p:cNvPr id="16" name="Shape 13"/>
           <p:cNvSpPr/>
           <p:nvPr/>
         </p:nvSpPr>
@@ -12644,7 +12447,7 @@
       </p:sp>
       <p:sp>
         <p:nvSpPr>
-          <p:cNvPr id="18" name="Text 15"/>
+          <p:cNvPr id="17" name="Text 14"/>
           <p:cNvSpPr txBox="1"/>
           <p:nvPr/>
         </p:nvSpPr>
@@ -12688,7 +12491,7 @@
       </p:sp>
       <p:sp>
         <p:nvSpPr>
-          <p:cNvPr id="19" name="Text 16"/>
+          <p:cNvPr id="18" name="Text 15"/>
           <p:cNvSpPr txBox="1"/>
           <p:nvPr/>
         </p:nvSpPr>
@@ -12732,7 +12535,7 @@
       </p:sp>
       <p:sp>
         <p:nvSpPr>
-          <p:cNvPr id="20" name="Shape 17"/>
+          <p:cNvPr id="19" name="Shape 16"/>
           <p:cNvSpPr/>
           <p:nvPr/>
         </p:nvSpPr>
@@ -12759,7 +12562,7 @@
       </p:sp>
       <p:sp>
         <p:nvSpPr>
-          <p:cNvPr id="21" name="Shape 18"/>
+          <p:cNvPr id="20" name="Shape 17"/>
           <p:cNvSpPr/>
           <p:nvPr/>
         </p:nvSpPr>
@@ -12786,7 +12589,7 @@
       </p:sp>
       <p:sp>
         <p:nvSpPr>
-          <p:cNvPr id="22" name="Text 19"/>
+          <p:cNvPr id="21" name="Text 18"/>
           <p:cNvSpPr txBox="1"/>
           <p:nvPr/>
         </p:nvSpPr>
@@ -12830,7 +12633,7 @@
       </p:sp>
       <p:sp>
         <p:nvSpPr>
-          <p:cNvPr id="23" name="Text 20"/>
+          <p:cNvPr id="22" name="Text 19"/>
           <p:cNvSpPr txBox="1"/>
           <p:nvPr/>
         </p:nvSpPr>
@@ -12874,7 +12677,7 @@
       </p:sp>
       <p:sp>
         <p:nvSpPr>
-          <p:cNvPr id="24" name="Shape 21"/>
+          <p:cNvPr id="23" name="Shape 20"/>
           <p:cNvSpPr/>
           <p:nvPr/>
         </p:nvSpPr>
@@ -12901,7 +12704,7 @@
       </p:sp>
       <p:sp>
         <p:nvSpPr>
-          <p:cNvPr id="25" name="Shape 22"/>
+          <p:cNvPr id="24" name="Shape 21"/>
           <p:cNvSpPr/>
           <p:nvPr/>
         </p:nvSpPr>
@@ -12928,7 +12731,7 @@
       </p:sp>
       <p:sp>
         <p:nvSpPr>
-          <p:cNvPr id="26" name="Text 23"/>
+          <p:cNvPr id="25" name="Text 22"/>
           <p:cNvSpPr txBox="1"/>
           <p:nvPr/>
         </p:nvSpPr>
@@ -12972,7 +12775,7 @@
       </p:sp>
       <p:sp>
         <p:nvSpPr>
-          <p:cNvPr id="27" name="Text 24"/>
+          <p:cNvPr id="26" name="Text 23"/>
           <p:cNvSpPr txBox="1"/>
           <p:nvPr/>
         </p:nvSpPr>
@@ -13016,7 +12819,7 @@
       </p:sp>
       <p:sp>
         <p:nvSpPr>
-          <p:cNvPr id="28" name="Shape 25"/>
+          <p:cNvPr id="27" name="Shape 24"/>
           <p:cNvSpPr/>
           <p:nvPr/>
         </p:nvSpPr>
@@ -13043,7 +12846,7 @@
       </p:sp>
       <p:sp>
         <p:nvSpPr>
-          <p:cNvPr id="29" name="Shape 26"/>
+          <p:cNvPr id="28" name="Shape 25"/>
           <p:cNvSpPr/>
           <p:nvPr/>
         </p:nvSpPr>
@@ -13070,7 +12873,7 @@
       </p:sp>
       <p:sp>
         <p:nvSpPr>
-          <p:cNvPr id="30" name="Text 27"/>
+          <p:cNvPr id="29" name="Text 26"/>
           <p:cNvSpPr txBox="1"/>
           <p:nvPr/>
         </p:nvSpPr>
@@ -13114,7 +12917,7 @@
       </p:sp>
       <p:sp>
         <p:nvSpPr>
-          <p:cNvPr id="31" name="Text 28"/>
+          <p:cNvPr id="30" name="Text 27"/>
           <p:cNvSpPr txBox="1"/>
           <p:nvPr/>
         </p:nvSpPr>
@@ -13158,7 +12961,7 @@
       </p:sp>
       <p:sp>
         <p:nvSpPr>
-          <p:cNvPr id="32" name="Shape 29"/>
+          <p:cNvPr id="31" name="Shape 28"/>
           <p:cNvSpPr/>
           <p:nvPr/>
         </p:nvSpPr>
@@ -13182,7 +12985,7 @@
       </p:sp>
       <p:sp>
         <p:nvSpPr>
-          <p:cNvPr id="33" name="Shape 30"/>
+          <p:cNvPr id="32" name="Shape 29"/>
           <p:cNvSpPr/>
           <p:nvPr/>
         </p:nvSpPr>
@@ -13206,7 +13009,7 @@
       </p:sp>
       <p:sp>
         <p:nvSpPr>
-          <p:cNvPr id="34" name="Shape 31"/>
+          <p:cNvPr id="33" name="Shape 30"/>
           <p:cNvSpPr/>
           <p:nvPr/>
         </p:nvSpPr>
@@ -13570,8 +13373,8 @@
         </p:nvSpPr>
         <p:spPr>
           <a:xfrm>
-            <a:off x="731520" y="1207008"/>
-            <a:ext cx="1325880" cy="54864"/>
+            <a:off x="822960" y="1938528"/>
+            <a:ext cx="73152" cy="2514600"/>
           </a:xfrm>
           <a:prstGeom prst="rect">
             <a:avLst/>
@@ -13589,237 +13392,22 @@
           </a:ln>
         </p:spPr>
       </p:sp>
-      <p:pic>
-        <p:nvPicPr>
-          <p:cNvPr id="13" name="Image 0" descr="preencoded.png">    </p:cNvPr>
-          <p:cNvPicPr>
-            <a:picLocks noChangeAspect="1"/>
-          </p:cNvPicPr>
-          <p:nvPr/>
-        </p:nvPicPr>
-        <p:blipFill>
-          <a:blip r:embed="rId1">
-            <a:extLst>
-              <a:ext uri="{96DAC541-7B7A-43D3-8B79-37D633B846F1}">
-                <asvg:svgBlip xmlns:asvg="http://schemas.microsoft.com/office/drawing/2016/SVG/main" r:embed="rId2"/>
-              </a:ext>
-            </a:extLst>
-          </a:blip>
-          <a:stretch>
-            <a:fillRect/>
-          </a:stretch>
-        </p:blipFill>
-        <p:spPr>
-          <a:xfrm>
-            <a:off x="914400" y="1865376"/>
-            <a:ext cx="10241280" cy="1024128"/>
-          </a:xfrm>
-          <a:prstGeom prst="rect">
-            <a:avLst/>
-          </a:prstGeom>
-        </p:spPr>
-      </p:pic>
-      <p:sp>
-        <p:nvSpPr>
-          <p:cNvPr id="14" name="Shape 11"/>
-          <p:cNvSpPr/>
-          <p:nvPr/>
-        </p:nvSpPr>
-        <p:spPr>
-          <a:xfrm>
-            <a:off x="914400" y="1865376"/>
-            <a:ext cx="10241280" cy="1024128"/>
-          </a:xfrm>
-          <a:prstGeom prst="rect">
-            <a:avLst/>
-          </a:prstGeom>
-          <a:solidFill>
-            <a:srgbClr val="17213A">
-              <a:alpha val="0"/>
-            </a:srgbClr>
-          </a:solidFill>
-          <a:ln w="12700">
-            <a:solidFill>
-              <a:srgbClr val="C4B5FD">
-                <a:alpha val="0"/>
-              </a:srgbClr>
-            </a:solidFill>
-            <a:prstDash val="solid"/>
-          </a:ln>
-          <a:effectLst>
-            <a:outerShdw sx="100000" sy="100000" kx="0" ky="0" algn="bl" rotWithShape="0" blurRad="30480" dist="50800" dir="2700000">
-              <a:srgbClr val="CBD5E1">
-                <a:alpha val="20000"/>
-              </a:srgbClr>
-            </a:outerShdw>
-            <a:glow rad="63500">
-              <a:srgbClr val="8A4FFF">
-                <a:alpha val="23000"/>
-              </a:srgbClr>
-            </a:glow>
-          </a:effectLst>
-        </p:spPr>
-      </p:sp>
-      <p:pic>
-        <p:nvPicPr>
-          <p:cNvPr id="15" name="Image 1" descr="preencoded.png">    </p:cNvPr>
-          <p:cNvPicPr>
-            <a:picLocks noChangeAspect="1"/>
-          </p:cNvPicPr>
-          <p:nvPr/>
-        </p:nvPicPr>
-        <p:blipFill>
-          <a:blip r:embed="rId3">
-            <a:extLst>
-              <a:ext uri="{96DAC541-7B7A-43D3-8B79-37D633B846F1}">
-                <asvg:svgBlip xmlns:asvg="http://schemas.microsoft.com/office/drawing/2016/SVG/main" r:embed="rId4"/>
-              </a:ext>
-            </a:extLst>
-          </a:blip>
-          <a:stretch>
-            <a:fillRect/>
-          </a:stretch>
-        </p:blipFill>
-        <p:spPr>
-          <a:xfrm>
-            <a:off x="914400" y="3191256"/>
-            <a:ext cx="10241280" cy="1024128"/>
-          </a:xfrm>
-          <a:prstGeom prst="rect">
-            <a:avLst/>
-          </a:prstGeom>
-        </p:spPr>
-      </p:pic>
-      <p:sp>
-        <p:nvSpPr>
-          <p:cNvPr id="16" name="Shape 12"/>
-          <p:cNvSpPr/>
-          <p:nvPr/>
-        </p:nvSpPr>
-        <p:spPr>
-          <a:xfrm>
-            <a:off x="914400" y="3191256"/>
-            <a:ext cx="10241280" cy="1024128"/>
-          </a:xfrm>
-          <a:prstGeom prst="rect">
-            <a:avLst/>
-          </a:prstGeom>
-          <a:solidFill>
-            <a:srgbClr val="17213A">
-              <a:alpha val="0"/>
-            </a:srgbClr>
-          </a:solidFill>
-          <a:ln w="12700">
-            <a:solidFill>
-              <a:srgbClr val="C4B5FD">
-                <a:alpha val="0"/>
-              </a:srgbClr>
-            </a:solidFill>
-            <a:prstDash val="solid"/>
-          </a:ln>
-          <a:effectLst>
-            <a:outerShdw sx="100000" sy="100000" kx="0" ky="0" algn="bl" rotWithShape="0" blurRad="30480" dist="50800" dir="2700000">
-              <a:srgbClr val="CBD5E1">
-                <a:alpha val="20000"/>
-              </a:srgbClr>
-            </a:outerShdw>
-            <a:glow rad="63500">
-              <a:srgbClr val="8A4FFF">
-                <a:alpha val="23000"/>
-              </a:srgbClr>
-            </a:glow>
-          </a:effectLst>
-        </p:spPr>
-      </p:sp>
-      <p:pic>
-        <p:nvPicPr>
-          <p:cNvPr id="17" name="Image 2" descr="preencoded.png">    </p:cNvPr>
-          <p:cNvPicPr>
-            <a:picLocks noChangeAspect="1"/>
-          </p:cNvPicPr>
-          <p:nvPr/>
-        </p:nvPicPr>
-        <p:blipFill>
-          <a:blip r:embed="rId5">
-            <a:extLst>
-              <a:ext uri="{96DAC541-7B7A-43D3-8B79-37D633B846F1}">
-                <asvg:svgBlip xmlns:asvg="http://schemas.microsoft.com/office/drawing/2016/SVG/main" r:embed="rId6"/>
-              </a:ext>
-            </a:extLst>
-          </a:blip>
-          <a:stretch>
-            <a:fillRect/>
-          </a:stretch>
-        </p:blipFill>
-        <p:spPr>
-          <a:xfrm>
-            <a:off x="914400" y="4507992"/>
-            <a:ext cx="10241280" cy="1024128"/>
-          </a:xfrm>
-          <a:prstGeom prst="rect">
-            <a:avLst/>
-          </a:prstGeom>
-        </p:spPr>
-      </p:pic>
-      <p:sp>
-        <p:nvSpPr>
-          <p:cNvPr id="18" name="Shape 13"/>
-          <p:cNvSpPr/>
-          <p:nvPr/>
-        </p:nvSpPr>
-        <p:spPr>
-          <a:xfrm>
-            <a:off x="914400" y="4507992"/>
-            <a:ext cx="10241280" cy="1024128"/>
-          </a:xfrm>
-          <a:prstGeom prst="rect">
-            <a:avLst/>
-          </a:prstGeom>
-          <a:solidFill>
-            <a:srgbClr val="17213A">
-              <a:alpha val="0"/>
-            </a:srgbClr>
-          </a:solidFill>
-          <a:ln w="12700">
-            <a:solidFill>
-              <a:srgbClr val="C4B5FD">
-                <a:alpha val="0"/>
-              </a:srgbClr>
-            </a:solidFill>
-            <a:prstDash val="solid"/>
-          </a:ln>
-          <a:effectLst>
-            <a:outerShdw sx="100000" sy="100000" kx="0" ky="0" algn="bl" rotWithShape="0" blurRad="30480" dist="50800" dir="2700000">
-              <a:srgbClr val="CBD5E1">
-                <a:alpha val="20000"/>
-              </a:srgbClr>
-            </a:outerShdw>
-            <a:glow rad="63500">
-              <a:srgbClr val="8A4FFF">
-                <a:alpha val="23000"/>
-              </a:srgbClr>
-            </a:glow>
-          </a:effectLst>
-        </p:spPr>
-      </p:sp>
-      <p:sp>
-        <p:nvSpPr>
-          <p:cNvPr id="19" name="Shape 14"/>
-          <p:cNvSpPr/>
-          <p:nvPr/>
-        </p:nvSpPr>
-        <p:spPr>
-          <a:xfrm>
-            <a:off x="786384" y="1956816"/>
-            <a:ext cx="32004" cy="3483864"/>
-          </a:xfrm>
-          <a:prstGeom prst="rect">
-            <a:avLst/>
-          </a:prstGeom>
-          <a:solidFill>
-            <a:srgbClr val="22D3EE">
-              <a:alpha val="80000"/>
-            </a:srgbClr>
+      <p:sp>
+        <p:nvSpPr>
+          <p:cNvPr id="13" name="Shape 11"/>
+          <p:cNvSpPr/>
+          <p:nvPr/>
+        </p:nvSpPr>
+        <p:spPr>
+          <a:xfrm>
+            <a:off x="4343400" y="1938528"/>
+            <a:ext cx="73152" cy="2514600"/>
+          </a:xfrm>
+          <a:prstGeom prst="rect">
+            <a:avLst/>
+          </a:prstGeom>
+          <a:solidFill>
+            <a:srgbClr val="22D3EE"/>
           </a:solidFill>
           <a:ln w="12700">
             <a:solidFill>
@@ -13833,14 +13421,14 @@
       </p:sp>
       <p:sp>
         <p:nvSpPr>
-          <p:cNvPr id="20" name="Shape 15"/>
-          <p:cNvSpPr/>
-          <p:nvPr/>
-        </p:nvSpPr>
-        <p:spPr>
-          <a:xfrm>
-            <a:off x="914400" y="1865376"/>
-            <a:ext cx="73152" cy="1024128"/>
+          <p:cNvPr id="14" name="Shape 12"/>
+          <p:cNvSpPr/>
+          <p:nvPr/>
+        </p:nvSpPr>
+        <p:spPr>
+          <a:xfrm>
+            <a:off x="7863840" y="1938528"/>
+            <a:ext cx="73152" cy="2514600"/>
           </a:xfrm>
           <a:prstGeom prst="rect">
             <a:avLst/>
@@ -13860,61 +13448,7 @@
       </p:sp>
       <p:sp>
         <p:nvSpPr>
-          <p:cNvPr id="21" name="Shape 16"/>
-          <p:cNvSpPr/>
-          <p:nvPr/>
-        </p:nvSpPr>
-        <p:spPr>
-          <a:xfrm>
-            <a:off x="914400" y="3191256"/>
-            <a:ext cx="73152" cy="1024128"/>
-          </a:xfrm>
-          <a:prstGeom prst="rect">
-            <a:avLst/>
-          </a:prstGeom>
-          <a:solidFill>
-            <a:srgbClr val="22D3EE"/>
-          </a:solidFill>
-          <a:ln w="12700">
-            <a:solidFill>
-              <a:srgbClr val="22D3EE">
-                <a:alpha val="0"/>
-              </a:srgbClr>
-            </a:solidFill>
-            <a:prstDash val="solid"/>
-          </a:ln>
-        </p:spPr>
-      </p:sp>
-      <p:sp>
-        <p:nvSpPr>
-          <p:cNvPr id="22" name="Shape 17"/>
-          <p:cNvSpPr/>
-          <p:nvPr/>
-        </p:nvSpPr>
-        <p:spPr>
-          <a:xfrm>
-            <a:off x="914400" y="4507992"/>
-            <a:ext cx="73152" cy="1024128"/>
-          </a:xfrm>
-          <a:prstGeom prst="rect">
-            <a:avLst/>
-          </a:prstGeom>
-          <a:solidFill>
-            <a:srgbClr val="8A4FFF"/>
-          </a:solidFill>
-          <a:ln w="12700">
-            <a:solidFill>
-              <a:srgbClr val="8A4FFF">
-                <a:alpha val="0"/>
-              </a:srgbClr>
-            </a:solidFill>
-            <a:prstDash val="solid"/>
-          </a:ln>
-        </p:spPr>
-      </p:sp>
-      <p:sp>
-        <p:nvSpPr>
-          <p:cNvPr id="23" name="mdpr:1-2-ea42c8:title:__title:1-2-ea42c8"/>
+          <p:cNvPr id="15" name="mdpr:1-2-ea42c8:title:__title:1-2-ea42c8"/>
           <p:cNvSpPr txBox="1"/>
           <p:nvPr/>
         </p:nvSpPr>
@@ -13956,14 +13490,14 @@
       </p:sp>
       <p:sp>
         <p:nvSpPr>
-          <p:cNvPr id="24" name="mdpr:1-2-ea42c8:item-1:block-27-chunk-1"/>
+          <p:cNvPr id="16" name="mdpr:1-2-ea42c8:item-1:block-27-chunk-1"/>
           <p:cNvSpPr txBox="1"/>
           <p:nvPr/>
         </p:nvSpPr>
         <p:spPr>
           <a:xfrm>
-            <a:off x="1133856" y="1957548"/>
-            <a:ext cx="9820656" cy="839785"/>
+            <a:off x="1042416" y="2103120"/>
+            <a:ext cx="2825496" cy="2185416"/>
           </a:xfrm>
           <a:prstGeom prst="rect">
             <a:avLst/>
@@ -14015,14 +13549,14 @@
       </p:sp>
       <p:sp>
         <p:nvSpPr>
-          <p:cNvPr id="25" name="mdpr:1-2-ea42c8:item-2:block-27-chunk-1"/>
+          <p:cNvPr id="17" name="mdpr:1-2-ea42c8:item-2:block-27-chunk-1"/>
           <p:cNvSpPr txBox="1"/>
           <p:nvPr/>
         </p:nvSpPr>
         <p:spPr>
           <a:xfrm>
-            <a:off x="1133856" y="3283428"/>
-            <a:ext cx="9820656" cy="839785"/>
+            <a:off x="4562856" y="2103120"/>
+            <a:ext cx="2825496" cy="2185416"/>
           </a:xfrm>
           <a:prstGeom prst="rect">
             <a:avLst/>
@@ -14074,14 +13608,14 @@
       </p:sp>
       <p:sp>
         <p:nvSpPr>
-          <p:cNvPr id="26" name="mdpr:1-2-ea42c8:item-3:block-27-chunk-1"/>
+          <p:cNvPr id="18" name="mdpr:1-2-ea42c8:item-3:block-27-chunk-1"/>
           <p:cNvSpPr txBox="1"/>
           <p:nvPr/>
         </p:nvSpPr>
         <p:spPr>
           <a:xfrm>
-            <a:off x="1133856" y="4600164"/>
-            <a:ext cx="9820656" cy="839785"/>
+            <a:off x="8083296" y="2103120"/>
+            <a:ext cx="2825496" cy="2185416"/>
           </a:xfrm>
           <a:prstGeom prst="rect">
             <a:avLst/>
@@ -14473,8 +14007,8 @@
         </p:nvSpPr>
         <p:spPr>
           <a:xfrm>
-            <a:off x="731520" y="1207008"/>
-            <a:ext cx="1325880" cy="54864"/>
+            <a:off x="822960" y="1737360"/>
+            <a:ext cx="73152" cy="841248"/>
           </a:xfrm>
           <a:prstGeom prst="rect">
             <a:avLst/>
@@ -14500,35 +14034,8 @@
         </p:nvSpPr>
         <p:spPr>
           <a:xfrm>
-            <a:off x="822960" y="1188720"/>
-            <a:ext cx="10515600" cy="45720"/>
-          </a:xfrm>
-          <a:prstGeom prst="rect">
-            <a:avLst/>
-          </a:prstGeom>
-          <a:solidFill>
-            <a:srgbClr val="8A4FFF"/>
-          </a:solidFill>
-          <a:ln w="12700">
-            <a:solidFill>
-              <a:srgbClr val="8A4FFF">
-                <a:alpha val="0"/>
-              </a:srgbClr>
-            </a:solidFill>
-            <a:prstDash val="solid"/>
-          </a:ln>
-        </p:spPr>
-      </p:sp>
-      <p:sp>
-        <p:nvSpPr>
-          <p:cNvPr id="14" name="Shape 12"/>
-          <p:cNvSpPr/>
-          <p:nvPr/>
-        </p:nvSpPr>
-        <p:spPr>
-          <a:xfrm>
-            <a:off x="822960" y="6382512"/>
-            <a:ext cx="2011680" cy="45720"/>
+            <a:off x="822960" y="2779776"/>
+            <a:ext cx="73152" cy="841248"/>
           </a:xfrm>
           <a:prstGeom prst="rect">
             <a:avLst/>
@@ -14548,70 +14055,41 @@
       </p:sp>
       <p:sp>
         <p:nvSpPr>
+          <p:cNvPr id="14" name="Shape 12"/>
+          <p:cNvSpPr/>
+          <p:nvPr/>
+        </p:nvSpPr>
+        <p:spPr>
+          <a:xfrm>
+            <a:off x="822960" y="3822192"/>
+            <a:ext cx="73152" cy="841248"/>
+          </a:xfrm>
+          <a:prstGeom prst="rect">
+            <a:avLst/>
+          </a:prstGeom>
+          <a:solidFill>
+            <a:srgbClr val="8A4FFF"/>
+          </a:solidFill>
+          <a:ln w="12700">
+            <a:solidFill>
+              <a:srgbClr val="8A4FFF">
+                <a:alpha val="0"/>
+              </a:srgbClr>
+            </a:solidFill>
+            <a:prstDash val="solid"/>
+          </a:ln>
+        </p:spPr>
+      </p:sp>
+      <p:sp>
+        <p:nvSpPr>
           <p:cNvPr id="15" name="Shape 13"/>
           <p:cNvSpPr/>
           <p:nvPr/>
         </p:nvSpPr>
         <p:spPr>
           <a:xfrm>
-            <a:off x="6080760" y="1389888"/>
-            <a:ext cx="22860" cy="4846320"/>
-          </a:xfrm>
-          <a:prstGeom prst="rect">
-            <a:avLst/>
-          </a:prstGeom>
-          <a:solidFill>
-            <a:srgbClr val="C4B5FD">
-              <a:alpha val="90000"/>
-            </a:srgbClr>
-          </a:solidFill>
-          <a:ln w="12700">
-            <a:solidFill>
-              <a:srgbClr val="C4B5FD">
-                <a:alpha val="0"/>
-              </a:srgbClr>
-            </a:solidFill>
-            <a:prstDash val="solid"/>
-          </a:ln>
-        </p:spPr>
-      </p:sp>
-      <p:sp>
-        <p:nvSpPr>
-          <p:cNvPr id="16" name="Shape 14"/>
-          <p:cNvSpPr/>
-          <p:nvPr/>
-        </p:nvSpPr>
-        <p:spPr>
-          <a:xfrm>
-            <a:off x="822960" y="1389888"/>
-            <a:ext cx="73152" cy="566928"/>
-          </a:xfrm>
-          <a:prstGeom prst="rect">
-            <a:avLst/>
-          </a:prstGeom>
-          <a:solidFill>
-            <a:srgbClr val="8A4FFF"/>
-          </a:solidFill>
-          <a:ln w="12700">
-            <a:solidFill>
-              <a:srgbClr val="8A4FFF">
-                <a:alpha val="0"/>
-              </a:srgbClr>
-            </a:solidFill>
-            <a:prstDash val="solid"/>
-          </a:ln>
-        </p:spPr>
-      </p:sp>
-      <p:sp>
-        <p:nvSpPr>
-          <p:cNvPr id="17" name="Shape 15"/>
-          <p:cNvSpPr/>
-          <p:nvPr/>
-        </p:nvSpPr>
-        <p:spPr>
-          <a:xfrm>
-            <a:off x="822960" y="2103120"/>
-            <a:ext cx="73152" cy="566928"/>
+            <a:off x="822960" y="4864608"/>
+            <a:ext cx="73152" cy="841248"/>
           </a:xfrm>
           <a:prstGeom prst="rect">
             <a:avLst/>
@@ -14631,14 +14109,14 @@
       </p:sp>
       <p:sp>
         <p:nvSpPr>
-          <p:cNvPr id="18" name="Shape 16"/>
-          <p:cNvSpPr/>
-          <p:nvPr/>
-        </p:nvSpPr>
-        <p:spPr>
-          <a:xfrm>
-            <a:off x="822960" y="2816352"/>
-            <a:ext cx="73152" cy="566928"/>
+          <p:cNvPr id="16" name="Shape 14"/>
+          <p:cNvSpPr/>
+          <p:nvPr/>
+        </p:nvSpPr>
+        <p:spPr>
+          <a:xfrm>
+            <a:off x="6272784" y="1737360"/>
+            <a:ext cx="73152" cy="841248"/>
           </a:xfrm>
           <a:prstGeom prst="rect">
             <a:avLst/>
@@ -14658,14 +14136,14 @@
       </p:sp>
       <p:sp>
         <p:nvSpPr>
-          <p:cNvPr id="19" name="Shape 17"/>
-          <p:cNvSpPr/>
-          <p:nvPr/>
-        </p:nvSpPr>
-        <p:spPr>
-          <a:xfrm>
-            <a:off x="822960" y="3529584"/>
-            <a:ext cx="73152" cy="566928"/>
+          <p:cNvPr id="17" name="Shape 15"/>
+          <p:cNvSpPr/>
+          <p:nvPr/>
+        </p:nvSpPr>
+        <p:spPr>
+          <a:xfrm>
+            <a:off x="6272784" y="2779776"/>
+            <a:ext cx="73152" cy="841248"/>
           </a:xfrm>
           <a:prstGeom prst="rect">
             <a:avLst/>
@@ -14685,14 +14163,14 @@
       </p:sp>
       <p:sp>
         <p:nvSpPr>
-          <p:cNvPr id="20" name="Shape 18"/>
-          <p:cNvSpPr/>
-          <p:nvPr/>
-        </p:nvSpPr>
-        <p:spPr>
-          <a:xfrm>
-            <a:off x="822960" y="4242816"/>
-            <a:ext cx="73152" cy="566928"/>
+          <p:cNvPr id="18" name="Shape 16"/>
+          <p:cNvSpPr/>
+          <p:nvPr/>
+        </p:nvSpPr>
+        <p:spPr>
+          <a:xfrm>
+            <a:off x="6272784" y="3822192"/>
+            <a:ext cx="73152" cy="841248"/>
           </a:xfrm>
           <a:prstGeom prst="rect">
             <a:avLst/>
@@ -14712,14 +14190,14 @@
       </p:sp>
       <p:sp>
         <p:nvSpPr>
-          <p:cNvPr id="21" name="Shape 19"/>
-          <p:cNvSpPr/>
-          <p:nvPr/>
-        </p:nvSpPr>
-        <p:spPr>
-          <a:xfrm>
-            <a:off x="822960" y="4956048"/>
-            <a:ext cx="73152" cy="566928"/>
+          <p:cNvPr id="19" name="Shape 17"/>
+          <p:cNvSpPr/>
+          <p:nvPr/>
+        </p:nvSpPr>
+        <p:spPr>
+          <a:xfrm>
+            <a:off x="6272784" y="4864608"/>
+            <a:ext cx="73152" cy="841248"/>
           </a:xfrm>
           <a:prstGeom prst="rect">
             <a:avLst/>
@@ -14739,223 +14217,7 @@
       </p:sp>
       <p:sp>
         <p:nvSpPr>
-          <p:cNvPr id="22" name="Shape 20"/>
-          <p:cNvSpPr/>
-          <p:nvPr/>
-        </p:nvSpPr>
-        <p:spPr>
-          <a:xfrm>
-            <a:off x="822960" y="5669280"/>
-            <a:ext cx="73152" cy="566928"/>
-          </a:xfrm>
-          <a:prstGeom prst="rect">
-            <a:avLst/>
-          </a:prstGeom>
-          <a:solidFill>
-            <a:srgbClr val="8A4FFF"/>
-          </a:solidFill>
-          <a:ln w="12700">
-            <a:solidFill>
-              <a:srgbClr val="8A4FFF">
-                <a:alpha val="0"/>
-              </a:srgbClr>
-            </a:solidFill>
-            <a:prstDash val="solid"/>
-          </a:ln>
-        </p:spPr>
-      </p:sp>
-      <p:sp>
-        <p:nvSpPr>
-          <p:cNvPr id="23" name="Shape 21"/>
-          <p:cNvSpPr/>
-          <p:nvPr/>
-        </p:nvSpPr>
-        <p:spPr>
-          <a:xfrm>
-            <a:off x="6272784" y="1389888"/>
-            <a:ext cx="73152" cy="566928"/>
-          </a:xfrm>
-          <a:prstGeom prst="rect">
-            <a:avLst/>
-          </a:prstGeom>
-          <a:solidFill>
-            <a:srgbClr val="22D3EE"/>
-          </a:solidFill>
-          <a:ln w="12700">
-            <a:solidFill>
-              <a:srgbClr val="22D3EE">
-                <a:alpha val="0"/>
-              </a:srgbClr>
-            </a:solidFill>
-            <a:prstDash val="solid"/>
-          </a:ln>
-        </p:spPr>
-      </p:sp>
-      <p:sp>
-        <p:nvSpPr>
-          <p:cNvPr id="24" name="Shape 22"/>
-          <p:cNvSpPr/>
-          <p:nvPr/>
-        </p:nvSpPr>
-        <p:spPr>
-          <a:xfrm>
-            <a:off x="6272784" y="2103120"/>
-            <a:ext cx="73152" cy="566928"/>
-          </a:xfrm>
-          <a:prstGeom prst="rect">
-            <a:avLst/>
-          </a:prstGeom>
-          <a:solidFill>
-            <a:srgbClr val="8A4FFF"/>
-          </a:solidFill>
-          <a:ln w="12700">
-            <a:solidFill>
-              <a:srgbClr val="8A4FFF">
-                <a:alpha val="0"/>
-              </a:srgbClr>
-            </a:solidFill>
-            <a:prstDash val="solid"/>
-          </a:ln>
-        </p:spPr>
-      </p:sp>
-      <p:sp>
-        <p:nvSpPr>
-          <p:cNvPr id="25" name="Shape 23"/>
-          <p:cNvSpPr/>
-          <p:nvPr/>
-        </p:nvSpPr>
-        <p:spPr>
-          <a:xfrm>
-            <a:off x="6272784" y="2816352"/>
-            <a:ext cx="73152" cy="566928"/>
-          </a:xfrm>
-          <a:prstGeom prst="rect">
-            <a:avLst/>
-          </a:prstGeom>
-          <a:solidFill>
-            <a:srgbClr val="22D3EE"/>
-          </a:solidFill>
-          <a:ln w="12700">
-            <a:solidFill>
-              <a:srgbClr val="22D3EE">
-                <a:alpha val="0"/>
-              </a:srgbClr>
-            </a:solidFill>
-            <a:prstDash val="solid"/>
-          </a:ln>
-        </p:spPr>
-      </p:sp>
-      <p:sp>
-        <p:nvSpPr>
-          <p:cNvPr id="26" name="Shape 24"/>
-          <p:cNvSpPr/>
-          <p:nvPr/>
-        </p:nvSpPr>
-        <p:spPr>
-          <a:xfrm>
-            <a:off x="6272784" y="3529584"/>
-            <a:ext cx="73152" cy="566928"/>
-          </a:xfrm>
-          <a:prstGeom prst="rect">
-            <a:avLst/>
-          </a:prstGeom>
-          <a:solidFill>
-            <a:srgbClr val="8A4FFF"/>
-          </a:solidFill>
-          <a:ln w="12700">
-            <a:solidFill>
-              <a:srgbClr val="8A4FFF">
-                <a:alpha val="0"/>
-              </a:srgbClr>
-            </a:solidFill>
-            <a:prstDash val="solid"/>
-          </a:ln>
-        </p:spPr>
-      </p:sp>
-      <p:sp>
-        <p:nvSpPr>
-          <p:cNvPr id="27" name="Shape 25"/>
-          <p:cNvSpPr/>
-          <p:nvPr/>
-        </p:nvSpPr>
-        <p:spPr>
-          <a:xfrm>
-            <a:off x="6272784" y="4242816"/>
-            <a:ext cx="73152" cy="566928"/>
-          </a:xfrm>
-          <a:prstGeom prst="rect">
-            <a:avLst/>
-          </a:prstGeom>
-          <a:solidFill>
-            <a:srgbClr val="22D3EE"/>
-          </a:solidFill>
-          <a:ln w="12700">
-            <a:solidFill>
-              <a:srgbClr val="22D3EE">
-                <a:alpha val="0"/>
-              </a:srgbClr>
-            </a:solidFill>
-            <a:prstDash val="solid"/>
-          </a:ln>
-        </p:spPr>
-      </p:sp>
-      <p:sp>
-        <p:nvSpPr>
-          <p:cNvPr id="28" name="Shape 26"/>
-          <p:cNvSpPr/>
-          <p:nvPr/>
-        </p:nvSpPr>
-        <p:spPr>
-          <a:xfrm>
-            <a:off x="6272784" y="4956048"/>
-            <a:ext cx="73152" cy="566928"/>
-          </a:xfrm>
-          <a:prstGeom prst="rect">
-            <a:avLst/>
-          </a:prstGeom>
-          <a:solidFill>
-            <a:srgbClr val="8A4FFF"/>
-          </a:solidFill>
-          <a:ln w="12700">
-            <a:solidFill>
-              <a:srgbClr val="8A4FFF">
-                <a:alpha val="0"/>
-              </a:srgbClr>
-            </a:solidFill>
-            <a:prstDash val="solid"/>
-          </a:ln>
-        </p:spPr>
-      </p:sp>
-      <p:sp>
-        <p:nvSpPr>
-          <p:cNvPr id="29" name="Shape 27"/>
-          <p:cNvSpPr/>
-          <p:nvPr/>
-        </p:nvSpPr>
-        <p:spPr>
-          <a:xfrm>
-            <a:off x="6272784" y="5669280"/>
-            <a:ext cx="73152" cy="566928"/>
-          </a:xfrm>
-          <a:prstGeom prst="rect">
-            <a:avLst/>
-          </a:prstGeom>
-          <a:solidFill>
-            <a:srgbClr val="22D3EE"/>
-          </a:solidFill>
-          <a:ln w="12700">
-            <a:solidFill>
-              <a:srgbClr val="22D3EE">
-                <a:alpha val="0"/>
-              </a:srgbClr>
-            </a:solidFill>
-            <a:prstDash val="solid"/>
-          </a:ln>
-        </p:spPr>
-      </p:sp>
-      <p:sp>
-        <p:nvSpPr>
-          <p:cNvPr id="30" name="mdpr:1-2-0772f8:title:__title:1-2-0772f8"/>
+          <p:cNvPr id="20" name="mdpr:1-2-0772f8:title:__title:1-2-0772f8"/>
           <p:cNvSpPr txBox="1"/>
           <p:nvPr/>
         </p:nvSpPr>
@@ -14997,14 +14259,14 @@
       </p:sp>
       <p:sp>
         <p:nvSpPr>
-          <p:cNvPr id="31" name="mdpr:1-2-0772f8:toc-item-1:toc-item-1"/>
+          <p:cNvPr id="21" name="mdpr:1-2-0772f8:toc-item-1:toc-item-1"/>
           <p:cNvSpPr txBox="1"/>
           <p:nvPr/>
         </p:nvSpPr>
         <p:spPr>
           <a:xfrm>
-            <a:off x="1042416" y="1481328"/>
-            <a:ext cx="4645152" cy="384048"/>
+            <a:off x="1042416" y="1828800"/>
+            <a:ext cx="4645152" cy="658368"/>
           </a:xfrm>
           <a:prstGeom prst="rect">
             <a:avLst/>
@@ -15039,14 +14301,14 @@
       </p:sp>
       <p:sp>
         <p:nvSpPr>
-          <p:cNvPr id="32" name="mdpr:1-2-0772f8:toc-item-2:toc-item-2"/>
+          <p:cNvPr id="22" name="mdpr:1-2-0772f8:toc-item-2:toc-item-2"/>
           <p:cNvSpPr txBox="1"/>
           <p:nvPr/>
         </p:nvSpPr>
         <p:spPr>
           <a:xfrm>
-            <a:off x="1042416" y="2194560"/>
-            <a:ext cx="4645152" cy="384048"/>
+            <a:off x="1042416" y="2871216"/>
+            <a:ext cx="4645152" cy="658368"/>
           </a:xfrm>
           <a:prstGeom prst="rect">
             <a:avLst/>
@@ -15081,14 +14343,14 @@
       </p:sp>
       <p:sp>
         <p:nvSpPr>
-          <p:cNvPr id="33" name="mdpr:1-2-0772f8:toc-item-3:toc-item-3"/>
+          <p:cNvPr id="23" name="mdpr:1-2-0772f8:toc-item-3:toc-item-3"/>
           <p:cNvSpPr txBox="1"/>
           <p:nvPr/>
         </p:nvSpPr>
         <p:spPr>
           <a:xfrm>
-            <a:off x="1042416" y="2907792"/>
-            <a:ext cx="4645152" cy="384048"/>
+            <a:off x="1042416" y="3913632"/>
+            <a:ext cx="4645152" cy="658368"/>
           </a:xfrm>
           <a:prstGeom prst="rect">
             <a:avLst/>
@@ -15123,14 +14385,14 @@
       </p:sp>
       <p:sp>
         <p:nvSpPr>
-          <p:cNvPr id="34" name="mdpr:1-2-0772f8:toc-item-4:toc-item-4"/>
+          <p:cNvPr id="24" name="mdpr:1-2-0772f8:toc-item-4:toc-item-4"/>
           <p:cNvSpPr txBox="1"/>
           <p:nvPr/>
         </p:nvSpPr>
         <p:spPr>
           <a:xfrm>
-            <a:off x="1042416" y="3621024"/>
-            <a:ext cx="4645152" cy="384048"/>
+            <a:off x="1042416" y="4956048"/>
+            <a:ext cx="4645152" cy="658368"/>
           </a:xfrm>
           <a:prstGeom prst="rect">
             <a:avLst/>
@@ -15165,14 +14427,14 @@
       </p:sp>
       <p:sp>
         <p:nvSpPr>
-          <p:cNvPr id="35" name="mdpr:1-2-0772f8:toc-item-5:toc-item-5"/>
+          <p:cNvPr id="25" name="mdpr:1-2-0772f8:toc-item-5:toc-item-5"/>
           <p:cNvSpPr txBox="1"/>
           <p:nvPr/>
         </p:nvSpPr>
         <p:spPr>
           <a:xfrm>
-            <a:off x="1042416" y="4334256"/>
-            <a:ext cx="4645152" cy="384048"/>
+            <a:off x="6492240" y="1828800"/>
+            <a:ext cx="4645152" cy="658368"/>
           </a:xfrm>
           <a:prstGeom prst="rect">
             <a:avLst/>
@@ -15207,14 +14469,14 @@
       </p:sp>
       <p:sp>
         <p:nvSpPr>
-          <p:cNvPr id="36" name="mdpr:1-2-0772f8:toc-item-6:toc-item-6"/>
+          <p:cNvPr id="26" name="mdpr:1-2-0772f8:toc-item-6:toc-item-6"/>
           <p:cNvSpPr txBox="1"/>
           <p:nvPr/>
         </p:nvSpPr>
         <p:spPr>
           <a:xfrm>
-            <a:off x="1042416" y="5047488"/>
-            <a:ext cx="4645152" cy="384048"/>
+            <a:off x="6492240" y="2871216"/>
+            <a:ext cx="4645152" cy="658368"/>
           </a:xfrm>
           <a:prstGeom prst="rect">
             <a:avLst/>
@@ -15249,14 +14511,14 @@
       </p:sp>
       <p:sp>
         <p:nvSpPr>
-          <p:cNvPr id="37" name="mdpr:1-2-0772f8:toc-item-7:toc-item-7"/>
+          <p:cNvPr id="27" name="mdpr:1-2-0772f8:toc-item-7:toc-item-7"/>
           <p:cNvSpPr txBox="1"/>
           <p:nvPr/>
         </p:nvSpPr>
         <p:spPr>
           <a:xfrm>
-            <a:off x="1042416" y="5760720"/>
-            <a:ext cx="4645152" cy="384048"/>
+            <a:off x="6492240" y="3913632"/>
+            <a:ext cx="4645152" cy="658368"/>
           </a:xfrm>
           <a:prstGeom prst="rect">
             <a:avLst/>
@@ -15291,14 +14553,14 @@
       </p:sp>
       <p:sp>
         <p:nvSpPr>
-          <p:cNvPr id="38" name="mdpr:1-2-0772f8:toc-item-8:toc-item-8"/>
+          <p:cNvPr id="28" name="mdpr:1-2-0772f8:toc-item-8:toc-item-8"/>
           <p:cNvSpPr txBox="1"/>
           <p:nvPr/>
         </p:nvSpPr>
         <p:spPr>
           <a:xfrm>
-            <a:off x="6492240" y="1481328"/>
-            <a:ext cx="4645152" cy="384048"/>
+            <a:off x="6492240" y="4956048"/>
+            <a:ext cx="4645152" cy="658368"/>
           </a:xfrm>
           <a:prstGeom prst="rect">
             <a:avLst/>
@@ -15326,258 +14588,6 @@
                 <a:cs typeface="Pretendard" pitchFamily="34" charset="-120"/>
               </a:rPr>
               <a:t>08  Chart and Table Pair</a:t>
-            </a:r>
-            <a:endParaRPr lang="en-US" sz="1800" dirty="0"/>
-          </a:p>
-        </p:txBody>
-      </p:sp>
-      <p:sp>
-        <p:nvSpPr>
-          <p:cNvPr id="39" name="mdpr:1-2-0772f8:toc-item-9:toc-item-9"/>
-          <p:cNvSpPr txBox="1"/>
-          <p:nvPr/>
-        </p:nvSpPr>
-        <p:spPr>
-          <a:xfrm>
-            <a:off x="6492240" y="2194560"/>
-            <a:ext cx="4645152" cy="384048"/>
-          </a:xfrm>
-          <a:prstGeom prst="rect">
-            <a:avLst/>
-          </a:prstGeom>
-          <a:noFill/>
-          <a:ln/>
-        </p:spPr>
-        <p:txBody>
-          <a:bodyPr wrap="square" lIns="0" tIns="25400" rIns="25400" bIns="0" rtlCol="0" anchor="ctr"/>
-          <a:lstStyle/>
-          <a:p>
-            <a:pPr algn="ctr" indent="0" marL="0">
-              <a:lnSpc>
-                <a:spcPct val="120000"/>
-              </a:lnSpc>
-              <a:buNone/>
-            </a:pPr>
-            <a:r>
-              <a:rPr lang="en-US" sz="1800" dirty="0">
-                <a:solidFill>
-                  <a:srgbClr val="F8F8F8"/>
-                </a:solidFill>
-                <a:latin typeface="Pretendard" pitchFamily="34" charset="0"/>
-                <a:ea typeface="Pretendard" pitchFamily="34" charset="-122"/>
-                <a:cs typeface="Pretendard" pitchFamily="34" charset="-120"/>
-              </a:rPr>
-              <a:t>09  Editable Proof Objects</a:t>
-            </a:r>
-            <a:endParaRPr lang="en-US" sz="1800" dirty="0"/>
-          </a:p>
-        </p:txBody>
-      </p:sp>
-      <p:sp>
-        <p:nvSpPr>
-          <p:cNvPr id="40" name="mdpr:1-2-0772f8:toc-item-10:toc-item-10"/>
-          <p:cNvSpPr txBox="1"/>
-          <p:nvPr/>
-        </p:nvSpPr>
-        <p:spPr>
-          <a:xfrm>
-            <a:off x="6492240" y="2907792"/>
-            <a:ext cx="4645152" cy="384048"/>
-          </a:xfrm>
-          <a:prstGeom prst="rect">
-            <a:avLst/>
-          </a:prstGeom>
-          <a:noFill/>
-          <a:ln/>
-        </p:spPr>
-        <p:txBody>
-          <a:bodyPr wrap="square" lIns="0" tIns="25400" rIns="25400" bIns="0" rtlCol="0" anchor="ctr"/>
-          <a:lstStyle/>
-          <a:p>
-            <a:pPr algn="ctr" indent="0" marL="0">
-              <a:lnSpc>
-                <a:spcPct val="120000"/>
-              </a:lnSpc>
-              <a:buNone/>
-            </a:pPr>
-            <a:r>
-              <a:rPr lang="en-US" sz="1800" dirty="0">
-                <a:solidFill>
-                  <a:srgbClr val="F8F8F8"/>
-                </a:solidFill>
-                <a:latin typeface="Pretendard" pitchFamily="34" charset="0"/>
-                <a:ea typeface="Pretendard" pitchFamily="34" charset="-122"/>
-                <a:cs typeface="Pretendard" pitchFamily="34" charset="-120"/>
-              </a:rPr>
-              <a:t>10  Object Shape Grammar</a:t>
-            </a:r>
-            <a:endParaRPr lang="en-US" sz="1800" dirty="0"/>
-          </a:p>
-        </p:txBody>
-      </p:sp>
-      <p:sp>
-        <p:nvSpPr>
-          <p:cNvPr id="41" name="mdpr:1-2-0772f8:toc-item-11:toc-item-11"/>
-          <p:cNvSpPr txBox="1"/>
-          <p:nvPr/>
-        </p:nvSpPr>
-        <p:spPr>
-          <a:xfrm>
-            <a:off x="6492240" y="3621024"/>
-            <a:ext cx="4645152" cy="384048"/>
-          </a:xfrm>
-          <a:prstGeom prst="rect">
-            <a:avLst/>
-          </a:prstGeom>
-          <a:noFill/>
-          <a:ln/>
-        </p:spPr>
-        <p:txBody>
-          <a:bodyPr wrap="square" lIns="0" tIns="25400" rIns="25400" bIns="0" rtlCol="0" anchor="ctr"/>
-          <a:lstStyle/>
-          <a:p>
-            <a:pPr algn="ctr" indent="0" marL="0">
-              <a:lnSpc>
-                <a:spcPct val="120000"/>
-              </a:lnSpc>
-              <a:buNone/>
-            </a:pPr>
-            <a:r>
-              <a:rPr lang="en-US" sz="1800" dirty="0">
-                <a:solidFill>
-                  <a:srgbClr val="F8F8F8"/>
-                </a:solidFill>
-                <a:latin typeface="Pretendard" pitchFamily="34" charset="0"/>
-                <a:ea typeface="Pretendard" pitchFamily="34" charset="-122"/>
-                <a:cs typeface="Pretendard" pitchFamily="34" charset="-120"/>
-              </a:rPr>
-              <a:t>11  Icon and Text Aside</a:t>
-            </a:r>
-            <a:endParaRPr lang="en-US" sz="1800" dirty="0"/>
-          </a:p>
-        </p:txBody>
-      </p:sp>
-      <p:sp>
-        <p:nvSpPr>
-          <p:cNvPr id="42" name="mdpr:1-2-0772f8:toc-item-12:toc-item-12"/>
-          <p:cNvSpPr txBox="1"/>
-          <p:nvPr/>
-        </p:nvSpPr>
-        <p:spPr>
-          <a:xfrm>
-            <a:off x="6492240" y="4334256"/>
-            <a:ext cx="4645152" cy="384048"/>
-          </a:xfrm>
-          <a:prstGeom prst="rect">
-            <a:avLst/>
-          </a:prstGeom>
-          <a:noFill/>
-          <a:ln/>
-        </p:spPr>
-        <p:txBody>
-          <a:bodyPr wrap="square" lIns="0" tIns="25400" rIns="25400" bIns="0" rtlCol="0" anchor="ctr"/>
-          <a:lstStyle/>
-          <a:p>
-            <a:pPr algn="ctr" indent="0" marL="0">
-              <a:lnSpc>
-                <a:spcPct val="120000"/>
-              </a:lnSpc>
-              <a:buNone/>
-            </a:pPr>
-            <a:r>
-              <a:rPr lang="en-US" sz="1800" dirty="0">
-                <a:solidFill>
-                  <a:srgbClr val="F8F8F8"/>
-                </a:solidFill>
-                <a:latin typeface="Pretendard" pitchFamily="34" charset="0"/>
-                <a:ea typeface="Pretendard" pitchFamily="34" charset="-122"/>
-                <a:cs typeface="Pretendard" pitchFamily="34" charset="-120"/>
-              </a:rPr>
-              <a:t>12  Overflow Guard</a:t>
-            </a:r>
-            <a:endParaRPr lang="en-US" sz="1800" dirty="0"/>
-          </a:p>
-        </p:txBody>
-      </p:sp>
-      <p:sp>
-        <p:nvSpPr>
-          <p:cNvPr id="43" name="mdpr:1-2-0772f8:toc-item-13:toc-item-13"/>
-          <p:cNvSpPr txBox="1"/>
-          <p:nvPr/>
-        </p:nvSpPr>
-        <p:spPr>
-          <a:xfrm>
-            <a:off x="6492240" y="5047488"/>
-            <a:ext cx="4645152" cy="384048"/>
-          </a:xfrm>
-          <a:prstGeom prst="rect">
-            <a:avLst/>
-          </a:prstGeom>
-          <a:noFill/>
-          <a:ln/>
-        </p:spPr>
-        <p:txBody>
-          <a:bodyPr wrap="square" lIns="0" tIns="25400" rIns="25400" bIns="0" rtlCol="0" anchor="ctr"/>
-          <a:lstStyle/>
-          <a:p>
-            <a:pPr algn="ctr" indent="0" marL="0">
-              <a:lnSpc>
-                <a:spcPct val="120000"/>
-              </a:lnSpc>
-              <a:buNone/>
-            </a:pPr>
-            <a:r>
-              <a:rPr lang="en-US" sz="1800" dirty="0">
-                <a:solidFill>
-                  <a:srgbClr val="F8F8F8"/>
-                </a:solidFill>
-                <a:latin typeface="Pretendard" pitchFamily="34" charset="0"/>
-                <a:ea typeface="Pretendard" pitchFamily="34" charset="-122"/>
-                <a:cs typeface="Pretendard" pitchFamily="34" charset="-120"/>
-              </a:rPr>
-              <a:t>13  Image Safe Frame</a:t>
-            </a:r>
-            <a:endParaRPr lang="en-US" sz="1800" dirty="0"/>
-          </a:p>
-        </p:txBody>
-      </p:sp>
-      <p:sp>
-        <p:nvSpPr>
-          <p:cNvPr id="44" name="mdpr:1-2-0772f8:toc-item-14:toc-item-14"/>
-          <p:cNvSpPr txBox="1"/>
-          <p:nvPr/>
-        </p:nvSpPr>
-        <p:spPr>
-          <a:xfrm>
-            <a:off x="6492240" y="5760720"/>
-            <a:ext cx="4645152" cy="384048"/>
-          </a:xfrm>
-          <a:prstGeom prst="rect">
-            <a:avLst/>
-          </a:prstGeom>
-          <a:noFill/>
-          <a:ln/>
-        </p:spPr>
-        <p:txBody>
-          <a:bodyPr wrap="square" lIns="0" tIns="25400" rIns="25400" bIns="0" rtlCol="0" anchor="ctr"/>
-          <a:lstStyle/>
-          <a:p>
-            <a:pPr algn="ctr" indent="0" marL="0">
-              <a:lnSpc>
-                <a:spcPct val="120000"/>
-              </a:lnSpc>
-              <a:buNone/>
-            </a:pPr>
-            <a:r>
-              <a:rPr lang="en-US" sz="1800" dirty="0">
-                <a:solidFill>
-                  <a:srgbClr val="F8F8F8"/>
-                </a:solidFill>
-                <a:latin typeface="Pretendard" pitchFamily="34" charset="0"/>
-                <a:ea typeface="Pretendard" pitchFamily="34" charset="-122"/>
-                <a:cs typeface="Pretendard" pitchFamily="34" charset="-120"/>
-              </a:rPr>
-              <a:t>14  Mixed Object Packing</a:t>
             </a:r>
             <a:endParaRPr lang="en-US" sz="1800" dirty="0"/>
           </a:p>
@@ -15925,8 +14935,8 @@
         </p:nvSpPr>
         <p:spPr>
           <a:xfrm>
-            <a:off x="731520" y="1207008"/>
-            <a:ext cx="1325880" cy="54864"/>
+            <a:off x="914400" y="1463040"/>
+            <a:ext cx="10241280" cy="73152"/>
           </a:xfrm>
           <a:prstGeom prst="rect">
             <a:avLst/>
@@ -15946,61 +14956,7 @@
       </p:sp>
       <p:sp>
         <p:nvSpPr>
-          <p:cNvPr id="13" name="Shape 11"/>
-          <p:cNvSpPr/>
-          <p:nvPr/>
-        </p:nvSpPr>
-        <p:spPr>
-          <a:xfrm>
-            <a:off x="822960" y="1554480"/>
-            <a:ext cx="4937760" cy="73152"/>
-          </a:xfrm>
-          <a:prstGeom prst="rect">
-            <a:avLst/>
-          </a:prstGeom>
-          <a:solidFill>
-            <a:srgbClr val="8A4FFF"/>
-          </a:solidFill>
-          <a:ln w="12700">
-            <a:solidFill>
-              <a:srgbClr val="8A4FFF">
-                <a:alpha val="0"/>
-              </a:srgbClr>
-            </a:solidFill>
-            <a:prstDash val="solid"/>
-          </a:ln>
-        </p:spPr>
-      </p:sp>
-      <p:sp>
-        <p:nvSpPr>
-          <p:cNvPr id="14" name="Shape 12"/>
-          <p:cNvSpPr/>
-          <p:nvPr/>
-        </p:nvSpPr>
-        <p:spPr>
-          <a:xfrm>
-            <a:off x="6400800" y="1554480"/>
-            <a:ext cx="4937760" cy="73152"/>
-          </a:xfrm>
-          <a:prstGeom prst="rect">
-            <a:avLst/>
-          </a:prstGeom>
-          <a:solidFill>
-            <a:srgbClr val="8A4FFF"/>
-          </a:solidFill>
-          <a:ln w="12700">
-            <a:solidFill>
-              <a:srgbClr val="8A4FFF">
-                <a:alpha val="0"/>
-              </a:srgbClr>
-            </a:solidFill>
-            <a:prstDash val="solid"/>
-          </a:ln>
-        </p:spPr>
-      </p:sp>
-      <p:sp>
-        <p:nvSpPr>
-          <p:cNvPr id="15" name="mdpr:2-2-4f71ba:title:__title:2-2-4f71ba"/>
+          <p:cNvPr id="13" name="mdpr:2-2-4f71ba:title:__title:2-2-4f71ba"/>
           <p:cNvSpPr txBox="1"/>
           <p:nvPr/>
         </p:nvSpPr>
@@ -16034,7 +14990,24 @@
                 <a:ea typeface="Pretendard" pitchFamily="34" charset="-122"/>
                 <a:cs typeface="Pretendard" pitchFamily="34" charset="-120"/>
               </a:rPr>
-              <a:t>Object Shape Grammar (Cont. 2/2)</a:t>
+              <a:t>Object Shape Grammar</a:t>
+            </a:r>
+            <a:pPr algn="ctr" indent="0" marL="0">
+              <a:lnSpc>
+                <a:spcPct val="120000"/>
+              </a:lnSpc>
+              <a:buNone/>
+            </a:pPr>
+            <a:r>
+              <a:rPr lang="en-US" sz="2000" dirty="0">
+                <a:solidFill>
+                  <a:srgbClr val="6C6C6C"/>
+                </a:solidFill>
+                <a:latin typeface="Pretendard" pitchFamily="34" charset="0"/>
+                <a:ea typeface="Pretendard" pitchFamily="34" charset="-122"/>
+                <a:cs typeface="Pretendard" pitchFamily="34" charset="-120"/>
+              </a:rPr>
+              <a:t> (Cont. 2/2)</a:t>
             </a:r>
             <a:endParaRPr lang="en-US" sz="3400" dirty="0"/>
           </a:p>
@@ -16042,14 +15015,14 @@
       </p:sp>
       <p:sp>
         <p:nvSpPr>
-          <p:cNvPr id="16" name="mdpr:2-2-4f71ba:left:block-27-chunk-2"/>
+          <p:cNvPr id="14" name="mdpr:2-2-4f71ba:body:block-27-chunk-2"/>
           <p:cNvSpPr txBox="1"/>
           <p:nvPr/>
         </p:nvSpPr>
         <p:spPr>
           <a:xfrm>
-            <a:off x="896112" y="1664208"/>
-            <a:ext cx="4791456" cy="4169664"/>
+            <a:off x="987552" y="1572768"/>
+            <a:ext cx="10094976" cy="4261104"/>
           </a:xfrm>
           <a:prstGeom prst="rect">
             <a:avLst/>
@@ -16097,28 +15070,6 @@
             </a:r>
             <a:endParaRPr lang="en-US" sz="2200" dirty="0"/>
           </a:p>
-        </p:txBody>
-      </p:sp>
-      <p:sp>
-        <p:nvSpPr>
-          <p:cNvPr id="17" name="mdpr:2-2-4f71ba:right:block-27-chunk-2"/>
-          <p:cNvSpPr txBox="1"/>
-          <p:nvPr/>
-        </p:nvSpPr>
-        <p:spPr>
-          <a:xfrm>
-            <a:off x="6473952" y="1664208"/>
-            <a:ext cx="4791456" cy="4169664"/>
-          </a:xfrm>
-          <a:prstGeom prst="rect">
-            <a:avLst/>
-          </a:prstGeom>
-          <a:noFill/>
-          <a:ln/>
-        </p:spPr>
-        <p:txBody>
-          <a:bodyPr wrap="square" lIns="0" tIns="25400" rIns="25400" bIns="0" rtlCol="0" anchor="t"/>
-          <a:lstStyle/>
           <a:p>
             <a:pPr algn="l" indent="0" marL="0">
               <a:lnSpc>
@@ -16137,6 +15088,9 @@
               </a:rPr>
               <a:t>- Rounded panel</a:t>
             </a:r>
+            <a:endParaRPr lang="en-US" sz="2200" dirty="0"/>
+          </a:p>
+          <a:p>
             <a:pPr algn="l" indent="0" marL="0">
               <a:lnSpc>
                 <a:spcPct val="120000"/>
@@ -16492,36 +15446,9 @@
           </a:ln>
         </p:spPr>
       </p:sp>
-      <p:sp>
-        <p:nvSpPr>
-          <p:cNvPr id="12" name="Shape 10"/>
-          <p:cNvSpPr/>
-          <p:nvPr/>
-        </p:nvSpPr>
-        <p:spPr>
-          <a:xfrm>
-            <a:off x="731520" y="1207008"/>
-            <a:ext cx="1325880" cy="54864"/>
-          </a:xfrm>
-          <a:prstGeom prst="rect">
-            <a:avLst/>
-          </a:prstGeom>
-          <a:solidFill>
-            <a:srgbClr val="8A4FFF"/>
-          </a:solidFill>
-          <a:ln w="12700">
-            <a:solidFill>
-              <a:srgbClr val="8A4FFF">
-                <a:alpha val="0"/>
-              </a:srgbClr>
-            </a:solidFill>
-            <a:prstDash val="solid"/>
-          </a:ln>
-        </p:spPr>
-      </p:sp>
       <p:pic>
         <p:nvPicPr>
-          <p:cNvPr id="13" name="Image 0" descr="preencoded.png">    </p:cNvPr>
+          <p:cNvPr id="12" name="Image 0" descr="preencoded.png">    </p:cNvPr>
           <p:cNvPicPr>
             <a:picLocks noChangeAspect="1"/>
           </p:cNvPicPr>
@@ -16551,7 +15478,7 @@
       </p:pic>
       <p:sp>
         <p:nvSpPr>
-          <p:cNvPr id="14" name="Shape 11"/>
+          <p:cNvPr id="13" name="Shape 10"/>
           <p:cNvSpPr/>
           <p:nvPr/>
         </p:nvSpPr>
@@ -16592,7 +15519,7 @@
       </p:sp>
       <p:pic>
         <p:nvPicPr>
-          <p:cNvPr id="15" name="Image 1" descr="preencoded.png">    </p:cNvPr>
+          <p:cNvPr id="14" name="Image 1" descr="preencoded.png">    </p:cNvPr>
           <p:cNvPicPr>
             <a:picLocks noChangeAspect="1"/>
           </p:cNvPicPr>
@@ -16622,7 +15549,7 @@
       </p:pic>
       <p:sp>
         <p:nvSpPr>
-          <p:cNvPr id="16" name="Shape 12"/>
+          <p:cNvPr id="15" name="Shape 11"/>
           <p:cNvSpPr/>
           <p:nvPr/>
         </p:nvSpPr>
@@ -16663,7 +15590,7 @@
       </p:sp>
       <p:pic>
         <p:nvPicPr>
-          <p:cNvPr id="17" name="Image 2" descr="preencoded.png">    </p:cNvPr>
+          <p:cNvPr id="16" name="Image 2" descr="preencoded.png">    </p:cNvPr>
           <p:cNvPicPr>
             <a:picLocks noChangeAspect="1"/>
           </p:cNvPicPr>
@@ -16693,7 +15620,7 @@
       </p:pic>
       <p:sp>
         <p:nvSpPr>
-          <p:cNvPr id="18" name="Shape 13"/>
+          <p:cNvPr id="17" name="Shape 12"/>
           <p:cNvSpPr/>
           <p:nvPr/>
         </p:nvSpPr>
@@ -16734,7 +15661,7 @@
       </p:sp>
       <p:pic>
         <p:nvPicPr>
-          <p:cNvPr id="19" name="Image 3" descr="preencoded.png">    </p:cNvPr>
+          <p:cNvPr id="18" name="Image 3" descr="preencoded.png">    </p:cNvPr>
           <p:cNvPicPr>
             <a:picLocks noChangeAspect="1"/>
           </p:cNvPicPr>
@@ -16764,7 +15691,7 @@
       </p:pic>
       <p:sp>
         <p:nvSpPr>
-          <p:cNvPr id="20" name="Shape 14"/>
+          <p:cNvPr id="19" name="Shape 13"/>
           <p:cNvSpPr/>
           <p:nvPr/>
         </p:nvSpPr>
@@ -16805,7 +15732,7 @@
       </p:sp>
       <p:sp>
         <p:nvSpPr>
-          <p:cNvPr id="21" name="Shape 15"/>
+          <p:cNvPr id="20" name="Shape 14"/>
           <p:cNvSpPr/>
           <p:nvPr/>
         </p:nvSpPr>
@@ -16832,7 +15759,7 @@
       </p:sp>
       <p:sp>
         <p:nvSpPr>
-          <p:cNvPr id="22" name="Shape 16"/>
+          <p:cNvPr id="21" name="Shape 15"/>
           <p:cNvSpPr/>
           <p:nvPr/>
         </p:nvSpPr>
@@ -16859,7 +15786,7 @@
       </p:sp>
       <p:sp>
         <p:nvSpPr>
-          <p:cNvPr id="23" name="Shape 17"/>
+          <p:cNvPr id="22" name="Shape 16"/>
           <p:cNvSpPr/>
           <p:nvPr/>
         </p:nvSpPr>
@@ -16886,7 +15813,7 @@
       </p:sp>
       <p:sp>
         <p:nvSpPr>
-          <p:cNvPr id="24" name="Shape 18"/>
+          <p:cNvPr id="23" name="Shape 17"/>
           <p:cNvSpPr/>
           <p:nvPr/>
         </p:nvSpPr>
@@ -16913,7 +15840,7 @@
       </p:sp>
       <p:sp>
         <p:nvSpPr>
-          <p:cNvPr id="25" name="mdpr:icon-and-text-aside-8429fc:title:__title:icon-and-text-aside-8429fc"/>
+          <p:cNvPr id="24" name="mdpr:icon-and-text-aside-8429fc:title:__title:icon-and-text-aside-8429fc"/>
           <p:cNvSpPr txBox="1"/>
           <p:nvPr/>
         </p:nvSpPr>
@@ -16955,7 +15882,7 @@
       </p:sp>
       <p:sp>
         <p:nvSpPr>
-          <p:cNvPr id="26" name="mdpr:icon-and-text-aside-8429fc:item-1:block-29"/>
+          <p:cNvPr id="25" name="mdpr:icon-and-text-aside-8429fc:item-1:block-29"/>
           <p:cNvSpPr txBox="1"/>
           <p:nvPr/>
         </p:nvSpPr>
@@ -17014,7 +15941,7 @@
       </p:sp>
       <p:sp>
         <p:nvSpPr>
-          <p:cNvPr id="27" name="mdpr:icon-and-text-aside-8429fc:item-2:block-29"/>
+          <p:cNvPr id="26" name="mdpr:icon-and-text-aside-8429fc:item-2:block-29"/>
           <p:cNvSpPr txBox="1"/>
           <p:nvPr/>
         </p:nvSpPr>
@@ -17073,7 +16000,7 @@
       </p:sp>
       <p:sp>
         <p:nvSpPr>
-          <p:cNvPr id="28" name="mdpr:icon-and-text-aside-8429fc:item-3:block-29"/>
+          <p:cNvPr id="27" name="mdpr:icon-and-text-aside-8429fc:item-3:block-29"/>
           <p:cNvSpPr txBox="1"/>
           <p:nvPr/>
         </p:nvSpPr>
@@ -17132,7 +16059,7 @@
       </p:sp>
       <p:sp>
         <p:nvSpPr>
-          <p:cNvPr id="29" name="mdpr:icon-and-text-aside-8429fc:item-4:block-29"/>
+          <p:cNvPr id="28" name="mdpr:icon-and-text-aside-8429fc:item-4:block-29"/>
           <p:cNvSpPr txBox="1"/>
           <p:nvPr/>
         </p:nvSpPr>
@@ -17523,36 +16450,9 @@
           </a:ln>
         </p:spPr>
       </p:sp>
-      <p:sp>
-        <p:nvSpPr>
-          <p:cNvPr id="12" name="Shape 10"/>
-          <p:cNvSpPr/>
-          <p:nvPr/>
-        </p:nvSpPr>
-        <p:spPr>
-          <a:xfrm>
-            <a:off x="731520" y="1207008"/>
-            <a:ext cx="1325880" cy="54864"/>
-          </a:xfrm>
-          <a:prstGeom prst="rect">
-            <a:avLst/>
-          </a:prstGeom>
-          <a:solidFill>
-            <a:srgbClr val="8A4FFF"/>
-          </a:solidFill>
-          <a:ln w="12700">
-            <a:solidFill>
-              <a:srgbClr val="8A4FFF">
-                <a:alpha val="0"/>
-              </a:srgbClr>
-            </a:solidFill>
-            <a:prstDash val="solid"/>
-          </a:ln>
-        </p:spPr>
-      </p:sp>
       <p:pic>
         <p:nvPicPr>
-          <p:cNvPr id="13" name="Image 0" descr="preencoded.png">    </p:cNvPr>
+          <p:cNvPr id="12" name="Image 0" descr="preencoded.png">    </p:cNvPr>
           <p:cNvPicPr>
             <a:picLocks noChangeAspect="1"/>
           </p:cNvPicPr>
@@ -17582,7 +16482,7 @@
       </p:pic>
       <p:sp>
         <p:nvSpPr>
-          <p:cNvPr id="14" name="Shape 11"/>
+          <p:cNvPr id="13" name="Shape 10"/>
           <p:cNvSpPr/>
           <p:nvPr/>
         </p:nvSpPr>
@@ -17623,7 +16523,7 @@
       </p:sp>
       <p:pic>
         <p:nvPicPr>
-          <p:cNvPr id="15" name="Image 1" descr="preencoded.png">    </p:cNvPr>
+          <p:cNvPr id="14" name="Image 1" descr="preencoded.png">    </p:cNvPr>
           <p:cNvPicPr>
             <a:picLocks noChangeAspect="1"/>
           </p:cNvPicPr>
@@ -17653,7 +16553,7 @@
       </p:pic>
       <p:sp>
         <p:nvSpPr>
-          <p:cNvPr id="16" name="Shape 12"/>
+          <p:cNvPr id="15" name="Shape 11"/>
           <p:cNvSpPr/>
           <p:nvPr/>
         </p:nvSpPr>
@@ -17694,7 +16594,7 @@
       </p:sp>
       <p:pic>
         <p:nvPicPr>
-          <p:cNvPr id="17" name="Image 2" descr="preencoded.png">    </p:cNvPr>
+          <p:cNvPr id="16" name="Image 2" descr="preencoded.png">    </p:cNvPr>
           <p:cNvPicPr>
             <a:picLocks noChangeAspect="1"/>
           </p:cNvPicPr>
@@ -17724,7 +16624,7 @@
       </p:pic>
       <p:sp>
         <p:nvSpPr>
-          <p:cNvPr id="18" name="Shape 13"/>
+          <p:cNvPr id="17" name="Shape 12"/>
           <p:cNvSpPr/>
           <p:nvPr/>
         </p:nvSpPr>
@@ -17765,7 +16665,7 @@
       </p:sp>
       <p:pic>
         <p:nvPicPr>
-          <p:cNvPr id="19" name="Image 3" descr="preencoded.png">    </p:cNvPr>
+          <p:cNvPr id="18" name="Image 3" descr="preencoded.png">    </p:cNvPr>
           <p:cNvPicPr>
             <a:picLocks noChangeAspect="1"/>
           </p:cNvPicPr>
@@ -17795,7 +16695,7 @@
       </p:pic>
       <p:sp>
         <p:nvSpPr>
-          <p:cNvPr id="20" name="Shape 14"/>
+          <p:cNvPr id="19" name="Shape 13"/>
           <p:cNvSpPr/>
           <p:nvPr/>
         </p:nvSpPr>
@@ -17836,7 +16736,7 @@
       </p:sp>
       <p:sp>
         <p:nvSpPr>
-          <p:cNvPr id="21" name="Shape 15"/>
+          <p:cNvPr id="20" name="Shape 14"/>
           <p:cNvSpPr/>
           <p:nvPr/>
         </p:nvSpPr>
@@ -17863,7 +16763,7 @@
       </p:sp>
       <p:sp>
         <p:nvSpPr>
-          <p:cNvPr id="22" name="Shape 16"/>
+          <p:cNvPr id="21" name="Shape 15"/>
           <p:cNvSpPr/>
           <p:nvPr/>
         </p:nvSpPr>
@@ -17890,7 +16790,7 @@
       </p:sp>
       <p:sp>
         <p:nvSpPr>
-          <p:cNvPr id="23" name="Shape 17"/>
+          <p:cNvPr id="22" name="Shape 16"/>
           <p:cNvSpPr/>
           <p:nvPr/>
         </p:nvSpPr>
@@ -17917,7 +16817,7 @@
       </p:sp>
       <p:sp>
         <p:nvSpPr>
-          <p:cNvPr id="24" name="Shape 18"/>
+          <p:cNvPr id="23" name="Shape 17"/>
           <p:cNvSpPr/>
           <p:nvPr/>
         </p:nvSpPr>
@@ -17944,7 +16844,7 @@
       </p:sp>
       <p:sp>
         <p:nvSpPr>
-          <p:cNvPr id="25" name="mdpr:overflow-guard-f8d03e:title:__title:overflow-guard-f8d03e"/>
+          <p:cNvPr id="24" name="mdpr:overflow-guard-f8d03e:title:__title:overflow-guard-f8d03e"/>
           <p:cNvSpPr txBox="1"/>
           <p:nvPr/>
         </p:nvSpPr>
@@ -17986,7 +16886,7 @@
       </p:sp>
       <p:sp>
         <p:nvSpPr>
-          <p:cNvPr id="26" name="mdpr:overflow-guard-f8d03e:item-1:block-31"/>
+          <p:cNvPr id="25" name="mdpr:overflow-guard-f8d03e:item-1:block-31"/>
           <p:cNvSpPr txBox="1"/>
           <p:nvPr/>
         </p:nvSpPr>
@@ -18045,7 +16945,7 @@
       </p:sp>
       <p:sp>
         <p:nvSpPr>
-          <p:cNvPr id="27" name="mdpr:overflow-guard-f8d03e:item-2:block-31"/>
+          <p:cNvPr id="26" name="mdpr:overflow-guard-f8d03e:item-2:block-31"/>
           <p:cNvSpPr txBox="1"/>
           <p:nvPr/>
         </p:nvSpPr>
@@ -18104,7 +17004,7 @@
       </p:sp>
       <p:sp>
         <p:nvSpPr>
-          <p:cNvPr id="28" name="mdpr:overflow-guard-f8d03e:item-3:block-31"/>
+          <p:cNvPr id="27" name="mdpr:overflow-guard-f8d03e:item-3:block-31"/>
           <p:cNvSpPr txBox="1"/>
           <p:nvPr/>
         </p:nvSpPr>
@@ -18163,7 +17063,7 @@
       </p:sp>
       <p:sp>
         <p:nvSpPr>
-          <p:cNvPr id="29" name="mdpr:overflow-guard-f8d03e:item-4:block-31"/>
+          <p:cNvPr id="28" name="mdpr:overflow-guard-f8d03e:item-4:block-31"/>
           <p:cNvSpPr txBox="1"/>
           <p:nvPr/>
         </p:nvSpPr>
@@ -18554,36 +17454,9 @@
           </a:ln>
         </p:spPr>
       </p:sp>
-      <p:sp>
-        <p:nvSpPr>
-          <p:cNvPr id="12" name="Shape 10"/>
-          <p:cNvSpPr/>
-          <p:nvPr/>
-        </p:nvSpPr>
-        <p:spPr>
-          <a:xfrm>
-            <a:off x="731520" y="1207008"/>
-            <a:ext cx="1325880" cy="54864"/>
-          </a:xfrm>
-          <a:prstGeom prst="rect">
-            <a:avLst/>
-          </a:prstGeom>
-          <a:solidFill>
-            <a:srgbClr val="8A4FFF"/>
-          </a:solidFill>
-          <a:ln w="12700">
-            <a:solidFill>
-              <a:srgbClr val="8A4FFF">
-                <a:alpha val="0"/>
-              </a:srgbClr>
-            </a:solidFill>
-            <a:prstDash val="solid"/>
-          </a:ln>
-        </p:spPr>
-      </p:sp>
       <p:pic>
         <p:nvPicPr>
-          <p:cNvPr id="13" name="Image 0" descr="preencoded.png">    </p:cNvPr>
+          <p:cNvPr id="12" name="Image 0" descr="preencoded.png">    </p:cNvPr>
           <p:cNvPicPr>
             <a:picLocks noChangeAspect="1"/>
           </p:cNvPicPr>
@@ -18613,7 +17486,7 @@
       </p:pic>
       <p:sp>
         <p:nvSpPr>
-          <p:cNvPr id="14" name="Shape 11"/>
+          <p:cNvPr id="13" name="Shape 10"/>
           <p:cNvSpPr/>
           <p:nvPr/>
         </p:nvSpPr>
@@ -18654,7 +17527,7 @@
       </p:sp>
       <p:sp>
         <p:nvSpPr>
-          <p:cNvPr id="15" name="Shape 12"/>
+          <p:cNvPr id="14" name="Shape 11"/>
           <p:cNvSpPr/>
           <p:nvPr/>
         </p:nvSpPr>
@@ -18681,7 +17554,7 @@
       </p:sp>
       <p:sp>
         <p:nvSpPr>
-          <p:cNvPr id="16" name="mdpr:image-safe-frame-d4d6a4:title:__title:image-safe-frame-d4d6a4"/>
+          <p:cNvPr id="15" name="mdpr:image-safe-frame-d4d6a4:title:__title:image-safe-frame-d4d6a4"/>
           <p:cNvSpPr txBox="1"/>
           <p:nvPr/>
         </p:nvSpPr>
@@ -18723,7 +17596,7 @@
       </p:sp>
       <p:sp>
         <p:nvSpPr>
-          <p:cNvPr id="17" name="mdpr:image-safe-frame-d4d6a4:body:block-33-block-33-block-33"/>
+          <p:cNvPr id="16" name="mdpr:image-safe-frame-d4d6a4:body:block-33-block-33-block-33"/>
           <p:cNvSpPr txBox="1"/>
           <p:nvPr/>
         </p:nvSpPr>
@@ -18862,7 +17735,7 @@
       </p:sp>
       <p:pic>
         <p:nvPicPr>
-          <p:cNvPr id="18" name="mdpr:image-safe-frame-d4d6a4:image-1:block-34" descr="{&quot;mdpr&quot;:{&quot;slideId&quot;:&quot;image-safe-frame-d4d6a4&quot;,&quot;layoutSlideId&quot;:&quot;layout-image-safe-frame-d4d6a4&quot;,&quot;regionId&quot;:&quot;image-1&quot;,&quot;blockIds&quot;:[&quot;block-34&quot;],&quot;objectKind&quot;:&quot;native-image&quot;,&quot;role&quot;:&quot;image&quot;,&quot;editable&quot;:false}}">    </p:cNvPr>
+          <p:cNvPr id="17" name="mdpr:image-safe-frame-d4d6a4:image-1:block-34" descr="{&quot;mdpr&quot;:{&quot;slideId&quot;:&quot;image-safe-frame-d4d6a4&quot;,&quot;layoutSlideId&quot;:&quot;layout-image-safe-frame-d4d6a4&quot;,&quot;regionId&quot;:&quot;image-1&quot;,&quot;blockIds&quot;:[&quot;block-34&quot;],&quot;objectKind&quot;:&quot;native-image&quot;,&quot;role&quot;:&quot;image&quot;,&quot;editable&quot;:false}}">    </p:cNvPr>
           <p:cNvPicPr>
             <a:picLocks noChangeAspect="1"/>
           </p:cNvPicPr>
@@ -19224,36 +18097,9 @@
           </a:ln>
         </p:spPr>
       </p:sp>
-      <p:sp>
-        <p:nvSpPr>
-          <p:cNvPr id="12" name="Shape 10"/>
-          <p:cNvSpPr/>
-          <p:nvPr/>
-        </p:nvSpPr>
-        <p:spPr>
-          <a:xfrm>
-            <a:off x="731520" y="1207008"/>
-            <a:ext cx="1325880" cy="54864"/>
-          </a:xfrm>
-          <a:prstGeom prst="rect">
-            <a:avLst/>
-          </a:prstGeom>
-          <a:solidFill>
-            <a:srgbClr val="8A4FFF"/>
-          </a:solidFill>
-          <a:ln w="12700">
-            <a:solidFill>
-              <a:srgbClr val="8A4FFF">
-                <a:alpha val="0"/>
-              </a:srgbClr>
-            </a:solidFill>
-            <a:prstDash val="solid"/>
-          </a:ln>
-        </p:spPr>
-      </p:sp>
       <p:pic>
         <p:nvPicPr>
-          <p:cNvPr id="13" name="Image 0" descr="preencoded.png">    </p:cNvPr>
+          <p:cNvPr id="12" name="Image 0" descr="preencoded.png">    </p:cNvPr>
           <p:cNvPicPr>
             <a:picLocks noChangeAspect="1"/>
           </p:cNvPicPr>
@@ -19283,7 +18129,7 @@
       </p:pic>
       <p:sp>
         <p:nvSpPr>
-          <p:cNvPr id="14" name="Shape 11"/>
+          <p:cNvPr id="13" name="Shape 10"/>
           <p:cNvSpPr/>
           <p:nvPr/>
         </p:nvSpPr>
@@ -19324,7 +18170,7 @@
       </p:sp>
       <p:pic>
         <p:nvPicPr>
-          <p:cNvPr id="15" name="Image 1" descr="preencoded.png">    </p:cNvPr>
+          <p:cNvPr id="14" name="Image 1" descr="preencoded.png">    </p:cNvPr>
           <p:cNvPicPr>
             <a:picLocks noChangeAspect="1"/>
           </p:cNvPicPr>
@@ -19354,7 +18200,7 @@
       </p:pic>
       <p:sp>
         <p:nvSpPr>
-          <p:cNvPr id="16" name="Shape 12"/>
+          <p:cNvPr id="15" name="Shape 11"/>
           <p:cNvSpPr/>
           <p:nvPr/>
         </p:nvSpPr>
@@ -19395,7 +18241,7 @@
       </p:sp>
       <p:pic>
         <p:nvPicPr>
-          <p:cNvPr id="17" name="Image 2" descr="preencoded.png">    </p:cNvPr>
+          <p:cNvPr id="16" name="Image 2" descr="preencoded.png">    </p:cNvPr>
           <p:cNvPicPr>
             <a:picLocks noChangeAspect="1"/>
           </p:cNvPicPr>
@@ -19425,7 +18271,7 @@
       </p:pic>
       <p:sp>
         <p:nvSpPr>
-          <p:cNvPr id="18" name="Shape 13"/>
+          <p:cNvPr id="17" name="Shape 12"/>
           <p:cNvSpPr/>
           <p:nvPr/>
         </p:nvSpPr>
@@ -19466,7 +18312,7 @@
       </p:sp>
       <p:sp>
         <p:nvSpPr>
-          <p:cNvPr id="19" name="Shape 14"/>
+          <p:cNvPr id="18" name="Shape 13"/>
           <p:cNvSpPr/>
           <p:nvPr/>
         </p:nvSpPr>
@@ -19493,7 +18339,7 @@
       </p:sp>
       <p:sp>
         <p:nvSpPr>
-          <p:cNvPr id="20" name="mdpr:mixed-object-packing-438299:title:__title:mixed-object-packing-438299"/>
+          <p:cNvPr id="19" name="mdpr:mixed-object-packing-438299:title:__title:mixed-object-packing-438299"/>
           <p:cNvSpPr txBox="1"/>
           <p:nvPr/>
         </p:nvSpPr>
@@ -19535,7 +18381,7 @@
       </p:sp>
       <p:graphicFrame>
         <p:nvGraphicFramePr>
-          <p:cNvPr id="21" name="Chart 0" descr=""/>
+          <p:cNvPr id="20" name="Chart 0" descr=""/>
           <p:cNvGraphicFramePr/>
           <p:nvPr/>
         </p:nvGraphicFramePr>
@@ -19993,7 +18839,7 @@
       </p:graphicFrame>
       <p:sp>
         <p:nvSpPr>
-          <p:cNvPr id="23" name="mdpr:mixed-object-packing-438299:body:block-36"/>
+          <p:cNvPr id="22" name="mdpr:mixed-object-packing-438299:body:block-36"/>
           <p:cNvSpPr txBox="1"/>
           <p:nvPr/>
         </p:nvSpPr>
@@ -20092,7 +18938,7 @@
       </p:sp>
       <p:pic>
         <p:nvPicPr>
-          <p:cNvPr id="24" name="mdpr:mixed-object-packing-438299:image-1:block-39" descr="{&quot;mdpr&quot;:{&quot;slideId&quot;:&quot;mixed-object-packing-438299&quot;,&quot;layoutSlideId&quot;:&quot;layout-mixed-object-packing-438299&quot;,&quot;regionId&quot;:&quot;image-1&quot;,&quot;blockIds&quot;:[&quot;block-39&quot;],&quot;objectKind&quot;:&quot;native-image&quot;,&quot;role&quot;:&quot;image&quot;,&quot;editable&quot;:false}}">    </p:cNvPr>
+          <p:cNvPr id="23" name="mdpr:mixed-object-packing-438299:image-1:block-39" descr="{&quot;mdpr&quot;:{&quot;slideId&quot;:&quot;mixed-object-packing-438299&quot;,&quot;layoutSlideId&quot;:&quot;layout-mixed-object-packing-438299&quot;,&quot;regionId&quot;:&quot;image-1&quot;,&quot;blockIds&quot;:[&quot;block-39&quot;],&quot;objectKind&quot;:&quot;native-image&quot;,&quot;role&quot;:&quot;image&quot;,&quot;editable&quot;:false}}">    </p:cNvPr>
           <p:cNvPicPr>
             <a:picLocks noChangeAspect="1"/>
           </p:cNvPicPr>
@@ -20462,8 +19308,8 @@
         </p:nvSpPr>
         <p:spPr>
           <a:xfrm>
-            <a:off x="731520" y="1207008"/>
-            <a:ext cx="1325880" cy="54864"/>
+            <a:off x="822960" y="1938528"/>
+            <a:ext cx="73152" cy="2514600"/>
           </a:xfrm>
           <a:prstGeom prst="rect">
             <a:avLst/>
@@ -20481,237 +19327,22 @@
           </a:ln>
         </p:spPr>
       </p:sp>
-      <p:pic>
-        <p:nvPicPr>
-          <p:cNvPr id="13" name="Image 0" descr="preencoded.png">    </p:cNvPr>
-          <p:cNvPicPr>
-            <a:picLocks noChangeAspect="1"/>
-          </p:cNvPicPr>
-          <p:nvPr/>
-        </p:nvPicPr>
-        <p:blipFill>
-          <a:blip r:embed="rId1">
-            <a:extLst>
-              <a:ext uri="{96DAC541-7B7A-43D3-8B79-37D633B846F1}">
-                <asvg:svgBlip xmlns:asvg="http://schemas.microsoft.com/office/drawing/2016/SVG/main" r:embed="rId2"/>
-              </a:ext>
-            </a:extLst>
-          </a:blip>
-          <a:stretch>
-            <a:fillRect/>
-          </a:stretch>
-        </p:blipFill>
-        <p:spPr>
-          <a:xfrm>
-            <a:off x="914400" y="1865376"/>
-            <a:ext cx="10241280" cy="1024128"/>
-          </a:xfrm>
-          <a:prstGeom prst="rect">
-            <a:avLst/>
-          </a:prstGeom>
-        </p:spPr>
-      </p:pic>
-      <p:sp>
-        <p:nvSpPr>
-          <p:cNvPr id="14" name="Shape 11"/>
-          <p:cNvSpPr/>
-          <p:nvPr/>
-        </p:nvSpPr>
-        <p:spPr>
-          <a:xfrm>
-            <a:off x="914400" y="1865376"/>
-            <a:ext cx="10241280" cy="1024128"/>
-          </a:xfrm>
-          <a:prstGeom prst="rect">
-            <a:avLst/>
-          </a:prstGeom>
-          <a:solidFill>
-            <a:srgbClr val="17213A">
-              <a:alpha val="0"/>
-            </a:srgbClr>
-          </a:solidFill>
-          <a:ln w="12700">
-            <a:solidFill>
-              <a:srgbClr val="C4B5FD">
-                <a:alpha val="0"/>
-              </a:srgbClr>
-            </a:solidFill>
-            <a:prstDash val="solid"/>
-          </a:ln>
-          <a:effectLst>
-            <a:outerShdw sx="100000" sy="100000" kx="0" ky="0" algn="bl" rotWithShape="0" blurRad="30480" dist="50800" dir="2700000">
-              <a:srgbClr val="CBD5E1">
-                <a:alpha val="20000"/>
-              </a:srgbClr>
-            </a:outerShdw>
-            <a:glow rad="63500">
-              <a:srgbClr val="8A4FFF">
-                <a:alpha val="23000"/>
-              </a:srgbClr>
-            </a:glow>
-          </a:effectLst>
-        </p:spPr>
-      </p:sp>
-      <p:pic>
-        <p:nvPicPr>
-          <p:cNvPr id="15" name="Image 1" descr="preencoded.png">    </p:cNvPr>
-          <p:cNvPicPr>
-            <a:picLocks noChangeAspect="1"/>
-          </p:cNvPicPr>
-          <p:nvPr/>
-        </p:nvPicPr>
-        <p:blipFill>
-          <a:blip r:embed="rId3">
-            <a:extLst>
-              <a:ext uri="{96DAC541-7B7A-43D3-8B79-37D633B846F1}">
-                <asvg:svgBlip xmlns:asvg="http://schemas.microsoft.com/office/drawing/2016/SVG/main" r:embed="rId4"/>
-              </a:ext>
-            </a:extLst>
-          </a:blip>
-          <a:stretch>
-            <a:fillRect/>
-          </a:stretch>
-        </p:blipFill>
-        <p:spPr>
-          <a:xfrm>
-            <a:off x="914400" y="3191256"/>
-            <a:ext cx="10241280" cy="1024128"/>
-          </a:xfrm>
-          <a:prstGeom prst="rect">
-            <a:avLst/>
-          </a:prstGeom>
-        </p:spPr>
-      </p:pic>
-      <p:sp>
-        <p:nvSpPr>
-          <p:cNvPr id="16" name="Shape 12"/>
-          <p:cNvSpPr/>
-          <p:nvPr/>
-        </p:nvSpPr>
-        <p:spPr>
-          <a:xfrm>
-            <a:off x="914400" y="3191256"/>
-            <a:ext cx="10241280" cy="1024128"/>
-          </a:xfrm>
-          <a:prstGeom prst="rect">
-            <a:avLst/>
-          </a:prstGeom>
-          <a:solidFill>
-            <a:srgbClr val="17213A">
-              <a:alpha val="0"/>
-            </a:srgbClr>
-          </a:solidFill>
-          <a:ln w="12700">
-            <a:solidFill>
-              <a:srgbClr val="C4B5FD">
-                <a:alpha val="0"/>
-              </a:srgbClr>
-            </a:solidFill>
-            <a:prstDash val="solid"/>
-          </a:ln>
-          <a:effectLst>
-            <a:outerShdw sx="100000" sy="100000" kx="0" ky="0" algn="bl" rotWithShape="0" blurRad="30480" dist="50800" dir="2700000">
-              <a:srgbClr val="CBD5E1">
-                <a:alpha val="20000"/>
-              </a:srgbClr>
-            </a:outerShdw>
-            <a:glow rad="63500">
-              <a:srgbClr val="8A4FFF">
-                <a:alpha val="23000"/>
-              </a:srgbClr>
-            </a:glow>
-          </a:effectLst>
-        </p:spPr>
-      </p:sp>
-      <p:pic>
-        <p:nvPicPr>
-          <p:cNvPr id="17" name="Image 2" descr="preencoded.png">    </p:cNvPr>
-          <p:cNvPicPr>
-            <a:picLocks noChangeAspect="1"/>
-          </p:cNvPicPr>
-          <p:nvPr/>
-        </p:nvPicPr>
-        <p:blipFill>
-          <a:blip r:embed="rId5">
-            <a:extLst>
-              <a:ext uri="{96DAC541-7B7A-43D3-8B79-37D633B846F1}">
-                <asvg:svgBlip xmlns:asvg="http://schemas.microsoft.com/office/drawing/2016/SVG/main" r:embed="rId6"/>
-              </a:ext>
-            </a:extLst>
-          </a:blip>
-          <a:stretch>
-            <a:fillRect/>
-          </a:stretch>
-        </p:blipFill>
-        <p:spPr>
-          <a:xfrm>
-            <a:off x="914400" y="4507992"/>
-            <a:ext cx="10241280" cy="1024128"/>
-          </a:xfrm>
-          <a:prstGeom prst="rect">
-            <a:avLst/>
-          </a:prstGeom>
-        </p:spPr>
-      </p:pic>
-      <p:sp>
-        <p:nvSpPr>
-          <p:cNvPr id="18" name="Shape 13"/>
-          <p:cNvSpPr/>
-          <p:nvPr/>
-        </p:nvSpPr>
-        <p:spPr>
-          <a:xfrm>
-            <a:off x="914400" y="4507992"/>
-            <a:ext cx="10241280" cy="1024128"/>
-          </a:xfrm>
-          <a:prstGeom prst="rect">
-            <a:avLst/>
-          </a:prstGeom>
-          <a:solidFill>
-            <a:srgbClr val="17213A">
-              <a:alpha val="0"/>
-            </a:srgbClr>
-          </a:solidFill>
-          <a:ln w="12700">
-            <a:solidFill>
-              <a:srgbClr val="C4B5FD">
-                <a:alpha val="0"/>
-              </a:srgbClr>
-            </a:solidFill>
-            <a:prstDash val="solid"/>
-          </a:ln>
-          <a:effectLst>
-            <a:outerShdw sx="100000" sy="100000" kx="0" ky="0" algn="bl" rotWithShape="0" blurRad="30480" dist="50800" dir="2700000">
-              <a:srgbClr val="CBD5E1">
-                <a:alpha val="20000"/>
-              </a:srgbClr>
-            </a:outerShdw>
-            <a:glow rad="63500">
-              <a:srgbClr val="8A4FFF">
-                <a:alpha val="23000"/>
-              </a:srgbClr>
-            </a:glow>
-          </a:effectLst>
-        </p:spPr>
-      </p:sp>
-      <p:sp>
-        <p:nvSpPr>
-          <p:cNvPr id="19" name="Shape 14"/>
-          <p:cNvSpPr/>
-          <p:nvPr/>
-        </p:nvSpPr>
-        <p:spPr>
-          <a:xfrm>
-            <a:off x="786384" y="1956816"/>
-            <a:ext cx="32004" cy="3483864"/>
-          </a:xfrm>
-          <a:prstGeom prst="rect">
-            <a:avLst/>
-          </a:prstGeom>
-          <a:solidFill>
-            <a:srgbClr val="22D3EE">
-              <a:alpha val="80000"/>
-            </a:srgbClr>
+      <p:sp>
+        <p:nvSpPr>
+          <p:cNvPr id="13" name="Shape 11"/>
+          <p:cNvSpPr/>
+          <p:nvPr/>
+        </p:nvSpPr>
+        <p:spPr>
+          <a:xfrm>
+            <a:off x="4343400" y="1938528"/>
+            <a:ext cx="73152" cy="2514600"/>
+          </a:xfrm>
+          <a:prstGeom prst="rect">
+            <a:avLst/>
+          </a:prstGeom>
+          <a:solidFill>
+            <a:srgbClr val="22D3EE"/>
           </a:solidFill>
           <a:ln w="12700">
             <a:solidFill>
@@ -20725,14 +19356,14 @@
       </p:sp>
       <p:sp>
         <p:nvSpPr>
-          <p:cNvPr id="20" name="Shape 15"/>
-          <p:cNvSpPr/>
-          <p:nvPr/>
-        </p:nvSpPr>
-        <p:spPr>
-          <a:xfrm>
-            <a:off x="914400" y="1865376"/>
-            <a:ext cx="73152" cy="1024128"/>
+          <p:cNvPr id="14" name="Shape 12"/>
+          <p:cNvSpPr/>
+          <p:nvPr/>
+        </p:nvSpPr>
+        <p:spPr>
+          <a:xfrm>
+            <a:off x="7863840" y="1938528"/>
+            <a:ext cx="73152" cy="2514600"/>
           </a:xfrm>
           <a:prstGeom prst="rect">
             <a:avLst/>
@@ -20752,61 +19383,7 @@
       </p:sp>
       <p:sp>
         <p:nvSpPr>
-          <p:cNvPr id="21" name="Shape 16"/>
-          <p:cNvSpPr/>
-          <p:nvPr/>
-        </p:nvSpPr>
-        <p:spPr>
-          <a:xfrm>
-            <a:off x="914400" y="3191256"/>
-            <a:ext cx="73152" cy="1024128"/>
-          </a:xfrm>
-          <a:prstGeom prst="rect">
-            <a:avLst/>
-          </a:prstGeom>
-          <a:solidFill>
-            <a:srgbClr val="22D3EE"/>
-          </a:solidFill>
-          <a:ln w="12700">
-            <a:solidFill>
-              <a:srgbClr val="22D3EE">
-                <a:alpha val="0"/>
-              </a:srgbClr>
-            </a:solidFill>
-            <a:prstDash val="solid"/>
-          </a:ln>
-        </p:spPr>
-      </p:sp>
-      <p:sp>
-        <p:nvSpPr>
-          <p:cNvPr id="22" name="Shape 17"/>
-          <p:cNvSpPr/>
-          <p:nvPr/>
-        </p:nvSpPr>
-        <p:spPr>
-          <a:xfrm>
-            <a:off x="914400" y="4507992"/>
-            <a:ext cx="73152" cy="1024128"/>
-          </a:xfrm>
-          <a:prstGeom prst="rect">
-            <a:avLst/>
-          </a:prstGeom>
-          <a:solidFill>
-            <a:srgbClr val="8A4FFF"/>
-          </a:solidFill>
-          <a:ln w="12700">
-            <a:solidFill>
-              <a:srgbClr val="8A4FFF">
-                <a:alpha val="0"/>
-              </a:srgbClr>
-            </a:solidFill>
-            <a:prstDash val="solid"/>
-          </a:ln>
-        </p:spPr>
-      </p:sp>
-      <p:sp>
-        <p:nvSpPr>
-          <p:cNvPr id="23" name="mdpr:actions-output-review-326e07:title:__title:actions-output-review-326e07"/>
+          <p:cNvPr id="15" name="mdpr:actions-output-review-326e07:title:__title:actions-output-review-326e07"/>
           <p:cNvSpPr txBox="1"/>
           <p:nvPr/>
         </p:nvSpPr>
@@ -20848,14 +19425,14 @@
       </p:sp>
       <p:sp>
         <p:nvSpPr>
-          <p:cNvPr id="24" name="mdpr:actions-output-review-326e07:item-1:block-41"/>
+          <p:cNvPr id="16" name="mdpr:actions-output-review-326e07:item-1:block-41"/>
           <p:cNvSpPr txBox="1"/>
           <p:nvPr/>
         </p:nvSpPr>
         <p:spPr>
           <a:xfrm>
-            <a:off x="1133856" y="1957548"/>
-            <a:ext cx="9820656" cy="839785"/>
+            <a:off x="1042416" y="2103120"/>
+            <a:ext cx="2825496" cy="2185416"/>
           </a:xfrm>
           <a:prstGeom prst="rect">
             <a:avLst/>
@@ -20907,14 +19484,14 @@
       </p:sp>
       <p:sp>
         <p:nvSpPr>
-          <p:cNvPr id="25" name="mdpr:actions-output-review-326e07:item-2:block-41"/>
+          <p:cNvPr id="17" name="mdpr:actions-output-review-326e07:item-2:block-41"/>
           <p:cNvSpPr txBox="1"/>
           <p:nvPr/>
         </p:nvSpPr>
         <p:spPr>
           <a:xfrm>
-            <a:off x="1133856" y="3283428"/>
-            <a:ext cx="9820656" cy="839785"/>
+            <a:off x="4562856" y="2103120"/>
+            <a:ext cx="2825496" cy="2185416"/>
           </a:xfrm>
           <a:prstGeom prst="rect">
             <a:avLst/>
@@ -20966,14 +19543,14 @@
       </p:sp>
       <p:sp>
         <p:nvSpPr>
-          <p:cNvPr id="26" name="mdpr:actions-output-review-326e07:item-3:block-41"/>
+          <p:cNvPr id="18" name="mdpr:actions-output-review-326e07:item-3:block-41"/>
           <p:cNvSpPr txBox="1"/>
           <p:nvPr/>
         </p:nvSpPr>
         <p:spPr>
           <a:xfrm>
-            <a:off x="1133856" y="4600164"/>
-            <a:ext cx="9820656" cy="839785"/>
+            <a:off x="8083296" y="2103120"/>
+            <a:ext cx="2825496" cy="2185416"/>
           </a:xfrm>
           <a:prstGeom prst="rect">
             <a:avLst/>
@@ -21365,8 +19942,8 @@
         </p:nvSpPr>
         <p:spPr>
           <a:xfrm>
-            <a:off x="731520" y="1207008"/>
-            <a:ext cx="1325880" cy="54864"/>
+            <a:off x="822960" y="1737360"/>
+            <a:ext cx="73152" cy="841248"/>
           </a:xfrm>
           <a:prstGeom prst="rect">
             <a:avLst/>
@@ -21392,35 +19969,8 @@
         </p:nvSpPr>
         <p:spPr>
           <a:xfrm>
-            <a:off x="822960" y="3099816"/>
-            <a:ext cx="10515600" cy="45720"/>
-          </a:xfrm>
-          <a:prstGeom prst="rect">
-            <a:avLst/>
-          </a:prstGeom>
-          <a:solidFill>
-            <a:srgbClr val="8A4FFF"/>
-          </a:solidFill>
-          <a:ln w="12700">
-            <a:solidFill>
-              <a:srgbClr val="8A4FFF">
-                <a:alpha val="0"/>
-              </a:srgbClr>
-            </a:solidFill>
-            <a:prstDash val="solid"/>
-          </a:ln>
-        </p:spPr>
-      </p:sp>
-      <p:sp>
-        <p:nvSpPr>
-          <p:cNvPr id="14" name="Shape 12"/>
-          <p:cNvSpPr/>
-          <p:nvPr/>
-        </p:nvSpPr>
-        <p:spPr>
-          <a:xfrm>
-            <a:off x="822960" y="4288536"/>
-            <a:ext cx="2011680" cy="45720"/>
+            <a:off x="822960" y="2779776"/>
+            <a:ext cx="73152" cy="841248"/>
           </a:xfrm>
           <a:prstGeom prst="rect">
             <a:avLst/>
@@ -21440,19 +19990,73 @@
       </p:sp>
       <p:sp>
         <p:nvSpPr>
+          <p:cNvPr id="14" name="Shape 12"/>
+          <p:cNvSpPr/>
+          <p:nvPr/>
+        </p:nvSpPr>
+        <p:spPr>
+          <a:xfrm>
+            <a:off x="822960" y="3822192"/>
+            <a:ext cx="73152" cy="841248"/>
+          </a:xfrm>
+          <a:prstGeom prst="rect">
+            <a:avLst/>
+          </a:prstGeom>
+          <a:solidFill>
+            <a:srgbClr val="8A4FFF"/>
+          </a:solidFill>
+          <a:ln w="12700">
+            <a:solidFill>
+              <a:srgbClr val="8A4FFF">
+                <a:alpha val="0"/>
+              </a:srgbClr>
+            </a:solidFill>
+            <a:prstDash val="solid"/>
+          </a:ln>
+        </p:spPr>
+      </p:sp>
+      <p:sp>
+        <p:nvSpPr>
           <p:cNvPr id="15" name="Shape 13"/>
           <p:cNvSpPr/>
           <p:nvPr/>
         </p:nvSpPr>
         <p:spPr>
           <a:xfrm>
-            <a:off x="822960" y="3300984"/>
+            <a:off x="822960" y="4864608"/>
             <a:ext cx="73152" cy="841248"/>
           </a:xfrm>
           <a:prstGeom prst="rect">
             <a:avLst/>
           </a:prstGeom>
           <a:solidFill>
+            <a:srgbClr val="22D3EE"/>
+          </a:solidFill>
+          <a:ln w="12700">
+            <a:solidFill>
+              <a:srgbClr val="22D3EE">
+                <a:alpha val="0"/>
+              </a:srgbClr>
+            </a:solidFill>
+            <a:prstDash val="solid"/>
+          </a:ln>
+        </p:spPr>
+      </p:sp>
+      <p:sp>
+        <p:nvSpPr>
+          <p:cNvPr id="16" name="Shape 14"/>
+          <p:cNvSpPr/>
+          <p:nvPr/>
+        </p:nvSpPr>
+        <p:spPr>
+          <a:xfrm>
+            <a:off x="6272784" y="1737360"/>
+            <a:ext cx="73152" cy="841248"/>
+          </a:xfrm>
+          <a:prstGeom prst="rect">
+            <a:avLst/>
+          </a:prstGeom>
+          <a:solidFill>
             <a:srgbClr val="8A4FFF"/>
           </a:solidFill>
           <a:ln w="12700">
@@ -21467,7 +20071,61 @@
       </p:sp>
       <p:sp>
         <p:nvSpPr>
-          <p:cNvPr id="16" name="mdpr:2-2-7bfb60:title:__title:2-2-7bfb60"/>
+          <p:cNvPr id="17" name="Shape 15"/>
+          <p:cNvSpPr/>
+          <p:nvPr/>
+        </p:nvSpPr>
+        <p:spPr>
+          <a:xfrm>
+            <a:off x="6272784" y="2779776"/>
+            <a:ext cx="73152" cy="841248"/>
+          </a:xfrm>
+          <a:prstGeom prst="rect">
+            <a:avLst/>
+          </a:prstGeom>
+          <a:solidFill>
+            <a:srgbClr val="22D3EE"/>
+          </a:solidFill>
+          <a:ln w="12700">
+            <a:solidFill>
+              <a:srgbClr val="22D3EE">
+                <a:alpha val="0"/>
+              </a:srgbClr>
+            </a:solidFill>
+            <a:prstDash val="solid"/>
+          </a:ln>
+        </p:spPr>
+      </p:sp>
+      <p:sp>
+        <p:nvSpPr>
+          <p:cNvPr id="18" name="Shape 16"/>
+          <p:cNvSpPr/>
+          <p:nvPr/>
+        </p:nvSpPr>
+        <p:spPr>
+          <a:xfrm>
+            <a:off x="6272784" y="3822192"/>
+            <a:ext cx="73152" cy="841248"/>
+          </a:xfrm>
+          <a:prstGeom prst="rect">
+            <a:avLst/>
+          </a:prstGeom>
+          <a:solidFill>
+            <a:srgbClr val="8A4FFF"/>
+          </a:solidFill>
+          <a:ln w="12700">
+            <a:solidFill>
+              <a:srgbClr val="8A4FFF">
+                <a:alpha val="0"/>
+              </a:srgbClr>
+            </a:solidFill>
+            <a:prstDash val="solid"/>
+          </a:ln>
+        </p:spPr>
+      </p:sp>
+      <p:sp>
+        <p:nvSpPr>
+          <p:cNvPr id="19" name="mdpr:2-2-7bfb60:title:__title:2-2-7bfb60"/>
           <p:cNvSpPr txBox="1"/>
           <p:nvPr/>
         </p:nvSpPr>
@@ -21501,7 +20159,24 @@
                 <a:ea typeface="Pretendard" pitchFamily="34" charset="-122"/>
                 <a:cs typeface="Pretendard" pitchFamily="34" charset="-120"/>
               </a:rPr>
-              <a:t>Agenda (Cont. 2/2)</a:t>
+              <a:t>Agenda</a:t>
+            </a:r>
+            <a:pPr algn="ctr" indent="0" marL="0">
+              <a:lnSpc>
+                <a:spcPct val="120000"/>
+              </a:lnSpc>
+              <a:buNone/>
+            </a:pPr>
+            <a:r>
+              <a:rPr lang="en-US" sz="2300" dirty="0">
+                <a:solidFill>
+                  <a:srgbClr val="6C6C6C"/>
+                </a:solidFill>
+                <a:latin typeface="Pretendard" pitchFamily="34" charset="0"/>
+                <a:ea typeface="Pretendard" pitchFamily="34" charset="-122"/>
+                <a:cs typeface="Pretendard" pitchFamily="34" charset="-120"/>
+              </a:rPr>
+              <a:t> (Cont. 2/2)</a:t>
             </a:r>
             <a:endParaRPr lang="en-US" sz="3800" dirty="0"/>
           </a:p>
@@ -21509,14 +20184,14 @@
       </p:sp>
       <p:sp>
         <p:nvSpPr>
-          <p:cNvPr id="17" name="mdpr:2-2-7bfb60:toc-item-1:toc-item-15"/>
+          <p:cNvPr id="20" name="mdpr:2-2-7bfb60:toc-item-1:toc-item-9"/>
           <p:cNvSpPr txBox="1"/>
           <p:nvPr/>
         </p:nvSpPr>
         <p:spPr>
           <a:xfrm>
-            <a:off x="1042416" y="3392424"/>
-            <a:ext cx="10094976" cy="658368"/>
+            <a:off x="1042416" y="1828800"/>
+            <a:ext cx="4645152" cy="658368"/>
           </a:xfrm>
           <a:prstGeom prst="rect">
             <a:avLst/>
@@ -21535,7 +20210,7 @@
               <a:buNone/>
             </a:pPr>
             <a:r>
-              <a:rPr lang="en-US" sz="2200" dirty="0">
+              <a:rPr lang="en-US" sz="1800" dirty="0">
                 <a:solidFill>
                   <a:srgbClr val="F8F8F8"/>
                 </a:solidFill>
@@ -21543,9 +20218,261 @@
                 <a:ea typeface="Pretendard" pitchFamily="34" charset="-122"/>
                 <a:cs typeface="Pretendard" pitchFamily="34" charset="-120"/>
               </a:rPr>
-              <a:t>01  Actions Output Review</a:t>
+              <a:t>09  Editable Proof Objects</a:t>
             </a:r>
-            <a:endParaRPr lang="en-US" sz="2200" dirty="0"/>
+            <a:endParaRPr lang="en-US" sz="1800" dirty="0"/>
+          </a:p>
+        </p:txBody>
+      </p:sp>
+      <p:sp>
+        <p:nvSpPr>
+          <p:cNvPr id="21" name="mdpr:2-2-7bfb60:toc-item-2:toc-item-10"/>
+          <p:cNvSpPr txBox="1"/>
+          <p:nvPr/>
+        </p:nvSpPr>
+        <p:spPr>
+          <a:xfrm>
+            <a:off x="1042416" y="2871216"/>
+            <a:ext cx="4645152" cy="658368"/>
+          </a:xfrm>
+          <a:prstGeom prst="rect">
+            <a:avLst/>
+          </a:prstGeom>
+          <a:noFill/>
+          <a:ln/>
+        </p:spPr>
+        <p:txBody>
+          <a:bodyPr wrap="square" lIns="0" tIns="25400" rIns="25400" bIns="0" rtlCol="0" anchor="ctr"/>
+          <a:lstStyle/>
+          <a:p>
+            <a:pPr algn="ctr" indent="0" marL="0">
+              <a:lnSpc>
+                <a:spcPct val="120000"/>
+              </a:lnSpc>
+              <a:buNone/>
+            </a:pPr>
+            <a:r>
+              <a:rPr lang="en-US" sz="1800" dirty="0">
+                <a:solidFill>
+                  <a:srgbClr val="F8F8F8"/>
+                </a:solidFill>
+                <a:latin typeface="Pretendard" pitchFamily="34" charset="0"/>
+                <a:ea typeface="Pretendard" pitchFamily="34" charset="-122"/>
+                <a:cs typeface="Pretendard" pitchFamily="34" charset="-120"/>
+              </a:rPr>
+              <a:t>10  Object Shape Grammar</a:t>
+            </a:r>
+            <a:endParaRPr lang="en-US" sz="1800" dirty="0"/>
+          </a:p>
+        </p:txBody>
+      </p:sp>
+      <p:sp>
+        <p:nvSpPr>
+          <p:cNvPr id="22" name="mdpr:2-2-7bfb60:toc-item-3:toc-item-11"/>
+          <p:cNvSpPr txBox="1"/>
+          <p:nvPr/>
+        </p:nvSpPr>
+        <p:spPr>
+          <a:xfrm>
+            <a:off x="1042416" y="3913632"/>
+            <a:ext cx="4645152" cy="658368"/>
+          </a:xfrm>
+          <a:prstGeom prst="rect">
+            <a:avLst/>
+          </a:prstGeom>
+          <a:noFill/>
+          <a:ln/>
+        </p:spPr>
+        <p:txBody>
+          <a:bodyPr wrap="square" lIns="0" tIns="25400" rIns="25400" bIns="0" rtlCol="0" anchor="ctr"/>
+          <a:lstStyle/>
+          <a:p>
+            <a:pPr algn="ctr" indent="0" marL="0">
+              <a:lnSpc>
+                <a:spcPct val="120000"/>
+              </a:lnSpc>
+              <a:buNone/>
+            </a:pPr>
+            <a:r>
+              <a:rPr lang="en-US" sz="1800" dirty="0">
+                <a:solidFill>
+                  <a:srgbClr val="F8F8F8"/>
+                </a:solidFill>
+                <a:latin typeface="Pretendard" pitchFamily="34" charset="0"/>
+                <a:ea typeface="Pretendard" pitchFamily="34" charset="-122"/>
+                <a:cs typeface="Pretendard" pitchFamily="34" charset="-120"/>
+              </a:rPr>
+              <a:t>11  Icon and Text Aside</a:t>
+            </a:r>
+            <a:endParaRPr lang="en-US" sz="1800" dirty="0"/>
+          </a:p>
+        </p:txBody>
+      </p:sp>
+      <p:sp>
+        <p:nvSpPr>
+          <p:cNvPr id="23" name="mdpr:2-2-7bfb60:toc-item-4:toc-item-12"/>
+          <p:cNvSpPr txBox="1"/>
+          <p:nvPr/>
+        </p:nvSpPr>
+        <p:spPr>
+          <a:xfrm>
+            <a:off x="1042416" y="4956048"/>
+            <a:ext cx="4645152" cy="658368"/>
+          </a:xfrm>
+          <a:prstGeom prst="rect">
+            <a:avLst/>
+          </a:prstGeom>
+          <a:noFill/>
+          <a:ln/>
+        </p:spPr>
+        <p:txBody>
+          <a:bodyPr wrap="square" lIns="0" tIns="25400" rIns="25400" bIns="0" rtlCol="0" anchor="ctr"/>
+          <a:lstStyle/>
+          <a:p>
+            <a:pPr algn="ctr" indent="0" marL="0">
+              <a:lnSpc>
+                <a:spcPct val="120000"/>
+              </a:lnSpc>
+              <a:buNone/>
+            </a:pPr>
+            <a:r>
+              <a:rPr lang="en-US" sz="1800" dirty="0">
+                <a:solidFill>
+                  <a:srgbClr val="F8F8F8"/>
+                </a:solidFill>
+                <a:latin typeface="Pretendard" pitchFamily="34" charset="0"/>
+                <a:ea typeface="Pretendard" pitchFamily="34" charset="-122"/>
+                <a:cs typeface="Pretendard" pitchFamily="34" charset="-120"/>
+              </a:rPr>
+              <a:t>12  Overflow Guard</a:t>
+            </a:r>
+            <a:endParaRPr lang="en-US" sz="1800" dirty="0"/>
+          </a:p>
+        </p:txBody>
+      </p:sp>
+      <p:sp>
+        <p:nvSpPr>
+          <p:cNvPr id="24" name="mdpr:2-2-7bfb60:toc-item-5:toc-item-13"/>
+          <p:cNvSpPr txBox="1"/>
+          <p:nvPr/>
+        </p:nvSpPr>
+        <p:spPr>
+          <a:xfrm>
+            <a:off x="6492240" y="1828800"/>
+            <a:ext cx="4645152" cy="658368"/>
+          </a:xfrm>
+          <a:prstGeom prst="rect">
+            <a:avLst/>
+          </a:prstGeom>
+          <a:noFill/>
+          <a:ln/>
+        </p:spPr>
+        <p:txBody>
+          <a:bodyPr wrap="square" lIns="0" tIns="25400" rIns="25400" bIns="0" rtlCol="0" anchor="ctr"/>
+          <a:lstStyle/>
+          <a:p>
+            <a:pPr algn="ctr" indent="0" marL="0">
+              <a:lnSpc>
+                <a:spcPct val="120000"/>
+              </a:lnSpc>
+              <a:buNone/>
+            </a:pPr>
+            <a:r>
+              <a:rPr lang="en-US" sz="1800" dirty="0">
+                <a:solidFill>
+                  <a:srgbClr val="F8F8F8"/>
+                </a:solidFill>
+                <a:latin typeface="Pretendard" pitchFamily="34" charset="0"/>
+                <a:ea typeface="Pretendard" pitchFamily="34" charset="-122"/>
+                <a:cs typeface="Pretendard" pitchFamily="34" charset="-120"/>
+              </a:rPr>
+              <a:t>13  Image Safe Frame</a:t>
+            </a:r>
+            <a:endParaRPr lang="en-US" sz="1800" dirty="0"/>
+          </a:p>
+        </p:txBody>
+      </p:sp>
+      <p:sp>
+        <p:nvSpPr>
+          <p:cNvPr id="25" name="mdpr:2-2-7bfb60:toc-item-6:toc-item-14"/>
+          <p:cNvSpPr txBox="1"/>
+          <p:nvPr/>
+        </p:nvSpPr>
+        <p:spPr>
+          <a:xfrm>
+            <a:off x="6492240" y="2871216"/>
+            <a:ext cx="4645152" cy="658368"/>
+          </a:xfrm>
+          <a:prstGeom prst="rect">
+            <a:avLst/>
+          </a:prstGeom>
+          <a:noFill/>
+          <a:ln/>
+        </p:spPr>
+        <p:txBody>
+          <a:bodyPr wrap="square" lIns="0" tIns="25400" rIns="25400" bIns="0" rtlCol="0" anchor="ctr"/>
+          <a:lstStyle/>
+          <a:p>
+            <a:pPr algn="ctr" indent="0" marL="0">
+              <a:lnSpc>
+                <a:spcPct val="120000"/>
+              </a:lnSpc>
+              <a:buNone/>
+            </a:pPr>
+            <a:r>
+              <a:rPr lang="en-US" sz="1800" dirty="0">
+                <a:solidFill>
+                  <a:srgbClr val="F8F8F8"/>
+                </a:solidFill>
+                <a:latin typeface="Pretendard" pitchFamily="34" charset="0"/>
+                <a:ea typeface="Pretendard" pitchFamily="34" charset="-122"/>
+                <a:cs typeface="Pretendard" pitchFamily="34" charset="-120"/>
+              </a:rPr>
+              <a:t>14  Mixed Object Packing</a:t>
+            </a:r>
+            <a:endParaRPr lang="en-US" sz="1800" dirty="0"/>
+          </a:p>
+        </p:txBody>
+      </p:sp>
+      <p:sp>
+        <p:nvSpPr>
+          <p:cNvPr id="26" name="mdpr:2-2-7bfb60:toc-item-7:toc-item-15"/>
+          <p:cNvSpPr txBox="1"/>
+          <p:nvPr/>
+        </p:nvSpPr>
+        <p:spPr>
+          <a:xfrm>
+            <a:off x="6492240" y="3913632"/>
+            <a:ext cx="4645152" cy="658368"/>
+          </a:xfrm>
+          <a:prstGeom prst="rect">
+            <a:avLst/>
+          </a:prstGeom>
+          <a:noFill/>
+          <a:ln/>
+        </p:spPr>
+        <p:txBody>
+          <a:bodyPr wrap="square" lIns="0" tIns="25400" rIns="25400" bIns="0" rtlCol="0" anchor="ctr"/>
+          <a:lstStyle/>
+          <a:p>
+            <a:pPr algn="ctr" indent="0" marL="0">
+              <a:lnSpc>
+                <a:spcPct val="120000"/>
+              </a:lnSpc>
+              <a:buNone/>
+            </a:pPr>
+            <a:r>
+              <a:rPr lang="en-US" sz="1800" dirty="0">
+                <a:solidFill>
+                  <a:srgbClr val="F8F8F8"/>
+                </a:solidFill>
+                <a:latin typeface="Pretendard" pitchFamily="34" charset="0"/>
+                <a:ea typeface="Pretendard" pitchFamily="34" charset="-122"/>
+                <a:cs typeface="Pretendard" pitchFamily="34" charset="-120"/>
+              </a:rPr>
+              <a:t>15  Actions Output Review</a:t>
+            </a:r>
+            <a:endParaRPr lang="en-US" sz="1800" dirty="0"/>
           </a:p>
         </p:txBody>
       </p:sp>
@@ -21883,36 +20810,9 @@
           </a:ln>
         </p:spPr>
       </p:sp>
-      <p:sp>
-        <p:nvSpPr>
-          <p:cNvPr id="12" name="Shape 10"/>
-          <p:cNvSpPr/>
-          <p:nvPr/>
-        </p:nvSpPr>
-        <p:spPr>
-          <a:xfrm>
-            <a:off x="731520" y="1207008"/>
-            <a:ext cx="1325880" cy="54864"/>
-          </a:xfrm>
-          <a:prstGeom prst="rect">
-            <a:avLst/>
-          </a:prstGeom>
-          <a:solidFill>
-            <a:srgbClr val="8A4FFF"/>
-          </a:solidFill>
-          <a:ln w="12700">
-            <a:solidFill>
-              <a:srgbClr val="8A4FFF">
-                <a:alpha val="0"/>
-              </a:srgbClr>
-            </a:solidFill>
-            <a:prstDash val="solid"/>
-          </a:ln>
-        </p:spPr>
-      </p:sp>
       <p:pic>
         <p:nvPicPr>
-          <p:cNvPr id="13" name="Image 0" descr="preencoded.png">    </p:cNvPr>
+          <p:cNvPr id="12" name="Image 0" descr="preencoded.png">    </p:cNvPr>
           <p:cNvPicPr>
             <a:picLocks noChangeAspect="1"/>
           </p:cNvPicPr>
@@ -21942,7 +20842,7 @@
       </p:pic>
       <p:sp>
         <p:nvSpPr>
-          <p:cNvPr id="14" name="Shape 11"/>
+          <p:cNvPr id="13" name="Shape 10"/>
           <p:cNvSpPr/>
           <p:nvPr/>
         </p:nvSpPr>
@@ -21983,7 +20883,7 @@
       </p:sp>
       <p:sp>
         <p:nvSpPr>
-          <p:cNvPr id="15" name="Shape 12"/>
+          <p:cNvPr id="14" name="Shape 11"/>
           <p:cNvSpPr/>
           <p:nvPr/>
         </p:nvSpPr>
@@ -22012,7 +20912,7 @@
       </p:sp>
       <p:sp>
         <p:nvSpPr>
-          <p:cNvPr id="16" name="Shape 13"/>
+          <p:cNvPr id="15" name="Shape 12"/>
           <p:cNvSpPr/>
           <p:nvPr/>
         </p:nvSpPr>
@@ -22039,7 +20939,7 @@
       </p:sp>
       <p:sp>
         <p:nvSpPr>
-          <p:cNvPr id="17" name="mdpr:teaser-summary-7731dc:title:__title:teaser-summary-7731dc"/>
+          <p:cNvPr id="16" name="mdpr:teaser-summary-7731dc:title:__title:teaser-summary-7731dc"/>
           <p:cNvSpPr txBox="1"/>
           <p:nvPr/>
         </p:nvSpPr>
@@ -22081,7 +20981,7 @@
       </p:sp>
       <p:sp>
         <p:nvSpPr>
-          <p:cNvPr id="18" name="mdpr:teaser-summary-7731dc:key-message:block-3"/>
+          <p:cNvPr id="17" name="mdpr:teaser-summary-7731dc:key-message:block-3"/>
           <p:cNvSpPr txBox="1"/>
           <p:nvPr/>
         </p:nvSpPr>
@@ -22123,7 +21023,7 @@
       </p:sp>
       <p:sp>
         <p:nvSpPr>
-          <p:cNvPr id="19" name="mdpr:teaser-summary-7731dc:body:block-4"/>
+          <p:cNvPr id="18" name="mdpr:teaser-summary-7731dc:body:block-4"/>
           <p:cNvSpPr txBox="1"/>
           <p:nvPr/>
         </p:nvSpPr>
@@ -22642,8 +21542,8 @@
         </p:nvSpPr>
         <p:spPr>
           <a:xfrm>
-            <a:off x="731520" y="1207008"/>
-            <a:ext cx="1325880" cy="54864"/>
+            <a:off x="822960" y="1938528"/>
+            <a:ext cx="73152" cy="2514600"/>
           </a:xfrm>
           <a:prstGeom prst="rect">
             <a:avLst/>
@@ -22661,237 +21561,22 @@
           </a:ln>
         </p:spPr>
       </p:sp>
-      <p:pic>
-        <p:nvPicPr>
-          <p:cNvPr id="13" name="Image 0" descr="preencoded.png">    </p:cNvPr>
-          <p:cNvPicPr>
-            <a:picLocks noChangeAspect="1"/>
-          </p:cNvPicPr>
-          <p:nvPr/>
-        </p:nvPicPr>
-        <p:blipFill>
-          <a:blip r:embed="rId1">
-            <a:extLst>
-              <a:ext uri="{96DAC541-7B7A-43D3-8B79-37D633B846F1}">
-                <asvg:svgBlip xmlns:asvg="http://schemas.microsoft.com/office/drawing/2016/SVG/main" r:embed="rId2"/>
-              </a:ext>
-            </a:extLst>
-          </a:blip>
-          <a:stretch>
-            <a:fillRect/>
-          </a:stretch>
-        </p:blipFill>
-        <p:spPr>
-          <a:xfrm>
-            <a:off x="914400" y="1865376"/>
-            <a:ext cx="10241280" cy="1024128"/>
-          </a:xfrm>
-          <a:prstGeom prst="rect">
-            <a:avLst/>
-          </a:prstGeom>
-        </p:spPr>
-      </p:pic>
-      <p:sp>
-        <p:nvSpPr>
-          <p:cNvPr id="14" name="Shape 11"/>
-          <p:cNvSpPr/>
-          <p:nvPr/>
-        </p:nvSpPr>
-        <p:spPr>
-          <a:xfrm>
-            <a:off x="914400" y="1865376"/>
-            <a:ext cx="10241280" cy="1024128"/>
-          </a:xfrm>
-          <a:prstGeom prst="rect">
-            <a:avLst/>
-          </a:prstGeom>
-          <a:solidFill>
-            <a:srgbClr val="17213A">
-              <a:alpha val="0"/>
-            </a:srgbClr>
-          </a:solidFill>
-          <a:ln w="12700">
-            <a:solidFill>
-              <a:srgbClr val="C4B5FD">
-                <a:alpha val="0"/>
-              </a:srgbClr>
-            </a:solidFill>
-            <a:prstDash val="solid"/>
-          </a:ln>
-          <a:effectLst>
-            <a:outerShdw sx="100000" sy="100000" kx="0" ky="0" algn="bl" rotWithShape="0" blurRad="30480" dist="50800" dir="2700000">
-              <a:srgbClr val="CBD5E1">
-                <a:alpha val="20000"/>
-              </a:srgbClr>
-            </a:outerShdw>
-            <a:glow rad="63500">
-              <a:srgbClr val="8A4FFF">
-                <a:alpha val="23000"/>
-              </a:srgbClr>
-            </a:glow>
-          </a:effectLst>
-        </p:spPr>
-      </p:sp>
-      <p:pic>
-        <p:nvPicPr>
-          <p:cNvPr id="15" name="Image 1" descr="preencoded.png">    </p:cNvPr>
-          <p:cNvPicPr>
-            <a:picLocks noChangeAspect="1"/>
-          </p:cNvPicPr>
-          <p:nvPr/>
-        </p:nvPicPr>
-        <p:blipFill>
-          <a:blip r:embed="rId3">
-            <a:extLst>
-              <a:ext uri="{96DAC541-7B7A-43D3-8B79-37D633B846F1}">
-                <asvg:svgBlip xmlns:asvg="http://schemas.microsoft.com/office/drawing/2016/SVG/main" r:embed="rId4"/>
-              </a:ext>
-            </a:extLst>
-          </a:blip>
-          <a:stretch>
-            <a:fillRect/>
-          </a:stretch>
-        </p:blipFill>
-        <p:spPr>
-          <a:xfrm>
-            <a:off x="914400" y="3191256"/>
-            <a:ext cx="10241280" cy="1024128"/>
-          </a:xfrm>
-          <a:prstGeom prst="rect">
-            <a:avLst/>
-          </a:prstGeom>
-        </p:spPr>
-      </p:pic>
-      <p:sp>
-        <p:nvSpPr>
-          <p:cNvPr id="16" name="Shape 12"/>
-          <p:cNvSpPr/>
-          <p:nvPr/>
-        </p:nvSpPr>
-        <p:spPr>
-          <a:xfrm>
-            <a:off x="914400" y="3191256"/>
-            <a:ext cx="10241280" cy="1024128"/>
-          </a:xfrm>
-          <a:prstGeom prst="rect">
-            <a:avLst/>
-          </a:prstGeom>
-          <a:solidFill>
-            <a:srgbClr val="17213A">
-              <a:alpha val="0"/>
-            </a:srgbClr>
-          </a:solidFill>
-          <a:ln w="12700">
-            <a:solidFill>
-              <a:srgbClr val="C4B5FD">
-                <a:alpha val="0"/>
-              </a:srgbClr>
-            </a:solidFill>
-            <a:prstDash val="solid"/>
-          </a:ln>
-          <a:effectLst>
-            <a:outerShdw sx="100000" sy="100000" kx="0" ky="0" algn="bl" rotWithShape="0" blurRad="30480" dist="50800" dir="2700000">
-              <a:srgbClr val="CBD5E1">
-                <a:alpha val="20000"/>
-              </a:srgbClr>
-            </a:outerShdw>
-            <a:glow rad="63500">
-              <a:srgbClr val="8A4FFF">
-                <a:alpha val="23000"/>
-              </a:srgbClr>
-            </a:glow>
-          </a:effectLst>
-        </p:spPr>
-      </p:sp>
-      <p:pic>
-        <p:nvPicPr>
-          <p:cNvPr id="17" name="Image 2" descr="preencoded.png">    </p:cNvPr>
-          <p:cNvPicPr>
-            <a:picLocks noChangeAspect="1"/>
-          </p:cNvPicPr>
-          <p:nvPr/>
-        </p:nvPicPr>
-        <p:blipFill>
-          <a:blip r:embed="rId5">
-            <a:extLst>
-              <a:ext uri="{96DAC541-7B7A-43D3-8B79-37D633B846F1}">
-                <asvg:svgBlip xmlns:asvg="http://schemas.microsoft.com/office/drawing/2016/SVG/main" r:embed="rId6"/>
-              </a:ext>
-            </a:extLst>
-          </a:blip>
-          <a:stretch>
-            <a:fillRect/>
-          </a:stretch>
-        </p:blipFill>
-        <p:spPr>
-          <a:xfrm>
-            <a:off x="914400" y="4507992"/>
-            <a:ext cx="10241280" cy="1024128"/>
-          </a:xfrm>
-          <a:prstGeom prst="rect">
-            <a:avLst/>
-          </a:prstGeom>
-        </p:spPr>
-      </p:pic>
-      <p:sp>
-        <p:nvSpPr>
-          <p:cNvPr id="18" name="Shape 13"/>
-          <p:cNvSpPr/>
-          <p:nvPr/>
-        </p:nvSpPr>
-        <p:spPr>
-          <a:xfrm>
-            <a:off x="914400" y="4507992"/>
-            <a:ext cx="10241280" cy="1024128"/>
-          </a:xfrm>
-          <a:prstGeom prst="rect">
-            <a:avLst/>
-          </a:prstGeom>
-          <a:solidFill>
-            <a:srgbClr val="17213A">
-              <a:alpha val="0"/>
-            </a:srgbClr>
-          </a:solidFill>
-          <a:ln w="12700">
-            <a:solidFill>
-              <a:srgbClr val="C4B5FD">
-                <a:alpha val="0"/>
-              </a:srgbClr>
-            </a:solidFill>
-            <a:prstDash val="solid"/>
-          </a:ln>
-          <a:effectLst>
-            <a:outerShdw sx="100000" sy="100000" kx="0" ky="0" algn="bl" rotWithShape="0" blurRad="30480" dist="50800" dir="2700000">
-              <a:srgbClr val="CBD5E1">
-                <a:alpha val="20000"/>
-              </a:srgbClr>
-            </a:outerShdw>
-            <a:glow rad="63500">
-              <a:srgbClr val="8A4FFF">
-                <a:alpha val="23000"/>
-              </a:srgbClr>
-            </a:glow>
-          </a:effectLst>
-        </p:spPr>
-      </p:sp>
-      <p:sp>
-        <p:nvSpPr>
-          <p:cNvPr id="19" name="Shape 14"/>
-          <p:cNvSpPr/>
-          <p:nvPr/>
-        </p:nvSpPr>
-        <p:spPr>
-          <a:xfrm>
-            <a:off x="786384" y="1956816"/>
-            <a:ext cx="32004" cy="3483864"/>
-          </a:xfrm>
-          <a:prstGeom prst="rect">
-            <a:avLst/>
-          </a:prstGeom>
-          <a:solidFill>
-            <a:srgbClr val="22D3EE">
-              <a:alpha val="80000"/>
-            </a:srgbClr>
+      <p:sp>
+        <p:nvSpPr>
+          <p:cNvPr id="13" name="Shape 11"/>
+          <p:cNvSpPr/>
+          <p:nvPr/>
+        </p:nvSpPr>
+        <p:spPr>
+          <a:xfrm>
+            <a:off x="4343400" y="1938528"/>
+            <a:ext cx="73152" cy="2514600"/>
+          </a:xfrm>
+          <a:prstGeom prst="rect">
+            <a:avLst/>
+          </a:prstGeom>
+          <a:solidFill>
+            <a:srgbClr val="22D3EE"/>
           </a:solidFill>
           <a:ln w="12700">
             <a:solidFill>
@@ -22905,14 +21590,14 @@
       </p:sp>
       <p:sp>
         <p:nvSpPr>
-          <p:cNvPr id="20" name="Shape 15"/>
-          <p:cNvSpPr/>
-          <p:nvPr/>
-        </p:nvSpPr>
-        <p:spPr>
-          <a:xfrm>
-            <a:off x="914400" y="1865376"/>
-            <a:ext cx="73152" cy="1024128"/>
+          <p:cNvPr id="14" name="Shape 12"/>
+          <p:cNvSpPr/>
+          <p:nvPr/>
+        </p:nvSpPr>
+        <p:spPr>
+          <a:xfrm>
+            <a:off x="7863840" y="1938528"/>
+            <a:ext cx="73152" cy="2514600"/>
           </a:xfrm>
           <a:prstGeom prst="rect">
             <a:avLst/>
@@ -22932,61 +21617,7 @@
       </p:sp>
       <p:sp>
         <p:nvSpPr>
-          <p:cNvPr id="21" name="Shape 16"/>
-          <p:cNvSpPr/>
-          <p:nvPr/>
-        </p:nvSpPr>
-        <p:spPr>
-          <a:xfrm>
-            <a:off x="914400" y="3191256"/>
-            <a:ext cx="73152" cy="1024128"/>
-          </a:xfrm>
-          <a:prstGeom prst="rect">
-            <a:avLst/>
-          </a:prstGeom>
-          <a:solidFill>
-            <a:srgbClr val="22D3EE"/>
-          </a:solidFill>
-          <a:ln w="12700">
-            <a:solidFill>
-              <a:srgbClr val="22D3EE">
-                <a:alpha val="0"/>
-              </a:srgbClr>
-            </a:solidFill>
-            <a:prstDash val="solid"/>
-          </a:ln>
-        </p:spPr>
-      </p:sp>
-      <p:sp>
-        <p:nvSpPr>
-          <p:cNvPr id="22" name="Shape 17"/>
-          <p:cNvSpPr/>
-          <p:nvPr/>
-        </p:nvSpPr>
-        <p:spPr>
-          <a:xfrm>
-            <a:off x="914400" y="4507992"/>
-            <a:ext cx="73152" cy="1024128"/>
-          </a:xfrm>
-          <a:prstGeom prst="rect">
-            <a:avLst/>
-          </a:prstGeom>
-          <a:solidFill>
-            <a:srgbClr val="8A4FFF"/>
-          </a:solidFill>
-          <a:ln w="12700">
-            <a:solidFill>
-              <a:srgbClr val="8A4FFF">
-                <a:alpha val="0"/>
-              </a:srgbClr>
-            </a:solidFill>
-            <a:prstDash val="solid"/>
-          </a:ln>
-        </p:spPr>
-      </p:sp>
-      <p:sp>
-        <p:nvSpPr>
-          <p:cNvPr id="23" name="mdpr:1-2-32ac08:title:__title:1-2-32ac08"/>
+          <p:cNvPr id="15" name="mdpr:1-2-32ac08:title:__title:1-2-32ac08"/>
           <p:cNvSpPr txBox="1"/>
           <p:nvPr/>
         </p:nvSpPr>
@@ -23028,14 +21659,14 @@
       </p:sp>
       <p:sp>
         <p:nvSpPr>
-          <p:cNvPr id="24" name="mdpr:1-2-32ac08:item-1:block-6-chunk-1"/>
+          <p:cNvPr id="16" name="mdpr:1-2-32ac08:item-1:block-6-chunk-1"/>
           <p:cNvSpPr txBox="1"/>
           <p:nvPr/>
         </p:nvSpPr>
         <p:spPr>
           <a:xfrm>
-            <a:off x="1133856" y="1957548"/>
-            <a:ext cx="9820656" cy="839785"/>
+            <a:off x="1042416" y="2103120"/>
+            <a:ext cx="2825496" cy="2185416"/>
           </a:xfrm>
           <a:prstGeom prst="rect">
             <a:avLst/>
@@ -23087,14 +21718,14 @@
       </p:sp>
       <p:sp>
         <p:nvSpPr>
-          <p:cNvPr id="25" name="mdpr:1-2-32ac08:item-2:block-6-chunk-1"/>
+          <p:cNvPr id="17" name="mdpr:1-2-32ac08:item-2:block-6-chunk-1"/>
           <p:cNvSpPr txBox="1"/>
           <p:nvPr/>
         </p:nvSpPr>
         <p:spPr>
           <a:xfrm>
-            <a:off x="1133856" y="3283428"/>
-            <a:ext cx="9820656" cy="839785"/>
+            <a:off x="4562856" y="2103120"/>
+            <a:ext cx="2825496" cy="2185416"/>
           </a:xfrm>
           <a:prstGeom prst="rect">
             <a:avLst/>
@@ -23146,14 +21777,14 @@
       </p:sp>
       <p:sp>
         <p:nvSpPr>
-          <p:cNvPr id="26" name="mdpr:1-2-32ac08:item-3:block-6-chunk-1"/>
+          <p:cNvPr id="18" name="mdpr:1-2-32ac08:item-3:block-6-chunk-1"/>
           <p:cNvSpPr txBox="1"/>
           <p:nvPr/>
         </p:nvSpPr>
         <p:spPr>
           <a:xfrm>
-            <a:off x="1133856" y="4600164"/>
-            <a:ext cx="9820656" cy="839785"/>
+            <a:off x="8083296" y="2103120"/>
+            <a:ext cx="2825496" cy="2185416"/>
           </a:xfrm>
           <a:prstGeom prst="rect">
             <a:avLst/>
@@ -23539,88 +22170,7 @@
       </p:sp>
       <p:sp>
         <p:nvSpPr>
-          <p:cNvPr id="12" name="Shape 10"/>
-          <p:cNvSpPr/>
-          <p:nvPr/>
-        </p:nvSpPr>
-        <p:spPr>
-          <a:xfrm>
-            <a:off x="731520" y="1207008"/>
-            <a:ext cx="1325880" cy="54864"/>
-          </a:xfrm>
-          <a:prstGeom prst="rect">
-            <a:avLst/>
-          </a:prstGeom>
-          <a:solidFill>
-            <a:srgbClr val="8A4FFF"/>
-          </a:solidFill>
-          <a:ln w="12700">
-            <a:solidFill>
-              <a:srgbClr val="8A4FFF">
-                <a:alpha val="0"/>
-              </a:srgbClr>
-            </a:solidFill>
-            <a:prstDash val="solid"/>
-          </a:ln>
-        </p:spPr>
-      </p:sp>
-      <p:sp>
-        <p:nvSpPr>
-          <p:cNvPr id="13" name="Shape 11"/>
-          <p:cNvSpPr/>
-          <p:nvPr/>
-        </p:nvSpPr>
-        <p:spPr>
-          <a:xfrm>
-            <a:off x="822960" y="1554480"/>
-            <a:ext cx="4937760" cy="73152"/>
-          </a:xfrm>
-          <a:prstGeom prst="rect">
-            <a:avLst/>
-          </a:prstGeom>
-          <a:solidFill>
-            <a:srgbClr val="8A4FFF"/>
-          </a:solidFill>
-          <a:ln w="12700">
-            <a:solidFill>
-              <a:srgbClr val="8A4FFF">
-                <a:alpha val="0"/>
-              </a:srgbClr>
-            </a:solidFill>
-            <a:prstDash val="solid"/>
-          </a:ln>
-        </p:spPr>
-      </p:sp>
-      <p:sp>
-        <p:nvSpPr>
-          <p:cNvPr id="14" name="Shape 12"/>
-          <p:cNvSpPr/>
-          <p:nvPr/>
-        </p:nvSpPr>
-        <p:spPr>
-          <a:xfrm>
-            <a:off x="6400800" y="1554480"/>
-            <a:ext cx="4937760" cy="73152"/>
-          </a:xfrm>
-          <a:prstGeom prst="rect">
-            <a:avLst/>
-          </a:prstGeom>
-          <a:solidFill>
-            <a:srgbClr val="8A4FFF"/>
-          </a:solidFill>
-          <a:ln w="12700">
-            <a:solidFill>
-              <a:srgbClr val="8A4FFF">
-                <a:alpha val="0"/>
-              </a:srgbClr>
-            </a:solidFill>
-            <a:prstDash val="solid"/>
-          </a:ln>
-        </p:spPr>
-      </p:sp>
-      <p:sp>
-        <p:nvSpPr>
-          <p:cNvPr id="15" name="mdpr:2-2-14f8eb:title:__title:2-2-14f8eb"/>
+          <p:cNvPr id="12" name="mdpr:2-2-14f8eb:title:__title:2-2-14f8eb"/>
           <p:cNvSpPr txBox="1"/>
           <p:nvPr/>
         </p:nvSpPr>
@@ -23654,7 +22204,24 @@
                 <a:ea typeface="Pretendard" pitchFamily="34" charset="-122"/>
                 <a:cs typeface="Pretendard" pitchFamily="34" charset="-120"/>
               </a:rPr>
-              <a:t>Composition Contract (Cont. 2/2)</a:t>
+              <a:t>Composition Contract</a:t>
+            </a:r>
+            <a:pPr algn="ctr" indent="0" marL="0">
+              <a:lnSpc>
+                <a:spcPct val="120000"/>
+              </a:lnSpc>
+              <a:buNone/>
+            </a:pPr>
+            <a:r>
+              <a:rPr lang="en-US" sz="2000" dirty="0">
+                <a:solidFill>
+                  <a:srgbClr val="6C6C6C"/>
+                </a:solidFill>
+                <a:latin typeface="Pretendard" pitchFamily="34" charset="0"/>
+                <a:ea typeface="Pretendard" pitchFamily="34" charset="-122"/>
+                <a:cs typeface="Pretendard" pitchFamily="34" charset="-120"/>
+              </a:rPr>
+              <a:t> (Cont. 2/2)</a:t>
             </a:r>
             <a:endParaRPr lang="en-US" sz="3400" dirty="0"/>
           </a:p>
@@ -23662,14 +22229,14 @@
       </p:sp>
       <p:sp>
         <p:nvSpPr>
-          <p:cNvPr id="16" name="mdpr:2-2-14f8eb:left:block-6-chunk-2"/>
+          <p:cNvPr id="13" name="mdpr:2-2-14f8eb:left:block-6-chunk-2"/>
           <p:cNvSpPr txBox="1"/>
           <p:nvPr/>
         </p:nvSpPr>
         <p:spPr>
           <a:xfrm>
-            <a:off x="896112" y="1664208"/>
-            <a:ext cx="4791456" cy="4169664"/>
+            <a:off x="896112" y="1463040"/>
+            <a:ext cx="4791456" cy="4261104"/>
           </a:xfrm>
           <a:prstGeom prst="rect">
             <a:avLst/>
@@ -23721,14 +22288,14 @@
       </p:sp>
       <p:sp>
         <p:nvSpPr>
-          <p:cNvPr id="17" name="mdpr:2-2-14f8eb:right:block-6-chunk-2"/>
+          <p:cNvPr id="14" name="mdpr:2-2-14f8eb:right:block-6-chunk-2"/>
           <p:cNvSpPr txBox="1"/>
           <p:nvPr/>
         </p:nvSpPr>
         <p:spPr>
           <a:xfrm>
-            <a:off x="6473952" y="1664208"/>
-            <a:ext cx="4791456" cy="4169664"/>
+            <a:off x="6473952" y="1463040"/>
+            <a:ext cx="4791456" cy="4261104"/>
           </a:xfrm>
           <a:prstGeom prst="rect">
             <a:avLst/>
@@ -24120,8 +22687,8 @@
         </p:nvSpPr>
         <p:spPr>
           <a:xfrm>
-            <a:off x="731520" y="1207008"/>
-            <a:ext cx="1325880" cy="54864"/>
+            <a:off x="822960" y="1938528"/>
+            <a:ext cx="73152" cy="2514600"/>
           </a:xfrm>
           <a:prstGeom prst="rect">
             <a:avLst/>
@@ -24139,237 +22706,22 @@
           </a:ln>
         </p:spPr>
       </p:sp>
-      <p:pic>
-        <p:nvPicPr>
-          <p:cNvPr id="13" name="Image 0" descr="preencoded.png">    </p:cNvPr>
-          <p:cNvPicPr>
-            <a:picLocks noChangeAspect="1"/>
-          </p:cNvPicPr>
-          <p:nvPr/>
-        </p:nvPicPr>
-        <p:blipFill>
-          <a:blip r:embed="rId1">
-            <a:extLst>
-              <a:ext uri="{96DAC541-7B7A-43D3-8B79-37D633B846F1}">
-                <asvg:svgBlip xmlns:asvg="http://schemas.microsoft.com/office/drawing/2016/SVG/main" r:embed="rId2"/>
-              </a:ext>
-            </a:extLst>
-          </a:blip>
-          <a:stretch>
-            <a:fillRect/>
-          </a:stretch>
-        </p:blipFill>
-        <p:spPr>
-          <a:xfrm>
-            <a:off x="914400" y="1865376"/>
-            <a:ext cx="10241280" cy="1024128"/>
-          </a:xfrm>
-          <a:prstGeom prst="rect">
-            <a:avLst/>
-          </a:prstGeom>
-        </p:spPr>
-      </p:pic>
-      <p:sp>
-        <p:nvSpPr>
-          <p:cNvPr id="14" name="Shape 11"/>
-          <p:cNvSpPr/>
-          <p:nvPr/>
-        </p:nvSpPr>
-        <p:spPr>
-          <a:xfrm>
-            <a:off x="914400" y="1865376"/>
-            <a:ext cx="10241280" cy="1024128"/>
-          </a:xfrm>
-          <a:prstGeom prst="rect">
-            <a:avLst/>
-          </a:prstGeom>
-          <a:solidFill>
-            <a:srgbClr val="17213A">
-              <a:alpha val="0"/>
-            </a:srgbClr>
-          </a:solidFill>
-          <a:ln w="12700">
-            <a:solidFill>
-              <a:srgbClr val="C4B5FD">
-                <a:alpha val="0"/>
-              </a:srgbClr>
-            </a:solidFill>
-            <a:prstDash val="solid"/>
-          </a:ln>
-          <a:effectLst>
-            <a:outerShdw sx="100000" sy="100000" kx="0" ky="0" algn="bl" rotWithShape="0" blurRad="30480" dist="50800" dir="2700000">
-              <a:srgbClr val="CBD5E1">
-                <a:alpha val="20000"/>
-              </a:srgbClr>
-            </a:outerShdw>
-            <a:glow rad="63500">
-              <a:srgbClr val="8A4FFF">
-                <a:alpha val="23000"/>
-              </a:srgbClr>
-            </a:glow>
-          </a:effectLst>
-        </p:spPr>
-      </p:sp>
-      <p:pic>
-        <p:nvPicPr>
-          <p:cNvPr id="15" name="Image 1" descr="preencoded.png">    </p:cNvPr>
-          <p:cNvPicPr>
-            <a:picLocks noChangeAspect="1"/>
-          </p:cNvPicPr>
-          <p:nvPr/>
-        </p:nvPicPr>
-        <p:blipFill>
-          <a:blip r:embed="rId3">
-            <a:extLst>
-              <a:ext uri="{96DAC541-7B7A-43D3-8B79-37D633B846F1}">
-                <asvg:svgBlip xmlns:asvg="http://schemas.microsoft.com/office/drawing/2016/SVG/main" r:embed="rId4"/>
-              </a:ext>
-            </a:extLst>
-          </a:blip>
-          <a:stretch>
-            <a:fillRect/>
-          </a:stretch>
-        </p:blipFill>
-        <p:spPr>
-          <a:xfrm>
-            <a:off x="914400" y="3191256"/>
-            <a:ext cx="10241280" cy="1024128"/>
-          </a:xfrm>
-          <a:prstGeom prst="rect">
-            <a:avLst/>
-          </a:prstGeom>
-        </p:spPr>
-      </p:pic>
-      <p:sp>
-        <p:nvSpPr>
-          <p:cNvPr id="16" name="Shape 12"/>
-          <p:cNvSpPr/>
-          <p:nvPr/>
-        </p:nvSpPr>
-        <p:spPr>
-          <a:xfrm>
-            <a:off x="914400" y="3191256"/>
-            <a:ext cx="10241280" cy="1024128"/>
-          </a:xfrm>
-          <a:prstGeom prst="rect">
-            <a:avLst/>
-          </a:prstGeom>
-          <a:solidFill>
-            <a:srgbClr val="17213A">
-              <a:alpha val="0"/>
-            </a:srgbClr>
-          </a:solidFill>
-          <a:ln w="12700">
-            <a:solidFill>
-              <a:srgbClr val="C4B5FD">
-                <a:alpha val="0"/>
-              </a:srgbClr>
-            </a:solidFill>
-            <a:prstDash val="solid"/>
-          </a:ln>
-          <a:effectLst>
-            <a:outerShdw sx="100000" sy="100000" kx="0" ky="0" algn="bl" rotWithShape="0" blurRad="30480" dist="50800" dir="2700000">
-              <a:srgbClr val="CBD5E1">
-                <a:alpha val="20000"/>
-              </a:srgbClr>
-            </a:outerShdw>
-            <a:glow rad="63500">
-              <a:srgbClr val="8A4FFF">
-                <a:alpha val="23000"/>
-              </a:srgbClr>
-            </a:glow>
-          </a:effectLst>
-        </p:spPr>
-      </p:sp>
-      <p:pic>
-        <p:nvPicPr>
-          <p:cNvPr id="17" name="Image 2" descr="preencoded.png">    </p:cNvPr>
-          <p:cNvPicPr>
-            <a:picLocks noChangeAspect="1"/>
-          </p:cNvPicPr>
-          <p:nvPr/>
-        </p:nvPicPr>
-        <p:blipFill>
-          <a:blip r:embed="rId5">
-            <a:extLst>
-              <a:ext uri="{96DAC541-7B7A-43D3-8B79-37D633B846F1}">
-                <asvg:svgBlip xmlns:asvg="http://schemas.microsoft.com/office/drawing/2016/SVG/main" r:embed="rId6"/>
-              </a:ext>
-            </a:extLst>
-          </a:blip>
-          <a:stretch>
-            <a:fillRect/>
-          </a:stretch>
-        </p:blipFill>
-        <p:spPr>
-          <a:xfrm>
-            <a:off x="914400" y="4507992"/>
-            <a:ext cx="10241280" cy="1024128"/>
-          </a:xfrm>
-          <a:prstGeom prst="rect">
-            <a:avLst/>
-          </a:prstGeom>
-        </p:spPr>
-      </p:pic>
-      <p:sp>
-        <p:nvSpPr>
-          <p:cNvPr id="18" name="Shape 13"/>
-          <p:cNvSpPr/>
-          <p:nvPr/>
-        </p:nvSpPr>
-        <p:spPr>
-          <a:xfrm>
-            <a:off x="914400" y="4507992"/>
-            <a:ext cx="10241280" cy="1024128"/>
-          </a:xfrm>
-          <a:prstGeom prst="rect">
-            <a:avLst/>
-          </a:prstGeom>
-          <a:solidFill>
-            <a:srgbClr val="17213A">
-              <a:alpha val="0"/>
-            </a:srgbClr>
-          </a:solidFill>
-          <a:ln w="12700">
-            <a:solidFill>
-              <a:srgbClr val="C4B5FD">
-                <a:alpha val="0"/>
-              </a:srgbClr>
-            </a:solidFill>
-            <a:prstDash val="solid"/>
-          </a:ln>
-          <a:effectLst>
-            <a:outerShdw sx="100000" sy="100000" kx="0" ky="0" algn="bl" rotWithShape="0" blurRad="30480" dist="50800" dir="2700000">
-              <a:srgbClr val="CBD5E1">
-                <a:alpha val="20000"/>
-              </a:srgbClr>
-            </a:outerShdw>
-            <a:glow rad="63500">
-              <a:srgbClr val="8A4FFF">
-                <a:alpha val="23000"/>
-              </a:srgbClr>
-            </a:glow>
-          </a:effectLst>
-        </p:spPr>
-      </p:sp>
-      <p:sp>
-        <p:nvSpPr>
-          <p:cNvPr id="19" name="Shape 14"/>
-          <p:cNvSpPr/>
-          <p:nvPr/>
-        </p:nvSpPr>
-        <p:spPr>
-          <a:xfrm>
-            <a:off x="786384" y="1956816"/>
-            <a:ext cx="32004" cy="3483864"/>
-          </a:xfrm>
-          <a:prstGeom prst="rect">
-            <a:avLst/>
-          </a:prstGeom>
-          <a:solidFill>
-            <a:srgbClr val="22D3EE">
-              <a:alpha val="80000"/>
-            </a:srgbClr>
+      <p:sp>
+        <p:nvSpPr>
+          <p:cNvPr id="13" name="Shape 11"/>
+          <p:cNvSpPr/>
+          <p:nvPr/>
+        </p:nvSpPr>
+        <p:spPr>
+          <a:xfrm>
+            <a:off x="4343400" y="1938528"/>
+            <a:ext cx="73152" cy="2514600"/>
+          </a:xfrm>
+          <a:prstGeom prst="rect">
+            <a:avLst/>
+          </a:prstGeom>
+          <a:solidFill>
+            <a:srgbClr val="22D3EE"/>
           </a:solidFill>
           <a:ln w="12700">
             <a:solidFill>
@@ -24383,14 +22735,14 @@
       </p:sp>
       <p:sp>
         <p:nvSpPr>
-          <p:cNvPr id="20" name="Shape 15"/>
-          <p:cNvSpPr/>
-          <p:nvPr/>
-        </p:nvSpPr>
-        <p:spPr>
-          <a:xfrm>
-            <a:off x="914400" y="1865376"/>
-            <a:ext cx="73152" cy="1024128"/>
+          <p:cNvPr id="14" name="Shape 12"/>
+          <p:cNvSpPr/>
+          <p:nvPr/>
+        </p:nvSpPr>
+        <p:spPr>
+          <a:xfrm>
+            <a:off x="7863840" y="1938528"/>
+            <a:ext cx="73152" cy="2514600"/>
           </a:xfrm>
           <a:prstGeom prst="rect">
             <a:avLst/>
@@ -24410,61 +22762,7 @@
       </p:sp>
       <p:sp>
         <p:nvSpPr>
-          <p:cNvPr id="21" name="Shape 16"/>
-          <p:cNvSpPr/>
-          <p:nvPr/>
-        </p:nvSpPr>
-        <p:spPr>
-          <a:xfrm>
-            <a:off x="914400" y="3191256"/>
-            <a:ext cx="73152" cy="1024128"/>
-          </a:xfrm>
-          <a:prstGeom prst="rect">
-            <a:avLst/>
-          </a:prstGeom>
-          <a:solidFill>
-            <a:srgbClr val="22D3EE"/>
-          </a:solidFill>
-          <a:ln w="12700">
-            <a:solidFill>
-              <a:srgbClr val="22D3EE">
-                <a:alpha val="0"/>
-              </a:srgbClr>
-            </a:solidFill>
-            <a:prstDash val="solid"/>
-          </a:ln>
-        </p:spPr>
-      </p:sp>
-      <p:sp>
-        <p:nvSpPr>
-          <p:cNvPr id="22" name="Shape 17"/>
-          <p:cNvSpPr/>
-          <p:nvPr/>
-        </p:nvSpPr>
-        <p:spPr>
-          <a:xfrm>
-            <a:off x="914400" y="4507992"/>
-            <a:ext cx="73152" cy="1024128"/>
-          </a:xfrm>
-          <a:prstGeom prst="rect">
-            <a:avLst/>
-          </a:prstGeom>
-          <a:solidFill>
-            <a:srgbClr val="8A4FFF"/>
-          </a:solidFill>
-          <a:ln w="12700">
-            <a:solidFill>
-              <a:srgbClr val="8A4FFF">
-                <a:alpha val="0"/>
-              </a:srgbClr>
-            </a:solidFill>
-            <a:prstDash val="solid"/>
-          </a:ln>
-        </p:spPr>
-      </p:sp>
-      <p:sp>
-        <p:nvSpPr>
-          <p:cNvPr id="23" name="mdpr:1-2-dfa474:title:__title:1-2-dfa474"/>
+          <p:cNvPr id="15" name="mdpr:1-2-dfa474:title:__title:1-2-dfa474"/>
           <p:cNvSpPr txBox="1"/>
           <p:nvPr/>
         </p:nvSpPr>
@@ -24506,14 +22804,14 @@
       </p:sp>
       <p:sp>
         <p:nvSpPr>
-          <p:cNvPr id="24" name="mdpr:1-2-dfa474:item-1:block-8-chunk-1"/>
+          <p:cNvPr id="16" name="mdpr:1-2-dfa474:item-1:block-8-chunk-1"/>
           <p:cNvSpPr txBox="1"/>
           <p:nvPr/>
         </p:nvSpPr>
         <p:spPr>
           <a:xfrm>
-            <a:off x="1133856" y="1957548"/>
-            <a:ext cx="9820656" cy="839785"/>
+            <a:off x="1042416" y="2103120"/>
+            <a:ext cx="2825496" cy="2185416"/>
           </a:xfrm>
           <a:prstGeom prst="rect">
             <a:avLst/>
@@ -24565,14 +22863,14 @@
       </p:sp>
       <p:sp>
         <p:nvSpPr>
-          <p:cNvPr id="25" name="mdpr:1-2-dfa474:item-2:block-8-chunk-1"/>
+          <p:cNvPr id="17" name="mdpr:1-2-dfa474:item-2:block-8-chunk-1"/>
           <p:cNvSpPr txBox="1"/>
           <p:nvPr/>
         </p:nvSpPr>
         <p:spPr>
           <a:xfrm>
-            <a:off x="1133856" y="3283428"/>
-            <a:ext cx="9820656" cy="839785"/>
+            <a:off x="4562856" y="2103120"/>
+            <a:ext cx="2825496" cy="2185416"/>
           </a:xfrm>
           <a:prstGeom prst="rect">
             <a:avLst/>
@@ -24624,14 +22922,14 @@
       </p:sp>
       <p:sp>
         <p:nvSpPr>
-          <p:cNvPr id="26" name="mdpr:1-2-dfa474:item-3:block-8-chunk-1"/>
+          <p:cNvPr id="18" name="mdpr:1-2-dfa474:item-3:block-8-chunk-1"/>
           <p:cNvSpPr txBox="1"/>
           <p:nvPr/>
         </p:nvSpPr>
         <p:spPr>
           <a:xfrm>
-            <a:off x="1133856" y="4600164"/>
-            <a:ext cx="9820656" cy="839785"/>
+            <a:off x="8083296" y="2103120"/>
+            <a:ext cx="2825496" cy="2185416"/>
           </a:xfrm>
           <a:prstGeom prst="rect">
             <a:avLst/>
@@ -25017,88 +23315,7 @@
       </p:sp>
       <p:sp>
         <p:nvSpPr>
-          <p:cNvPr id="12" name="Shape 10"/>
-          <p:cNvSpPr/>
-          <p:nvPr/>
-        </p:nvSpPr>
-        <p:spPr>
-          <a:xfrm>
-            <a:off x="731520" y="1207008"/>
-            <a:ext cx="1325880" cy="54864"/>
-          </a:xfrm>
-          <a:prstGeom prst="rect">
-            <a:avLst/>
-          </a:prstGeom>
-          <a:solidFill>
-            <a:srgbClr val="8A4FFF"/>
-          </a:solidFill>
-          <a:ln w="12700">
-            <a:solidFill>
-              <a:srgbClr val="8A4FFF">
-                <a:alpha val="0"/>
-              </a:srgbClr>
-            </a:solidFill>
-            <a:prstDash val="solid"/>
-          </a:ln>
-        </p:spPr>
-      </p:sp>
-      <p:sp>
-        <p:nvSpPr>
-          <p:cNvPr id="13" name="Shape 11"/>
-          <p:cNvSpPr/>
-          <p:nvPr/>
-        </p:nvSpPr>
-        <p:spPr>
-          <a:xfrm>
-            <a:off x="822960" y="1554480"/>
-            <a:ext cx="4937760" cy="73152"/>
-          </a:xfrm>
-          <a:prstGeom prst="rect">
-            <a:avLst/>
-          </a:prstGeom>
-          <a:solidFill>
-            <a:srgbClr val="8A4FFF"/>
-          </a:solidFill>
-          <a:ln w="12700">
-            <a:solidFill>
-              <a:srgbClr val="8A4FFF">
-                <a:alpha val="0"/>
-              </a:srgbClr>
-            </a:solidFill>
-            <a:prstDash val="solid"/>
-          </a:ln>
-        </p:spPr>
-      </p:sp>
-      <p:sp>
-        <p:nvSpPr>
-          <p:cNvPr id="14" name="Shape 12"/>
-          <p:cNvSpPr/>
-          <p:nvPr/>
-        </p:nvSpPr>
-        <p:spPr>
-          <a:xfrm>
-            <a:off x="6400800" y="1554480"/>
-            <a:ext cx="4937760" cy="73152"/>
-          </a:xfrm>
-          <a:prstGeom prst="rect">
-            <a:avLst/>
-          </a:prstGeom>
-          <a:solidFill>
-            <a:srgbClr val="8A4FFF"/>
-          </a:solidFill>
-          <a:ln w="12700">
-            <a:solidFill>
-              <a:srgbClr val="8A4FFF">
-                <a:alpha val="0"/>
-              </a:srgbClr>
-            </a:solidFill>
-            <a:prstDash val="solid"/>
-          </a:ln>
-        </p:spPr>
-      </p:sp>
-      <p:sp>
-        <p:nvSpPr>
-          <p:cNvPr id="15" name="mdpr:2-2-149bde:title:__title:2-2-149bde"/>
+          <p:cNvPr id="12" name="mdpr:2-2-149bde:title:__title:2-2-149bde"/>
           <p:cNvSpPr txBox="1"/>
           <p:nvPr/>
         </p:nvSpPr>
@@ -25132,7 +23349,24 @@
                 <a:ea typeface="Pretendard" pitchFamily="34" charset="-122"/>
                 <a:cs typeface="Pretendard" pitchFamily="34" charset="-120"/>
               </a:rPr>
-              <a:t>Pruned Style Families (Cont. 2/2)</a:t>
+              <a:t>Pruned Style Families</a:t>
+            </a:r>
+            <a:pPr algn="ctr" indent="0" marL="0">
+              <a:lnSpc>
+                <a:spcPct val="120000"/>
+              </a:lnSpc>
+              <a:buNone/>
+            </a:pPr>
+            <a:r>
+              <a:rPr lang="en-US" sz="2000" dirty="0">
+                <a:solidFill>
+                  <a:srgbClr val="6C6C6C"/>
+                </a:solidFill>
+                <a:latin typeface="Pretendard" pitchFamily="34" charset="0"/>
+                <a:ea typeface="Pretendard" pitchFamily="34" charset="-122"/>
+                <a:cs typeface="Pretendard" pitchFamily="34" charset="-120"/>
+              </a:rPr>
+              <a:t> (Cont. 2/2)</a:t>
             </a:r>
             <a:endParaRPr lang="en-US" sz="3400" dirty="0"/>
           </a:p>
@@ -25140,14 +23374,14 @@
       </p:sp>
       <p:sp>
         <p:nvSpPr>
-          <p:cNvPr id="16" name="mdpr:2-2-149bde:left:block-8-chunk-2"/>
+          <p:cNvPr id="13" name="mdpr:2-2-149bde:left:block-8-chunk-2"/>
           <p:cNvSpPr txBox="1"/>
           <p:nvPr/>
         </p:nvSpPr>
         <p:spPr>
           <a:xfrm>
-            <a:off x="896112" y="1664208"/>
-            <a:ext cx="4791456" cy="4169664"/>
+            <a:off x="896112" y="1463040"/>
+            <a:ext cx="4791456" cy="4261104"/>
           </a:xfrm>
           <a:prstGeom prst="rect">
             <a:avLst/>
@@ -25199,14 +23433,14 @@
       </p:sp>
       <p:sp>
         <p:nvSpPr>
-          <p:cNvPr id="17" name="mdpr:2-2-149bde:right:block-8-chunk-2"/>
+          <p:cNvPr id="14" name="mdpr:2-2-149bde:right:block-8-chunk-2"/>
           <p:cNvSpPr txBox="1"/>
           <p:nvPr/>
         </p:nvSpPr>
         <p:spPr>
           <a:xfrm>
-            <a:off x="6473952" y="1664208"/>
-            <a:ext cx="4791456" cy="4169664"/>
+            <a:off x="6473952" y="1463040"/>
+            <a:ext cx="4791456" cy="4261104"/>
           </a:xfrm>
           <a:prstGeom prst="rect">
             <a:avLst/>
@@ -25590,16 +23824,158 @@
           </a:ln>
         </p:spPr>
       </p:sp>
-      <p:sp>
-        <p:nvSpPr>
-          <p:cNvPr id="12" name="Shape 10"/>
-          <p:cNvSpPr/>
-          <p:nvPr/>
-        </p:nvSpPr>
-        <p:spPr>
-          <a:xfrm>
-            <a:off x="731520" y="1207008"/>
-            <a:ext cx="1325880" cy="54864"/>
+      <p:pic>
+        <p:nvPicPr>
+          <p:cNvPr id="12" name="Image 0" descr="preencoded.png">    </p:cNvPr>
+          <p:cNvPicPr>
+            <a:picLocks noChangeAspect="1"/>
+          </p:cNvPicPr>
+          <p:nvPr/>
+        </p:nvPicPr>
+        <p:blipFill>
+          <a:blip r:embed="rId1">
+            <a:extLst>
+              <a:ext uri="{96DAC541-7B7A-43D3-8B79-37D633B846F1}">
+                <asvg:svgBlip xmlns:asvg="http://schemas.microsoft.com/office/drawing/2016/SVG/main" r:embed="rId2"/>
+              </a:ext>
+            </a:extLst>
+          </a:blip>
+          <a:stretch>
+            <a:fillRect/>
+          </a:stretch>
+        </p:blipFill>
+        <p:spPr>
+          <a:xfrm>
+            <a:off x="914400" y="2523744"/>
+            <a:ext cx="10241280" cy="1024128"/>
+          </a:xfrm>
+          <a:prstGeom prst="rect">
+            <a:avLst/>
+          </a:prstGeom>
+        </p:spPr>
+      </p:pic>
+      <p:sp>
+        <p:nvSpPr>
+          <p:cNvPr id="13" name="Shape 10"/>
+          <p:cNvSpPr/>
+          <p:nvPr/>
+        </p:nvSpPr>
+        <p:spPr>
+          <a:xfrm>
+            <a:off x="914400" y="2523744"/>
+            <a:ext cx="10241280" cy="1024128"/>
+          </a:xfrm>
+          <a:prstGeom prst="rect">
+            <a:avLst/>
+          </a:prstGeom>
+          <a:solidFill>
+            <a:srgbClr val="17213A">
+              <a:alpha val="0"/>
+            </a:srgbClr>
+          </a:solidFill>
+          <a:ln w="12700">
+            <a:solidFill>
+              <a:srgbClr val="C4B5FD">
+                <a:alpha val="0"/>
+              </a:srgbClr>
+            </a:solidFill>
+            <a:prstDash val="solid"/>
+          </a:ln>
+          <a:effectLst>
+            <a:outerShdw sx="100000" sy="100000" kx="0" ky="0" algn="bl" rotWithShape="0" blurRad="30480" dist="50800" dir="2700000">
+              <a:srgbClr val="CBD5E1">
+                <a:alpha val="20000"/>
+              </a:srgbClr>
+            </a:outerShdw>
+            <a:glow rad="63500">
+              <a:srgbClr val="8A4FFF">
+                <a:alpha val="23000"/>
+              </a:srgbClr>
+            </a:glow>
+          </a:effectLst>
+        </p:spPr>
+      </p:sp>
+      <p:pic>
+        <p:nvPicPr>
+          <p:cNvPr id="14" name="Image 1" descr="preencoded.png">    </p:cNvPr>
+          <p:cNvPicPr>
+            <a:picLocks noChangeAspect="1"/>
+          </p:cNvPicPr>
+          <p:nvPr/>
+        </p:nvPicPr>
+        <p:blipFill>
+          <a:blip r:embed="rId3">
+            <a:extLst>
+              <a:ext uri="{96DAC541-7B7A-43D3-8B79-37D633B846F1}">
+                <asvg:svgBlip xmlns:asvg="http://schemas.microsoft.com/office/drawing/2016/SVG/main" r:embed="rId4"/>
+              </a:ext>
+            </a:extLst>
+          </a:blip>
+          <a:stretch>
+            <a:fillRect/>
+          </a:stretch>
+        </p:blipFill>
+        <p:spPr>
+          <a:xfrm>
+            <a:off x="914400" y="3849624"/>
+            <a:ext cx="10241280" cy="1024128"/>
+          </a:xfrm>
+          <a:prstGeom prst="rect">
+            <a:avLst/>
+          </a:prstGeom>
+        </p:spPr>
+      </p:pic>
+      <p:sp>
+        <p:nvSpPr>
+          <p:cNvPr id="15" name="Shape 11"/>
+          <p:cNvSpPr/>
+          <p:nvPr/>
+        </p:nvSpPr>
+        <p:spPr>
+          <a:xfrm>
+            <a:off x="914400" y="3849624"/>
+            <a:ext cx="10241280" cy="1024128"/>
+          </a:xfrm>
+          <a:prstGeom prst="rect">
+            <a:avLst/>
+          </a:prstGeom>
+          <a:solidFill>
+            <a:srgbClr val="17213A">
+              <a:alpha val="0"/>
+            </a:srgbClr>
+          </a:solidFill>
+          <a:ln w="12700">
+            <a:solidFill>
+              <a:srgbClr val="C4B5FD">
+                <a:alpha val="0"/>
+              </a:srgbClr>
+            </a:solidFill>
+            <a:prstDash val="solid"/>
+          </a:ln>
+          <a:effectLst>
+            <a:outerShdw sx="100000" sy="100000" kx="0" ky="0" algn="bl" rotWithShape="0" blurRad="30480" dist="50800" dir="2700000">
+              <a:srgbClr val="CBD5E1">
+                <a:alpha val="20000"/>
+              </a:srgbClr>
+            </a:outerShdw>
+            <a:glow rad="63500">
+              <a:srgbClr val="8A4FFF">
+                <a:alpha val="23000"/>
+              </a:srgbClr>
+            </a:glow>
+          </a:effectLst>
+        </p:spPr>
+      </p:sp>
+      <p:sp>
+        <p:nvSpPr>
+          <p:cNvPr id="16" name="Shape 12"/>
+          <p:cNvSpPr/>
+          <p:nvPr/>
+        </p:nvSpPr>
+        <p:spPr>
+          <a:xfrm>
+            <a:off x="914400" y="2523744"/>
+            <a:ext cx="73152" cy="1024128"/>
           </a:xfrm>
           <a:prstGeom prst="rect">
             <a:avLst/>
@@ -25619,24 +23995,24 @@
       </p:sp>
       <p:sp>
         <p:nvSpPr>
-          <p:cNvPr id="13" name="Shape 11"/>
-          <p:cNvSpPr/>
-          <p:nvPr/>
-        </p:nvSpPr>
-        <p:spPr>
-          <a:xfrm>
-            <a:off x="822960" y="1554480"/>
-            <a:ext cx="4937760" cy="73152"/>
-          </a:xfrm>
-          <a:prstGeom prst="rect">
-            <a:avLst/>
-          </a:prstGeom>
-          <a:solidFill>
-            <a:srgbClr val="8A4FFF"/>
-          </a:solidFill>
-          <a:ln w="12700">
-            <a:solidFill>
-              <a:srgbClr val="8A4FFF">
+          <p:cNvPr id="17" name="Shape 13"/>
+          <p:cNvSpPr/>
+          <p:nvPr/>
+        </p:nvSpPr>
+        <p:spPr>
+          <a:xfrm>
+            <a:off x="914400" y="3849624"/>
+            <a:ext cx="73152" cy="1024128"/>
+          </a:xfrm>
+          <a:prstGeom prst="rect">
+            <a:avLst/>
+          </a:prstGeom>
+          <a:solidFill>
+            <a:srgbClr val="22D3EE"/>
+          </a:solidFill>
+          <a:ln w="12700">
+            <a:solidFill>
+              <a:srgbClr val="22D3EE">
                 <a:alpha val="0"/>
               </a:srgbClr>
             </a:solidFill>
@@ -25646,34 +24022,7 @@
       </p:sp>
       <p:sp>
         <p:nvSpPr>
-          <p:cNvPr id="14" name="Shape 12"/>
-          <p:cNvSpPr/>
-          <p:nvPr/>
-        </p:nvSpPr>
-        <p:spPr>
-          <a:xfrm>
-            <a:off x="6400800" y="1554480"/>
-            <a:ext cx="4937760" cy="73152"/>
-          </a:xfrm>
-          <a:prstGeom prst="rect">
-            <a:avLst/>
-          </a:prstGeom>
-          <a:solidFill>
-            <a:srgbClr val="8A4FFF"/>
-          </a:solidFill>
-          <a:ln w="12700">
-            <a:solidFill>
-              <a:srgbClr val="8A4FFF">
-                <a:alpha val="0"/>
-              </a:srgbClr>
-            </a:solidFill>
-            <a:prstDash val="solid"/>
-          </a:ln>
-        </p:spPr>
-      </p:sp>
-      <p:sp>
-        <p:nvSpPr>
-          <p:cNvPr id="15" name="mdpr:1-2-5a84f1:title:__title:1-2-5a84f1"/>
+          <p:cNvPr id="18" name="mdpr:1-2-5a84f1:title:__title:1-2-5a84f1"/>
           <p:cNvSpPr txBox="1"/>
           <p:nvPr/>
         </p:nvSpPr>
@@ -25715,14 +24064,14 @@
       </p:sp>
       <p:sp>
         <p:nvSpPr>
-          <p:cNvPr id="16" name="mdpr:1-2-5a84f1:left:block-10-chunk-1"/>
+          <p:cNvPr id="19" name="mdpr:1-2-5a84f1:item-1:block-10-chunk-1"/>
           <p:cNvSpPr txBox="1"/>
           <p:nvPr/>
         </p:nvSpPr>
         <p:spPr>
           <a:xfrm>
-            <a:off x="896112" y="1664208"/>
-            <a:ext cx="4791456" cy="4169664"/>
+            <a:off x="1133856" y="2615916"/>
+            <a:ext cx="9820656" cy="839785"/>
           </a:xfrm>
           <a:prstGeom prst="rect">
             <a:avLst/>
@@ -25731,7 +24080,7 @@
           <a:ln/>
         </p:spPr>
         <p:txBody>
-          <a:bodyPr wrap="square" lIns="0" tIns="25400" rIns="25400" bIns="0" rtlCol="0" anchor="t"/>
+          <a:bodyPr wrap="square" lIns="0" tIns="25400" rIns="25400" bIns="0" rtlCol="0" anchor="ctr"/>
           <a:lstStyle/>
           <a:p>
             <a:pPr algn="l" indent="0" marL="0">
@@ -25749,7 +24098,7 @@
                 <a:ea typeface="Pretendard" pitchFamily="34" charset="-122"/>
                 <a:cs typeface="Pretendard" pitchFamily="34" charset="-120"/>
               </a:rPr>
-              <a:t>- Headings</a:t>
+              <a:t>Headings</a:t>
             </a:r>
             <a:pPr algn="l" indent="0" marL="0">
               <a:lnSpc>
@@ -25774,14 +24123,14 @@
       </p:sp>
       <p:sp>
         <p:nvSpPr>
-          <p:cNvPr id="17" name="mdpr:1-2-5a84f1:right:block-10-chunk-1"/>
+          <p:cNvPr id="20" name="mdpr:1-2-5a84f1:item-2:block-10-chunk-1"/>
           <p:cNvSpPr txBox="1"/>
           <p:nvPr/>
         </p:nvSpPr>
         <p:spPr>
           <a:xfrm>
-            <a:off x="6473952" y="1664208"/>
-            <a:ext cx="4791456" cy="4169664"/>
+            <a:off x="1133856" y="3941796"/>
+            <a:ext cx="9820656" cy="839785"/>
           </a:xfrm>
           <a:prstGeom prst="rect">
             <a:avLst/>
@@ -25790,7 +24139,7 @@
           <a:ln/>
         </p:spPr>
         <p:txBody>
-          <a:bodyPr wrap="square" lIns="0" tIns="25400" rIns="25400" bIns="0" rtlCol="0" anchor="t"/>
+          <a:bodyPr wrap="square" lIns="0" tIns="25400" rIns="25400" bIns="0" rtlCol="0" anchor="ctr"/>
           <a:lstStyle/>
           <a:p>
             <a:pPr algn="l" indent="0" marL="0">
@@ -25808,7 +24157,7 @@
                 <a:ea typeface="Pretendard" pitchFamily="34" charset="-122"/>
                 <a:cs typeface="Pretendard" pitchFamily="34" charset="-120"/>
               </a:rPr>
-              <a:t>- Lists</a:t>
+              <a:t>Lists</a:t>
             </a:r>
             <a:pPr algn="l" indent="0" marL="0">
               <a:lnSpc>
